--- a/04-Data exploration and transformation in Azure Databricks.pptx
+++ b/04-Data exploration and transformation in Azure Databricks.pptx
@@ -5,10 +5,10 @@
     <p:sldMasterId id="2147483648" r:id="rId1"/>
   </p:sldMasterIdLst>
   <p:notesMasterIdLst>
-    <p:notesMasterId r:id="rId20"/>
+    <p:notesMasterId r:id="rId25"/>
   </p:notesMasterIdLst>
   <p:handoutMasterIdLst>
-    <p:handoutMasterId r:id="rId21"/>
+    <p:handoutMasterId r:id="rId26"/>
   </p:handoutMasterIdLst>
   <p:sldIdLst>
     <p:sldId id="256" r:id="rId2"/>
@@ -26,9 +26,14 @@
     <p:sldId id="258" r:id="rId14"/>
     <p:sldId id="8373" r:id="rId15"/>
     <p:sldId id="2076137763" r:id="rId16"/>
-    <p:sldId id="259" r:id="rId17"/>
-    <p:sldId id="423" r:id="rId18"/>
-    <p:sldId id="424" r:id="rId19"/>
+    <p:sldId id="2134805630" r:id="rId17"/>
+    <p:sldId id="2134805629" r:id="rId18"/>
+    <p:sldId id="259" r:id="rId19"/>
+    <p:sldId id="423" r:id="rId20"/>
+    <p:sldId id="2134805640" r:id="rId21"/>
+    <p:sldId id="2134805641" r:id="rId22"/>
+    <p:sldId id="2134805642" r:id="rId23"/>
+    <p:sldId id="424" r:id="rId24"/>
   </p:sldIdLst>
   <p:sldSz cx="12192000" cy="6858000"/>
   <p:notesSz cx="6858000" cy="9144000"/>
@@ -811,7 +816,7 @@
           <a:p>
             <a:fld id="{2B56BDA5-FBCC-43E1-957B-02AF36889AD5}" type="datetimeFigureOut">
               <a:rPr lang="en-US" smtClean="0"/>
-              <a:t>12/3/2023</a:t>
+              <a:t>9/7/2024</a:t>
             </a:fld>
             <a:endParaRPr lang="en-US" dirty="0"/>
           </a:p>
@@ -988,7 +993,7 @@
           <a:p>
             <a:fld id="{8F44CDF0-0D54-4AFE-B409-D6358A9BB9A1}" type="datetimeFigureOut">
               <a:rPr lang="en-US" smtClean="0"/>
-              <a:t>12/3/2023</a:t>
+              <a:t>9/7/2024</a:t>
             </a:fld>
             <a:endParaRPr lang="en-US" dirty="0"/>
           </a:p>
@@ -1986,43 +1991,170 @@
           <a:bodyPr/>
           <a:lstStyle/>
           <a:p>
-            <a:pPr marL="0" marR="0" lvl="0" indent="0" algn="l" defTabSz="914400" rtl="0" eaLnBrk="1" fontAlgn="auto" latinLnBrk="0" hangingPunct="1">
-              <a:lnSpc>
-                <a:spcPct val="100000"/>
-              </a:lnSpc>
-              <a:spcBef>
-                <a:spcPts val="0"/>
-              </a:spcBef>
-              <a:spcAft>
-                <a:spcPts val="0"/>
-              </a:spcAft>
-              <a:buClrTx/>
-              <a:buSzTx/>
-              <a:buFontTx/>
-              <a:buNone/>
-              <a:tabLst/>
-              <a:defRPr/>
-            </a:pPr>
-            <a:r>
-              <a:rPr lang="en-IE" b="1" dirty="0"/>
-              <a:t>Talking Points:</a:t>
-            </a:r>
-            <a:endParaRPr lang="en-IE" dirty="0"/>
-          </a:p>
-          <a:p>
-            <a:endParaRPr lang="en-GB" dirty="0"/>
-          </a:p>
-          <a:p>
-            <a:r>
-              <a:rPr lang="en-GB" dirty="0"/>
-              <a:t>Let’s look at some common manipulation and transformation capabilities with Azure Databricks</a:t>
-            </a:r>
+            <a:r>
+              <a:rPr lang="en-US" i="1" dirty="0"/>
+              <a:t>The %</a:t>
+            </a:r>
+            <a:r>
+              <a:rPr lang="en-US" i="1" dirty="0" err="1"/>
+              <a:t>pyspark</a:t>
+            </a:r>
+            <a:r>
+              <a:rPr lang="en-US" i="1" dirty="0"/>
+              <a:t> “magic” at the beginning of the code instructs Spark to treat the following code as Python. You could also use %spark to indicate that the code cell contains Scala code.</a:t>
+            </a:r>
+          </a:p>
+          <a:p>
+            <a:endParaRPr lang="en-US" i="1" dirty="0"/>
+          </a:p>
+          <a:p>
+            <a:r>
+              <a:rPr lang="en-US" i="1" dirty="0" err="1"/>
+              <a:t>Dataframes</a:t>
+            </a:r>
+            <a:r>
+              <a:rPr lang="en-US" i="1" dirty="0"/>
+              <a:t> are not the only way to work with data in Spark, but they’re the most common. Other data object types include resilient distributed dataset (RDD), which are the core native building block for data structures in Spark, and Datasets, which are essentially strongly-typed </a:t>
+            </a:r>
+            <a:r>
+              <a:rPr lang="en-US" i="1" dirty="0" err="1"/>
+              <a:t>dataframes</a:t>
+            </a:r>
+            <a:r>
+              <a:rPr lang="en-US" i="1" dirty="0"/>
+              <a:t>. </a:t>
+            </a:r>
+            <a:r>
+              <a:rPr lang="en-US" i="1" dirty="0" err="1"/>
+              <a:t>Dataframes</a:t>
+            </a:r>
+            <a:r>
+              <a:rPr lang="en-US" i="1" dirty="0"/>
+              <a:t> are provided on Spark via the </a:t>
+            </a:r>
+            <a:r>
+              <a:rPr lang="en-US" i="1" dirty="0" err="1"/>
+              <a:t>SparkSQL</a:t>
+            </a:r>
+            <a:r>
+              <a:rPr lang="en-US" i="1" dirty="0"/>
+              <a:t> library and are functionally very similar to Pandas </a:t>
+            </a:r>
+            <a:r>
+              <a:rPr lang="en-US" i="1" dirty="0" err="1"/>
+              <a:t>dataframes</a:t>
+            </a:r>
+            <a:r>
+              <a:rPr lang="en-US" i="1" dirty="0"/>
+              <a:t> that are commonly used in Python (with which some students may be familiar).</a:t>
+            </a:r>
+          </a:p>
+          <a:p>
+            <a:endParaRPr lang="en-US" i="1" dirty="0"/>
+          </a:p>
+          <a:p>
+            <a:r>
+              <a:rPr lang="en-US" i="1" dirty="0"/>
+              <a:t>The code sample on the slide shows how to load a </a:t>
+            </a:r>
+            <a:r>
+              <a:rPr lang="en-US" i="1" dirty="0" err="1"/>
+              <a:t>dataframe</a:t>
+            </a:r>
+            <a:r>
+              <a:rPr lang="en-US" i="1" dirty="0"/>
+              <a:t> with data from a CSV file (you can also load data from other formats, including Parquet) and how to use some of its built-in methods (specifically select and </a:t>
+            </a:r>
+            <a:r>
+              <a:rPr lang="en-US" i="1" dirty="0" err="1"/>
+              <a:t>groupBy</a:t>
+            </a:r>
+            <a:r>
+              <a:rPr lang="en-US" i="1" dirty="0"/>
+              <a:t>) and functions (count) to manipulate data. For details about these and other </a:t>
+            </a:r>
+            <a:r>
+              <a:rPr lang="en-US" i="1" dirty="0" err="1"/>
+              <a:t>dataframe</a:t>
+            </a:r>
+            <a:r>
+              <a:rPr lang="en-US" i="1" dirty="0"/>
+              <a:t> methods and functions, see the Spark </a:t>
+            </a:r>
+            <a:r>
+              <a:rPr lang="en-US" i="1" dirty="0" err="1"/>
+              <a:t>Dataframe</a:t>
+            </a:r>
+            <a:r>
+              <a:rPr lang="en-US" i="1" dirty="0"/>
+              <a:t> API documentation at https://spark.apache.org/docs/latest/api/python/reference/pyspark.sql/dataframe.html.</a:t>
+            </a:r>
+          </a:p>
+          <a:p>
+            <a:endParaRPr lang="en-US" i="1" dirty="0"/>
           </a:p>
         </p:txBody>
       </p:sp>
       <p:sp>
         <p:nvSpPr>
-          <p:cNvPr id="4" name="Slide Number Placeholder 3"/>
+          <p:cNvPr id="4" name="Header Placeholder 3"/>
+          <p:cNvSpPr>
+            <a:spLocks noGrp="1"/>
+          </p:cNvSpPr>
+          <p:nvPr>
+            <p:ph type="hdr" sz="quarter"/>
+          </p:nvPr>
+        </p:nvSpPr>
+        <p:spPr/>
+        <p:txBody>
+          <a:bodyPr/>
+          <a:lstStyle/>
+          <a:p>
+            <a:endParaRPr lang="en-US"/>
+          </a:p>
+        </p:txBody>
+      </p:sp>
+      <p:sp>
+        <p:nvSpPr>
+          <p:cNvPr id="5" name="Footer Placeholder 4"/>
+          <p:cNvSpPr>
+            <a:spLocks noGrp="1"/>
+          </p:cNvSpPr>
+          <p:nvPr>
+            <p:ph type="ftr" sz="quarter" idx="4"/>
+          </p:nvPr>
+        </p:nvSpPr>
+        <p:spPr/>
+        <p:txBody>
+          <a:bodyPr/>
+          <a:lstStyle/>
+          <a:p>
+            <a:pPr defTabSz="914099" eaLnBrk="0" hangingPunct="0"/>
+            <a:r>
+              <a:rPr lang="en-US" sz="400">
+                <a:gradFill>
+                  <a:gsLst>
+                    <a:gs pos="0">
+                      <a:prstClr val="black"/>
+                    </a:gs>
+                    <a:gs pos="100000">
+                      <a:prstClr val="black"/>
+                    </a:gs>
+                  </a:gsLst>
+                  <a:lin ang="5400000" scaled="0"/>
+                </a:gradFill>
+                <a:latin typeface="Segoe UI" pitchFamily="34" charset="0"/>
+                <a:ea typeface="Segoe UI" pitchFamily="34" charset="0"/>
+                <a:cs typeface="Segoe UI" pitchFamily="34" charset="0"/>
+              </a:rPr>
+              <a:t>© Microsoft Corporation</a:t>
+            </a:r>
+          </a:p>
+        </p:txBody>
+      </p:sp>
+      <p:sp>
+        <p:nvSpPr>
+          <p:cNvPr id="6" name="Slide Number Placeholder 5"/>
           <p:cNvSpPr>
             <a:spLocks noGrp="1"/>
           </p:cNvSpPr>
@@ -2035,18 +2167,19 @@
           <a:bodyPr/>
           <a:lstStyle/>
           <a:p>
-            <a:fld id="{37E24C93-78CA-4AF0-9E77-825D60ABA46D}" type="slidenum">
+            <a:fld id="{B4008EB6-D09E-4580-8CD6-DDB14511944F}" type="slidenum">
               <a:rPr lang="en-US" smtClean="0"/>
+              <a:pPr/>
               <a:t>16</a:t>
             </a:fld>
-            <a:endParaRPr lang="en-US" dirty="0"/>
+            <a:endParaRPr lang="en-US"/>
           </a:p>
         </p:txBody>
       </p:sp>
     </p:spTree>
     <p:extLst>
       <p:ext uri="{BB962C8B-B14F-4D97-AF65-F5344CB8AC3E}">
-        <p14:creationId xmlns:p14="http://schemas.microsoft.com/office/powerpoint/2010/main" val="420517814"/>
+        <p14:creationId xmlns:p14="http://schemas.microsoft.com/office/powerpoint/2010/main" val="609860776"/>
       </p:ext>
     </p:extLst>
   </p:cSld>
@@ -2100,464 +2233,146 @@
           <a:bodyPr/>
           <a:lstStyle/>
           <a:p>
-            <a:pPr marL="0" marR="0" lvl="0" indent="0" defTabSz="228554" eaLnBrk="1" fontAlgn="auto" latinLnBrk="0" hangingPunct="1">
-              <a:lnSpc>
-                <a:spcPct val="117999"/>
-              </a:lnSpc>
-              <a:spcBef>
-                <a:spcPts val="0"/>
-              </a:spcBef>
-              <a:spcAft>
-                <a:spcPts val="0"/>
-              </a:spcAft>
-              <a:buClrTx/>
-              <a:buSzTx/>
-              <a:buFontTx/>
-              <a:buNone/>
-              <a:tabLst/>
-              <a:defRPr/>
-            </a:pPr>
-            <a:r>
-              <a:rPr lang="en-US" sz="1000" b="1" dirty="0"/>
-              <a:t>Talking points</a:t>
-            </a:r>
-          </a:p>
-          <a:p>
-            <a:pPr algn="l">
-              <a:buFont typeface="Arial" panose="020B0604020202020204" pitchFamily="34" charset="0"/>
-              <a:buNone/>
-            </a:pPr>
-            <a:endParaRPr lang="en-GB" sz="1200" b="0" i="0" dirty="0">
-              <a:solidFill>
-                <a:srgbClr val="171717"/>
-              </a:solidFill>
-              <a:effectLst/>
-              <a:latin typeface="Segoe UI" panose="020B0502040204020203" pitchFamily="34" charset="0"/>
-              <a:sym typeface="Helvetica Neue"/>
-            </a:endParaRPr>
-          </a:p>
-          <a:p>
-            <a:pPr algn="l">
-              <a:buFont typeface="Arial" panose="020B0604020202020204" pitchFamily="34" charset="0"/>
-              <a:buNone/>
-            </a:pPr>
-            <a:r>
-              <a:rPr lang="en-GB" sz="1200" b="0" i="0" u="none" dirty="0">
-                <a:solidFill>
-                  <a:srgbClr val="171717"/>
-                </a:solidFill>
-                <a:effectLst/>
-                <a:latin typeface="Segoe UI"/>
-                <a:cs typeface="Segoe UI"/>
-                <a:sym typeface="Helvetica Neue"/>
-              </a:rPr>
-              <a:t>There are a number of advanced transformation that can be performed in Azure Databricks, here are some common transformations used:</a:t>
-            </a:r>
-          </a:p>
-          <a:p>
-            <a:pPr algn="l">
-              <a:buFont typeface="Arial" panose="020B0604020202020204" pitchFamily="34" charset="0"/>
-              <a:buNone/>
-            </a:pPr>
-            <a:endParaRPr lang="en-GB" sz="1200" b="1" i="1" dirty="0">
-              <a:solidFill>
-                <a:srgbClr val="171717"/>
-              </a:solidFill>
-              <a:effectLst/>
-              <a:latin typeface="Segoe UI"/>
-              <a:cs typeface="Segoe UI"/>
-              <a:sym typeface="Helvetica Neue"/>
-            </a:endParaRPr>
-          </a:p>
-          <a:p>
-            <a:pPr algn="l">
-              <a:buFont typeface="Arial" panose="020B0604020202020204" pitchFamily="34" charset="0"/>
-              <a:buNone/>
-            </a:pPr>
-            <a:r>
-              <a:rPr lang="en-GB" sz="1200" b="1" i="1" dirty="0" err="1">
-                <a:solidFill>
-                  <a:srgbClr val="171717"/>
-                </a:solidFill>
-                <a:effectLst/>
-                <a:latin typeface="Segoe UI"/>
-                <a:cs typeface="Segoe UI"/>
-                <a:sym typeface="Helvetica Neue"/>
-              </a:rPr>
-              <a:t>DateTime</a:t>
-            </a:r>
-            <a:r>
-              <a:rPr lang="en-GB" sz="1200" b="1" i="1" dirty="0">
-                <a:solidFill>
-                  <a:srgbClr val="171717"/>
-                </a:solidFill>
-                <a:effectLst/>
-                <a:latin typeface="Segoe UI"/>
-                <a:cs typeface="Segoe UI"/>
-                <a:sym typeface="Helvetica Neue"/>
-              </a:rPr>
-              <a:t> manipulation:</a:t>
-            </a:r>
-          </a:p>
-          <a:p>
-            <a:pPr algn="l">
-              <a:buFont typeface="Arial" panose="020B0604020202020204" pitchFamily="34" charset="0"/>
-              <a:buNone/>
-            </a:pPr>
-            <a:endParaRPr lang="en-GB" sz="1200" b="1" i="1" dirty="0">
-              <a:solidFill>
-                <a:srgbClr val="171717"/>
-              </a:solidFill>
-              <a:effectLst/>
-              <a:latin typeface="Segoe UI"/>
-              <a:cs typeface="Segoe UI"/>
-            </a:endParaRPr>
-          </a:p>
-          <a:p>
-            <a:pPr algn="l">
-              <a:buFont typeface="Arial" panose="020B0604020202020204" pitchFamily="34" charset="0"/>
-              <a:buNone/>
-            </a:pPr>
-            <a:r>
-              <a:rPr lang="en-GB" sz="1200" b="0" i="0" dirty="0">
-                <a:solidFill>
-                  <a:srgbClr val="171717"/>
-                </a:solidFill>
-                <a:effectLst/>
-                <a:latin typeface="Segoe UI" panose="020B0502040204020203" pitchFamily="34" charset="0"/>
-                <a:sym typeface="Helvetica Neue"/>
-              </a:rPr>
-              <a:t>Sometimes you need to normalize data where different </a:t>
-            </a:r>
-            <a:r>
-              <a:rPr lang="en-GB" sz="1200" b="0" i="0" dirty="0" err="1">
-                <a:solidFill>
-                  <a:srgbClr val="171717"/>
-                </a:solidFill>
-                <a:effectLst/>
-                <a:latin typeface="Segoe UI" panose="020B0502040204020203" pitchFamily="34" charset="0"/>
-                <a:sym typeface="Helvetica Neue"/>
-              </a:rPr>
-              <a:t>DateTime</a:t>
-            </a:r>
-            <a:r>
-              <a:rPr lang="en-GB" sz="1200" b="0" i="0" dirty="0">
-                <a:solidFill>
-                  <a:srgbClr val="171717"/>
-                </a:solidFill>
-                <a:effectLst/>
-                <a:latin typeface="Segoe UI" panose="020B0502040204020203" pitchFamily="34" charset="0"/>
-                <a:sym typeface="Helvetica Neue"/>
-              </a:rPr>
-              <a:t> formats have been used. Within Azure Databricks, you can use different functions to manipulate </a:t>
-            </a:r>
-            <a:r>
-              <a:rPr lang="en-GB" sz="1200" b="0" i="0" dirty="0" err="1">
-                <a:solidFill>
-                  <a:srgbClr val="171717"/>
-                </a:solidFill>
-                <a:effectLst/>
-                <a:latin typeface="Segoe UI" panose="020B0502040204020203" pitchFamily="34" charset="0"/>
-                <a:sym typeface="Helvetica Neue"/>
-              </a:rPr>
-              <a:t>DateTime</a:t>
-            </a:r>
-            <a:r>
-              <a:rPr lang="en-GB" sz="1200" b="0" i="0" dirty="0">
-                <a:solidFill>
-                  <a:srgbClr val="171717"/>
-                </a:solidFill>
-                <a:effectLst/>
-                <a:latin typeface="Segoe UI" panose="020B0502040204020203" pitchFamily="34" charset="0"/>
-                <a:sym typeface="Helvetica Neue"/>
-              </a:rPr>
-              <a:t> and use it across DataFrames. </a:t>
-            </a:r>
-          </a:p>
-          <a:p>
-            <a:pPr algn="l">
-              <a:buFont typeface="Arial" panose="020B0604020202020204" pitchFamily="34" charset="0"/>
-              <a:buNone/>
-            </a:pPr>
-            <a:endParaRPr lang="en-GB" sz="1200" b="0" i="0" dirty="0">
-              <a:solidFill>
-                <a:srgbClr val="171717"/>
-              </a:solidFill>
-              <a:effectLst/>
-              <a:latin typeface="Segoe UI" panose="020B0502040204020203" pitchFamily="34" charset="0"/>
-              <a:sym typeface="Helvetica Neue"/>
-            </a:endParaRPr>
-          </a:p>
-          <a:p>
-            <a:pPr algn="l">
-              <a:buFont typeface="Arial" panose="020B0604020202020204" pitchFamily="34" charset="0"/>
-              <a:buNone/>
-            </a:pPr>
-            <a:r>
-              <a:rPr lang="en-GB" sz="1200" b="1" i="1" dirty="0">
-                <a:solidFill>
-                  <a:srgbClr val="171717"/>
-                </a:solidFill>
-                <a:effectLst/>
-                <a:latin typeface="Segoe UI"/>
-                <a:cs typeface="Segoe UI"/>
-                <a:sym typeface="Helvetica Neue"/>
-              </a:rPr>
-              <a:t>Aggregate functions:</a:t>
-            </a:r>
-          </a:p>
-          <a:p>
-            <a:pPr algn="l">
-              <a:buFont typeface="Arial" panose="020B0604020202020204" pitchFamily="34" charset="0"/>
-              <a:buNone/>
-            </a:pPr>
-            <a:endParaRPr lang="en-GB" sz="1200" b="1" i="1" dirty="0">
-              <a:solidFill>
-                <a:srgbClr val="171717"/>
-              </a:solidFill>
-              <a:effectLst/>
-              <a:latin typeface="Segoe UI"/>
-              <a:cs typeface="Segoe UI"/>
-            </a:endParaRPr>
-          </a:p>
-          <a:p>
-            <a:pPr algn="l"/>
-            <a:r>
-              <a:rPr lang="en-GB" sz="1800" b="0" i="0" dirty="0">
-                <a:effectLst/>
-                <a:latin typeface="Helvetica Neue"/>
-              </a:rPr>
-              <a:t>Aggregating data is one of the more common tasks when working with big data. When there is a question such as what are the total sales, you might think off using an aggregate function. A common used function is the </a:t>
-            </a:r>
-            <a:r>
-              <a:rPr lang="en-GB" sz="1800" b="0" i="0" dirty="0" err="1">
-                <a:effectLst/>
-                <a:latin typeface="Helvetica Neue"/>
-              </a:rPr>
-              <a:t>groupBy</a:t>
-            </a:r>
-            <a:r>
-              <a:rPr lang="en-GB" sz="1800" b="0" i="0" dirty="0">
-                <a:effectLst/>
-                <a:latin typeface="Helvetica Neue"/>
-              </a:rPr>
-              <a:t>() function, which g</a:t>
-            </a:r>
-            <a:r>
-              <a:rPr lang="en-GB" sz="1800" b="0" dirty="0">
-                <a:effectLst/>
-                <a:latin typeface="Helvetica Neue"/>
-              </a:rPr>
-              <a:t>roups the Dataset using the specified columns, so that we can run aggregation on them, we can see the aggregation per grouping. </a:t>
-            </a:r>
-            <a:r>
-              <a:rPr lang="en-GB" sz="1800" b="0" i="0" dirty="0">
-                <a:effectLst/>
-                <a:latin typeface="Helvetica Neue"/>
-              </a:rPr>
-              <a:t>Unlike some other transformations, this transformation does not return a DataFrame. In Scala it returns a </a:t>
-            </a:r>
-            <a:r>
-              <a:rPr lang="en-GB" sz="1800" b="0" i="0" dirty="0" err="1">
-                <a:effectLst/>
-                <a:latin typeface="Helvetica Neue"/>
-              </a:rPr>
-              <a:t>RelationalGroupedDataset</a:t>
-            </a:r>
-            <a:r>
-              <a:rPr lang="en-GB" sz="1800" b="0" i="0" dirty="0">
-                <a:effectLst/>
-                <a:latin typeface="Helvetica Neue"/>
-              </a:rPr>
-              <a:t> object and in Python it returns a </a:t>
-            </a:r>
-            <a:r>
-              <a:rPr lang="en-GB" sz="1800" b="0" i="0" dirty="0" err="1">
-                <a:effectLst/>
-                <a:latin typeface="Helvetica Neue"/>
-              </a:rPr>
-              <a:t>GroupedData</a:t>
-            </a:r>
-            <a:r>
-              <a:rPr lang="en-GB" sz="1800" b="0" i="0" dirty="0">
-                <a:effectLst/>
-                <a:latin typeface="Helvetica Neue"/>
-              </a:rPr>
-              <a:t> objects. So be mindful these will not be persisted until you store the results in a DataFrame.</a:t>
-            </a:r>
-          </a:p>
-          <a:p>
-            <a:pPr algn="l">
-              <a:buFont typeface="Arial" panose="020B0604020202020204" pitchFamily="34" charset="0"/>
-              <a:buNone/>
-            </a:pPr>
-            <a:endParaRPr lang="en-GB" sz="1200" b="0" i="0" dirty="0">
-              <a:solidFill>
-                <a:srgbClr val="171717"/>
-              </a:solidFill>
-              <a:effectLst/>
-              <a:latin typeface="Segoe UI" panose="020B0502040204020203" pitchFamily="34" charset="0"/>
-              <a:sym typeface="Helvetica Neue"/>
-            </a:endParaRPr>
-          </a:p>
-          <a:p>
-            <a:pPr algn="l">
-              <a:buFont typeface="Arial" panose="020B0604020202020204" pitchFamily="34" charset="0"/>
-              <a:buNone/>
-            </a:pPr>
-            <a:r>
-              <a:rPr lang="en-GB" sz="1200" b="1" i="1" dirty="0">
-                <a:solidFill>
-                  <a:srgbClr val="171717"/>
-                </a:solidFill>
-                <a:effectLst/>
-                <a:latin typeface="Segoe UI"/>
-                <a:cs typeface="Segoe UI"/>
-                <a:sym typeface="Helvetica Neue"/>
-              </a:rPr>
-              <a:t>Deduplication of Data:</a:t>
-            </a:r>
-            <a:endParaRPr lang="en-GB" sz="1200" b="1" i="1" dirty="0">
-              <a:solidFill>
-                <a:srgbClr val="171717"/>
-              </a:solidFill>
-              <a:effectLst/>
-              <a:latin typeface="Segoe UI"/>
-              <a:cs typeface="Segoe UI"/>
-            </a:endParaRPr>
-          </a:p>
-          <a:p>
-            <a:pPr algn="l"/>
-            <a:endParaRPr lang="en-GB" sz="1200" b="0" i="0" dirty="0">
-              <a:solidFill>
-                <a:srgbClr val="000000"/>
-              </a:solidFill>
-              <a:effectLst/>
-              <a:latin typeface="Helvetica Neue"/>
-            </a:endParaRPr>
-          </a:p>
-          <a:p>
-            <a:pPr algn="l"/>
-            <a:r>
-              <a:rPr lang="en-GB" sz="1200" b="0" i="0" dirty="0">
-                <a:solidFill>
-                  <a:srgbClr val="000000"/>
-                </a:solidFill>
-                <a:effectLst/>
-                <a:latin typeface="Helvetica Neue"/>
-              </a:rPr>
-              <a:t>In many scenarios, you will likely get data where there are duplicate records. In some of the records, the names could be mixed case, while in others, they are uppercase, which results in a deduplication of records. </a:t>
-            </a:r>
-            <a:endParaRPr lang="en-IE" sz="1000" dirty="0">
-              <a:latin typeface="Helvetica Neue"/>
-              <a:sym typeface="Helvetica Neue"/>
-            </a:endParaRPr>
-          </a:p>
-          <a:p>
-            <a:pPr marL="0" indent="0">
-              <a:buNone/>
-            </a:pPr>
-            <a:endParaRPr lang="en-US" sz="1000" b="1" dirty="0"/>
-          </a:p>
-          <a:p>
-            <a:pPr marL="0" marR="0" lvl="0" indent="0" algn="l" defTabSz="932742" rtl="0" eaLnBrk="1" fontAlgn="auto" latinLnBrk="0" hangingPunct="1">
-              <a:lnSpc>
-                <a:spcPct val="90000"/>
-              </a:lnSpc>
-              <a:spcBef>
-                <a:spcPts val="0"/>
-              </a:spcBef>
-              <a:spcAft>
-                <a:spcPts val="340"/>
-              </a:spcAft>
-              <a:buClrTx/>
-              <a:buSzTx/>
-              <a:buFontTx/>
-              <a:buNone/>
-              <a:tabLst/>
-              <a:defRPr/>
-            </a:pPr>
-            <a:r>
-              <a:rPr lang="en-US" sz="1000" b="1" dirty="0"/>
-              <a:t>Instructor notes and guidance</a:t>
-            </a:r>
-          </a:p>
-          <a:p>
-            <a:pPr marR="0" lvl="0" indent="0" fontAlgn="auto">
-              <a:lnSpc>
-                <a:spcPct val="90000"/>
-              </a:lnSpc>
-              <a:spcBef>
-                <a:spcPts val="0"/>
-              </a:spcBef>
-              <a:spcAft>
-                <a:spcPts val="340"/>
-              </a:spcAft>
-              <a:buClrTx/>
-              <a:buSzTx/>
-              <a:buFontTx/>
-              <a:buNone/>
-              <a:tabLst/>
-              <a:defRPr/>
-            </a:pPr>
-            <a:endParaRPr lang="en-US" sz="1200" dirty="0">
-              <a:solidFill>
-                <a:srgbClr val="000000"/>
-              </a:solidFill>
-              <a:latin typeface="Helvetica Neue"/>
-            </a:endParaRPr>
-          </a:p>
-          <a:p>
-            <a:pPr marR="0" lvl="0" indent="0" fontAlgn="auto">
-              <a:lnSpc>
-                <a:spcPct val="90000"/>
-              </a:lnSpc>
-              <a:spcBef>
-                <a:spcPts val="0"/>
-              </a:spcBef>
-              <a:spcAft>
-                <a:spcPts val="340"/>
-              </a:spcAft>
-              <a:buClrTx/>
-              <a:buSzTx/>
-              <a:buFontTx/>
-              <a:buNone/>
-              <a:tabLst/>
-              <a:defRPr/>
-            </a:pPr>
-            <a:r>
-              <a:rPr lang="en-US" sz="1200" dirty="0">
-                <a:solidFill>
-                  <a:srgbClr val="000000"/>
-                </a:solidFill>
-                <a:latin typeface="Helvetica Neue"/>
-              </a:rPr>
-              <a:t>This slide showcases some example of advanced transformation methods that are commonly seen among customers.  In the lab, students will deep-dive into notebook examples of each of the advanced methods mentioned. The students will use the functions to play with </a:t>
-            </a:r>
-            <a:r>
-              <a:rPr lang="en-US" sz="1200" dirty="0" err="1">
-                <a:solidFill>
-                  <a:srgbClr val="000000"/>
-                </a:solidFill>
-                <a:latin typeface="Helvetica Neue"/>
-              </a:rPr>
-              <a:t>DataTime</a:t>
-            </a:r>
-            <a:r>
-              <a:rPr lang="en-US" sz="1200" dirty="0">
-                <a:solidFill>
-                  <a:srgbClr val="000000"/>
-                </a:solidFill>
-                <a:latin typeface="Helvetica Neue"/>
-              </a:rPr>
-              <a:t> manipulation, aggregate functions and deduplication functions of data. </a:t>
+            <a:r>
+              <a:rPr lang="en-US" i="1" dirty="0"/>
+              <a:t>In addition to providing the </a:t>
+            </a:r>
+            <a:r>
+              <a:rPr lang="en-US" i="1" dirty="0" err="1"/>
+              <a:t>dataframe</a:t>
+            </a:r>
+            <a:r>
+              <a:rPr lang="en-US" i="1" dirty="0"/>
+              <a:t> object, the </a:t>
+            </a:r>
+            <a:r>
+              <a:rPr lang="en-US" i="1" dirty="0" err="1"/>
+              <a:t>SparkSQl</a:t>
+            </a:r>
+            <a:r>
+              <a:rPr lang="en-US" i="1" dirty="0"/>
+              <a:t> library provides support for SQL syntax, either via the </a:t>
+            </a:r>
+            <a:r>
+              <a:rPr lang="en-US" i="1" dirty="0" err="1"/>
+              <a:t>spark.sql</a:t>
+            </a:r>
+            <a:r>
+              <a:rPr lang="en-US" i="1" dirty="0"/>
+              <a:t> method to return a </a:t>
+            </a:r>
+            <a:r>
+              <a:rPr lang="en-US" i="1" dirty="0" err="1"/>
+              <a:t>dataframe</a:t>
+            </a:r>
+            <a:r>
+              <a:rPr lang="en-US" i="1" dirty="0"/>
+              <a:t> or in standalone SQL code.</a:t>
+            </a:r>
+          </a:p>
+          <a:p>
+            <a:endParaRPr lang="en-US" i="1" dirty="0"/>
+          </a:p>
+          <a:p>
+            <a:r>
+              <a:rPr lang="en-US" i="1" dirty="0"/>
+              <a:t>To understand what’s going on in the code examples, students need to be aware of the existence of the Spark “</a:t>
+            </a:r>
+            <a:r>
+              <a:rPr lang="en-US" i="1" dirty="0" err="1"/>
+              <a:t>metastore</a:t>
+            </a:r>
+            <a:r>
+              <a:rPr lang="en-US" i="1" dirty="0"/>
+              <a:t>”, which you can think of as being a relational database layer in which tables and views are defined. The data itself is stored in files, which the tables “overlay”. Spark </a:t>
+            </a:r>
+            <a:r>
+              <a:rPr lang="en-US" i="1" dirty="0" err="1"/>
+              <a:t>metastores</a:t>
+            </a:r>
+            <a:r>
+              <a:rPr lang="en-US" i="1" dirty="0"/>
+              <a:t> are based on a technology called </a:t>
+            </a:r>
+            <a:r>
+              <a:rPr lang="en-US" b="1" i="1" dirty="0"/>
+              <a:t>Hive</a:t>
+            </a:r>
+            <a:r>
+              <a:rPr lang="en-US" i="1" dirty="0"/>
+              <a:t>, which provides relational data services to open source systems such as Hadoop and Spark. We’ll explore tables in the </a:t>
+            </a:r>
+            <a:r>
+              <a:rPr lang="en-US" i="1" dirty="0" err="1"/>
+              <a:t>metastore</a:t>
+            </a:r>
+            <a:r>
+              <a:rPr lang="en-US" i="1" dirty="0"/>
+              <a:t> later in this module when we discuss Delta Lake.</a:t>
             </a:r>
           </a:p>
         </p:txBody>
       </p:sp>
       <p:sp>
         <p:nvSpPr>
-          <p:cNvPr id="4" name="Slide Number Placeholder 3"/>
+          <p:cNvPr id="4" name="Header Placeholder 3"/>
+          <p:cNvSpPr>
+            <a:spLocks noGrp="1"/>
+          </p:cNvSpPr>
+          <p:nvPr>
+            <p:ph type="hdr" sz="quarter"/>
+          </p:nvPr>
+        </p:nvSpPr>
+        <p:spPr/>
+        <p:txBody>
+          <a:bodyPr/>
+          <a:lstStyle/>
+          <a:p>
+            <a:endParaRPr lang="en-US"/>
+          </a:p>
+        </p:txBody>
+      </p:sp>
+      <p:sp>
+        <p:nvSpPr>
+          <p:cNvPr id="5" name="Footer Placeholder 4"/>
+          <p:cNvSpPr>
+            <a:spLocks noGrp="1"/>
+          </p:cNvSpPr>
+          <p:nvPr>
+            <p:ph type="ftr" sz="quarter" idx="4"/>
+          </p:nvPr>
+        </p:nvSpPr>
+        <p:spPr/>
+        <p:txBody>
+          <a:bodyPr/>
+          <a:lstStyle/>
+          <a:p>
+            <a:pPr defTabSz="914099" eaLnBrk="0" hangingPunct="0"/>
+            <a:r>
+              <a:rPr lang="en-US" sz="400">
+                <a:gradFill>
+                  <a:gsLst>
+                    <a:gs pos="0">
+                      <a:prstClr val="black"/>
+                    </a:gs>
+                    <a:gs pos="100000">
+                      <a:prstClr val="black"/>
+                    </a:gs>
+                  </a:gsLst>
+                  <a:lin ang="5400000" scaled="0"/>
+                </a:gradFill>
+                <a:latin typeface="Segoe UI" pitchFamily="34" charset="0"/>
+                <a:ea typeface="Segoe UI" pitchFamily="34" charset="0"/>
+                <a:cs typeface="Segoe UI" pitchFamily="34" charset="0"/>
+              </a:rPr>
+              <a:t>© Microsoft Corporation</a:t>
+            </a:r>
+          </a:p>
+        </p:txBody>
+      </p:sp>
+      <p:sp>
+        <p:nvSpPr>
+          <p:cNvPr id="6" name="Slide Number Placeholder 5"/>
           <p:cNvSpPr>
             <a:spLocks noGrp="1"/>
           </p:cNvSpPr>
@@ -2570,18 +2385,19 @@
           <a:bodyPr/>
           <a:lstStyle/>
           <a:p>
-            <a:fld id="{37E24C93-78CA-4AF0-9E77-825D60ABA46D}" type="slidenum">
+            <a:fld id="{B4008EB6-D09E-4580-8CD6-DDB14511944F}" type="slidenum">
               <a:rPr lang="en-US" smtClean="0"/>
+              <a:pPr/>
               <a:t>17</a:t>
             </a:fld>
-            <a:endParaRPr lang="en-US" dirty="0"/>
+            <a:endParaRPr lang="en-US"/>
           </a:p>
         </p:txBody>
       </p:sp>
     </p:spTree>
     <p:extLst>
       <p:ext uri="{BB962C8B-B14F-4D97-AF65-F5344CB8AC3E}">
-        <p14:creationId xmlns:p14="http://schemas.microsoft.com/office/powerpoint/2010/main" val="1281536820"/>
+        <p14:creationId xmlns:p14="http://schemas.microsoft.com/office/powerpoint/2010/main" val="4131556773"/>
       </p:ext>
     </p:extLst>
   </p:cSld>
@@ -2635,102 +2451,37 @@
           <a:bodyPr/>
           <a:lstStyle/>
           <a:p>
-            <a:pPr algn="l" rtl="0" fontAlgn="base"/>
-            <a:r>
-              <a:rPr lang="en-US" sz="1200" b="1" i="0" u="none" strike="noStrike" dirty="0">
-                <a:solidFill>
-                  <a:srgbClr val="000000"/>
-                </a:solidFill>
-                <a:effectLst/>
-                <a:latin typeface="Helvetica Neue"/>
-              </a:rPr>
-              <a:t>TALKING POINTS</a:t>
-            </a:r>
-            <a:r>
-              <a:rPr lang="en-US" sz="1200" b="0" i="0" dirty="0">
-                <a:effectLst/>
-                <a:latin typeface="Helvetica Neue"/>
-              </a:rPr>
-              <a:t>​</a:t>
-            </a:r>
-            <a:endParaRPr lang="en-US" b="0" i="0" dirty="0">
-              <a:effectLst/>
-            </a:endParaRPr>
-          </a:p>
-          <a:p>
-            <a:pPr algn="l" rtl="0" fontAlgn="base"/>
-            <a:r>
-              <a:rPr lang="en-US" sz="1200" b="0" i="0" dirty="0">
-                <a:effectLst/>
-                <a:latin typeface="Helvetica Neue"/>
-              </a:rPr>
-              <a:t>​</a:t>
-            </a:r>
-            <a:endParaRPr lang="en-US" b="0" i="0" dirty="0">
-              <a:effectLst/>
-            </a:endParaRPr>
-          </a:p>
-          <a:p>
-            <a:pPr algn="l" rtl="0" fontAlgn="base"/>
-            <a:r>
-              <a:rPr lang="en-US" sz="1200" b="0" i="0" u="none" strike="noStrike" dirty="0">
-                <a:solidFill>
-                  <a:srgbClr val="000000"/>
-                </a:solidFill>
-                <a:effectLst/>
-                <a:latin typeface="Helvetica Neue"/>
-              </a:rPr>
-              <a:t>Let’s put this into reality and show you how it works.</a:t>
-            </a:r>
-            <a:r>
-              <a:rPr lang="en-US" sz="1200" b="0" i="0" dirty="0">
-                <a:effectLst/>
-                <a:latin typeface="Helvetica Neue"/>
-              </a:rPr>
-              <a:t>​</a:t>
-            </a:r>
-            <a:endParaRPr lang="en-US" b="0" i="0" dirty="0">
-              <a:effectLst/>
-            </a:endParaRPr>
-          </a:p>
-          <a:p>
-            <a:pPr algn="l" rtl="0" fontAlgn="base"/>
-            <a:r>
-              <a:rPr lang="en-US" sz="1200" b="0" i="0" dirty="0">
-                <a:effectLst/>
-                <a:latin typeface="Helvetica Neue"/>
-              </a:rPr>
-              <a:t>​</a:t>
-            </a:r>
-            <a:endParaRPr lang="en-US" b="0" i="0" dirty="0">
-              <a:effectLst/>
-            </a:endParaRPr>
-          </a:p>
-          <a:p>
-            <a:pPr algn="l" rtl="0" fontAlgn="base"/>
-            <a:r>
-              <a:rPr lang="en-US" sz="1200" b="0" i="0" u="none" strike="noStrike" dirty="0">
-                <a:solidFill>
-                  <a:srgbClr val="000000"/>
-                </a:solidFill>
-                <a:effectLst/>
-                <a:latin typeface="Helvetica Neue"/>
-              </a:rPr>
-              <a:t>All instructions and context are found in this repository</a:t>
-            </a:r>
-            <a:r>
-              <a:rPr lang="en-US" sz="1200" b="0" i="0" dirty="0">
-                <a:effectLst/>
-                <a:latin typeface="Helvetica Neue"/>
-              </a:rPr>
-              <a:t>​</a:t>
-            </a:r>
-            <a:endParaRPr lang="en-US" b="0" i="0" dirty="0">
-              <a:effectLst/>
-            </a:endParaRPr>
+            <a:pPr marL="0" marR="0" lvl="0" indent="0" algn="l" defTabSz="914400" rtl="0" eaLnBrk="1" fontAlgn="auto" latinLnBrk="0" hangingPunct="1">
+              <a:lnSpc>
+                <a:spcPct val="100000"/>
+              </a:lnSpc>
+              <a:spcBef>
+                <a:spcPts val="0"/>
+              </a:spcBef>
+              <a:spcAft>
+                <a:spcPts val="0"/>
+              </a:spcAft>
+              <a:buClrTx/>
+              <a:buSzTx/>
+              <a:buFontTx/>
+              <a:buNone/>
+              <a:tabLst/>
+              <a:defRPr/>
+            </a:pPr>
+            <a:r>
+              <a:rPr lang="en-IE" b="1" dirty="0"/>
+              <a:t>Talking Points:</a:t>
+            </a:r>
+            <a:endParaRPr lang="en-IE" dirty="0"/>
           </a:p>
           <a:p>
             <a:endParaRPr lang="en-GB" dirty="0"/>
+          </a:p>
+          <a:p>
+            <a:r>
+              <a:rPr lang="en-GB" dirty="0"/>
+              <a:t>Let’s look at some common manipulation and transformation capabilities with Azure Databricks</a:t>
+            </a:r>
           </a:p>
         </p:txBody>
       </p:sp>
@@ -2752,6 +2503,1249 @@
             <a:fld id="{37E24C93-78CA-4AF0-9E77-825D60ABA46D}" type="slidenum">
               <a:rPr lang="en-US" smtClean="0"/>
               <a:t>18</a:t>
+            </a:fld>
+            <a:endParaRPr lang="en-US" dirty="0"/>
+          </a:p>
+        </p:txBody>
+      </p:sp>
+    </p:spTree>
+    <p:extLst>
+      <p:ext uri="{BB962C8B-B14F-4D97-AF65-F5344CB8AC3E}">
+        <p14:creationId xmlns:p14="http://schemas.microsoft.com/office/powerpoint/2010/main" val="420517814"/>
+      </p:ext>
+    </p:extLst>
+  </p:cSld>
+  <p:clrMapOvr>
+    <a:masterClrMapping/>
+  </p:clrMapOvr>
+</p:notes>
+</file>
+
+<file path=ppt/notesSlides/notesSlide15.xml><?xml version="1.0" encoding="utf-8"?>
+<p:notes xmlns:a="http://schemas.openxmlformats.org/drawingml/2006/main" xmlns:r="http://schemas.openxmlformats.org/officeDocument/2006/relationships" xmlns:p="http://schemas.openxmlformats.org/presentationml/2006/main">
+  <p:cSld>
+    <p:spTree>
+      <p:nvGrpSpPr>
+        <p:cNvPr id="1" name=""/>
+        <p:cNvGrpSpPr/>
+        <p:nvPr/>
+      </p:nvGrpSpPr>
+      <p:grpSpPr>
+        <a:xfrm>
+          <a:off x="0" y="0"/>
+          <a:ext cx="0" cy="0"/>
+          <a:chOff x="0" y="0"/>
+          <a:chExt cx="0" cy="0"/>
+        </a:xfrm>
+      </p:grpSpPr>
+      <p:sp>
+        <p:nvSpPr>
+          <p:cNvPr id="2" name="Slide Image Placeholder 1"/>
+          <p:cNvSpPr>
+            <a:spLocks noGrp="1" noRot="1" noChangeAspect="1"/>
+          </p:cNvSpPr>
+          <p:nvPr>
+            <p:ph type="sldImg"/>
+          </p:nvPr>
+        </p:nvSpPr>
+        <p:spPr/>
+      </p:sp>
+      <p:sp>
+        <p:nvSpPr>
+          <p:cNvPr id="3" name="Notes Placeholder 2"/>
+          <p:cNvSpPr>
+            <a:spLocks noGrp="1"/>
+          </p:cNvSpPr>
+          <p:nvPr>
+            <p:ph type="body" idx="1"/>
+          </p:nvPr>
+        </p:nvSpPr>
+        <p:spPr/>
+        <p:txBody>
+          <a:bodyPr/>
+          <a:lstStyle/>
+          <a:p>
+            <a:pPr marL="0" marR="0" lvl="0" indent="0" defTabSz="228554" eaLnBrk="1" fontAlgn="auto" latinLnBrk="0" hangingPunct="1">
+              <a:lnSpc>
+                <a:spcPct val="117999"/>
+              </a:lnSpc>
+              <a:spcBef>
+                <a:spcPts val="0"/>
+              </a:spcBef>
+              <a:spcAft>
+                <a:spcPts val="0"/>
+              </a:spcAft>
+              <a:buClrTx/>
+              <a:buSzTx/>
+              <a:buFontTx/>
+              <a:buNone/>
+              <a:tabLst/>
+              <a:defRPr/>
+            </a:pPr>
+            <a:r>
+              <a:rPr lang="en-US" sz="1000" b="1" dirty="0"/>
+              <a:t>Talking points</a:t>
+            </a:r>
+          </a:p>
+          <a:p>
+            <a:pPr algn="l">
+              <a:buFont typeface="Arial" panose="020B0604020202020204" pitchFamily="34" charset="0"/>
+              <a:buNone/>
+            </a:pPr>
+            <a:endParaRPr lang="en-GB" sz="1200" b="0" i="0" dirty="0">
+              <a:solidFill>
+                <a:srgbClr val="171717"/>
+              </a:solidFill>
+              <a:effectLst/>
+              <a:latin typeface="Segoe UI" panose="020B0502040204020203" pitchFamily="34" charset="0"/>
+              <a:sym typeface="Helvetica Neue"/>
+            </a:endParaRPr>
+          </a:p>
+          <a:p>
+            <a:pPr algn="l">
+              <a:buFont typeface="Arial" panose="020B0604020202020204" pitchFamily="34" charset="0"/>
+              <a:buNone/>
+            </a:pPr>
+            <a:r>
+              <a:rPr lang="en-GB" sz="1200" b="0" i="0" u="none" dirty="0">
+                <a:solidFill>
+                  <a:srgbClr val="171717"/>
+                </a:solidFill>
+                <a:effectLst/>
+                <a:latin typeface="Segoe UI"/>
+                <a:cs typeface="Segoe UI"/>
+                <a:sym typeface="Helvetica Neue"/>
+              </a:rPr>
+              <a:t>There are a number of advanced transformation that can be performed in Azure Databricks, here are some common transformations used:</a:t>
+            </a:r>
+          </a:p>
+          <a:p>
+            <a:pPr algn="l">
+              <a:buFont typeface="Arial" panose="020B0604020202020204" pitchFamily="34" charset="0"/>
+              <a:buNone/>
+            </a:pPr>
+            <a:endParaRPr lang="en-GB" sz="1200" b="1" i="1" dirty="0">
+              <a:solidFill>
+                <a:srgbClr val="171717"/>
+              </a:solidFill>
+              <a:effectLst/>
+              <a:latin typeface="Segoe UI"/>
+              <a:cs typeface="Segoe UI"/>
+              <a:sym typeface="Helvetica Neue"/>
+            </a:endParaRPr>
+          </a:p>
+          <a:p>
+            <a:pPr algn="l">
+              <a:buFont typeface="Arial" panose="020B0604020202020204" pitchFamily="34" charset="0"/>
+              <a:buNone/>
+            </a:pPr>
+            <a:r>
+              <a:rPr lang="en-GB" sz="1200" b="1" i="1" dirty="0" err="1">
+                <a:solidFill>
+                  <a:srgbClr val="171717"/>
+                </a:solidFill>
+                <a:effectLst/>
+                <a:latin typeface="Segoe UI"/>
+                <a:cs typeface="Segoe UI"/>
+                <a:sym typeface="Helvetica Neue"/>
+              </a:rPr>
+              <a:t>DateTime</a:t>
+            </a:r>
+            <a:r>
+              <a:rPr lang="en-GB" sz="1200" b="1" i="1" dirty="0">
+                <a:solidFill>
+                  <a:srgbClr val="171717"/>
+                </a:solidFill>
+                <a:effectLst/>
+                <a:latin typeface="Segoe UI"/>
+                <a:cs typeface="Segoe UI"/>
+                <a:sym typeface="Helvetica Neue"/>
+              </a:rPr>
+              <a:t> manipulation:</a:t>
+            </a:r>
+          </a:p>
+          <a:p>
+            <a:pPr algn="l">
+              <a:buFont typeface="Arial" panose="020B0604020202020204" pitchFamily="34" charset="0"/>
+              <a:buNone/>
+            </a:pPr>
+            <a:endParaRPr lang="en-GB" sz="1200" b="1" i="1" dirty="0">
+              <a:solidFill>
+                <a:srgbClr val="171717"/>
+              </a:solidFill>
+              <a:effectLst/>
+              <a:latin typeface="Segoe UI"/>
+              <a:cs typeface="Segoe UI"/>
+            </a:endParaRPr>
+          </a:p>
+          <a:p>
+            <a:pPr algn="l">
+              <a:buFont typeface="Arial" panose="020B0604020202020204" pitchFamily="34" charset="0"/>
+              <a:buNone/>
+            </a:pPr>
+            <a:r>
+              <a:rPr lang="en-GB" sz="1200" b="0" i="0" dirty="0">
+                <a:solidFill>
+                  <a:srgbClr val="171717"/>
+                </a:solidFill>
+                <a:effectLst/>
+                <a:latin typeface="Segoe UI" panose="020B0502040204020203" pitchFamily="34" charset="0"/>
+                <a:sym typeface="Helvetica Neue"/>
+              </a:rPr>
+              <a:t>Sometimes you need to normalize data where different </a:t>
+            </a:r>
+            <a:r>
+              <a:rPr lang="en-GB" sz="1200" b="0" i="0" dirty="0" err="1">
+                <a:solidFill>
+                  <a:srgbClr val="171717"/>
+                </a:solidFill>
+                <a:effectLst/>
+                <a:latin typeface="Segoe UI" panose="020B0502040204020203" pitchFamily="34" charset="0"/>
+                <a:sym typeface="Helvetica Neue"/>
+              </a:rPr>
+              <a:t>DateTime</a:t>
+            </a:r>
+            <a:r>
+              <a:rPr lang="en-GB" sz="1200" b="0" i="0" dirty="0">
+                <a:solidFill>
+                  <a:srgbClr val="171717"/>
+                </a:solidFill>
+                <a:effectLst/>
+                <a:latin typeface="Segoe UI" panose="020B0502040204020203" pitchFamily="34" charset="0"/>
+                <a:sym typeface="Helvetica Neue"/>
+              </a:rPr>
+              <a:t> formats have been used. Within Azure Databricks, you can use different functions to manipulate </a:t>
+            </a:r>
+            <a:r>
+              <a:rPr lang="en-GB" sz="1200" b="0" i="0" dirty="0" err="1">
+                <a:solidFill>
+                  <a:srgbClr val="171717"/>
+                </a:solidFill>
+                <a:effectLst/>
+                <a:latin typeface="Segoe UI" panose="020B0502040204020203" pitchFamily="34" charset="0"/>
+                <a:sym typeface="Helvetica Neue"/>
+              </a:rPr>
+              <a:t>DateTime</a:t>
+            </a:r>
+            <a:r>
+              <a:rPr lang="en-GB" sz="1200" b="0" i="0" dirty="0">
+                <a:solidFill>
+                  <a:srgbClr val="171717"/>
+                </a:solidFill>
+                <a:effectLst/>
+                <a:latin typeface="Segoe UI" panose="020B0502040204020203" pitchFamily="34" charset="0"/>
+                <a:sym typeface="Helvetica Neue"/>
+              </a:rPr>
+              <a:t> and use it across DataFrames. </a:t>
+            </a:r>
+          </a:p>
+          <a:p>
+            <a:pPr algn="l">
+              <a:buFont typeface="Arial" panose="020B0604020202020204" pitchFamily="34" charset="0"/>
+              <a:buNone/>
+            </a:pPr>
+            <a:endParaRPr lang="en-GB" sz="1200" b="0" i="0" dirty="0">
+              <a:solidFill>
+                <a:srgbClr val="171717"/>
+              </a:solidFill>
+              <a:effectLst/>
+              <a:latin typeface="Segoe UI" panose="020B0502040204020203" pitchFamily="34" charset="0"/>
+              <a:sym typeface="Helvetica Neue"/>
+            </a:endParaRPr>
+          </a:p>
+          <a:p>
+            <a:pPr algn="l">
+              <a:buFont typeface="Arial" panose="020B0604020202020204" pitchFamily="34" charset="0"/>
+              <a:buNone/>
+            </a:pPr>
+            <a:r>
+              <a:rPr lang="en-GB" sz="1200" b="1" i="1" dirty="0">
+                <a:solidFill>
+                  <a:srgbClr val="171717"/>
+                </a:solidFill>
+                <a:effectLst/>
+                <a:latin typeface="Segoe UI"/>
+                <a:cs typeface="Segoe UI"/>
+                <a:sym typeface="Helvetica Neue"/>
+              </a:rPr>
+              <a:t>Aggregate functions:</a:t>
+            </a:r>
+          </a:p>
+          <a:p>
+            <a:pPr algn="l">
+              <a:buFont typeface="Arial" panose="020B0604020202020204" pitchFamily="34" charset="0"/>
+              <a:buNone/>
+            </a:pPr>
+            <a:endParaRPr lang="en-GB" sz="1200" b="1" i="1" dirty="0">
+              <a:solidFill>
+                <a:srgbClr val="171717"/>
+              </a:solidFill>
+              <a:effectLst/>
+              <a:latin typeface="Segoe UI"/>
+              <a:cs typeface="Segoe UI"/>
+            </a:endParaRPr>
+          </a:p>
+          <a:p>
+            <a:pPr algn="l"/>
+            <a:r>
+              <a:rPr lang="en-GB" sz="1800" b="0" i="0" dirty="0">
+                <a:effectLst/>
+                <a:latin typeface="Helvetica Neue"/>
+              </a:rPr>
+              <a:t>Aggregating data is one of the more common tasks when working with big data. When there is a question such as what are the total sales, you might think off using an aggregate function. A common used function is the </a:t>
+            </a:r>
+            <a:r>
+              <a:rPr lang="en-GB" sz="1800" b="0" i="0" dirty="0" err="1">
+                <a:effectLst/>
+                <a:latin typeface="Helvetica Neue"/>
+              </a:rPr>
+              <a:t>groupBy</a:t>
+            </a:r>
+            <a:r>
+              <a:rPr lang="en-GB" sz="1800" b="0" i="0" dirty="0">
+                <a:effectLst/>
+                <a:latin typeface="Helvetica Neue"/>
+              </a:rPr>
+              <a:t>() function, which g</a:t>
+            </a:r>
+            <a:r>
+              <a:rPr lang="en-GB" sz="1800" b="0" dirty="0">
+                <a:effectLst/>
+                <a:latin typeface="Helvetica Neue"/>
+              </a:rPr>
+              <a:t>roups the Dataset using the specified columns, so that we can run aggregation on them, we can see the aggregation per grouping. </a:t>
+            </a:r>
+            <a:r>
+              <a:rPr lang="en-GB" sz="1800" b="0" i="0" dirty="0">
+                <a:effectLst/>
+                <a:latin typeface="Helvetica Neue"/>
+              </a:rPr>
+              <a:t>Unlike some other transformations, this transformation does not return a DataFrame. In Scala it returns a </a:t>
+            </a:r>
+            <a:r>
+              <a:rPr lang="en-GB" sz="1800" b="0" i="0" dirty="0" err="1">
+                <a:effectLst/>
+                <a:latin typeface="Helvetica Neue"/>
+              </a:rPr>
+              <a:t>RelationalGroupedDataset</a:t>
+            </a:r>
+            <a:r>
+              <a:rPr lang="en-GB" sz="1800" b="0" i="0" dirty="0">
+                <a:effectLst/>
+                <a:latin typeface="Helvetica Neue"/>
+              </a:rPr>
+              <a:t> object and in Python it returns a </a:t>
+            </a:r>
+            <a:r>
+              <a:rPr lang="en-GB" sz="1800" b="0" i="0" dirty="0" err="1">
+                <a:effectLst/>
+                <a:latin typeface="Helvetica Neue"/>
+              </a:rPr>
+              <a:t>GroupedData</a:t>
+            </a:r>
+            <a:r>
+              <a:rPr lang="en-GB" sz="1800" b="0" i="0" dirty="0">
+                <a:effectLst/>
+                <a:latin typeface="Helvetica Neue"/>
+              </a:rPr>
+              <a:t> objects. So be mindful these will not be persisted until you store the results in a DataFrame.</a:t>
+            </a:r>
+          </a:p>
+          <a:p>
+            <a:pPr algn="l">
+              <a:buFont typeface="Arial" panose="020B0604020202020204" pitchFamily="34" charset="0"/>
+              <a:buNone/>
+            </a:pPr>
+            <a:endParaRPr lang="en-GB" sz="1200" b="0" i="0" dirty="0">
+              <a:solidFill>
+                <a:srgbClr val="171717"/>
+              </a:solidFill>
+              <a:effectLst/>
+              <a:latin typeface="Segoe UI" panose="020B0502040204020203" pitchFamily="34" charset="0"/>
+              <a:sym typeface="Helvetica Neue"/>
+            </a:endParaRPr>
+          </a:p>
+          <a:p>
+            <a:pPr algn="l">
+              <a:buFont typeface="Arial" panose="020B0604020202020204" pitchFamily="34" charset="0"/>
+              <a:buNone/>
+            </a:pPr>
+            <a:r>
+              <a:rPr lang="en-GB" sz="1200" b="1" i="1" dirty="0">
+                <a:solidFill>
+                  <a:srgbClr val="171717"/>
+                </a:solidFill>
+                <a:effectLst/>
+                <a:latin typeface="Segoe UI"/>
+                <a:cs typeface="Segoe UI"/>
+                <a:sym typeface="Helvetica Neue"/>
+              </a:rPr>
+              <a:t>Deduplication of Data:</a:t>
+            </a:r>
+            <a:endParaRPr lang="en-GB" sz="1200" b="1" i="1" dirty="0">
+              <a:solidFill>
+                <a:srgbClr val="171717"/>
+              </a:solidFill>
+              <a:effectLst/>
+              <a:latin typeface="Segoe UI"/>
+              <a:cs typeface="Segoe UI"/>
+            </a:endParaRPr>
+          </a:p>
+          <a:p>
+            <a:pPr algn="l"/>
+            <a:endParaRPr lang="en-GB" sz="1200" b="0" i="0" dirty="0">
+              <a:solidFill>
+                <a:srgbClr val="000000"/>
+              </a:solidFill>
+              <a:effectLst/>
+              <a:latin typeface="Helvetica Neue"/>
+            </a:endParaRPr>
+          </a:p>
+          <a:p>
+            <a:pPr algn="l"/>
+            <a:r>
+              <a:rPr lang="en-GB" sz="1200" b="0" i="0" dirty="0">
+                <a:solidFill>
+                  <a:srgbClr val="000000"/>
+                </a:solidFill>
+                <a:effectLst/>
+                <a:latin typeface="Helvetica Neue"/>
+              </a:rPr>
+              <a:t>In many scenarios, you will likely get data where there are duplicate records. In some of the records, the names could be mixed case, while in others, they are uppercase, which results in a deduplication of records. </a:t>
+            </a:r>
+            <a:endParaRPr lang="en-IE" sz="1000" dirty="0">
+              <a:latin typeface="Helvetica Neue"/>
+              <a:sym typeface="Helvetica Neue"/>
+            </a:endParaRPr>
+          </a:p>
+          <a:p>
+            <a:pPr marL="0" indent="0">
+              <a:buNone/>
+            </a:pPr>
+            <a:endParaRPr lang="en-US" sz="1000" b="1" dirty="0"/>
+          </a:p>
+          <a:p>
+            <a:pPr marL="0" marR="0" lvl="0" indent="0" algn="l" defTabSz="932742" rtl="0" eaLnBrk="1" fontAlgn="auto" latinLnBrk="0" hangingPunct="1">
+              <a:lnSpc>
+                <a:spcPct val="90000"/>
+              </a:lnSpc>
+              <a:spcBef>
+                <a:spcPts val="0"/>
+              </a:spcBef>
+              <a:spcAft>
+                <a:spcPts val="340"/>
+              </a:spcAft>
+              <a:buClrTx/>
+              <a:buSzTx/>
+              <a:buFontTx/>
+              <a:buNone/>
+              <a:tabLst/>
+              <a:defRPr/>
+            </a:pPr>
+            <a:r>
+              <a:rPr lang="en-US" sz="1000" b="1" dirty="0"/>
+              <a:t>Instructor notes and guidance</a:t>
+            </a:r>
+          </a:p>
+          <a:p>
+            <a:pPr marR="0" lvl="0" indent="0" fontAlgn="auto">
+              <a:lnSpc>
+                <a:spcPct val="90000"/>
+              </a:lnSpc>
+              <a:spcBef>
+                <a:spcPts val="0"/>
+              </a:spcBef>
+              <a:spcAft>
+                <a:spcPts val="340"/>
+              </a:spcAft>
+              <a:buClrTx/>
+              <a:buSzTx/>
+              <a:buFontTx/>
+              <a:buNone/>
+              <a:tabLst/>
+              <a:defRPr/>
+            </a:pPr>
+            <a:endParaRPr lang="en-US" sz="1200" dirty="0">
+              <a:solidFill>
+                <a:srgbClr val="000000"/>
+              </a:solidFill>
+              <a:latin typeface="Helvetica Neue"/>
+            </a:endParaRPr>
+          </a:p>
+          <a:p>
+            <a:pPr marR="0" lvl="0" indent="0" fontAlgn="auto">
+              <a:lnSpc>
+                <a:spcPct val="90000"/>
+              </a:lnSpc>
+              <a:spcBef>
+                <a:spcPts val="0"/>
+              </a:spcBef>
+              <a:spcAft>
+                <a:spcPts val="340"/>
+              </a:spcAft>
+              <a:buClrTx/>
+              <a:buSzTx/>
+              <a:buFontTx/>
+              <a:buNone/>
+              <a:tabLst/>
+              <a:defRPr/>
+            </a:pPr>
+            <a:r>
+              <a:rPr lang="en-US" sz="1200" dirty="0">
+                <a:solidFill>
+                  <a:srgbClr val="000000"/>
+                </a:solidFill>
+                <a:latin typeface="Helvetica Neue"/>
+              </a:rPr>
+              <a:t>This slide showcases some example of advanced transformation methods that are commonly seen among customers.  In the lab, students will deep-dive into notebook examples of each of the advanced methods mentioned. The students will use the functions to play with </a:t>
+            </a:r>
+            <a:r>
+              <a:rPr lang="en-US" sz="1200" dirty="0" err="1">
+                <a:solidFill>
+                  <a:srgbClr val="000000"/>
+                </a:solidFill>
+                <a:latin typeface="Helvetica Neue"/>
+              </a:rPr>
+              <a:t>DataTime</a:t>
+            </a:r>
+            <a:r>
+              <a:rPr lang="en-US" sz="1200" dirty="0">
+                <a:solidFill>
+                  <a:srgbClr val="000000"/>
+                </a:solidFill>
+                <a:latin typeface="Helvetica Neue"/>
+              </a:rPr>
+              <a:t> manipulation, aggregate functions and deduplication functions of data. </a:t>
+            </a:r>
+          </a:p>
+        </p:txBody>
+      </p:sp>
+      <p:sp>
+        <p:nvSpPr>
+          <p:cNvPr id="4" name="Slide Number Placeholder 3"/>
+          <p:cNvSpPr>
+            <a:spLocks noGrp="1"/>
+          </p:cNvSpPr>
+          <p:nvPr>
+            <p:ph type="sldNum" sz="quarter" idx="5"/>
+          </p:nvPr>
+        </p:nvSpPr>
+        <p:spPr/>
+        <p:txBody>
+          <a:bodyPr/>
+          <a:lstStyle/>
+          <a:p>
+            <a:fld id="{37E24C93-78CA-4AF0-9E77-825D60ABA46D}" type="slidenum">
+              <a:rPr lang="en-US" smtClean="0"/>
+              <a:t>19</a:t>
+            </a:fld>
+            <a:endParaRPr lang="en-US" dirty="0"/>
+          </a:p>
+        </p:txBody>
+      </p:sp>
+    </p:spTree>
+    <p:extLst>
+      <p:ext uri="{BB962C8B-B14F-4D97-AF65-F5344CB8AC3E}">
+        <p14:creationId xmlns:p14="http://schemas.microsoft.com/office/powerpoint/2010/main" val="1281536820"/>
+      </p:ext>
+    </p:extLst>
+  </p:cSld>
+  <p:clrMapOvr>
+    <a:masterClrMapping/>
+  </p:clrMapOvr>
+</p:notes>
+</file>
+
+<file path=ppt/notesSlides/notesSlide16.xml><?xml version="1.0" encoding="utf-8"?>
+<p:notes xmlns:a="http://schemas.openxmlformats.org/drawingml/2006/main" xmlns:r="http://schemas.openxmlformats.org/officeDocument/2006/relationships" xmlns:p="http://schemas.openxmlformats.org/presentationml/2006/main">
+  <p:cSld>
+    <p:spTree>
+      <p:nvGrpSpPr>
+        <p:cNvPr id="1" name=""/>
+        <p:cNvGrpSpPr/>
+        <p:nvPr/>
+      </p:nvGrpSpPr>
+      <p:grpSpPr>
+        <a:xfrm>
+          <a:off x="0" y="0"/>
+          <a:ext cx="0" cy="0"/>
+          <a:chOff x="0" y="0"/>
+          <a:chExt cx="0" cy="0"/>
+        </a:xfrm>
+      </p:grpSpPr>
+      <p:sp>
+        <p:nvSpPr>
+          <p:cNvPr id="2" name="Slide Image Placeholder 1"/>
+          <p:cNvSpPr>
+            <a:spLocks noGrp="1" noRot="1" noChangeAspect="1"/>
+          </p:cNvSpPr>
+          <p:nvPr>
+            <p:ph type="sldImg"/>
+          </p:nvPr>
+        </p:nvSpPr>
+        <p:spPr/>
+      </p:sp>
+      <p:sp>
+        <p:nvSpPr>
+          <p:cNvPr id="3" name="Notes Placeholder 2"/>
+          <p:cNvSpPr>
+            <a:spLocks noGrp="1"/>
+          </p:cNvSpPr>
+          <p:nvPr>
+            <p:ph type="body" idx="1"/>
+          </p:nvPr>
+        </p:nvSpPr>
+        <p:spPr/>
+        <p:txBody>
+          <a:bodyPr/>
+          <a:lstStyle/>
+          <a:p>
+            <a:r>
+              <a:rPr lang="en-US" i="1" dirty="0"/>
+              <a:t>Point out that the code loads data in CSV format and saves the transformed results in Parquet format – sometimes that’s the only transformation required! In this case, the data is modified by adding a new column named “Year” that is derived from the </a:t>
+            </a:r>
+            <a:r>
+              <a:rPr lang="en-US" i="1" dirty="0" err="1"/>
+              <a:t>OrderDate</a:t>
+            </a:r>
+            <a:r>
+              <a:rPr lang="en-US" i="1" dirty="0"/>
+              <a:t> column by using the </a:t>
+            </a:r>
+            <a:r>
+              <a:rPr lang="en-US" b="1" i="1" dirty="0"/>
+              <a:t>year</a:t>
+            </a:r>
+            <a:r>
+              <a:rPr lang="en-US" b="0" i="1" dirty="0"/>
+              <a:t> function.</a:t>
+            </a:r>
+            <a:endParaRPr lang="en-US" i="1" dirty="0"/>
+          </a:p>
+          <a:p>
+            <a:r>
+              <a:rPr lang="en-US" i="1" dirty="0"/>
+              <a:t>See the </a:t>
+            </a:r>
+            <a:r>
+              <a:rPr lang="en-US" i="1" dirty="0" err="1"/>
+              <a:t>PySpark</a:t>
+            </a:r>
+            <a:r>
+              <a:rPr lang="en-US" i="1" dirty="0"/>
+              <a:t> </a:t>
+            </a:r>
+            <a:r>
+              <a:rPr lang="en-US" i="1" dirty="0" err="1"/>
+              <a:t>Dataframe</a:t>
+            </a:r>
+            <a:r>
+              <a:rPr lang="en-US" i="1" dirty="0"/>
+              <a:t> API reference at https://spark.apache.org/docs/latest/api/python/reference/pyspark.sql/dataframe.html for more details of transformations you can apply to </a:t>
+            </a:r>
+            <a:r>
+              <a:rPr lang="en-US" i="1" dirty="0" err="1"/>
+              <a:t>dataframes</a:t>
+            </a:r>
+            <a:r>
+              <a:rPr lang="en-US" i="1" dirty="0"/>
+              <a:t>.</a:t>
+            </a:r>
+          </a:p>
+        </p:txBody>
+      </p:sp>
+      <p:sp>
+        <p:nvSpPr>
+          <p:cNvPr id="4" name="Header Placeholder 3"/>
+          <p:cNvSpPr>
+            <a:spLocks noGrp="1"/>
+          </p:cNvSpPr>
+          <p:nvPr>
+            <p:ph type="hdr" sz="quarter"/>
+          </p:nvPr>
+        </p:nvSpPr>
+        <p:spPr/>
+        <p:txBody>
+          <a:bodyPr/>
+          <a:lstStyle/>
+          <a:p>
+            <a:endParaRPr lang="en-US"/>
+          </a:p>
+        </p:txBody>
+      </p:sp>
+      <p:sp>
+        <p:nvSpPr>
+          <p:cNvPr id="5" name="Footer Placeholder 4"/>
+          <p:cNvSpPr>
+            <a:spLocks noGrp="1"/>
+          </p:cNvSpPr>
+          <p:nvPr>
+            <p:ph type="ftr" sz="quarter" idx="4"/>
+          </p:nvPr>
+        </p:nvSpPr>
+        <p:spPr/>
+        <p:txBody>
+          <a:bodyPr/>
+          <a:lstStyle/>
+          <a:p>
+            <a:pPr defTabSz="914099" eaLnBrk="0" hangingPunct="0"/>
+            <a:r>
+              <a:rPr lang="en-US" sz="400">
+                <a:gradFill>
+                  <a:gsLst>
+                    <a:gs pos="0">
+                      <a:prstClr val="black"/>
+                    </a:gs>
+                    <a:gs pos="100000">
+                      <a:prstClr val="black"/>
+                    </a:gs>
+                  </a:gsLst>
+                  <a:lin ang="5400000" scaled="0"/>
+                </a:gradFill>
+                <a:latin typeface="Segoe UI" pitchFamily="34" charset="0"/>
+                <a:ea typeface="Segoe UI" pitchFamily="34" charset="0"/>
+                <a:cs typeface="Segoe UI" pitchFamily="34" charset="0"/>
+              </a:rPr>
+              <a:t>© Microsoft Corporation</a:t>
+            </a:r>
+          </a:p>
+        </p:txBody>
+      </p:sp>
+      <p:sp>
+        <p:nvSpPr>
+          <p:cNvPr id="6" name="Slide Number Placeholder 5"/>
+          <p:cNvSpPr>
+            <a:spLocks noGrp="1"/>
+          </p:cNvSpPr>
+          <p:nvPr>
+            <p:ph type="sldNum" sz="quarter" idx="5"/>
+          </p:nvPr>
+        </p:nvSpPr>
+        <p:spPr/>
+        <p:txBody>
+          <a:bodyPr/>
+          <a:lstStyle/>
+          <a:p>
+            <a:fld id="{B4008EB6-D09E-4580-8CD6-DDB14511944F}" type="slidenum">
+              <a:rPr lang="en-US" smtClean="0"/>
+              <a:pPr/>
+              <a:t>20</a:t>
+            </a:fld>
+            <a:endParaRPr lang="en-US"/>
+          </a:p>
+        </p:txBody>
+      </p:sp>
+    </p:spTree>
+    <p:extLst>
+      <p:ext uri="{BB962C8B-B14F-4D97-AF65-F5344CB8AC3E}">
+        <p14:creationId xmlns:p14="http://schemas.microsoft.com/office/powerpoint/2010/main" val="4186549347"/>
+      </p:ext>
+    </p:extLst>
+  </p:cSld>
+  <p:clrMapOvr>
+    <a:masterClrMapping/>
+  </p:clrMapOvr>
+</p:notes>
+</file>
+
+<file path=ppt/notesSlides/notesSlide17.xml><?xml version="1.0" encoding="utf-8"?>
+<p:notes xmlns:a="http://schemas.openxmlformats.org/drawingml/2006/main" xmlns:r="http://schemas.openxmlformats.org/officeDocument/2006/relationships" xmlns:p="http://schemas.openxmlformats.org/presentationml/2006/main">
+  <p:cSld>
+    <p:spTree>
+      <p:nvGrpSpPr>
+        <p:cNvPr id="1" name=""/>
+        <p:cNvGrpSpPr/>
+        <p:nvPr/>
+      </p:nvGrpSpPr>
+      <p:grpSpPr>
+        <a:xfrm>
+          <a:off x="0" y="0"/>
+          <a:ext cx="0" cy="0"/>
+          <a:chOff x="0" y="0"/>
+          <a:chExt cx="0" cy="0"/>
+        </a:xfrm>
+      </p:grpSpPr>
+      <p:sp>
+        <p:nvSpPr>
+          <p:cNvPr id="2" name="Slide Image Placeholder 1"/>
+          <p:cNvSpPr>
+            <a:spLocks noGrp="1" noRot="1" noChangeAspect="1"/>
+          </p:cNvSpPr>
+          <p:nvPr>
+            <p:ph type="sldImg"/>
+          </p:nvPr>
+        </p:nvSpPr>
+        <p:spPr/>
+      </p:sp>
+      <p:sp>
+        <p:nvSpPr>
+          <p:cNvPr id="3" name="Notes Placeholder 2"/>
+          <p:cNvSpPr>
+            <a:spLocks noGrp="1"/>
+          </p:cNvSpPr>
+          <p:nvPr>
+            <p:ph type="body" idx="1"/>
+          </p:nvPr>
+        </p:nvSpPr>
+        <p:spPr/>
+        <p:txBody>
+          <a:bodyPr/>
+          <a:lstStyle/>
+          <a:p>
+            <a:r>
+              <a:rPr lang="en-US" i="1" dirty="0"/>
+              <a:t>Partitioning data enables Spark to optimize query performance by distributing processing for each partition across worker nodes. Additionally, queries that filter based on partitioning columns improve performance by eliminating unnecessary disk IO.</a:t>
+            </a:r>
+          </a:p>
+          <a:p>
+            <a:r>
+              <a:rPr lang="en-US" i="1" dirty="0"/>
+              <a:t>Note that the folder names generated when partitioning a </a:t>
+            </a:r>
+            <a:r>
+              <a:rPr lang="en-US" i="1" dirty="0" err="1"/>
+              <a:t>dataframe</a:t>
+            </a:r>
+            <a:r>
+              <a:rPr lang="en-US" i="1" dirty="0"/>
+              <a:t> include the partitioning column name and value in a “column=value” format.</a:t>
+            </a:r>
+          </a:p>
+        </p:txBody>
+      </p:sp>
+      <p:sp>
+        <p:nvSpPr>
+          <p:cNvPr id="4" name="Header Placeholder 3"/>
+          <p:cNvSpPr>
+            <a:spLocks noGrp="1"/>
+          </p:cNvSpPr>
+          <p:nvPr>
+            <p:ph type="hdr" sz="quarter"/>
+          </p:nvPr>
+        </p:nvSpPr>
+        <p:spPr/>
+        <p:txBody>
+          <a:bodyPr/>
+          <a:lstStyle/>
+          <a:p>
+            <a:endParaRPr lang="en-US"/>
+          </a:p>
+        </p:txBody>
+      </p:sp>
+      <p:sp>
+        <p:nvSpPr>
+          <p:cNvPr id="5" name="Footer Placeholder 4"/>
+          <p:cNvSpPr>
+            <a:spLocks noGrp="1"/>
+          </p:cNvSpPr>
+          <p:nvPr>
+            <p:ph type="ftr" sz="quarter" idx="4"/>
+          </p:nvPr>
+        </p:nvSpPr>
+        <p:spPr/>
+        <p:txBody>
+          <a:bodyPr/>
+          <a:lstStyle/>
+          <a:p>
+            <a:pPr defTabSz="914099" eaLnBrk="0" hangingPunct="0"/>
+            <a:r>
+              <a:rPr lang="en-US" sz="400">
+                <a:gradFill>
+                  <a:gsLst>
+                    <a:gs pos="0">
+                      <a:prstClr val="black"/>
+                    </a:gs>
+                    <a:gs pos="100000">
+                      <a:prstClr val="black"/>
+                    </a:gs>
+                  </a:gsLst>
+                  <a:lin ang="5400000" scaled="0"/>
+                </a:gradFill>
+                <a:latin typeface="Segoe UI" pitchFamily="34" charset="0"/>
+                <a:ea typeface="Segoe UI" pitchFamily="34" charset="0"/>
+                <a:cs typeface="Segoe UI" pitchFamily="34" charset="0"/>
+              </a:rPr>
+              <a:t>© Microsoft Corporation</a:t>
+            </a:r>
+          </a:p>
+        </p:txBody>
+      </p:sp>
+      <p:sp>
+        <p:nvSpPr>
+          <p:cNvPr id="6" name="Slide Number Placeholder 5"/>
+          <p:cNvSpPr>
+            <a:spLocks noGrp="1"/>
+          </p:cNvSpPr>
+          <p:nvPr>
+            <p:ph type="sldNum" sz="quarter" idx="5"/>
+          </p:nvPr>
+        </p:nvSpPr>
+        <p:spPr/>
+        <p:txBody>
+          <a:bodyPr/>
+          <a:lstStyle/>
+          <a:p>
+            <a:fld id="{B4008EB6-D09E-4580-8CD6-DDB14511944F}" type="slidenum">
+              <a:rPr lang="en-US" smtClean="0"/>
+              <a:pPr/>
+              <a:t>21</a:t>
+            </a:fld>
+            <a:endParaRPr lang="en-US"/>
+          </a:p>
+        </p:txBody>
+      </p:sp>
+    </p:spTree>
+    <p:extLst>
+      <p:ext uri="{BB962C8B-B14F-4D97-AF65-F5344CB8AC3E}">
+        <p14:creationId xmlns:p14="http://schemas.microsoft.com/office/powerpoint/2010/main" val="1394205423"/>
+      </p:ext>
+    </p:extLst>
+  </p:cSld>
+  <p:clrMapOvr>
+    <a:masterClrMapping/>
+  </p:clrMapOvr>
+</p:notes>
+</file>
+
+<file path=ppt/notesSlides/notesSlide18.xml><?xml version="1.0" encoding="utf-8"?>
+<p:notes xmlns:a="http://schemas.openxmlformats.org/drawingml/2006/main" xmlns:r="http://schemas.openxmlformats.org/officeDocument/2006/relationships" xmlns:p="http://schemas.openxmlformats.org/presentationml/2006/main">
+  <p:cSld>
+    <p:spTree>
+      <p:nvGrpSpPr>
+        <p:cNvPr id="1" name=""/>
+        <p:cNvGrpSpPr/>
+        <p:nvPr/>
+      </p:nvGrpSpPr>
+      <p:grpSpPr>
+        <a:xfrm>
+          <a:off x="0" y="0"/>
+          <a:ext cx="0" cy="0"/>
+          <a:chOff x="0" y="0"/>
+          <a:chExt cx="0" cy="0"/>
+        </a:xfrm>
+      </p:grpSpPr>
+      <p:sp>
+        <p:nvSpPr>
+          <p:cNvPr id="2" name="Slide Image Placeholder 1"/>
+          <p:cNvSpPr>
+            <a:spLocks noGrp="1" noRot="1" noChangeAspect="1"/>
+          </p:cNvSpPr>
+          <p:nvPr>
+            <p:ph type="sldImg"/>
+          </p:nvPr>
+        </p:nvSpPr>
+        <p:spPr/>
+      </p:sp>
+      <p:sp>
+        <p:nvSpPr>
+          <p:cNvPr id="3" name="Notes Placeholder 2"/>
+          <p:cNvSpPr>
+            <a:spLocks noGrp="1"/>
+          </p:cNvSpPr>
+          <p:nvPr>
+            <p:ph type="body" idx="1"/>
+          </p:nvPr>
+        </p:nvSpPr>
+        <p:spPr/>
+        <p:txBody>
+          <a:bodyPr/>
+          <a:lstStyle/>
+          <a:p>
+            <a:r>
+              <a:rPr lang="en-US" i="1" dirty="0"/>
+              <a:t>Many data engineers are familiar with SQL syntax and will find it easier to use when manipulating relational data structures. Creating a view in the </a:t>
+            </a:r>
+            <a:r>
+              <a:rPr lang="en-US" i="1" dirty="0" err="1"/>
+              <a:t>metastore</a:t>
+            </a:r>
+            <a:r>
+              <a:rPr lang="en-US" i="1" dirty="0"/>
+              <a:t> enables you to write SQL queries that return a transformed </a:t>
+            </a:r>
+            <a:r>
+              <a:rPr lang="en-US" i="1" dirty="0" err="1"/>
+              <a:t>dataframe</a:t>
+            </a:r>
+            <a:r>
+              <a:rPr lang="en-US" i="1" dirty="0"/>
+              <a:t>, which you can then write as an external table. External tables are relational tables in the </a:t>
+            </a:r>
+            <a:r>
+              <a:rPr lang="en-US" i="1" dirty="0" err="1"/>
+              <a:t>metastore</a:t>
+            </a:r>
+            <a:r>
+              <a:rPr lang="en-US" i="1" dirty="0"/>
+              <a:t> that reference files in a data lake location that you specify, so you can access the data by querying the table or by reading the files directly from the data lake. Additionally, external tables are “loosely bound” to the underlying data files – dropping the table does </a:t>
+            </a:r>
+            <a:r>
+              <a:rPr lang="en-US" i="1" u="sng" dirty="0"/>
+              <a:t>not</a:t>
+            </a:r>
+            <a:r>
+              <a:rPr lang="en-US" i="1" u="none" dirty="0"/>
+              <a:t> delete the files, so you can use this technique to transform the data and persist it in files, drop the table, and still use the transformed data files in downstream processes.</a:t>
+            </a:r>
+            <a:endParaRPr lang="en-US" i="1" dirty="0"/>
+          </a:p>
+        </p:txBody>
+      </p:sp>
+      <p:sp>
+        <p:nvSpPr>
+          <p:cNvPr id="4" name="Header Placeholder 3"/>
+          <p:cNvSpPr>
+            <a:spLocks noGrp="1"/>
+          </p:cNvSpPr>
+          <p:nvPr>
+            <p:ph type="hdr" sz="quarter"/>
+          </p:nvPr>
+        </p:nvSpPr>
+        <p:spPr/>
+        <p:txBody>
+          <a:bodyPr/>
+          <a:lstStyle/>
+          <a:p>
+            <a:endParaRPr lang="en-US"/>
+          </a:p>
+        </p:txBody>
+      </p:sp>
+      <p:sp>
+        <p:nvSpPr>
+          <p:cNvPr id="5" name="Footer Placeholder 4"/>
+          <p:cNvSpPr>
+            <a:spLocks noGrp="1"/>
+          </p:cNvSpPr>
+          <p:nvPr>
+            <p:ph type="ftr" sz="quarter" idx="4"/>
+          </p:nvPr>
+        </p:nvSpPr>
+        <p:spPr/>
+        <p:txBody>
+          <a:bodyPr/>
+          <a:lstStyle/>
+          <a:p>
+            <a:pPr defTabSz="914099" eaLnBrk="0" hangingPunct="0"/>
+            <a:r>
+              <a:rPr lang="en-US" sz="400">
+                <a:gradFill>
+                  <a:gsLst>
+                    <a:gs pos="0">
+                      <a:prstClr val="black"/>
+                    </a:gs>
+                    <a:gs pos="100000">
+                      <a:prstClr val="black"/>
+                    </a:gs>
+                  </a:gsLst>
+                  <a:lin ang="5400000" scaled="0"/>
+                </a:gradFill>
+                <a:latin typeface="Segoe UI" pitchFamily="34" charset="0"/>
+                <a:ea typeface="Segoe UI" pitchFamily="34" charset="0"/>
+                <a:cs typeface="Segoe UI" pitchFamily="34" charset="0"/>
+              </a:rPr>
+              <a:t>© Microsoft Corporation</a:t>
+            </a:r>
+          </a:p>
+        </p:txBody>
+      </p:sp>
+      <p:sp>
+        <p:nvSpPr>
+          <p:cNvPr id="6" name="Slide Number Placeholder 5"/>
+          <p:cNvSpPr>
+            <a:spLocks noGrp="1"/>
+          </p:cNvSpPr>
+          <p:nvPr>
+            <p:ph type="sldNum" sz="quarter" idx="5"/>
+          </p:nvPr>
+        </p:nvSpPr>
+        <p:spPr/>
+        <p:txBody>
+          <a:bodyPr/>
+          <a:lstStyle/>
+          <a:p>
+            <a:fld id="{B4008EB6-D09E-4580-8CD6-DDB14511944F}" type="slidenum">
+              <a:rPr lang="en-US" smtClean="0"/>
+              <a:pPr/>
+              <a:t>22</a:t>
+            </a:fld>
+            <a:endParaRPr lang="en-US"/>
+          </a:p>
+        </p:txBody>
+      </p:sp>
+    </p:spTree>
+    <p:extLst>
+      <p:ext uri="{BB962C8B-B14F-4D97-AF65-F5344CB8AC3E}">
+        <p14:creationId xmlns:p14="http://schemas.microsoft.com/office/powerpoint/2010/main" val="1887702454"/>
+      </p:ext>
+    </p:extLst>
+  </p:cSld>
+  <p:clrMapOvr>
+    <a:masterClrMapping/>
+  </p:clrMapOvr>
+</p:notes>
+</file>
+
+<file path=ppt/notesSlides/notesSlide19.xml><?xml version="1.0" encoding="utf-8"?>
+<p:notes xmlns:a="http://schemas.openxmlformats.org/drawingml/2006/main" xmlns:r="http://schemas.openxmlformats.org/officeDocument/2006/relationships" xmlns:p="http://schemas.openxmlformats.org/presentationml/2006/main">
+  <p:cSld>
+    <p:spTree>
+      <p:nvGrpSpPr>
+        <p:cNvPr id="1" name=""/>
+        <p:cNvGrpSpPr/>
+        <p:nvPr/>
+      </p:nvGrpSpPr>
+      <p:grpSpPr>
+        <a:xfrm>
+          <a:off x="0" y="0"/>
+          <a:ext cx="0" cy="0"/>
+          <a:chOff x="0" y="0"/>
+          <a:chExt cx="0" cy="0"/>
+        </a:xfrm>
+      </p:grpSpPr>
+      <p:sp>
+        <p:nvSpPr>
+          <p:cNvPr id="2" name="Slide Image Placeholder 1"/>
+          <p:cNvSpPr>
+            <a:spLocks noGrp="1" noRot="1" noChangeAspect="1"/>
+          </p:cNvSpPr>
+          <p:nvPr>
+            <p:ph type="sldImg"/>
+          </p:nvPr>
+        </p:nvSpPr>
+        <p:spPr/>
+      </p:sp>
+      <p:sp>
+        <p:nvSpPr>
+          <p:cNvPr id="3" name="Notes Placeholder 2"/>
+          <p:cNvSpPr>
+            <a:spLocks noGrp="1"/>
+          </p:cNvSpPr>
+          <p:nvPr>
+            <p:ph type="body" idx="1"/>
+          </p:nvPr>
+        </p:nvSpPr>
+        <p:spPr/>
+        <p:txBody>
+          <a:bodyPr/>
+          <a:lstStyle/>
+          <a:p>
+            <a:pPr algn="l" rtl="0" fontAlgn="base"/>
+            <a:r>
+              <a:rPr lang="en-US" sz="1200" b="1" i="0" u="none" strike="noStrike" dirty="0">
+                <a:solidFill>
+                  <a:srgbClr val="000000"/>
+                </a:solidFill>
+                <a:effectLst/>
+                <a:latin typeface="Helvetica Neue"/>
+              </a:rPr>
+              <a:t>TALKING POINTS</a:t>
+            </a:r>
+            <a:r>
+              <a:rPr lang="en-US" sz="1200" b="0" i="0" dirty="0">
+                <a:effectLst/>
+                <a:latin typeface="Helvetica Neue"/>
+              </a:rPr>
+              <a:t>​</a:t>
+            </a:r>
+            <a:endParaRPr lang="en-US" b="0" i="0" dirty="0">
+              <a:effectLst/>
+            </a:endParaRPr>
+          </a:p>
+          <a:p>
+            <a:pPr algn="l" rtl="0" fontAlgn="base"/>
+            <a:r>
+              <a:rPr lang="en-US" sz="1200" b="0" i="0" dirty="0">
+                <a:effectLst/>
+                <a:latin typeface="Helvetica Neue"/>
+              </a:rPr>
+              <a:t>​</a:t>
+            </a:r>
+            <a:endParaRPr lang="en-US" b="0" i="0" dirty="0">
+              <a:effectLst/>
+            </a:endParaRPr>
+          </a:p>
+          <a:p>
+            <a:pPr algn="l" rtl="0" fontAlgn="base"/>
+            <a:r>
+              <a:rPr lang="en-US" sz="1200" b="0" i="0" u="none" strike="noStrike" dirty="0">
+                <a:solidFill>
+                  <a:srgbClr val="000000"/>
+                </a:solidFill>
+                <a:effectLst/>
+                <a:latin typeface="Helvetica Neue"/>
+              </a:rPr>
+              <a:t>Let’s put this into reality and show you how it works.</a:t>
+            </a:r>
+            <a:r>
+              <a:rPr lang="en-US" sz="1200" b="0" i="0" dirty="0">
+                <a:effectLst/>
+                <a:latin typeface="Helvetica Neue"/>
+              </a:rPr>
+              <a:t>​</a:t>
+            </a:r>
+            <a:endParaRPr lang="en-US" b="0" i="0" dirty="0">
+              <a:effectLst/>
+            </a:endParaRPr>
+          </a:p>
+          <a:p>
+            <a:pPr algn="l" rtl="0" fontAlgn="base"/>
+            <a:r>
+              <a:rPr lang="en-US" sz="1200" b="0" i="0" dirty="0">
+                <a:effectLst/>
+                <a:latin typeface="Helvetica Neue"/>
+              </a:rPr>
+              <a:t>​</a:t>
+            </a:r>
+            <a:endParaRPr lang="en-US" b="0" i="0" dirty="0">
+              <a:effectLst/>
+            </a:endParaRPr>
+          </a:p>
+          <a:p>
+            <a:pPr algn="l" rtl="0" fontAlgn="base"/>
+            <a:r>
+              <a:rPr lang="en-US" sz="1200" b="0" i="0" u="none" strike="noStrike" dirty="0">
+                <a:solidFill>
+                  <a:srgbClr val="000000"/>
+                </a:solidFill>
+                <a:effectLst/>
+                <a:latin typeface="Helvetica Neue"/>
+              </a:rPr>
+              <a:t>All instructions and context are found in this repository</a:t>
+            </a:r>
+            <a:r>
+              <a:rPr lang="en-US" sz="1200" b="0" i="0" dirty="0">
+                <a:effectLst/>
+                <a:latin typeface="Helvetica Neue"/>
+              </a:rPr>
+              <a:t>​</a:t>
+            </a:r>
+            <a:endParaRPr lang="en-US" b="0" i="0" dirty="0">
+              <a:effectLst/>
+            </a:endParaRPr>
+          </a:p>
+          <a:p>
+            <a:endParaRPr lang="en-GB" dirty="0"/>
+          </a:p>
+        </p:txBody>
+      </p:sp>
+      <p:sp>
+        <p:nvSpPr>
+          <p:cNvPr id="4" name="Slide Number Placeholder 3"/>
+          <p:cNvSpPr>
+            <a:spLocks noGrp="1"/>
+          </p:cNvSpPr>
+          <p:nvPr>
+            <p:ph type="sldNum" sz="quarter" idx="5"/>
+          </p:nvPr>
+        </p:nvSpPr>
+        <p:spPr/>
+        <p:txBody>
+          <a:bodyPr/>
+          <a:lstStyle/>
+          <a:p>
+            <a:fld id="{37E24C93-78CA-4AF0-9E77-825D60ABA46D}" type="slidenum">
+              <a:rPr lang="en-US" smtClean="0"/>
+              <a:t>23</a:t>
             </a:fld>
             <a:endParaRPr lang="en-US" dirty="0"/>
           </a:p>
@@ -4573,7 +5567,7 @@
                 </a:solidFill>
                 <a:latin typeface="Segoe UI" panose="020B0502040204020203" pitchFamily="34" charset="0"/>
               </a:rPr>
-              <a:t>This slide focusses on reading and writing data and the ease to do so in Azure Databricks, as some customers already use Azure Databricks. </a:t>
+              <a:t>This slide focuses on reading and writing data and the ease to do so in Azure Databricks, as some customers already use Azure Databricks. </a:t>
             </a:r>
             <a:r>
               <a:rPr lang="en-GB" sz="1200" dirty="0">
@@ -17832,6 +18826,974 @@
 </p:sldLayout>
 </file>
 
+<file path=ppt/slideLayouts/slideLayout38.xml><?xml version="1.0" encoding="utf-8"?>
+<p:sldLayout xmlns:a="http://schemas.openxmlformats.org/drawingml/2006/main" xmlns:r="http://schemas.openxmlformats.org/officeDocument/2006/relationships" xmlns:p="http://schemas.openxmlformats.org/presentationml/2006/main" userDrawn="1">
+  <p:cSld name="Developer code full page">
+    <p:bg>
+      <p:bgPr>
+        <a:solidFill>
+          <a:srgbClr val="E8E6DF"/>
+        </a:solidFill>
+        <a:effectLst/>
+      </p:bgPr>
+    </p:bg>
+    <p:spTree>
+      <p:nvGrpSpPr>
+        <p:cNvPr id="1" name=""/>
+        <p:cNvGrpSpPr/>
+        <p:nvPr/>
+      </p:nvGrpSpPr>
+      <p:grpSpPr>
+        <a:xfrm>
+          <a:off x="0" y="0"/>
+          <a:ext cx="0" cy="0"/>
+          <a:chOff x="0" y="0"/>
+          <a:chExt cx="0" cy="0"/>
+        </a:xfrm>
+      </p:grpSpPr>
+      <p:sp>
+        <p:nvSpPr>
+          <p:cNvPr id="7" name="Text Placeholder 14">
+            <a:extLst>
+              <a:ext uri="{FF2B5EF4-FFF2-40B4-BE49-F238E27FC236}">
+                <a16:creationId xmlns:a16="http://schemas.microsoft.com/office/drawing/2014/main" id="{A2F35014-FB65-ACD9-730E-E1D616E56103}"/>
+              </a:ext>
+            </a:extLst>
+          </p:cNvPr>
+          <p:cNvSpPr>
+            <a:spLocks noGrp="1"/>
+          </p:cNvSpPr>
+          <p:nvPr>
+            <p:ph type="body" sz="quarter" idx="13" hasCustomPrompt="1"/>
+          </p:nvPr>
+        </p:nvSpPr>
+        <p:spPr>
+          <a:xfrm>
+            <a:off x="0" y="0"/>
+            <a:ext cx="3788358" cy="569387"/>
+          </a:xfrm>
+          <a:gradFill flip="none" rotWithShape="1">
+            <a:gsLst>
+              <a:gs pos="0">
+                <a:srgbClr val="000000"/>
+              </a:gs>
+              <a:gs pos="92000">
+                <a:srgbClr val="000000"/>
+              </a:gs>
+              <a:gs pos="92000">
+                <a:schemeClr val="accent3"/>
+              </a:gs>
+            </a:gsLst>
+            <a:lin ang="16200000" scaled="1"/>
+            <a:tileRect/>
+          </a:gradFill>
+        </p:spPr>
+        <p:txBody>
+          <a:bodyPr vert="horz" wrap="square" lIns="585216" tIns="91440" rIns="0" bIns="45720" rtlCol="0">
+            <a:spAutoFit/>
+          </a:bodyPr>
+          <a:lstStyle>
+            <a:lvl1pPr marL="0" indent="0">
+              <a:buNone/>
+              <a:defRPr kumimoji="0" lang="en-US" sz="2800" b="0" i="0" u="none" strike="noStrike" cap="none" normalizeH="0" dirty="0">
+                <a:ln>
+                  <a:noFill/>
+                </a:ln>
+                <a:solidFill>
+                  <a:srgbClr val="FFFFFF"/>
+                </a:solidFill>
+                <a:effectLst/>
+                <a:uLnTx/>
+                <a:uFillTx/>
+                <a:latin typeface="+mj-lt"/>
+              </a:defRPr>
+            </a:lvl1pPr>
+          </a:lstStyle>
+          <a:p>
+            <a:pPr marL="228600" lvl="0" indent="-228600"/>
+            <a:r>
+              <a:rPr lang="en-US" dirty="0"/>
+              <a:t>Click to enter title</a:t>
+            </a:r>
+          </a:p>
+        </p:txBody>
+      </p:sp>
+      <p:sp>
+        <p:nvSpPr>
+          <p:cNvPr id="3" name="Footer Placeholder 10">
+            <a:extLst>
+              <a:ext uri="{FF2B5EF4-FFF2-40B4-BE49-F238E27FC236}">
+                <a16:creationId xmlns:a16="http://schemas.microsoft.com/office/drawing/2014/main" id="{EC3CADB3-1E72-D613-A509-B863360A3F3D}"/>
+              </a:ext>
+            </a:extLst>
+          </p:cNvPr>
+          <p:cNvSpPr>
+            <a:spLocks noGrp="1"/>
+          </p:cNvSpPr>
+          <p:nvPr>
+            <p:ph type="ftr" sz="quarter" idx="3"/>
+          </p:nvPr>
+        </p:nvSpPr>
+        <p:spPr>
+          <a:xfrm>
+            <a:off x="7448551" y="6421083"/>
+            <a:ext cx="4151312" cy="197976"/>
+          </a:xfrm>
+          <a:prstGeom prst="rect">
+            <a:avLst/>
+          </a:prstGeom>
+        </p:spPr>
+        <p:txBody>
+          <a:bodyPr vert="horz" lIns="0" tIns="0" rIns="0" bIns="0" rtlCol="0" anchor="ctr"/>
+          <a:lstStyle>
+            <a:lvl1pPr marL="0" algn="r" defTabSz="914400" rtl="0" eaLnBrk="1" latinLnBrk="0" hangingPunct="1">
+              <a:defRPr lang="en-US" sz="1000" kern="1200" dirty="0">
+                <a:solidFill>
+                  <a:schemeClr val="tx1"/>
+                </a:solidFill>
+                <a:latin typeface="+mn-lt"/>
+                <a:ea typeface="+mn-ea"/>
+                <a:cs typeface="+mn-cs"/>
+              </a:defRPr>
+            </a:lvl1pPr>
+            <a:lvl5pPr>
+              <a:defRPr lang="en-US" sz="750" kern="100" cap="all" spc="0" baseline="0" dirty="0">
+                <a:solidFill>
+                  <a:schemeClr val="tx1"/>
+                </a:solidFill>
+                <a:latin typeface="Arial" panose="020B0604020202020204" pitchFamily="34" charset="0"/>
+                <a:ea typeface="+mn-ea"/>
+                <a:cs typeface="Arial" panose="020B0604020202020204" pitchFamily="34" charset="0"/>
+              </a:defRPr>
+            </a:lvl5pPr>
+          </a:lstStyle>
+          <a:p>
+            <a:pPr defTabSz="914367">
+              <a:defRPr/>
+            </a:pPr>
+            <a:r>
+              <a:rPr lang="en-US">
+                <a:solidFill>
+                  <a:srgbClr val="000000"/>
+                </a:solidFill>
+              </a:rPr>
+              <a:t>© Copyright Microsoft Corporation. All rights reserved.</a:t>
+            </a:r>
+          </a:p>
+        </p:txBody>
+      </p:sp>
+      <p:sp>
+        <p:nvSpPr>
+          <p:cNvPr id="8" name="Text Placeholder 3">
+            <a:extLst>
+              <a:ext uri="{FF2B5EF4-FFF2-40B4-BE49-F238E27FC236}">
+                <a16:creationId xmlns:a16="http://schemas.microsoft.com/office/drawing/2014/main" id="{642E0005-D466-9A2B-2F72-437D2E7450DA}"/>
+              </a:ext>
+            </a:extLst>
+          </p:cNvPr>
+          <p:cNvSpPr txBox="1">
+            <a:spLocks/>
+          </p:cNvSpPr>
+          <p:nvPr userDrawn="1"/>
+        </p:nvSpPr>
+        <p:spPr>
+          <a:xfrm>
+            <a:off x="295276" y="770467"/>
+            <a:ext cx="11604624" cy="5504921"/>
+          </a:xfrm>
+          <a:prstGeom prst="rect">
+            <a:avLst/>
+          </a:prstGeom>
+          <a:solidFill>
+            <a:srgbClr val="FFFFFF"/>
+          </a:solidFill>
+        </p:spPr>
+        <p:txBody>
+          <a:bodyPr vert="horz" lIns="274320" tIns="182880" rIns="182880" bIns="182880" rtlCol="0">
+            <a:noAutofit/>
+          </a:bodyPr>
+          <a:lstStyle>
+            <a:lvl1pPr marL="0" indent="0" algn="l" defTabSz="914132" rtl="0" eaLnBrk="1" latinLnBrk="0" hangingPunct="1">
+              <a:lnSpc>
+                <a:spcPct val="150000"/>
+              </a:lnSpc>
+              <a:spcBef>
+                <a:spcPts val="0"/>
+              </a:spcBef>
+              <a:spcAft>
+                <a:spcPts val="600"/>
+              </a:spcAft>
+              <a:buClr>
+                <a:schemeClr val="bg1"/>
+              </a:buClr>
+              <a:buSzPct val="120000"/>
+              <a:buFontTx/>
+              <a:buNone/>
+              <a:defRPr lang="en-US" sz="1400" b="0" i="0" kern="1200">
+                <a:solidFill>
+                  <a:schemeClr val="tx1"/>
+                </a:solidFill>
+                <a:effectLst/>
+                <a:latin typeface="Consolas" panose="020B0609020204030204" pitchFamily="49" charset="0"/>
+                <a:ea typeface="Segoe UI Semibold" charset="0"/>
+                <a:cs typeface="Segoe UI Semibold" charset="0"/>
+              </a:defRPr>
+            </a:lvl1pPr>
+            <a:lvl2pPr marL="0" indent="0" algn="l" defTabSz="914132" rtl="0" eaLnBrk="1" latinLnBrk="0" hangingPunct="1">
+              <a:lnSpc>
+                <a:spcPct val="110000"/>
+              </a:lnSpc>
+              <a:spcBef>
+                <a:spcPts val="0"/>
+              </a:spcBef>
+              <a:spcAft>
+                <a:spcPts val="600"/>
+              </a:spcAft>
+              <a:buClrTx/>
+              <a:buSzPct val="110000"/>
+              <a:buFont typeface="Arial" charset="0"/>
+              <a:buNone/>
+              <a:defRPr lang="en-US" sz="2000" b="0" i="0" kern="1200" dirty="0" smtClean="0">
+                <a:solidFill>
+                  <a:schemeClr val="tx1"/>
+                </a:solidFill>
+                <a:effectLst/>
+                <a:latin typeface="Segoe UI" charset="0"/>
+                <a:ea typeface="Segoe UI" charset="0"/>
+                <a:cs typeface="Segoe UI" charset="0"/>
+              </a:defRPr>
+            </a:lvl2pPr>
+            <a:lvl3pPr marL="288925" indent="-222250" algn="l" defTabSz="914132" rtl="0" eaLnBrk="1" latinLnBrk="0" hangingPunct="1">
+              <a:lnSpc>
+                <a:spcPct val="110000"/>
+              </a:lnSpc>
+              <a:spcBef>
+                <a:spcPts val="0"/>
+              </a:spcBef>
+              <a:spcAft>
+                <a:spcPts val="600"/>
+              </a:spcAft>
+              <a:buClrTx/>
+              <a:buSzPct val="120000"/>
+              <a:buFont typeface="Arial" charset="0"/>
+              <a:buChar char="•"/>
+              <a:defRPr lang="en-US" sz="2000" b="0" i="0" kern="1200" dirty="0" smtClean="0">
+                <a:solidFill>
+                  <a:schemeClr val="tx1"/>
+                </a:solidFill>
+                <a:effectLst/>
+                <a:latin typeface="Segoe UI" charset="0"/>
+                <a:ea typeface="Segoe UI" charset="0"/>
+                <a:cs typeface="Segoe UI" charset="0"/>
+              </a:defRPr>
+            </a:lvl3pPr>
+            <a:lvl4pPr marL="631825" indent="-182880" algn="l" defTabSz="914132" rtl="0" eaLnBrk="1" latinLnBrk="0" hangingPunct="1">
+              <a:lnSpc>
+                <a:spcPct val="110000"/>
+              </a:lnSpc>
+              <a:spcBef>
+                <a:spcPts val="0"/>
+              </a:spcBef>
+              <a:spcAft>
+                <a:spcPts val="600"/>
+              </a:spcAft>
+              <a:buClrTx/>
+              <a:buFont typeface="Arial" charset="0"/>
+              <a:buChar char="•"/>
+              <a:tabLst/>
+              <a:defRPr lang="en-US" sz="1800" b="0" i="0" kern="1200" dirty="0" smtClean="0">
+                <a:solidFill>
+                  <a:schemeClr val="tx1"/>
+                </a:solidFill>
+                <a:effectLst/>
+                <a:latin typeface="Segoe UI" charset="0"/>
+                <a:ea typeface="Segoe UI" charset="0"/>
+                <a:cs typeface="Segoe UI" charset="0"/>
+              </a:defRPr>
+            </a:lvl4pPr>
+            <a:lvl5pPr marL="1162685" indent="-194310" algn="l" defTabSz="914132" rtl="0" eaLnBrk="1" latinLnBrk="0" hangingPunct="1">
+              <a:lnSpc>
+                <a:spcPct val="110000"/>
+              </a:lnSpc>
+              <a:spcBef>
+                <a:spcPts val="500"/>
+              </a:spcBef>
+              <a:buClr>
+                <a:schemeClr val="tx1"/>
+              </a:buClr>
+              <a:buFont typeface="Arial"/>
+              <a:buChar char="•"/>
+              <a:defRPr lang="en-US" sz="1600" b="0" i="0" kern="1200" dirty="0">
+                <a:solidFill>
+                  <a:schemeClr val="tx1"/>
+                </a:solidFill>
+                <a:effectLst/>
+                <a:latin typeface="Segoe UI" charset="0"/>
+                <a:ea typeface="Segoe UI" charset="0"/>
+                <a:cs typeface="Segoe UI" charset="0"/>
+              </a:defRPr>
+            </a:lvl5pPr>
+            <a:lvl6pPr marL="1873781" indent="-228533" algn="l" defTabSz="914132" rtl="0" eaLnBrk="1" latinLnBrk="0" hangingPunct="1">
+              <a:lnSpc>
+                <a:spcPct val="110000"/>
+              </a:lnSpc>
+              <a:spcBef>
+                <a:spcPts val="500"/>
+              </a:spcBef>
+              <a:buFont typeface="Arial" panose="020B0604020202020204" pitchFamily="34" charset="0"/>
+              <a:buChar char="•"/>
+              <a:defRPr sz="1400" kern="1200">
+                <a:solidFill>
+                  <a:schemeClr val="tx1"/>
+                </a:solidFill>
+                <a:latin typeface="+mn-lt"/>
+                <a:ea typeface="+mn-ea"/>
+                <a:cs typeface="+mn-cs"/>
+              </a:defRPr>
+            </a:lvl6pPr>
+            <a:lvl7pPr marL="2970926" indent="-228533" algn="l" defTabSz="914132" rtl="0" eaLnBrk="1" latinLnBrk="0" hangingPunct="1">
+              <a:lnSpc>
+                <a:spcPct val="90000"/>
+              </a:lnSpc>
+              <a:spcBef>
+                <a:spcPts val="500"/>
+              </a:spcBef>
+              <a:buFont typeface="Arial" panose="020B0604020202020204" pitchFamily="34" charset="0"/>
+              <a:buChar char="•"/>
+              <a:defRPr sz="1900" kern="1200">
+                <a:solidFill>
+                  <a:schemeClr val="tx1"/>
+                </a:solidFill>
+                <a:latin typeface="+mn-lt"/>
+                <a:ea typeface="+mn-ea"/>
+                <a:cs typeface="+mn-cs"/>
+              </a:defRPr>
+            </a:lvl7pPr>
+            <a:lvl8pPr marL="3427992" indent="-228533" algn="l" defTabSz="914132" rtl="0" eaLnBrk="1" latinLnBrk="0" hangingPunct="1">
+              <a:lnSpc>
+                <a:spcPct val="90000"/>
+              </a:lnSpc>
+              <a:spcBef>
+                <a:spcPts val="500"/>
+              </a:spcBef>
+              <a:buFont typeface="Arial" panose="020B0604020202020204" pitchFamily="34" charset="0"/>
+              <a:buChar char="•"/>
+              <a:defRPr sz="1900" kern="1200">
+                <a:solidFill>
+                  <a:schemeClr val="tx1"/>
+                </a:solidFill>
+                <a:latin typeface="+mn-lt"/>
+                <a:ea typeface="+mn-ea"/>
+                <a:cs typeface="+mn-cs"/>
+              </a:defRPr>
+            </a:lvl8pPr>
+            <a:lvl9pPr marL="3885057" indent="-228533" algn="l" defTabSz="914132" rtl="0" eaLnBrk="1" latinLnBrk="0" hangingPunct="1">
+              <a:lnSpc>
+                <a:spcPct val="90000"/>
+              </a:lnSpc>
+              <a:spcBef>
+                <a:spcPts val="500"/>
+              </a:spcBef>
+              <a:buFont typeface="Arial" panose="020B0604020202020204" pitchFamily="34" charset="0"/>
+              <a:buChar char="•"/>
+              <a:defRPr sz="1900" kern="1200">
+                <a:solidFill>
+                  <a:schemeClr val="tx1"/>
+                </a:solidFill>
+                <a:latin typeface="+mn-lt"/>
+                <a:ea typeface="+mn-ea"/>
+                <a:cs typeface="+mn-cs"/>
+              </a:defRPr>
+            </a:lvl9pPr>
+          </a:lstStyle>
+          <a:p>
+            <a:pPr marL="0" marR="0" lvl="0" indent="0" algn="l" defTabSz="914132" rtl="0" eaLnBrk="1" fontAlgn="auto" latinLnBrk="0" hangingPunct="1">
+              <a:lnSpc>
+                <a:spcPct val="150000"/>
+              </a:lnSpc>
+              <a:spcBef>
+                <a:spcPts val="0"/>
+              </a:spcBef>
+              <a:spcAft>
+                <a:spcPts val="600"/>
+              </a:spcAft>
+              <a:buClr>
+                <a:srgbClr val="E9E9E9"/>
+              </a:buClr>
+              <a:buSzPct val="120000"/>
+              <a:buFontTx/>
+              <a:buNone/>
+              <a:tabLst/>
+              <a:defRPr/>
+            </a:pPr>
+            <a:endParaRPr kumimoji="0" lang="en-US" sz="1400" b="0" i="0" u="none" strike="noStrike" kern="1200" cap="none" spc="0" normalizeH="0" baseline="0" noProof="0" dirty="0">
+              <a:ln>
+                <a:noFill/>
+              </a:ln>
+              <a:solidFill>
+                <a:srgbClr val="000000"/>
+              </a:solidFill>
+              <a:effectLst/>
+              <a:uLnTx/>
+              <a:uFillTx/>
+              <a:latin typeface="Consolas" panose="020B0609020204030204" pitchFamily="49" charset="0"/>
+              <a:cs typeface="Segoe UI Semibold" charset="0"/>
+            </a:endParaRPr>
+          </a:p>
+        </p:txBody>
+      </p:sp>
+      <p:sp>
+        <p:nvSpPr>
+          <p:cNvPr id="9" name="Text Placeholder 4" descr="This layout should only be used for developer code. The font used is a monospace font which is ideal for showing code.">
+            <a:extLst>
+              <a:ext uri="{FF2B5EF4-FFF2-40B4-BE49-F238E27FC236}">
+                <a16:creationId xmlns:a16="http://schemas.microsoft.com/office/drawing/2014/main" id="{3EC8DAD9-3274-7DD3-8458-A6CF6E36618D}"/>
+              </a:ext>
+            </a:extLst>
+          </p:cNvPr>
+          <p:cNvSpPr>
+            <a:spLocks noGrp="1"/>
+          </p:cNvSpPr>
+          <p:nvPr>
+            <p:ph type="body" sz="quarter" idx="11" hasCustomPrompt="1"/>
+          </p:nvPr>
+        </p:nvSpPr>
+        <p:spPr>
+          <a:xfrm>
+            <a:off x="579438" y="1083733"/>
+            <a:ext cx="11020425" cy="4885267"/>
+          </a:xfrm>
+        </p:spPr>
+        <p:txBody>
+          <a:bodyPr/>
+          <a:lstStyle>
+            <a:lvl1pPr marL="0" indent="0">
+              <a:buNone/>
+              <a:tabLst/>
+              <a:defRPr sz="1400">
+                <a:solidFill>
+                  <a:srgbClr val="2F2F2F"/>
+                </a:solidFill>
+                <a:latin typeface="Consolas" panose="020B0609020204030204" pitchFamily="49" charset="0"/>
+                <a:cs typeface="Consolas" panose="020B0609020204030204" pitchFamily="49" charset="0"/>
+              </a:defRPr>
+            </a:lvl1pPr>
+            <a:lvl2pPr marL="346449" indent="0">
+              <a:buNone/>
+              <a:defRPr sz="2399">
+                <a:gradFill>
+                  <a:gsLst>
+                    <a:gs pos="61049">
+                      <a:schemeClr val="tx1"/>
+                    </a:gs>
+                    <a:gs pos="43000">
+                      <a:schemeClr val="tx1"/>
+                    </a:gs>
+                  </a:gsLst>
+                  <a:lin ang="5400000" scaled="0"/>
+                </a:gradFill>
+                <a:latin typeface="Consolas" panose="020B0609020204030204" pitchFamily="49" charset="0"/>
+                <a:cs typeface="Consolas" panose="020B0609020204030204" pitchFamily="49" charset="0"/>
+              </a:defRPr>
+            </a:lvl2pPr>
+            <a:lvl3pPr marL="584432" indent="0">
+              <a:buNone/>
+              <a:defRPr sz="1999">
+                <a:gradFill>
+                  <a:gsLst>
+                    <a:gs pos="61049">
+                      <a:schemeClr val="tx1"/>
+                    </a:gs>
+                    <a:gs pos="43000">
+                      <a:schemeClr val="tx1"/>
+                    </a:gs>
+                  </a:gsLst>
+                  <a:lin ang="5400000" scaled="0"/>
+                </a:gradFill>
+                <a:latin typeface="Consolas" panose="020B0609020204030204" pitchFamily="49" charset="0"/>
+                <a:cs typeface="Consolas" panose="020B0609020204030204" pitchFamily="49" charset="0"/>
+              </a:defRPr>
+            </a:lvl3pPr>
+            <a:lvl4pPr marL="814319" indent="0">
+              <a:buNone/>
+              <a:defRPr sz="1799">
+                <a:gradFill>
+                  <a:gsLst>
+                    <a:gs pos="61049">
+                      <a:schemeClr val="tx1"/>
+                    </a:gs>
+                    <a:gs pos="43000">
+                      <a:schemeClr val="tx1"/>
+                    </a:gs>
+                  </a:gsLst>
+                  <a:lin ang="5400000" scaled="0"/>
+                </a:gradFill>
+                <a:latin typeface="Consolas" panose="020B0609020204030204" pitchFamily="49" charset="0"/>
+                <a:cs typeface="Consolas" panose="020B0609020204030204" pitchFamily="49" charset="0"/>
+              </a:defRPr>
+            </a:lvl4pPr>
+            <a:lvl5pPr marL="1050682" indent="0">
+              <a:buNone/>
+              <a:defRPr sz="1799">
+                <a:gradFill>
+                  <a:gsLst>
+                    <a:gs pos="61049">
+                      <a:schemeClr val="tx1"/>
+                    </a:gs>
+                    <a:gs pos="43000">
+                      <a:schemeClr val="tx1"/>
+                    </a:gs>
+                  </a:gsLst>
+                  <a:lin ang="5400000" scaled="0"/>
+                </a:gradFill>
+                <a:latin typeface="Consolas" panose="020B0609020204030204" pitchFamily="49" charset="0"/>
+                <a:cs typeface="Consolas" panose="020B0609020204030204" pitchFamily="49" charset="0"/>
+              </a:defRPr>
+            </a:lvl5pPr>
+          </a:lstStyle>
+          <a:p>
+            <a:pPr lvl="0"/>
+            <a:r>
+              <a:rPr lang="en-US" dirty="0"/>
+              <a:t>Click to edit or paste code</a:t>
+            </a:r>
+          </a:p>
+        </p:txBody>
+      </p:sp>
+    </p:spTree>
+    <p:extLst>
+      <p:ext uri="{BB962C8B-B14F-4D97-AF65-F5344CB8AC3E}">
+        <p14:creationId xmlns:p14="http://schemas.microsoft.com/office/powerpoint/2010/main" val="108831048"/>
+      </p:ext>
+    </p:extLst>
+  </p:cSld>
+  <p:clrMapOvr>
+    <a:overrideClrMapping bg1="lt1" tx1="dk1" bg2="lt2" tx2="dk2" accent1="accent1" accent2="accent2" accent3="accent3" accent4="accent4" accent5="accent5" accent6="accent6" hlink="hlink" folHlink="folHlink"/>
+  </p:clrMapOvr>
+  <p:transition>
+    <p:fade/>
+  </p:transition>
+  <p:extLst>
+    <p:ext uri="{DCECCB84-F9BA-43D5-87BE-67443E8EF086}">
+      <p15:sldGuideLst xmlns:p15="http://schemas.microsoft.com/office/powerpoint/2012/main">
+        <p15:guide id="2" orient="horz" pos="438">
+          <p15:clr>
+            <a:srgbClr val="5ACBF0"/>
+          </p15:clr>
+        </p15:guide>
+        <p15:guide id="3" orient="horz" pos="288">
+          <p15:clr>
+            <a:srgbClr val="5ACBF0"/>
+          </p15:clr>
+        </p15:guide>
+      </p15:sldGuideLst>
+    </p:ext>
+  </p:extLst>
+</p:sldLayout>
+</file>
+
+<file path=ppt/slideLayouts/slideLayout39.xml><?xml version="1.0" encoding="utf-8"?>
+<p:sldLayout xmlns:a="http://schemas.openxmlformats.org/drawingml/2006/main" xmlns:r="http://schemas.openxmlformats.org/officeDocument/2006/relationships" xmlns:p="http://schemas.openxmlformats.org/presentationml/2006/main" userDrawn="1">
+  <p:cSld name="Developer code right">
+    <p:bg>
+      <p:bgPr>
+        <a:solidFill>
+          <a:srgbClr val="E8E6DF"/>
+        </a:solidFill>
+        <a:effectLst/>
+      </p:bgPr>
+    </p:bg>
+    <p:spTree>
+      <p:nvGrpSpPr>
+        <p:cNvPr id="1" name=""/>
+        <p:cNvGrpSpPr/>
+        <p:nvPr/>
+      </p:nvGrpSpPr>
+      <p:grpSpPr>
+        <a:xfrm>
+          <a:off x="0" y="0"/>
+          <a:ext cx="0" cy="0"/>
+          <a:chOff x="0" y="0"/>
+          <a:chExt cx="0" cy="0"/>
+        </a:xfrm>
+      </p:grpSpPr>
+      <p:sp>
+        <p:nvSpPr>
+          <p:cNvPr id="3" name="Rectangle 2">
+            <a:extLst>
+              <a:ext uri="{FF2B5EF4-FFF2-40B4-BE49-F238E27FC236}">
+                <a16:creationId xmlns:a16="http://schemas.microsoft.com/office/drawing/2014/main" id="{2316165A-5926-4F59-B348-996936FBB574}"/>
+              </a:ext>
+              <a:ext uri="{C183D7F6-B498-43B3-948B-1728B52AA6E4}">
+                <adec:decorative xmlns:adec="http://schemas.microsoft.com/office/drawing/2017/decorative" val="1"/>
+              </a:ext>
+            </a:extLst>
+          </p:cNvPr>
+          <p:cNvSpPr/>
+          <p:nvPr userDrawn="1"/>
+        </p:nvSpPr>
+        <p:spPr bwMode="auto">
+          <a:xfrm>
+            <a:off x="5205984" y="0"/>
+            <a:ext cx="6986016" cy="6858000"/>
+          </a:xfrm>
+          <a:prstGeom prst="rect">
+            <a:avLst/>
+          </a:prstGeom>
+          <a:solidFill>
+            <a:srgbClr val="FFFFFF"/>
+          </a:solidFill>
+          <a:ln>
+            <a:noFill/>
+            <a:headEnd type="none" w="med" len="med"/>
+            <a:tailEnd type="none" w="med" len="med"/>
+          </a:ln>
+          <a:effectLst/>
+        </p:spPr>
+        <p:style>
+          <a:lnRef idx="1">
+            <a:schemeClr val="accent2"/>
+          </a:lnRef>
+          <a:fillRef idx="3">
+            <a:schemeClr val="accent2"/>
+          </a:fillRef>
+          <a:effectRef idx="2">
+            <a:schemeClr val="accent2"/>
+          </a:effectRef>
+          <a:fontRef idx="minor">
+            <a:schemeClr val="lt1"/>
+          </a:fontRef>
+        </p:style>
+        <p:txBody>
+          <a:bodyPr rot="0" spcFirstLastPara="0" vertOverflow="overflow" horzOverflow="overflow" vert="horz" wrap="square" lIns="182880" tIns="146304" rIns="182880" bIns="146304" numCol="1" spcCol="0" rtlCol="0" fromWordArt="0" anchor="t" anchorCtr="0" forceAA="0" compatLnSpc="1">
+            <a:prstTxWarp prst="textNoShape">
+              <a:avLst/>
+            </a:prstTxWarp>
+            <a:noAutofit/>
+          </a:bodyPr>
+          <a:lstStyle/>
+          <a:p>
+            <a:pPr algn="l" defTabSz="932472" fontAlgn="base">
+              <a:spcBef>
+                <a:spcPct val="0"/>
+              </a:spcBef>
+              <a:spcAft>
+                <a:spcPct val="0"/>
+              </a:spcAft>
+            </a:pPr>
+            <a:endParaRPr lang="en-US" sz="2000" dirty="0">
+              <a:solidFill>
+                <a:srgbClr val="FFFFFF"/>
+              </a:solidFill>
+              <a:ea typeface="Segoe UI" pitchFamily="34" charset="0"/>
+              <a:cs typeface="Segoe UI" pitchFamily="34" charset="0"/>
+            </a:endParaRPr>
+          </a:p>
+        </p:txBody>
+      </p:sp>
+      <p:sp>
+        <p:nvSpPr>
+          <p:cNvPr id="4" name="Title 1">
+            <a:extLst>
+              <a:ext uri="{FF2B5EF4-FFF2-40B4-BE49-F238E27FC236}">
+                <a16:creationId xmlns:a16="http://schemas.microsoft.com/office/drawing/2014/main" id="{DFD107E2-140D-CB86-9FA1-B9481E49E6FE}"/>
+              </a:ext>
+            </a:extLst>
+          </p:cNvPr>
+          <p:cNvSpPr>
+            <a:spLocks noGrp="1"/>
+          </p:cNvSpPr>
+          <p:nvPr>
+            <p:ph type="title"/>
+          </p:nvPr>
+        </p:nvSpPr>
+        <p:spPr>
+          <a:xfrm>
+            <a:off x="588262" y="585216"/>
+            <a:ext cx="4042761" cy="984885"/>
+          </a:xfrm>
+        </p:spPr>
+        <p:txBody>
+          <a:bodyPr/>
+          <a:lstStyle>
+            <a:lvl1pPr>
+              <a:defRPr sz="3200" b="0" i="0">
+                <a:solidFill>
+                  <a:schemeClr val="tx1"/>
+                </a:solidFill>
+                <a:latin typeface="+mj-lt"/>
+                <a:cs typeface="Segoe UI Semibold" panose="020B0502040204020203" pitchFamily="34" charset="0"/>
+              </a:defRPr>
+            </a:lvl1pPr>
+          </a:lstStyle>
+          <a:p>
+            <a:r>
+              <a:rPr lang="en-US"/>
+              <a:t>Click to edit Master title style</a:t>
+            </a:r>
+            <a:endParaRPr lang="en-US" dirty="0"/>
+          </a:p>
+        </p:txBody>
+      </p:sp>
+      <p:sp>
+        <p:nvSpPr>
+          <p:cNvPr id="6" name="Text Placeholder 3">
+            <a:extLst>
+              <a:ext uri="{FF2B5EF4-FFF2-40B4-BE49-F238E27FC236}">
+                <a16:creationId xmlns:a16="http://schemas.microsoft.com/office/drawing/2014/main" id="{277F5E94-C055-4558-A211-EF7933FCA82F}"/>
+              </a:ext>
+            </a:extLst>
+          </p:cNvPr>
+          <p:cNvSpPr>
+            <a:spLocks noGrp="1"/>
+          </p:cNvSpPr>
+          <p:nvPr>
+            <p:ph type="body" sz="quarter" idx="15"/>
+          </p:nvPr>
+        </p:nvSpPr>
+        <p:spPr>
+          <a:xfrm>
+            <a:off x="586389" y="1594155"/>
+            <a:ext cx="4042761" cy="726353"/>
+          </a:xfrm>
+          <a:prstGeom prst="rect">
+            <a:avLst/>
+          </a:prstGeom>
+        </p:spPr>
+        <p:txBody>
+          <a:bodyPr wrap="square">
+            <a:spAutoFit/>
+          </a:bodyPr>
+          <a:lstStyle>
+            <a:lvl1pPr marL="0" indent="0">
+              <a:buFont typeface="Arial" panose="020B0604020202020204" pitchFamily="34" charset="0"/>
+              <a:buNone/>
+              <a:defRPr>
+                <a:solidFill>
+                  <a:schemeClr val="tx1"/>
+                </a:solidFill>
+              </a:defRPr>
+            </a:lvl1pPr>
+            <a:lvl2pPr marL="137160" indent="0">
+              <a:buFont typeface="Arial" panose="020B0604020202020204" pitchFamily="34" charset="0"/>
+              <a:buNone/>
+              <a:defRPr>
+                <a:solidFill>
+                  <a:schemeClr val="tx1"/>
+                </a:solidFill>
+              </a:defRPr>
+            </a:lvl2pPr>
+            <a:lvl3pPr marL="265176" indent="0">
+              <a:buFont typeface="Arial" panose="020B0604020202020204" pitchFamily="34" charset="0"/>
+              <a:buNone/>
+              <a:defRPr>
+                <a:solidFill>
+                  <a:schemeClr val="tx1"/>
+                </a:solidFill>
+              </a:defRPr>
+            </a:lvl3pPr>
+            <a:lvl4pPr marL="685800" indent="0">
+              <a:buNone/>
+              <a:defRPr/>
+            </a:lvl4pPr>
+            <a:lvl5pPr marL="914400" indent="0">
+              <a:buNone/>
+              <a:defRPr/>
+            </a:lvl5pPr>
+          </a:lstStyle>
+          <a:p>
+            <a:pPr lvl="0"/>
+            <a:r>
+              <a:rPr lang="en-US" dirty="0"/>
+              <a:t>Click to edit Master text styles</a:t>
+            </a:r>
+          </a:p>
+          <a:p>
+            <a:pPr lvl="1"/>
+            <a:r>
+              <a:rPr lang="en-US" dirty="0"/>
+              <a:t>Second level</a:t>
+            </a:r>
+          </a:p>
+          <a:p>
+            <a:pPr lvl="2"/>
+            <a:r>
+              <a:rPr lang="en-US" dirty="0"/>
+              <a:t>Third level</a:t>
+            </a:r>
+          </a:p>
+        </p:txBody>
+      </p:sp>
+      <p:sp>
+        <p:nvSpPr>
+          <p:cNvPr id="7" name="Text Placeholder 4" descr="This layout should only be used for developer code. The font used is a monospace font which is ideal for showing code.">
+            <a:extLst>
+              <a:ext uri="{FF2B5EF4-FFF2-40B4-BE49-F238E27FC236}">
+                <a16:creationId xmlns:a16="http://schemas.microsoft.com/office/drawing/2014/main" id="{A89B3FAE-417F-41EF-9D05-0D6CAF8EC76C}"/>
+              </a:ext>
+            </a:extLst>
+          </p:cNvPr>
+          <p:cNvSpPr>
+            <a:spLocks noGrp="1"/>
+          </p:cNvSpPr>
+          <p:nvPr>
+            <p:ph type="body" sz="quarter" idx="11" hasCustomPrompt="1"/>
+          </p:nvPr>
+        </p:nvSpPr>
+        <p:spPr>
+          <a:xfrm>
+            <a:off x="5800725" y="582613"/>
+            <a:ext cx="5799138" cy="5692775"/>
+          </a:xfrm>
+        </p:spPr>
+        <p:txBody>
+          <a:bodyPr/>
+          <a:lstStyle>
+            <a:lvl1pPr marL="0" indent="0">
+              <a:buNone/>
+              <a:tabLst/>
+              <a:defRPr sz="1400">
+                <a:solidFill>
+                  <a:srgbClr val="2F2F2F"/>
+                </a:solidFill>
+                <a:latin typeface="Consolas" panose="020B0609020204030204" pitchFamily="49" charset="0"/>
+                <a:cs typeface="Consolas" panose="020B0609020204030204" pitchFamily="49" charset="0"/>
+              </a:defRPr>
+            </a:lvl1pPr>
+            <a:lvl2pPr marL="346449" indent="0">
+              <a:buNone/>
+              <a:defRPr sz="2399">
+                <a:gradFill>
+                  <a:gsLst>
+                    <a:gs pos="61049">
+                      <a:schemeClr val="tx1"/>
+                    </a:gs>
+                    <a:gs pos="43000">
+                      <a:schemeClr val="tx1"/>
+                    </a:gs>
+                  </a:gsLst>
+                  <a:lin ang="5400000" scaled="0"/>
+                </a:gradFill>
+                <a:latin typeface="Consolas" panose="020B0609020204030204" pitchFamily="49" charset="0"/>
+                <a:cs typeface="Consolas" panose="020B0609020204030204" pitchFamily="49" charset="0"/>
+              </a:defRPr>
+            </a:lvl2pPr>
+            <a:lvl3pPr marL="584432" indent="0">
+              <a:buNone/>
+              <a:defRPr sz="1999">
+                <a:gradFill>
+                  <a:gsLst>
+                    <a:gs pos="61049">
+                      <a:schemeClr val="tx1"/>
+                    </a:gs>
+                    <a:gs pos="43000">
+                      <a:schemeClr val="tx1"/>
+                    </a:gs>
+                  </a:gsLst>
+                  <a:lin ang="5400000" scaled="0"/>
+                </a:gradFill>
+                <a:latin typeface="Consolas" panose="020B0609020204030204" pitchFamily="49" charset="0"/>
+                <a:cs typeface="Consolas" panose="020B0609020204030204" pitchFamily="49" charset="0"/>
+              </a:defRPr>
+            </a:lvl3pPr>
+            <a:lvl4pPr marL="814319" indent="0">
+              <a:buNone/>
+              <a:defRPr sz="1799">
+                <a:gradFill>
+                  <a:gsLst>
+                    <a:gs pos="61049">
+                      <a:schemeClr val="tx1"/>
+                    </a:gs>
+                    <a:gs pos="43000">
+                      <a:schemeClr val="tx1"/>
+                    </a:gs>
+                  </a:gsLst>
+                  <a:lin ang="5400000" scaled="0"/>
+                </a:gradFill>
+                <a:latin typeface="Consolas" panose="020B0609020204030204" pitchFamily="49" charset="0"/>
+                <a:cs typeface="Consolas" panose="020B0609020204030204" pitchFamily="49" charset="0"/>
+              </a:defRPr>
+            </a:lvl4pPr>
+            <a:lvl5pPr marL="1050682" indent="0">
+              <a:buNone/>
+              <a:defRPr sz="1799">
+                <a:gradFill>
+                  <a:gsLst>
+                    <a:gs pos="61049">
+                      <a:schemeClr val="tx1"/>
+                    </a:gs>
+                    <a:gs pos="43000">
+                      <a:schemeClr val="tx1"/>
+                    </a:gs>
+                  </a:gsLst>
+                  <a:lin ang="5400000" scaled="0"/>
+                </a:gradFill>
+                <a:latin typeface="Consolas" panose="020B0609020204030204" pitchFamily="49" charset="0"/>
+                <a:cs typeface="Consolas" panose="020B0609020204030204" pitchFamily="49" charset="0"/>
+              </a:defRPr>
+            </a:lvl5pPr>
+          </a:lstStyle>
+          <a:p>
+            <a:pPr lvl="0"/>
+            <a:r>
+              <a:rPr lang="en-US" dirty="0"/>
+              <a:t>Click to edit or paste code</a:t>
+            </a:r>
+          </a:p>
+        </p:txBody>
+      </p:sp>
+    </p:spTree>
+    <p:extLst>
+      <p:ext uri="{BB962C8B-B14F-4D97-AF65-F5344CB8AC3E}">
+        <p14:creationId xmlns:p14="http://schemas.microsoft.com/office/powerpoint/2010/main" val="3491851260"/>
+      </p:ext>
+    </p:extLst>
+  </p:cSld>
+  <p:clrMapOvr>
+    <a:overrideClrMapping bg1="lt1" tx1="dk1" bg2="lt2" tx2="dk2" accent1="accent1" accent2="accent2" accent3="accent3" accent4="accent4" accent5="accent5" accent6="accent6" hlink="hlink" folHlink="folHlink"/>
+  </p:clrMapOvr>
+  <p:transition>
+    <p:fade/>
+  </p:transition>
+  <p:extLst>
+    <p:ext uri="{DCECCB84-F9BA-43D5-87BE-67443E8EF086}">
+      <p15:sldGuideLst xmlns:p15="http://schemas.microsoft.com/office/powerpoint/2012/main">
+        <p15:guide id="1" orient="horz" pos="288">
+          <p15:clr>
+            <a:srgbClr val="5ACBF0"/>
+          </p15:clr>
+        </p15:guide>
+        <p15:guide id="2" orient="horz" pos="445">
+          <p15:clr>
+            <a:srgbClr val="5ACBF0"/>
+          </p15:clr>
+        </p15:guide>
+        <p15:guide id="4" orient="horz" pos="843">
+          <p15:clr>
+            <a:srgbClr val="5ACBF0"/>
+          </p15:clr>
+        </p15:guide>
+        <p15:guide id="7" pos="3283">
+          <p15:clr>
+            <a:srgbClr val="5ACBF0"/>
+          </p15:clr>
+        </p15:guide>
+        <p15:guide id="8" pos="3654">
+          <p15:clr>
+            <a:srgbClr val="5ACBF0"/>
+          </p15:clr>
+        </p15:guide>
+        <p15:guide id="9" pos="2916">
+          <p15:clr>
+            <a:srgbClr val="5ACBF0"/>
+          </p15:clr>
+        </p15:guide>
+      </p15:sldGuideLst>
+    </p:ext>
+  </p:extLst>
+</p:sldLayout>
+</file>
+
 <file path=ppt/slideLayouts/slideLayout4.xml><?xml version="1.0" encoding="utf-8"?>
 <p:sldLayout xmlns:a="http://schemas.openxmlformats.org/drawingml/2006/main" xmlns:r="http://schemas.openxmlformats.org/officeDocument/2006/relationships" xmlns:p="http://schemas.openxmlformats.org/presentationml/2006/main" showMasterSp="0" preserve="1" userDrawn="1">
   <p:cSld name="Transition Blue">
@@ -20950,10 +22912,10 @@
           <p:nvPr userDrawn="1"/>
         </p:nvPicPr>
         <p:blipFill rotWithShape="1">
-          <a:blip r:embed="rId39">
+          <a:blip r:embed="rId41">
             <a:extLst>
               <a:ext uri="{96DAC541-7B7A-43D3-8B79-37D633B846F1}">
-                <asvg:svgBlip xmlns:asvg="http://schemas.microsoft.com/office/drawing/2016/SVG/main" r:embed="rId40"/>
+                <asvg:svgBlip xmlns:asvg="http://schemas.microsoft.com/office/drawing/2016/SVG/main" r:embed="rId42"/>
               </a:ext>
             </a:extLst>
           </a:blip>
@@ -21135,10 +23097,10 @@
           <p:nvPr userDrawn="1"/>
         </p:nvPicPr>
         <p:blipFill>
-          <a:blip r:embed="rId41">
+          <a:blip r:embed="rId43">
             <a:extLst>
               <a:ext uri="{96DAC541-7B7A-43D3-8B79-37D633B846F1}">
-                <asvg:svgBlip xmlns:asvg="http://schemas.microsoft.com/office/drawing/2016/SVG/main" r:embed="rId42"/>
+                <asvg:svgBlip xmlns:asvg="http://schemas.microsoft.com/office/drawing/2016/SVG/main" r:embed="rId44"/>
               </a:ext>
             </a:extLst>
           </a:blip>
@@ -21202,6 +23164,8 @@
     <p:sldLayoutId id="2147483664" r:id="rId35"/>
     <p:sldLayoutId id="2147483655" r:id="rId36"/>
     <p:sldLayoutId id="2147483689" r:id="rId37"/>
+    <p:sldLayoutId id="2147483691" r:id="rId38"/>
+    <p:sldLayoutId id="2147483692" r:id="rId39"/>
   </p:sldLayoutIdLst>
   <p:hf hdr="0" dt="0"/>
   <p:txStyles>
@@ -24182,6 +26146,2495 @@
       </p:grpSpPr>
       <p:sp>
         <p:nvSpPr>
+          <p:cNvPr id="3" name="Text Placeholder 2">
+            <a:extLst>
+              <a:ext uri="{FF2B5EF4-FFF2-40B4-BE49-F238E27FC236}">
+                <a16:creationId xmlns:a16="http://schemas.microsoft.com/office/drawing/2014/main" id="{CC65019B-B847-6E09-9F80-AC8EE7956914}"/>
+              </a:ext>
+            </a:extLst>
+          </p:cNvPr>
+          <p:cNvSpPr>
+            <a:spLocks noGrp="1"/>
+          </p:cNvSpPr>
+          <p:nvPr>
+            <p:ph type="title" idx="4294967295"/>
+          </p:nvPr>
+        </p:nvSpPr>
+        <p:spPr>
+          <a:xfrm>
+            <a:off x="0" y="0"/>
+            <a:ext cx="4889500" cy="569913"/>
+          </a:xfrm>
+          <a:prstGeom prst="rect">
+            <a:avLst/>
+          </a:prstGeom>
+          <a:gradFill flip="none" rotWithShape="1">
+            <a:gsLst>
+              <a:gs pos="0">
+                <a:srgbClr val="000000"/>
+              </a:gs>
+              <a:gs pos="92000">
+                <a:srgbClr val="000000"/>
+              </a:gs>
+              <a:gs pos="92000">
+                <a:schemeClr val="accent3"/>
+              </a:gs>
+            </a:gsLst>
+            <a:lin ang="16200000" scaled="1"/>
+            <a:tileRect/>
+          </a:gradFill>
+          <a:ln>
+            <a:noFill/>
+            <a:prstDash/>
+          </a:ln>
+          <a:effectLst/>
+        </p:spPr>
+        <p:txBody>
+          <a:bodyPr rot="0" spcFirstLastPara="0" vertOverflow="overflow" horzOverflow="overflow" vert="horz" wrap="square" lIns="585216" tIns="91440" rIns="0" bIns="45720" numCol="1" spcCol="0" rtlCol="0" fromWordArt="0" anchor="t" anchorCtr="0" forceAA="0" compatLnSpc="1">
+            <a:prstTxWarp prst="textNoShape">
+              <a:avLst/>
+            </a:prstTxWarp>
+            <a:spAutoFit/>
+          </a:bodyPr>
+          <a:lstStyle/>
+          <a:p>
+            <a:pPr marL="0" marR="0" lvl="0" indent="0" algn="l" defTabSz="932742" rtl="0" eaLnBrk="1" fontAlgn="auto" latinLnBrk="0" hangingPunct="1">
+              <a:lnSpc>
+                <a:spcPct val="100000"/>
+              </a:lnSpc>
+              <a:spcBef>
+                <a:spcPct val="20000"/>
+              </a:spcBef>
+              <a:spcAft>
+                <a:spcPts val="0"/>
+              </a:spcAft>
+              <a:buClrTx/>
+              <a:buSzPct val="90000"/>
+              <a:buFont typeface="Arial" panose="020B0604020202020204" pitchFamily="34" charset="0"/>
+              <a:buNone/>
+              <a:tabLst/>
+              <a:defRPr/>
+            </a:pPr>
+            <a:r>
+              <a:rPr kumimoji="0" lang="en-IN" sz="2800" b="0" i="0" u="none" strike="noStrike" kern="1200" cap="none" spc="0" normalizeH="0" baseline="0" noProof="0">
+                <a:ln>
+                  <a:noFill/>
+                </a:ln>
+                <a:solidFill>
+                  <a:srgbClr val="FFFFFF"/>
+                </a:solidFill>
+                <a:effectLst/>
+                <a:uLnTx/>
+                <a:uFillTx/>
+                <a:latin typeface="+mj-lt"/>
+                <a:ea typeface="+mn-ea"/>
+                <a:cs typeface="Segoe UI" panose="020B0502040204020203" pitchFamily="34" charset="0"/>
+              </a:rPr>
+              <a:t>Analyze data with Spark</a:t>
+            </a:r>
+            <a:endParaRPr kumimoji="0" lang="en-IN" sz="2800" b="0" i="0" u="none" strike="noStrike" kern="1200" cap="none" spc="0" normalizeH="0" baseline="0" noProof="0" dirty="0">
+              <a:ln>
+                <a:noFill/>
+              </a:ln>
+              <a:solidFill>
+                <a:srgbClr val="FFFFFF"/>
+              </a:solidFill>
+              <a:effectLst/>
+              <a:uLnTx/>
+              <a:uFillTx/>
+              <a:latin typeface="+mj-lt"/>
+              <a:ea typeface="+mn-ea"/>
+              <a:cs typeface="Segoe UI" panose="020B0502040204020203" pitchFamily="34" charset="0"/>
+            </a:endParaRPr>
+          </a:p>
+        </p:txBody>
+      </p:sp>
+      <p:sp>
+        <p:nvSpPr>
+          <p:cNvPr id="8" name="Text Placeholder 7">
+            <a:extLst>
+              <a:ext uri="{FF2B5EF4-FFF2-40B4-BE49-F238E27FC236}">
+                <a16:creationId xmlns:a16="http://schemas.microsoft.com/office/drawing/2014/main" id="{82DD13EC-3ADC-9186-19F5-BF656D9F581C}"/>
+              </a:ext>
+            </a:extLst>
+          </p:cNvPr>
+          <p:cNvSpPr>
+            <a:spLocks noGrp="1"/>
+          </p:cNvSpPr>
+          <p:nvPr>
+            <p:ph type="body" sz="quarter" idx="11"/>
+          </p:nvPr>
+        </p:nvSpPr>
+        <p:spPr>
+          <a:xfrm>
+            <a:off x="579438" y="1084263"/>
+            <a:ext cx="11020425" cy="338554"/>
+          </a:xfrm>
+        </p:spPr>
+        <p:txBody>
+          <a:bodyPr>
+            <a:normAutofit fontScale="70000" lnSpcReduction="20000"/>
+          </a:bodyPr>
+          <a:lstStyle/>
+          <a:p>
+            <a:r>
+              <a:rPr lang="en-US" sz="2200" dirty="0">
+                <a:latin typeface="+mj-lt"/>
+              </a:rPr>
+              <a:t>Explore data with </a:t>
+            </a:r>
+            <a:r>
+              <a:rPr lang="en-US" sz="2200" dirty="0" err="1">
+                <a:latin typeface="+mj-lt"/>
+              </a:rPr>
+              <a:t>dataframes</a:t>
+            </a:r>
+            <a:endParaRPr lang="en-US" sz="2200" dirty="0">
+              <a:latin typeface="+mj-lt"/>
+            </a:endParaRPr>
+          </a:p>
+        </p:txBody>
+      </p:sp>
+      <p:sp>
+        <p:nvSpPr>
+          <p:cNvPr id="4" name="Rectangle 3">
+            <a:extLst>
+              <a:ext uri="{FF2B5EF4-FFF2-40B4-BE49-F238E27FC236}">
+                <a16:creationId xmlns:a16="http://schemas.microsoft.com/office/drawing/2014/main" id="{FBDF2A5A-7C77-002C-8BDD-EED75AF1A214}"/>
+              </a:ext>
+            </a:extLst>
+          </p:cNvPr>
+          <p:cNvSpPr>
+            <a:spLocks/>
+          </p:cNvSpPr>
+          <p:nvPr/>
+        </p:nvSpPr>
+        <p:spPr bwMode="auto">
+          <a:xfrm>
+            <a:off x="579438" y="1519769"/>
+            <a:ext cx="11020425" cy="2156962"/>
+          </a:xfrm>
+          <a:prstGeom prst="rect">
+            <a:avLst/>
+          </a:prstGeom>
+          <a:noFill/>
+          <a:ln w="19050">
+            <a:solidFill>
+              <a:schemeClr val="accent4"/>
+            </a:solidFill>
+            <a:headEnd type="none" w="med" len="med"/>
+            <a:tailEnd type="none" w="med" len="med"/>
+          </a:ln>
+          <a:effectLst/>
+        </p:spPr>
+        <p:style>
+          <a:lnRef idx="1">
+            <a:schemeClr val="accent2"/>
+          </a:lnRef>
+          <a:fillRef idx="3">
+            <a:schemeClr val="accent2"/>
+          </a:fillRef>
+          <a:effectRef idx="2">
+            <a:schemeClr val="accent2"/>
+          </a:effectRef>
+          <a:fontRef idx="minor">
+            <a:schemeClr val="lt1"/>
+          </a:fontRef>
+        </p:style>
+        <p:txBody>
+          <a:bodyPr rot="0" spcFirstLastPara="0" vertOverflow="overflow" horzOverflow="overflow" vert="horz" wrap="square" lIns="182880" tIns="146304" rIns="182880" bIns="146304" numCol="1" spcCol="0" rtlCol="0" fromWordArt="0" anchor="t" anchorCtr="0" forceAA="0" compatLnSpc="1">
+            <a:prstTxWarp prst="textNoShape">
+              <a:avLst/>
+            </a:prstTxWarp>
+            <a:noAutofit/>
+          </a:bodyPr>
+          <a:lstStyle/>
+          <a:p>
+            <a:pPr defTabSz="932472" fontAlgn="base">
+              <a:lnSpc>
+                <a:spcPct val="90000"/>
+              </a:lnSpc>
+              <a:spcBef>
+                <a:spcPct val="0"/>
+              </a:spcBef>
+              <a:spcAft>
+                <a:spcPct val="0"/>
+              </a:spcAft>
+            </a:pPr>
+            <a:r>
+              <a:rPr lang="en-US" sz="1400" dirty="0">
+                <a:solidFill>
+                  <a:schemeClr val="accent6">
+                    <a:lumMod val="10000"/>
+                  </a:schemeClr>
+                </a:solidFill>
+                <a:latin typeface="Consolas" panose="020B0609020204030204" pitchFamily="49" charset="0"/>
+                <a:ea typeface="Segoe UI" pitchFamily="34" charset="0"/>
+                <a:cs typeface="Courier New" panose="02070309020205020404" pitchFamily="49" charset="0"/>
+              </a:rPr>
+              <a:t>%</a:t>
+            </a:r>
+            <a:r>
+              <a:rPr lang="en-US" sz="1400" dirty="0" err="1">
+                <a:solidFill>
+                  <a:schemeClr val="accent6">
+                    <a:lumMod val="10000"/>
+                  </a:schemeClr>
+                </a:solidFill>
+                <a:latin typeface="Consolas" panose="020B0609020204030204" pitchFamily="49" charset="0"/>
+                <a:ea typeface="Segoe UI" pitchFamily="34" charset="0"/>
+                <a:cs typeface="Courier New" panose="02070309020205020404" pitchFamily="49" charset="0"/>
+              </a:rPr>
+              <a:t>pyspark</a:t>
+            </a:r>
+            <a:endParaRPr lang="en-US" sz="1400" dirty="0">
+              <a:solidFill>
+                <a:schemeClr val="accent6">
+                  <a:lumMod val="10000"/>
+                </a:schemeClr>
+              </a:solidFill>
+              <a:latin typeface="Consolas" panose="020B0609020204030204" pitchFamily="49" charset="0"/>
+              <a:ea typeface="Segoe UI" pitchFamily="34" charset="0"/>
+              <a:cs typeface="Courier New" panose="02070309020205020404" pitchFamily="49" charset="0"/>
+            </a:endParaRPr>
+          </a:p>
+          <a:p>
+            <a:pPr defTabSz="932472" fontAlgn="base">
+              <a:lnSpc>
+                <a:spcPct val="90000"/>
+              </a:lnSpc>
+              <a:spcBef>
+                <a:spcPct val="0"/>
+              </a:spcBef>
+              <a:spcAft>
+                <a:spcPct val="0"/>
+              </a:spcAft>
+            </a:pPr>
+            <a:endParaRPr lang="en-US" sz="1400" dirty="0">
+              <a:solidFill>
+                <a:schemeClr val="tx1"/>
+              </a:solidFill>
+              <a:latin typeface="Consolas" panose="020B0609020204030204" pitchFamily="49" charset="0"/>
+              <a:ea typeface="Segoe UI" pitchFamily="34" charset="0"/>
+              <a:cs typeface="Courier New" panose="02070309020205020404" pitchFamily="49" charset="0"/>
+            </a:endParaRPr>
+          </a:p>
+          <a:p>
+            <a:pPr defTabSz="932472" fontAlgn="base">
+              <a:lnSpc>
+                <a:spcPct val="90000"/>
+              </a:lnSpc>
+              <a:spcBef>
+                <a:spcPct val="0"/>
+              </a:spcBef>
+              <a:spcAft>
+                <a:spcPct val="0"/>
+              </a:spcAft>
+            </a:pPr>
+            <a:r>
+              <a:rPr lang="en-US" sz="1400" dirty="0">
+                <a:solidFill>
+                  <a:srgbClr val="008000"/>
+                </a:solidFill>
+                <a:latin typeface="Consolas" panose="020B0609020204030204" pitchFamily="49" charset="0"/>
+                <a:ea typeface="Segoe UI" pitchFamily="34" charset="0"/>
+                <a:cs typeface="Courier New" panose="02070309020205020404" pitchFamily="49" charset="0"/>
+              </a:rPr>
+              <a:t># Load data</a:t>
+            </a:r>
+          </a:p>
+          <a:p>
+            <a:pPr defTabSz="932472" fontAlgn="base">
+              <a:lnSpc>
+                <a:spcPct val="90000"/>
+              </a:lnSpc>
+              <a:spcBef>
+                <a:spcPct val="0"/>
+              </a:spcBef>
+              <a:spcAft>
+                <a:spcPct val="0"/>
+              </a:spcAft>
+            </a:pPr>
+            <a:r>
+              <a:rPr lang="en-US" sz="1400" dirty="0" err="1">
+                <a:solidFill>
+                  <a:schemeClr val="accent6">
+                    <a:lumMod val="10000"/>
+                  </a:schemeClr>
+                </a:solidFill>
+                <a:latin typeface="Consolas" panose="020B0609020204030204" pitchFamily="49" charset="0"/>
+                <a:ea typeface="Segoe UI" pitchFamily="34" charset="0"/>
+                <a:cs typeface="Courier New" panose="02070309020205020404" pitchFamily="49" charset="0"/>
+              </a:rPr>
+              <a:t>df</a:t>
+            </a:r>
+            <a:r>
+              <a:rPr lang="en-US" sz="1400" dirty="0">
+                <a:solidFill>
+                  <a:schemeClr val="accent6">
+                    <a:lumMod val="10000"/>
+                  </a:schemeClr>
+                </a:solidFill>
+                <a:latin typeface="Consolas" panose="020B0609020204030204" pitchFamily="49" charset="0"/>
+                <a:ea typeface="Segoe UI" pitchFamily="34" charset="0"/>
+                <a:cs typeface="Courier New" panose="02070309020205020404" pitchFamily="49" charset="0"/>
+              </a:rPr>
+              <a:t>=</a:t>
+            </a:r>
+            <a:r>
+              <a:rPr lang="en-US" sz="1400" dirty="0" err="1">
+                <a:solidFill>
+                  <a:schemeClr val="accent6">
+                    <a:lumMod val="10000"/>
+                  </a:schemeClr>
+                </a:solidFill>
+                <a:latin typeface="Consolas" panose="020B0609020204030204" pitchFamily="49" charset="0"/>
+                <a:ea typeface="Segoe UI" pitchFamily="34" charset="0"/>
+                <a:cs typeface="Courier New" panose="02070309020205020404" pitchFamily="49" charset="0"/>
+              </a:rPr>
+              <a:t>spark.read.load</a:t>
+            </a:r>
+            <a:r>
+              <a:rPr lang="en-US" sz="1400" dirty="0">
+                <a:solidFill>
+                  <a:schemeClr val="accent6">
+                    <a:lumMod val="10000"/>
+                  </a:schemeClr>
+                </a:solidFill>
+                <a:latin typeface="Consolas" panose="020B0609020204030204" pitchFamily="49" charset="0"/>
+                <a:ea typeface="Segoe UI" pitchFamily="34" charset="0"/>
+                <a:cs typeface="Courier New" panose="02070309020205020404" pitchFamily="49" charset="0"/>
+              </a:rPr>
+              <a:t>("/data/products.csv", format="csv", header=True)</a:t>
+            </a:r>
+          </a:p>
+          <a:p>
+            <a:pPr defTabSz="932472" fontAlgn="base">
+              <a:lnSpc>
+                <a:spcPct val="90000"/>
+              </a:lnSpc>
+              <a:spcBef>
+                <a:spcPct val="0"/>
+              </a:spcBef>
+              <a:spcAft>
+                <a:spcPct val="0"/>
+              </a:spcAft>
+            </a:pPr>
+            <a:endParaRPr lang="en-US" sz="1400" dirty="0">
+              <a:solidFill>
+                <a:schemeClr val="tx1"/>
+              </a:solidFill>
+              <a:latin typeface="Consolas" panose="020B0609020204030204" pitchFamily="49" charset="0"/>
+              <a:ea typeface="Segoe UI" pitchFamily="34" charset="0"/>
+              <a:cs typeface="Courier New" panose="02070309020205020404" pitchFamily="49" charset="0"/>
+            </a:endParaRPr>
+          </a:p>
+          <a:p>
+            <a:pPr defTabSz="932472" fontAlgn="base">
+              <a:lnSpc>
+                <a:spcPct val="90000"/>
+              </a:lnSpc>
+              <a:spcBef>
+                <a:spcPct val="0"/>
+              </a:spcBef>
+              <a:spcAft>
+                <a:spcPct val="0"/>
+              </a:spcAft>
+            </a:pPr>
+            <a:r>
+              <a:rPr lang="en-US" sz="1400" dirty="0">
+                <a:solidFill>
+                  <a:srgbClr val="008000"/>
+                </a:solidFill>
+                <a:latin typeface="Consolas" panose="020B0609020204030204" pitchFamily="49" charset="0"/>
+                <a:cs typeface="Courier New" panose="02070309020205020404" pitchFamily="49" charset="0"/>
+              </a:rPr>
+              <a:t># Manipulate </a:t>
+            </a:r>
+            <a:r>
+              <a:rPr lang="en-US" sz="1400" dirty="0" err="1">
+                <a:solidFill>
+                  <a:srgbClr val="008000"/>
+                </a:solidFill>
+                <a:latin typeface="Consolas" panose="020B0609020204030204" pitchFamily="49" charset="0"/>
+                <a:cs typeface="Courier New" panose="02070309020205020404" pitchFamily="49" charset="0"/>
+              </a:rPr>
+              <a:t>dataframe</a:t>
+            </a:r>
+            <a:endParaRPr lang="en-US" sz="1400" dirty="0">
+              <a:solidFill>
+                <a:srgbClr val="008000"/>
+              </a:solidFill>
+              <a:latin typeface="Consolas" panose="020B0609020204030204" pitchFamily="49" charset="0"/>
+              <a:cs typeface="Courier New" panose="02070309020205020404" pitchFamily="49" charset="0"/>
+            </a:endParaRPr>
+          </a:p>
+          <a:p>
+            <a:pPr defTabSz="932472" fontAlgn="base">
+              <a:lnSpc>
+                <a:spcPct val="90000"/>
+              </a:lnSpc>
+              <a:spcBef>
+                <a:spcPct val="0"/>
+              </a:spcBef>
+              <a:spcAft>
+                <a:spcPct val="0"/>
+              </a:spcAft>
+            </a:pPr>
+            <a:r>
+              <a:rPr lang="en-US" sz="1400" dirty="0" err="1">
+                <a:solidFill>
+                  <a:schemeClr val="accent6">
+                    <a:lumMod val="10000"/>
+                  </a:schemeClr>
+                </a:solidFill>
+                <a:latin typeface="Consolas" panose="020B0609020204030204" pitchFamily="49" charset="0"/>
+                <a:ea typeface="Segoe UI" pitchFamily="34" charset="0"/>
+                <a:cs typeface="Courier New" panose="02070309020205020404" pitchFamily="49" charset="0"/>
+              </a:rPr>
+              <a:t>counts_df</a:t>
+            </a:r>
+            <a:r>
+              <a:rPr lang="en-US" sz="1400" dirty="0">
+                <a:solidFill>
+                  <a:schemeClr val="accent6">
+                    <a:lumMod val="10000"/>
+                  </a:schemeClr>
+                </a:solidFill>
+                <a:latin typeface="Consolas" panose="020B0609020204030204" pitchFamily="49" charset="0"/>
+                <a:ea typeface="Segoe UI" pitchFamily="34" charset="0"/>
+                <a:cs typeface="Courier New" panose="02070309020205020404" pitchFamily="49" charset="0"/>
+              </a:rPr>
+              <a:t> = </a:t>
+            </a:r>
+            <a:r>
+              <a:rPr lang="en-US" sz="1400" dirty="0" err="1">
+                <a:solidFill>
+                  <a:schemeClr val="accent6">
+                    <a:lumMod val="10000"/>
+                  </a:schemeClr>
+                </a:solidFill>
+                <a:latin typeface="Consolas" panose="020B0609020204030204" pitchFamily="49" charset="0"/>
+                <a:ea typeface="Segoe UI" pitchFamily="34" charset="0"/>
+                <a:cs typeface="Courier New" panose="02070309020205020404" pitchFamily="49" charset="0"/>
+              </a:rPr>
+              <a:t>df.select</a:t>
+            </a:r>
+            <a:r>
+              <a:rPr lang="en-US" sz="1400" dirty="0">
+                <a:solidFill>
+                  <a:schemeClr val="accent6">
+                    <a:lumMod val="10000"/>
+                  </a:schemeClr>
+                </a:solidFill>
+                <a:latin typeface="Consolas" panose="020B0609020204030204" pitchFamily="49" charset="0"/>
+                <a:ea typeface="Segoe UI" pitchFamily="34" charset="0"/>
+                <a:cs typeface="Courier New" panose="02070309020205020404" pitchFamily="49" charset="0"/>
+              </a:rPr>
+              <a:t>("</a:t>
+            </a:r>
+            <a:r>
+              <a:rPr lang="en-US" sz="1400" dirty="0" err="1">
+                <a:solidFill>
+                  <a:schemeClr val="accent6">
+                    <a:lumMod val="10000"/>
+                  </a:schemeClr>
+                </a:solidFill>
+                <a:latin typeface="Consolas" panose="020B0609020204030204" pitchFamily="49" charset="0"/>
+                <a:ea typeface="Segoe UI" pitchFamily="34" charset="0"/>
+                <a:cs typeface="Courier New" panose="02070309020205020404" pitchFamily="49" charset="0"/>
+              </a:rPr>
+              <a:t>ProductID</a:t>
+            </a:r>
+            <a:r>
+              <a:rPr lang="en-US" sz="1400" dirty="0">
+                <a:solidFill>
+                  <a:schemeClr val="accent6">
+                    <a:lumMod val="10000"/>
+                  </a:schemeClr>
+                </a:solidFill>
+                <a:latin typeface="Consolas" panose="020B0609020204030204" pitchFamily="49" charset="0"/>
+                <a:ea typeface="Segoe UI" pitchFamily="34" charset="0"/>
+                <a:cs typeface="Courier New" panose="02070309020205020404" pitchFamily="49" charset="0"/>
+              </a:rPr>
+              <a:t>", "Category").</a:t>
+            </a:r>
+            <a:r>
+              <a:rPr lang="en-US" sz="1400" dirty="0" err="1">
+                <a:solidFill>
+                  <a:schemeClr val="accent6">
+                    <a:lumMod val="10000"/>
+                  </a:schemeClr>
+                </a:solidFill>
+                <a:latin typeface="Consolas" panose="020B0609020204030204" pitchFamily="49" charset="0"/>
+                <a:ea typeface="Segoe UI" pitchFamily="34" charset="0"/>
+                <a:cs typeface="Courier New" panose="02070309020205020404" pitchFamily="49" charset="0"/>
+              </a:rPr>
+              <a:t>groupBy</a:t>
+            </a:r>
+            <a:r>
+              <a:rPr lang="en-US" sz="1400" dirty="0">
+                <a:solidFill>
+                  <a:schemeClr val="accent6">
+                    <a:lumMod val="10000"/>
+                  </a:schemeClr>
+                </a:solidFill>
+                <a:latin typeface="Consolas" panose="020B0609020204030204" pitchFamily="49" charset="0"/>
+                <a:ea typeface="Segoe UI" pitchFamily="34" charset="0"/>
+                <a:cs typeface="Courier New" panose="02070309020205020404" pitchFamily="49" charset="0"/>
+              </a:rPr>
+              <a:t>("Category").count()</a:t>
+            </a:r>
+          </a:p>
+          <a:p>
+            <a:pPr defTabSz="932472" fontAlgn="base">
+              <a:lnSpc>
+                <a:spcPct val="90000"/>
+              </a:lnSpc>
+              <a:spcBef>
+                <a:spcPct val="0"/>
+              </a:spcBef>
+              <a:spcAft>
+                <a:spcPct val="0"/>
+              </a:spcAft>
+            </a:pPr>
+            <a:endParaRPr lang="en-US" sz="1400" dirty="0">
+              <a:solidFill>
+                <a:schemeClr val="tx1"/>
+              </a:solidFill>
+              <a:latin typeface="Consolas" panose="020B0609020204030204" pitchFamily="49" charset="0"/>
+              <a:ea typeface="Segoe UI" pitchFamily="34" charset="0"/>
+              <a:cs typeface="Courier New" panose="02070309020205020404" pitchFamily="49" charset="0"/>
+            </a:endParaRPr>
+          </a:p>
+          <a:p>
+            <a:pPr defTabSz="932472" fontAlgn="base">
+              <a:lnSpc>
+                <a:spcPct val="90000"/>
+              </a:lnSpc>
+              <a:spcBef>
+                <a:spcPct val="0"/>
+              </a:spcBef>
+              <a:spcAft>
+                <a:spcPct val="0"/>
+              </a:spcAft>
+            </a:pPr>
+            <a:r>
+              <a:rPr lang="en-US" sz="1400" dirty="0">
+                <a:solidFill>
+                  <a:srgbClr val="008000"/>
+                </a:solidFill>
+                <a:latin typeface="Consolas" panose="020B0609020204030204" pitchFamily="49" charset="0"/>
+                <a:cs typeface="Courier New" panose="02070309020205020404" pitchFamily="49" charset="0"/>
+              </a:rPr>
+              <a:t># Display </a:t>
+            </a:r>
+            <a:r>
+              <a:rPr lang="en-US" sz="1400" dirty="0" err="1">
+                <a:solidFill>
+                  <a:srgbClr val="008000"/>
+                </a:solidFill>
+                <a:latin typeface="Consolas" panose="020B0609020204030204" pitchFamily="49" charset="0"/>
+                <a:cs typeface="Courier New" panose="02070309020205020404" pitchFamily="49" charset="0"/>
+              </a:rPr>
+              <a:t>dataframe</a:t>
+            </a:r>
+            <a:endParaRPr lang="en-US" sz="1400" dirty="0">
+              <a:solidFill>
+                <a:srgbClr val="008000"/>
+              </a:solidFill>
+              <a:latin typeface="Consolas" panose="020B0609020204030204" pitchFamily="49" charset="0"/>
+              <a:cs typeface="Courier New" panose="02070309020205020404" pitchFamily="49" charset="0"/>
+            </a:endParaRPr>
+          </a:p>
+          <a:p>
+            <a:pPr defTabSz="932472" fontAlgn="base">
+              <a:lnSpc>
+                <a:spcPct val="90000"/>
+              </a:lnSpc>
+              <a:spcBef>
+                <a:spcPct val="0"/>
+              </a:spcBef>
+              <a:spcAft>
+                <a:spcPct val="0"/>
+              </a:spcAft>
+            </a:pPr>
+            <a:r>
+              <a:rPr lang="en-US" sz="1400" dirty="0">
+                <a:solidFill>
+                  <a:schemeClr val="accent6">
+                    <a:lumMod val="10000"/>
+                  </a:schemeClr>
+                </a:solidFill>
+                <a:latin typeface="Consolas" panose="020B0609020204030204" pitchFamily="49" charset="0"/>
+                <a:ea typeface="Segoe UI" pitchFamily="34" charset="0"/>
+                <a:cs typeface="Courier New" panose="02070309020205020404" pitchFamily="49" charset="0"/>
+              </a:rPr>
+              <a:t>display(</a:t>
+            </a:r>
+            <a:r>
+              <a:rPr lang="en-US" sz="1400" dirty="0" err="1">
+                <a:solidFill>
+                  <a:schemeClr val="accent6">
+                    <a:lumMod val="10000"/>
+                  </a:schemeClr>
+                </a:solidFill>
+                <a:latin typeface="Consolas" panose="020B0609020204030204" pitchFamily="49" charset="0"/>
+                <a:ea typeface="Segoe UI" pitchFamily="34" charset="0"/>
+                <a:cs typeface="Courier New" panose="02070309020205020404" pitchFamily="49" charset="0"/>
+              </a:rPr>
+              <a:t>counts_df</a:t>
+            </a:r>
+            <a:r>
+              <a:rPr lang="en-US" sz="1400" dirty="0">
+                <a:solidFill>
+                  <a:schemeClr val="accent6">
+                    <a:lumMod val="10000"/>
+                  </a:schemeClr>
+                </a:solidFill>
+                <a:latin typeface="Consolas" panose="020B0609020204030204" pitchFamily="49" charset="0"/>
+                <a:ea typeface="Segoe UI" pitchFamily="34" charset="0"/>
+                <a:cs typeface="Courier New" panose="02070309020205020404" pitchFamily="49" charset="0"/>
+              </a:rPr>
+              <a:t>)</a:t>
+            </a:r>
+          </a:p>
+        </p:txBody>
+      </p:sp>
+      <p:graphicFrame>
+        <p:nvGraphicFramePr>
+          <p:cNvPr id="9" name="Table 8">
+            <a:extLst>
+              <a:ext uri="{FF2B5EF4-FFF2-40B4-BE49-F238E27FC236}">
+                <a16:creationId xmlns:a16="http://schemas.microsoft.com/office/drawing/2014/main" id="{051C38A5-F6DE-851C-C37C-06E599694BF4}"/>
+              </a:ext>
+            </a:extLst>
+          </p:cNvPr>
+          <p:cNvGraphicFramePr>
+            <a:graphicFrameLocks noGrp="1"/>
+          </p:cNvGraphicFramePr>
+          <p:nvPr/>
+        </p:nvGraphicFramePr>
+        <p:xfrm>
+          <a:off x="579438" y="4112236"/>
+          <a:ext cx="11020425" cy="1828800"/>
+        </p:xfrm>
+        <a:graphic>
+          <a:graphicData uri="http://schemas.openxmlformats.org/drawingml/2006/table">
+            <a:tbl>
+              <a:tblPr firstRow="1">
+                <a:tableStyleId>{616DA210-FB5B-4158-B5E0-FEB733F419BA}</a:tableStyleId>
+              </a:tblPr>
+              <a:tblGrid>
+                <a:gridCol w="5485756">
+                  <a:extLst>
+                    <a:ext uri="{9D8B030D-6E8A-4147-A177-3AD203B41FA5}">
+                      <a16:colId xmlns:a16="http://schemas.microsoft.com/office/drawing/2014/main" val="1465204520"/>
+                    </a:ext>
+                  </a:extLst>
+                </a:gridCol>
+                <a:gridCol w="5534669">
+                  <a:extLst>
+                    <a:ext uri="{9D8B030D-6E8A-4147-A177-3AD203B41FA5}">
+                      <a16:colId xmlns:a16="http://schemas.microsoft.com/office/drawing/2014/main" val="2229609619"/>
+                    </a:ext>
+                  </a:extLst>
+                </a:gridCol>
+              </a:tblGrid>
+              <a:tr h="0">
+                <a:tc>
+                  <a:txBody>
+                    <a:bodyPr/>
+                    <a:lstStyle/>
+                    <a:p>
+                      <a:pPr algn="l"/>
+                      <a:r>
+                        <a:rPr lang="en-US" sz="1800" b="0" dirty="0">
+                          <a:solidFill>
+                            <a:schemeClr val="tx1"/>
+                          </a:solidFill>
+                          <a:effectLst/>
+                          <a:latin typeface="+mj-lt"/>
+                        </a:rPr>
+                        <a:t>Category</a:t>
+                      </a:r>
+                    </a:p>
+                  </a:txBody>
+                  <a:tcPr anchor="ctr">
+                    <a:lnL w="6350" cap="flat" cmpd="sng" algn="ctr">
+                      <a:solidFill>
+                        <a:schemeClr val="bg1">
+                          <a:lumMod val="50000"/>
+                        </a:schemeClr>
+                      </a:solidFill>
+                      <a:prstDash val="solid"/>
+                      <a:round/>
+                      <a:headEnd type="none" w="med" len="med"/>
+                      <a:tailEnd type="none" w="med" len="med"/>
+                    </a:lnL>
+                    <a:lnR w="19050" cap="flat" cmpd="sng" algn="ctr">
+                      <a:solidFill>
+                        <a:schemeClr val="bg1">
+                          <a:lumMod val="75000"/>
+                        </a:schemeClr>
+                      </a:solidFill>
+                      <a:prstDash val="solid"/>
+                      <a:round/>
+                      <a:headEnd type="none" w="med" len="med"/>
+                      <a:tailEnd type="none" w="med" len="med"/>
+                    </a:lnR>
+                    <a:lnT w="6350" cap="flat" cmpd="sng" algn="ctr">
+                      <a:solidFill>
+                        <a:schemeClr val="bg1">
+                          <a:lumMod val="50000"/>
+                        </a:schemeClr>
+                      </a:solidFill>
+                      <a:prstDash val="solid"/>
+                      <a:round/>
+                      <a:headEnd type="none" w="med" len="med"/>
+                      <a:tailEnd type="none" w="med" len="med"/>
+                    </a:lnT>
+                    <a:lnB w="6350" cap="flat" cmpd="sng" algn="ctr">
+                      <a:noFill/>
+                      <a:prstDash val="solid"/>
+                      <a:round/>
+                      <a:headEnd type="none" w="med" len="med"/>
+                      <a:tailEnd type="none" w="med" len="med"/>
+                    </a:lnB>
+                    <a:lnTlToBr w="12700" cmpd="sng">
+                      <a:noFill/>
+                      <a:prstDash val="solid"/>
+                    </a:lnTlToBr>
+                    <a:lnBlToTr w="12700" cmpd="sng">
+                      <a:noFill/>
+                      <a:prstDash val="solid"/>
+                    </a:lnBlToTr>
+                    <a:solidFill>
+                      <a:srgbClr val="FFA38B"/>
+                    </a:solidFill>
+                  </a:tcPr>
+                </a:tc>
+                <a:tc>
+                  <a:txBody>
+                    <a:bodyPr/>
+                    <a:lstStyle/>
+                    <a:p>
+                      <a:pPr algn="l"/>
+                      <a:r>
+                        <a:rPr lang="en-US" sz="1800" b="0" dirty="0">
+                          <a:solidFill>
+                            <a:schemeClr val="tx1"/>
+                          </a:solidFill>
+                          <a:effectLst/>
+                          <a:latin typeface="+mj-lt"/>
+                        </a:rPr>
+                        <a:t>count</a:t>
+                      </a:r>
+                    </a:p>
+                  </a:txBody>
+                  <a:tcPr anchor="ctr">
+                    <a:lnL w="19050" cap="flat" cmpd="sng" algn="ctr">
+                      <a:solidFill>
+                        <a:schemeClr val="bg1">
+                          <a:lumMod val="75000"/>
+                        </a:schemeClr>
+                      </a:solidFill>
+                      <a:prstDash val="solid"/>
+                      <a:round/>
+                      <a:headEnd type="none" w="med" len="med"/>
+                      <a:tailEnd type="none" w="med" len="med"/>
+                    </a:lnL>
+                    <a:lnR w="6350" cap="flat" cmpd="sng" algn="ctr">
+                      <a:solidFill>
+                        <a:schemeClr val="bg1">
+                          <a:lumMod val="50000"/>
+                        </a:schemeClr>
+                      </a:solidFill>
+                      <a:prstDash val="solid"/>
+                      <a:round/>
+                      <a:headEnd type="none" w="med" len="med"/>
+                      <a:tailEnd type="none" w="med" len="med"/>
+                    </a:lnR>
+                    <a:lnT w="6350" cap="flat" cmpd="sng" algn="ctr">
+                      <a:solidFill>
+                        <a:schemeClr val="bg1">
+                          <a:lumMod val="50000"/>
+                        </a:schemeClr>
+                      </a:solidFill>
+                      <a:prstDash val="solid"/>
+                      <a:round/>
+                      <a:headEnd type="none" w="med" len="med"/>
+                      <a:tailEnd type="none" w="med" len="med"/>
+                    </a:lnT>
+                    <a:lnB w="6350" cap="flat" cmpd="sng" algn="ctr">
+                      <a:noFill/>
+                      <a:prstDash val="solid"/>
+                      <a:round/>
+                      <a:headEnd type="none" w="med" len="med"/>
+                      <a:tailEnd type="none" w="med" len="med"/>
+                    </a:lnB>
+                    <a:lnTlToBr w="12700" cmpd="sng">
+                      <a:noFill/>
+                      <a:prstDash val="solid"/>
+                    </a:lnTlToBr>
+                    <a:lnBlToTr w="12700" cmpd="sng">
+                      <a:noFill/>
+                      <a:prstDash val="solid"/>
+                    </a:lnBlToTr>
+                    <a:solidFill>
+                      <a:srgbClr val="D988DC"/>
+                    </a:solidFill>
+                  </a:tcPr>
+                </a:tc>
+                <a:extLst>
+                  <a:ext uri="{0D108BD9-81ED-4DB2-BD59-A6C34878D82A}">
+                    <a16:rowId xmlns:a16="http://schemas.microsoft.com/office/drawing/2014/main" val="4108471226"/>
+                  </a:ext>
+                </a:extLst>
+              </a:tr>
+              <a:tr h="365760">
+                <a:tc>
+                  <a:txBody>
+                    <a:bodyPr/>
+                    <a:lstStyle/>
+                    <a:p>
+                      <a:r>
+                        <a:rPr lang="en-US" sz="1600" dirty="0">
+                          <a:solidFill>
+                            <a:schemeClr val="tx1"/>
+                          </a:solidFill>
+                          <a:effectLst/>
+                        </a:rPr>
+                        <a:t>Headsets</a:t>
+                      </a:r>
+                    </a:p>
+                  </a:txBody>
+                  <a:tcPr anchor="ctr">
+                    <a:lnL w="6350" cap="flat" cmpd="sng" algn="ctr">
+                      <a:solidFill>
+                        <a:schemeClr val="bg1">
+                          <a:lumMod val="50000"/>
+                        </a:schemeClr>
+                      </a:solidFill>
+                      <a:prstDash val="solid"/>
+                      <a:round/>
+                      <a:headEnd type="none" w="med" len="med"/>
+                      <a:tailEnd type="none" w="med" len="med"/>
+                    </a:lnL>
+                    <a:lnR w="6350" cap="flat" cmpd="sng" algn="ctr">
+                      <a:solidFill>
+                        <a:schemeClr val="bg1">
+                          <a:lumMod val="50000"/>
+                        </a:schemeClr>
+                      </a:solidFill>
+                      <a:prstDash val="solid"/>
+                      <a:round/>
+                      <a:headEnd type="none" w="med" len="med"/>
+                      <a:tailEnd type="none" w="med" len="med"/>
+                    </a:lnR>
+                    <a:lnT w="6350" cap="flat" cmpd="sng" algn="ctr">
+                      <a:noFill/>
+                      <a:prstDash val="solid"/>
+                      <a:round/>
+                      <a:headEnd type="none" w="med" len="med"/>
+                      <a:tailEnd type="none" w="med" len="med"/>
+                    </a:lnT>
+                    <a:lnB w="6350" cap="flat" cmpd="sng" algn="ctr">
+                      <a:solidFill>
+                        <a:schemeClr val="bg1">
+                          <a:lumMod val="50000"/>
+                        </a:schemeClr>
+                      </a:solidFill>
+                      <a:prstDash val="solid"/>
+                      <a:round/>
+                      <a:headEnd type="none" w="med" len="med"/>
+                      <a:tailEnd type="none" w="med" len="med"/>
+                    </a:lnB>
+                    <a:lnTlToBr w="12700" cmpd="sng">
+                      <a:noFill/>
+                      <a:prstDash val="solid"/>
+                    </a:lnTlToBr>
+                    <a:lnBlToTr w="12700" cmpd="sng">
+                      <a:noFill/>
+                      <a:prstDash val="solid"/>
+                    </a:lnBlToTr>
+                    <a:noFill/>
+                  </a:tcPr>
+                </a:tc>
+                <a:tc>
+                  <a:txBody>
+                    <a:bodyPr/>
+                    <a:lstStyle/>
+                    <a:p>
+                      <a:r>
+                        <a:rPr lang="en-US" sz="1600" dirty="0">
+                          <a:solidFill>
+                            <a:schemeClr val="tx1"/>
+                          </a:solidFill>
+                          <a:effectLst/>
+                        </a:rPr>
+                        <a:t>3</a:t>
+                      </a:r>
+                    </a:p>
+                  </a:txBody>
+                  <a:tcPr anchor="ctr">
+                    <a:lnL w="6350" cap="flat" cmpd="sng" algn="ctr">
+                      <a:solidFill>
+                        <a:schemeClr val="bg1">
+                          <a:lumMod val="50000"/>
+                        </a:schemeClr>
+                      </a:solidFill>
+                      <a:prstDash val="solid"/>
+                      <a:round/>
+                      <a:headEnd type="none" w="med" len="med"/>
+                      <a:tailEnd type="none" w="med" len="med"/>
+                    </a:lnL>
+                    <a:lnR w="6350" cap="flat" cmpd="sng" algn="ctr">
+                      <a:solidFill>
+                        <a:schemeClr val="bg1">
+                          <a:lumMod val="50000"/>
+                        </a:schemeClr>
+                      </a:solidFill>
+                      <a:prstDash val="solid"/>
+                      <a:round/>
+                      <a:headEnd type="none" w="med" len="med"/>
+                      <a:tailEnd type="none" w="med" len="med"/>
+                    </a:lnR>
+                    <a:lnT w="6350" cap="flat" cmpd="sng" algn="ctr">
+                      <a:noFill/>
+                      <a:prstDash val="solid"/>
+                      <a:round/>
+                      <a:headEnd type="none" w="med" len="med"/>
+                      <a:tailEnd type="none" w="med" len="med"/>
+                    </a:lnT>
+                    <a:lnB w="6350" cap="flat" cmpd="sng" algn="ctr">
+                      <a:solidFill>
+                        <a:schemeClr val="bg1">
+                          <a:lumMod val="50000"/>
+                        </a:schemeClr>
+                      </a:solidFill>
+                      <a:prstDash val="solid"/>
+                      <a:round/>
+                      <a:headEnd type="none" w="med" len="med"/>
+                      <a:tailEnd type="none" w="med" len="med"/>
+                    </a:lnB>
+                    <a:lnTlToBr w="12700" cmpd="sng">
+                      <a:noFill/>
+                      <a:prstDash val="solid"/>
+                    </a:lnTlToBr>
+                    <a:lnBlToTr w="12700" cmpd="sng">
+                      <a:noFill/>
+                      <a:prstDash val="solid"/>
+                    </a:lnBlToTr>
+                    <a:noFill/>
+                  </a:tcPr>
+                </a:tc>
+                <a:extLst>
+                  <a:ext uri="{0D108BD9-81ED-4DB2-BD59-A6C34878D82A}">
+                    <a16:rowId xmlns:a16="http://schemas.microsoft.com/office/drawing/2014/main" val="4115661179"/>
+                  </a:ext>
+                </a:extLst>
+              </a:tr>
+              <a:tr h="365760">
+                <a:tc>
+                  <a:txBody>
+                    <a:bodyPr/>
+                    <a:lstStyle/>
+                    <a:p>
+                      <a:r>
+                        <a:rPr lang="en-US" sz="1600" dirty="0">
+                          <a:solidFill>
+                            <a:schemeClr val="tx1"/>
+                          </a:solidFill>
+                          <a:effectLst/>
+                        </a:rPr>
+                        <a:t>Wheels</a:t>
+                      </a:r>
+                    </a:p>
+                  </a:txBody>
+                  <a:tcPr anchor="ctr">
+                    <a:lnL w="6350" cap="flat" cmpd="sng" algn="ctr">
+                      <a:solidFill>
+                        <a:schemeClr val="bg1">
+                          <a:lumMod val="50000"/>
+                        </a:schemeClr>
+                      </a:solidFill>
+                      <a:prstDash val="solid"/>
+                      <a:round/>
+                      <a:headEnd type="none" w="med" len="med"/>
+                      <a:tailEnd type="none" w="med" len="med"/>
+                    </a:lnL>
+                    <a:lnR w="6350" cap="flat" cmpd="sng" algn="ctr">
+                      <a:solidFill>
+                        <a:schemeClr val="bg1">
+                          <a:lumMod val="50000"/>
+                        </a:schemeClr>
+                      </a:solidFill>
+                      <a:prstDash val="solid"/>
+                      <a:round/>
+                      <a:headEnd type="none" w="med" len="med"/>
+                      <a:tailEnd type="none" w="med" len="med"/>
+                    </a:lnR>
+                    <a:lnT w="6350" cap="flat" cmpd="sng" algn="ctr">
+                      <a:solidFill>
+                        <a:schemeClr val="bg1">
+                          <a:lumMod val="50000"/>
+                        </a:schemeClr>
+                      </a:solidFill>
+                      <a:prstDash val="solid"/>
+                      <a:round/>
+                      <a:headEnd type="none" w="med" len="med"/>
+                      <a:tailEnd type="none" w="med" len="med"/>
+                    </a:lnT>
+                    <a:lnB w="6350" cap="flat" cmpd="sng" algn="ctr">
+                      <a:solidFill>
+                        <a:schemeClr val="bg1">
+                          <a:lumMod val="50000"/>
+                        </a:schemeClr>
+                      </a:solidFill>
+                      <a:prstDash val="solid"/>
+                      <a:round/>
+                      <a:headEnd type="none" w="med" len="med"/>
+                      <a:tailEnd type="none" w="med" len="med"/>
+                    </a:lnB>
+                    <a:lnTlToBr w="12700" cmpd="sng">
+                      <a:noFill/>
+                      <a:prstDash val="solid"/>
+                    </a:lnTlToBr>
+                    <a:lnBlToTr w="12700" cmpd="sng">
+                      <a:noFill/>
+                      <a:prstDash val="solid"/>
+                    </a:lnBlToTr>
+                    <a:noFill/>
+                  </a:tcPr>
+                </a:tc>
+                <a:tc>
+                  <a:txBody>
+                    <a:bodyPr/>
+                    <a:lstStyle/>
+                    <a:p>
+                      <a:r>
+                        <a:rPr lang="en-US" sz="1600" dirty="0">
+                          <a:solidFill>
+                            <a:schemeClr val="tx1"/>
+                          </a:solidFill>
+                          <a:effectLst/>
+                        </a:rPr>
+                        <a:t>14</a:t>
+                      </a:r>
+                    </a:p>
+                  </a:txBody>
+                  <a:tcPr anchor="ctr">
+                    <a:lnL w="6350" cap="flat" cmpd="sng" algn="ctr">
+                      <a:solidFill>
+                        <a:schemeClr val="bg1">
+                          <a:lumMod val="50000"/>
+                        </a:schemeClr>
+                      </a:solidFill>
+                      <a:prstDash val="solid"/>
+                      <a:round/>
+                      <a:headEnd type="none" w="med" len="med"/>
+                      <a:tailEnd type="none" w="med" len="med"/>
+                    </a:lnL>
+                    <a:lnR w="6350" cap="flat" cmpd="sng" algn="ctr">
+                      <a:solidFill>
+                        <a:schemeClr val="bg1">
+                          <a:lumMod val="50000"/>
+                        </a:schemeClr>
+                      </a:solidFill>
+                      <a:prstDash val="solid"/>
+                      <a:round/>
+                      <a:headEnd type="none" w="med" len="med"/>
+                      <a:tailEnd type="none" w="med" len="med"/>
+                    </a:lnR>
+                    <a:lnT w="6350" cap="flat" cmpd="sng" algn="ctr">
+                      <a:solidFill>
+                        <a:schemeClr val="bg1">
+                          <a:lumMod val="50000"/>
+                        </a:schemeClr>
+                      </a:solidFill>
+                      <a:prstDash val="solid"/>
+                      <a:round/>
+                      <a:headEnd type="none" w="med" len="med"/>
+                      <a:tailEnd type="none" w="med" len="med"/>
+                    </a:lnT>
+                    <a:lnB w="6350" cap="flat" cmpd="sng" algn="ctr">
+                      <a:solidFill>
+                        <a:schemeClr val="bg1">
+                          <a:lumMod val="50000"/>
+                        </a:schemeClr>
+                      </a:solidFill>
+                      <a:prstDash val="solid"/>
+                      <a:round/>
+                      <a:headEnd type="none" w="med" len="med"/>
+                      <a:tailEnd type="none" w="med" len="med"/>
+                    </a:lnB>
+                    <a:lnTlToBr w="12700" cmpd="sng">
+                      <a:noFill/>
+                      <a:prstDash val="solid"/>
+                    </a:lnTlToBr>
+                    <a:lnBlToTr w="12700" cmpd="sng">
+                      <a:noFill/>
+                      <a:prstDash val="solid"/>
+                    </a:lnBlToTr>
+                    <a:noFill/>
+                  </a:tcPr>
+                </a:tc>
+                <a:extLst>
+                  <a:ext uri="{0D108BD9-81ED-4DB2-BD59-A6C34878D82A}">
+                    <a16:rowId xmlns:a16="http://schemas.microsoft.com/office/drawing/2014/main" val="2369567092"/>
+                  </a:ext>
+                </a:extLst>
+              </a:tr>
+              <a:tr h="365760">
+                <a:tc>
+                  <a:txBody>
+                    <a:bodyPr/>
+                    <a:lstStyle/>
+                    <a:p>
+                      <a:r>
+                        <a:rPr lang="en-US" sz="1600" dirty="0">
+                          <a:solidFill>
+                            <a:schemeClr val="tx1"/>
+                          </a:solidFill>
+                          <a:effectLst/>
+                        </a:rPr>
+                        <a:t>Mountain Bikes</a:t>
+                      </a:r>
+                    </a:p>
+                  </a:txBody>
+                  <a:tcPr anchor="ctr">
+                    <a:lnL w="6350" cap="flat" cmpd="sng" algn="ctr">
+                      <a:solidFill>
+                        <a:schemeClr val="bg1">
+                          <a:lumMod val="50000"/>
+                        </a:schemeClr>
+                      </a:solidFill>
+                      <a:prstDash val="solid"/>
+                      <a:round/>
+                      <a:headEnd type="none" w="med" len="med"/>
+                      <a:tailEnd type="none" w="med" len="med"/>
+                    </a:lnL>
+                    <a:lnR w="6350" cap="flat" cmpd="sng" algn="ctr">
+                      <a:solidFill>
+                        <a:schemeClr val="bg1">
+                          <a:lumMod val="50000"/>
+                        </a:schemeClr>
+                      </a:solidFill>
+                      <a:prstDash val="solid"/>
+                      <a:round/>
+                      <a:headEnd type="none" w="med" len="med"/>
+                      <a:tailEnd type="none" w="med" len="med"/>
+                    </a:lnR>
+                    <a:lnT w="6350" cap="flat" cmpd="sng" algn="ctr">
+                      <a:solidFill>
+                        <a:schemeClr val="bg1">
+                          <a:lumMod val="50000"/>
+                        </a:schemeClr>
+                      </a:solidFill>
+                      <a:prstDash val="solid"/>
+                      <a:round/>
+                      <a:headEnd type="none" w="med" len="med"/>
+                      <a:tailEnd type="none" w="med" len="med"/>
+                    </a:lnT>
+                    <a:lnB w="6350" cap="flat" cmpd="sng" algn="ctr">
+                      <a:solidFill>
+                        <a:schemeClr val="bg1">
+                          <a:lumMod val="50000"/>
+                        </a:schemeClr>
+                      </a:solidFill>
+                      <a:prstDash val="solid"/>
+                      <a:round/>
+                      <a:headEnd type="none" w="med" len="med"/>
+                      <a:tailEnd type="none" w="med" len="med"/>
+                    </a:lnB>
+                    <a:lnTlToBr w="12700" cmpd="sng">
+                      <a:noFill/>
+                      <a:prstDash val="solid"/>
+                    </a:lnTlToBr>
+                    <a:lnBlToTr w="12700" cmpd="sng">
+                      <a:noFill/>
+                      <a:prstDash val="solid"/>
+                    </a:lnBlToTr>
+                    <a:noFill/>
+                  </a:tcPr>
+                </a:tc>
+                <a:tc>
+                  <a:txBody>
+                    <a:bodyPr/>
+                    <a:lstStyle/>
+                    <a:p>
+                      <a:r>
+                        <a:rPr lang="en-US" sz="1600" dirty="0">
+                          <a:solidFill>
+                            <a:schemeClr val="tx1"/>
+                          </a:solidFill>
+                          <a:effectLst/>
+                        </a:rPr>
+                        <a:t>32</a:t>
+                      </a:r>
+                    </a:p>
+                  </a:txBody>
+                  <a:tcPr anchor="ctr">
+                    <a:lnL w="6350" cap="flat" cmpd="sng" algn="ctr">
+                      <a:solidFill>
+                        <a:schemeClr val="bg1">
+                          <a:lumMod val="50000"/>
+                        </a:schemeClr>
+                      </a:solidFill>
+                      <a:prstDash val="solid"/>
+                      <a:round/>
+                      <a:headEnd type="none" w="med" len="med"/>
+                      <a:tailEnd type="none" w="med" len="med"/>
+                    </a:lnL>
+                    <a:lnR w="6350" cap="flat" cmpd="sng" algn="ctr">
+                      <a:solidFill>
+                        <a:schemeClr val="bg1">
+                          <a:lumMod val="50000"/>
+                        </a:schemeClr>
+                      </a:solidFill>
+                      <a:prstDash val="solid"/>
+                      <a:round/>
+                      <a:headEnd type="none" w="med" len="med"/>
+                      <a:tailEnd type="none" w="med" len="med"/>
+                    </a:lnR>
+                    <a:lnT w="6350" cap="flat" cmpd="sng" algn="ctr">
+                      <a:solidFill>
+                        <a:schemeClr val="bg1">
+                          <a:lumMod val="50000"/>
+                        </a:schemeClr>
+                      </a:solidFill>
+                      <a:prstDash val="solid"/>
+                      <a:round/>
+                      <a:headEnd type="none" w="med" len="med"/>
+                      <a:tailEnd type="none" w="med" len="med"/>
+                    </a:lnT>
+                    <a:lnB w="6350" cap="flat" cmpd="sng" algn="ctr">
+                      <a:solidFill>
+                        <a:schemeClr val="bg1">
+                          <a:lumMod val="50000"/>
+                        </a:schemeClr>
+                      </a:solidFill>
+                      <a:prstDash val="solid"/>
+                      <a:round/>
+                      <a:headEnd type="none" w="med" len="med"/>
+                      <a:tailEnd type="none" w="med" len="med"/>
+                    </a:lnB>
+                    <a:lnTlToBr w="12700" cmpd="sng">
+                      <a:noFill/>
+                      <a:prstDash val="solid"/>
+                    </a:lnTlToBr>
+                    <a:lnBlToTr w="12700" cmpd="sng">
+                      <a:noFill/>
+                      <a:prstDash val="solid"/>
+                    </a:lnBlToTr>
+                    <a:noFill/>
+                  </a:tcPr>
+                </a:tc>
+                <a:extLst>
+                  <a:ext uri="{0D108BD9-81ED-4DB2-BD59-A6C34878D82A}">
+                    <a16:rowId xmlns:a16="http://schemas.microsoft.com/office/drawing/2014/main" val="641135237"/>
+                  </a:ext>
+                </a:extLst>
+              </a:tr>
+              <a:tr h="365760">
+                <a:tc>
+                  <a:txBody>
+                    <a:bodyPr/>
+                    <a:lstStyle/>
+                    <a:p>
+                      <a:r>
+                        <a:rPr lang="en-US" sz="1600" dirty="0">
+                          <a:solidFill>
+                            <a:schemeClr val="tx1"/>
+                          </a:solidFill>
+                          <a:effectLst/>
+                        </a:rPr>
+                        <a:t>...</a:t>
+                      </a:r>
+                    </a:p>
+                  </a:txBody>
+                  <a:tcPr anchor="ctr">
+                    <a:lnL w="6350" cap="flat" cmpd="sng" algn="ctr">
+                      <a:solidFill>
+                        <a:schemeClr val="bg1">
+                          <a:lumMod val="50000"/>
+                        </a:schemeClr>
+                      </a:solidFill>
+                      <a:prstDash val="solid"/>
+                      <a:round/>
+                      <a:headEnd type="none" w="med" len="med"/>
+                      <a:tailEnd type="none" w="med" len="med"/>
+                    </a:lnL>
+                    <a:lnR w="6350" cap="flat" cmpd="sng" algn="ctr">
+                      <a:solidFill>
+                        <a:schemeClr val="bg1">
+                          <a:lumMod val="50000"/>
+                        </a:schemeClr>
+                      </a:solidFill>
+                      <a:prstDash val="solid"/>
+                      <a:round/>
+                      <a:headEnd type="none" w="med" len="med"/>
+                      <a:tailEnd type="none" w="med" len="med"/>
+                    </a:lnR>
+                    <a:lnT w="6350" cap="flat" cmpd="sng" algn="ctr">
+                      <a:solidFill>
+                        <a:schemeClr val="bg1">
+                          <a:lumMod val="50000"/>
+                        </a:schemeClr>
+                      </a:solidFill>
+                      <a:prstDash val="solid"/>
+                      <a:round/>
+                      <a:headEnd type="none" w="med" len="med"/>
+                      <a:tailEnd type="none" w="med" len="med"/>
+                    </a:lnT>
+                    <a:lnB w="6350" cap="flat" cmpd="sng" algn="ctr">
+                      <a:solidFill>
+                        <a:schemeClr val="bg1">
+                          <a:lumMod val="50000"/>
+                        </a:schemeClr>
+                      </a:solidFill>
+                      <a:prstDash val="solid"/>
+                      <a:round/>
+                      <a:headEnd type="none" w="med" len="med"/>
+                      <a:tailEnd type="none" w="med" len="med"/>
+                    </a:lnB>
+                    <a:lnTlToBr w="12700" cmpd="sng">
+                      <a:noFill/>
+                      <a:prstDash val="solid"/>
+                    </a:lnTlToBr>
+                    <a:lnBlToTr w="12700" cmpd="sng">
+                      <a:noFill/>
+                      <a:prstDash val="solid"/>
+                    </a:lnBlToTr>
+                    <a:noFill/>
+                  </a:tcPr>
+                </a:tc>
+                <a:tc>
+                  <a:txBody>
+                    <a:bodyPr/>
+                    <a:lstStyle/>
+                    <a:p>
+                      <a:r>
+                        <a:rPr lang="en-US" sz="1600" dirty="0">
+                          <a:solidFill>
+                            <a:schemeClr val="tx1"/>
+                          </a:solidFill>
+                          <a:effectLst/>
+                        </a:rPr>
+                        <a:t>...</a:t>
+                      </a:r>
+                    </a:p>
+                  </a:txBody>
+                  <a:tcPr anchor="ctr">
+                    <a:lnL w="6350" cap="flat" cmpd="sng" algn="ctr">
+                      <a:solidFill>
+                        <a:schemeClr val="bg1">
+                          <a:lumMod val="50000"/>
+                        </a:schemeClr>
+                      </a:solidFill>
+                      <a:prstDash val="solid"/>
+                      <a:round/>
+                      <a:headEnd type="none" w="med" len="med"/>
+                      <a:tailEnd type="none" w="med" len="med"/>
+                    </a:lnL>
+                    <a:lnR w="6350" cap="flat" cmpd="sng" algn="ctr">
+                      <a:solidFill>
+                        <a:schemeClr val="bg1">
+                          <a:lumMod val="50000"/>
+                        </a:schemeClr>
+                      </a:solidFill>
+                      <a:prstDash val="solid"/>
+                      <a:round/>
+                      <a:headEnd type="none" w="med" len="med"/>
+                      <a:tailEnd type="none" w="med" len="med"/>
+                    </a:lnR>
+                    <a:lnT w="6350" cap="flat" cmpd="sng" algn="ctr">
+                      <a:solidFill>
+                        <a:schemeClr val="bg1">
+                          <a:lumMod val="50000"/>
+                        </a:schemeClr>
+                      </a:solidFill>
+                      <a:prstDash val="solid"/>
+                      <a:round/>
+                      <a:headEnd type="none" w="med" len="med"/>
+                      <a:tailEnd type="none" w="med" len="med"/>
+                    </a:lnT>
+                    <a:lnB w="6350" cap="flat" cmpd="sng" algn="ctr">
+                      <a:solidFill>
+                        <a:schemeClr val="bg1">
+                          <a:lumMod val="50000"/>
+                        </a:schemeClr>
+                      </a:solidFill>
+                      <a:prstDash val="solid"/>
+                      <a:round/>
+                      <a:headEnd type="none" w="med" len="med"/>
+                      <a:tailEnd type="none" w="med" len="med"/>
+                    </a:lnB>
+                    <a:lnTlToBr w="12700" cmpd="sng">
+                      <a:noFill/>
+                      <a:prstDash val="solid"/>
+                    </a:lnTlToBr>
+                    <a:lnBlToTr w="12700" cmpd="sng">
+                      <a:noFill/>
+                      <a:prstDash val="solid"/>
+                    </a:lnBlToTr>
+                    <a:noFill/>
+                  </a:tcPr>
+                </a:tc>
+                <a:extLst>
+                  <a:ext uri="{0D108BD9-81ED-4DB2-BD59-A6C34878D82A}">
+                    <a16:rowId xmlns:a16="http://schemas.microsoft.com/office/drawing/2014/main" val="304539739"/>
+                  </a:ext>
+                </a:extLst>
+              </a:tr>
+            </a:tbl>
+          </a:graphicData>
+        </a:graphic>
+      </p:graphicFrame>
+    </p:spTree>
+    <p:extLst>
+      <p:ext uri="{BB962C8B-B14F-4D97-AF65-F5344CB8AC3E}">
+        <p14:creationId xmlns:p14="http://schemas.microsoft.com/office/powerpoint/2010/main" val="1195666368"/>
+      </p:ext>
+    </p:extLst>
+  </p:cSld>
+  <p:clrMapOvr>
+    <a:masterClrMapping/>
+  </p:clrMapOvr>
+  <p:transition>
+    <p:fade/>
+  </p:transition>
+</p:sld>
+</file>
+
+<file path=ppt/slides/slide17.xml><?xml version="1.0" encoding="utf-8"?>
+<p:sld xmlns:a="http://schemas.openxmlformats.org/drawingml/2006/main" xmlns:r="http://schemas.openxmlformats.org/officeDocument/2006/relationships" xmlns:p="http://schemas.openxmlformats.org/presentationml/2006/main">
+  <p:cSld>
+    <p:spTree>
+      <p:nvGrpSpPr>
+        <p:cNvPr id="1" name=""/>
+        <p:cNvGrpSpPr/>
+        <p:nvPr/>
+      </p:nvGrpSpPr>
+      <p:grpSpPr>
+        <a:xfrm>
+          <a:off x="0" y="0"/>
+          <a:ext cx="0" cy="0"/>
+          <a:chOff x="0" y="0"/>
+          <a:chExt cx="0" cy="0"/>
+        </a:xfrm>
+      </p:grpSpPr>
+      <p:sp>
+        <p:nvSpPr>
+          <p:cNvPr id="5" name="Text Placeholder 4">
+            <a:extLst>
+              <a:ext uri="{FF2B5EF4-FFF2-40B4-BE49-F238E27FC236}">
+                <a16:creationId xmlns:a16="http://schemas.microsoft.com/office/drawing/2014/main" id="{519B59FC-2420-9BD2-F15A-24F02ADDF794}"/>
+              </a:ext>
+            </a:extLst>
+          </p:cNvPr>
+          <p:cNvSpPr>
+            <a:spLocks noGrp="1"/>
+          </p:cNvSpPr>
+          <p:nvPr>
+            <p:ph type="title" idx="4294967295"/>
+          </p:nvPr>
+        </p:nvSpPr>
+        <p:spPr>
+          <a:xfrm>
+            <a:off x="0" y="0"/>
+            <a:ext cx="4889500" cy="569913"/>
+          </a:xfrm>
+          <a:prstGeom prst="rect">
+            <a:avLst/>
+          </a:prstGeom>
+          <a:gradFill flip="none" rotWithShape="1">
+            <a:gsLst>
+              <a:gs pos="0">
+                <a:srgbClr val="000000"/>
+              </a:gs>
+              <a:gs pos="92000">
+                <a:srgbClr val="000000"/>
+              </a:gs>
+              <a:gs pos="92000">
+                <a:schemeClr val="accent3"/>
+              </a:gs>
+            </a:gsLst>
+            <a:lin ang="16200000" scaled="1"/>
+            <a:tileRect/>
+          </a:gradFill>
+          <a:ln>
+            <a:noFill/>
+            <a:prstDash/>
+          </a:ln>
+          <a:effectLst/>
+        </p:spPr>
+        <p:txBody>
+          <a:bodyPr rot="0" spcFirstLastPara="0" vertOverflow="overflow" horzOverflow="overflow" vert="horz" wrap="square" lIns="585216" tIns="91440" rIns="0" bIns="45720" numCol="1" spcCol="0" rtlCol="0" fromWordArt="0" anchor="t" anchorCtr="0" forceAA="0" compatLnSpc="1">
+            <a:prstTxWarp prst="textNoShape">
+              <a:avLst/>
+            </a:prstTxWarp>
+            <a:spAutoFit/>
+          </a:bodyPr>
+          <a:lstStyle/>
+          <a:p>
+            <a:pPr marL="0" marR="0" lvl="0" indent="0" algn="l" defTabSz="932742" rtl="0" eaLnBrk="1" fontAlgn="auto" latinLnBrk="0" hangingPunct="1">
+              <a:lnSpc>
+                <a:spcPct val="100000"/>
+              </a:lnSpc>
+              <a:spcBef>
+                <a:spcPct val="20000"/>
+              </a:spcBef>
+              <a:spcAft>
+                <a:spcPts val="0"/>
+              </a:spcAft>
+              <a:buClrTx/>
+              <a:buSzPct val="90000"/>
+              <a:buFont typeface="Arial" panose="020B0604020202020204" pitchFamily="34" charset="0"/>
+              <a:buNone/>
+              <a:tabLst/>
+              <a:defRPr/>
+            </a:pPr>
+            <a:r>
+              <a:rPr kumimoji="0" lang="en-IN" sz="2800" b="0" i="0" u="none" strike="noStrike" kern="1200" cap="none" spc="0" normalizeH="0" baseline="0" noProof="0">
+                <a:ln>
+                  <a:noFill/>
+                </a:ln>
+                <a:solidFill>
+                  <a:srgbClr val="FFFFFF"/>
+                </a:solidFill>
+                <a:effectLst/>
+                <a:uLnTx/>
+                <a:uFillTx/>
+                <a:latin typeface="+mj-lt"/>
+                <a:ea typeface="+mn-ea"/>
+                <a:cs typeface="Segoe UI" panose="020B0502040204020203" pitchFamily="34" charset="0"/>
+              </a:rPr>
+              <a:t>Analyze data with Spark </a:t>
+            </a:r>
+            <a:endParaRPr kumimoji="0" lang="en-IN" sz="2800" b="0" i="0" u="none" strike="noStrike" kern="1200" cap="none" spc="0" normalizeH="0" baseline="0" noProof="0" dirty="0">
+              <a:ln>
+                <a:noFill/>
+              </a:ln>
+              <a:solidFill>
+                <a:srgbClr val="FFFFFF"/>
+              </a:solidFill>
+              <a:effectLst/>
+              <a:uLnTx/>
+              <a:uFillTx/>
+              <a:latin typeface="+mj-lt"/>
+              <a:ea typeface="+mn-ea"/>
+              <a:cs typeface="Segoe UI" panose="020B0502040204020203" pitchFamily="34" charset="0"/>
+            </a:endParaRPr>
+          </a:p>
+        </p:txBody>
+      </p:sp>
+      <p:sp>
+        <p:nvSpPr>
+          <p:cNvPr id="8" name="Text Placeholder 7">
+            <a:extLst>
+              <a:ext uri="{FF2B5EF4-FFF2-40B4-BE49-F238E27FC236}">
+                <a16:creationId xmlns:a16="http://schemas.microsoft.com/office/drawing/2014/main" id="{4BBDE461-17C4-C56C-B420-92A4D562EAF7}"/>
+              </a:ext>
+            </a:extLst>
+          </p:cNvPr>
+          <p:cNvSpPr>
+            <a:spLocks noGrp="1"/>
+          </p:cNvSpPr>
+          <p:nvPr>
+            <p:ph type="body" sz="quarter" idx="11"/>
+          </p:nvPr>
+        </p:nvSpPr>
+        <p:spPr>
+          <a:xfrm>
+            <a:off x="579438" y="1084263"/>
+            <a:ext cx="11020425" cy="338554"/>
+          </a:xfrm>
+        </p:spPr>
+        <p:txBody>
+          <a:bodyPr>
+            <a:normAutofit fontScale="70000" lnSpcReduction="20000"/>
+          </a:bodyPr>
+          <a:lstStyle/>
+          <a:p>
+            <a:r>
+              <a:rPr lang="en-US" sz="2200" dirty="0">
+                <a:latin typeface="+mj-lt"/>
+              </a:rPr>
+              <a:t>Using SQL expressions in Spark</a:t>
+            </a:r>
+          </a:p>
+        </p:txBody>
+      </p:sp>
+      <p:sp>
+        <p:nvSpPr>
+          <p:cNvPr id="6" name="Rectangle 5">
+            <a:extLst>
+              <a:ext uri="{FF2B5EF4-FFF2-40B4-BE49-F238E27FC236}">
+                <a16:creationId xmlns:a16="http://schemas.microsoft.com/office/drawing/2014/main" id="{B08B46C0-E5DE-1DB7-FE64-A7B300DA4248}"/>
+              </a:ext>
+            </a:extLst>
+          </p:cNvPr>
+          <p:cNvSpPr/>
+          <p:nvPr/>
+        </p:nvSpPr>
+        <p:spPr bwMode="auto">
+          <a:xfrm>
+            <a:off x="579438" y="1519769"/>
+            <a:ext cx="11020425" cy="2173628"/>
+          </a:xfrm>
+          <a:prstGeom prst="rect">
+            <a:avLst/>
+          </a:prstGeom>
+          <a:noFill/>
+          <a:ln w="19050">
+            <a:solidFill>
+              <a:schemeClr val="accent4"/>
+            </a:solidFill>
+            <a:headEnd type="none" w="med" len="med"/>
+            <a:tailEnd type="none" w="med" len="med"/>
+          </a:ln>
+          <a:effectLst/>
+        </p:spPr>
+        <p:style>
+          <a:lnRef idx="1">
+            <a:schemeClr val="accent2"/>
+          </a:lnRef>
+          <a:fillRef idx="3">
+            <a:schemeClr val="accent2"/>
+          </a:fillRef>
+          <a:effectRef idx="2">
+            <a:schemeClr val="accent2"/>
+          </a:effectRef>
+          <a:fontRef idx="minor">
+            <a:schemeClr val="lt1"/>
+          </a:fontRef>
+        </p:style>
+        <p:txBody>
+          <a:bodyPr rot="0" spcFirstLastPara="0" vertOverflow="overflow" horzOverflow="overflow" vert="horz" wrap="square" lIns="182880" tIns="146304" rIns="182880" bIns="146304" numCol="1" spcCol="0" rtlCol="0" fromWordArt="0" anchor="t" anchorCtr="0" forceAA="0" compatLnSpc="1">
+            <a:prstTxWarp prst="textNoShape">
+              <a:avLst/>
+            </a:prstTxWarp>
+            <a:noAutofit/>
+          </a:bodyPr>
+          <a:lstStyle/>
+          <a:p>
+            <a:pPr defTabSz="932472" fontAlgn="base">
+              <a:lnSpc>
+                <a:spcPct val="90000"/>
+              </a:lnSpc>
+              <a:spcBef>
+                <a:spcPct val="0"/>
+              </a:spcBef>
+              <a:spcAft>
+                <a:spcPct val="0"/>
+              </a:spcAft>
+            </a:pPr>
+            <a:r>
+              <a:rPr lang="en-US" sz="1400" dirty="0">
+                <a:solidFill>
+                  <a:schemeClr val="accent6">
+                    <a:lumMod val="10000"/>
+                  </a:schemeClr>
+                </a:solidFill>
+                <a:latin typeface="Consolas" panose="020B0609020204030204" pitchFamily="49" charset="0"/>
+                <a:ea typeface="Segoe UI" pitchFamily="34" charset="0"/>
+                <a:cs typeface="Courier New" panose="02070309020205020404" pitchFamily="49" charset="0"/>
+              </a:rPr>
+              <a:t>%</a:t>
+            </a:r>
+            <a:r>
+              <a:rPr lang="en-US" sz="1400" dirty="0" err="1">
+                <a:solidFill>
+                  <a:schemeClr val="accent6">
+                    <a:lumMod val="10000"/>
+                  </a:schemeClr>
+                </a:solidFill>
+                <a:latin typeface="Consolas" panose="020B0609020204030204" pitchFamily="49" charset="0"/>
+                <a:ea typeface="Segoe UI" pitchFamily="34" charset="0"/>
+                <a:cs typeface="Courier New" panose="02070309020205020404" pitchFamily="49" charset="0"/>
+              </a:rPr>
+              <a:t>pyspark</a:t>
+            </a:r>
+            <a:endParaRPr lang="en-US" sz="1400" dirty="0">
+              <a:solidFill>
+                <a:schemeClr val="accent6">
+                  <a:lumMod val="10000"/>
+                </a:schemeClr>
+              </a:solidFill>
+              <a:latin typeface="Consolas" panose="020B0609020204030204" pitchFamily="49" charset="0"/>
+              <a:ea typeface="Segoe UI" pitchFamily="34" charset="0"/>
+              <a:cs typeface="Courier New" panose="02070309020205020404" pitchFamily="49" charset="0"/>
+            </a:endParaRPr>
+          </a:p>
+          <a:p>
+            <a:pPr defTabSz="932472" fontAlgn="base">
+              <a:lnSpc>
+                <a:spcPct val="90000"/>
+              </a:lnSpc>
+              <a:spcBef>
+                <a:spcPct val="0"/>
+              </a:spcBef>
+              <a:spcAft>
+                <a:spcPct val="0"/>
+              </a:spcAft>
+            </a:pPr>
+            <a:endParaRPr lang="en-US" sz="1400" dirty="0">
+              <a:solidFill>
+                <a:schemeClr val="tx1"/>
+              </a:solidFill>
+              <a:latin typeface="Consolas" panose="020B0609020204030204" pitchFamily="49" charset="0"/>
+              <a:ea typeface="Segoe UI" pitchFamily="34" charset="0"/>
+              <a:cs typeface="Courier New" panose="02070309020205020404" pitchFamily="49" charset="0"/>
+            </a:endParaRPr>
+          </a:p>
+          <a:p>
+            <a:pPr defTabSz="932472" fontAlgn="base">
+              <a:lnSpc>
+                <a:spcPct val="90000"/>
+              </a:lnSpc>
+              <a:spcBef>
+                <a:spcPct val="0"/>
+              </a:spcBef>
+              <a:spcAft>
+                <a:spcPct val="0"/>
+              </a:spcAft>
+            </a:pPr>
+            <a:r>
+              <a:rPr lang="en-US" sz="1400" dirty="0">
+                <a:solidFill>
+                  <a:srgbClr val="008000"/>
+                </a:solidFill>
+                <a:latin typeface="Consolas" panose="020B0609020204030204" pitchFamily="49" charset="0"/>
+                <a:ea typeface="Segoe UI" pitchFamily="34" charset="0"/>
+                <a:cs typeface="Courier New" panose="02070309020205020404" pitchFamily="49" charset="0"/>
+              </a:rPr>
+              <a:t># Create a table in the </a:t>
+            </a:r>
+            <a:r>
+              <a:rPr lang="en-US" sz="1400" dirty="0" err="1">
+                <a:solidFill>
+                  <a:srgbClr val="008000"/>
+                </a:solidFill>
+                <a:latin typeface="Consolas" panose="020B0609020204030204" pitchFamily="49" charset="0"/>
+                <a:ea typeface="Segoe UI" pitchFamily="34" charset="0"/>
+                <a:cs typeface="Courier New" panose="02070309020205020404" pitchFamily="49" charset="0"/>
+              </a:rPr>
+              <a:t>metastore</a:t>
+            </a:r>
+            <a:endParaRPr lang="en-US" sz="1400" dirty="0">
+              <a:solidFill>
+                <a:srgbClr val="008000"/>
+              </a:solidFill>
+              <a:latin typeface="Consolas" panose="020B0609020204030204" pitchFamily="49" charset="0"/>
+              <a:ea typeface="Segoe UI" pitchFamily="34" charset="0"/>
+              <a:cs typeface="Courier New" panose="02070309020205020404" pitchFamily="49" charset="0"/>
+            </a:endParaRPr>
+          </a:p>
+          <a:p>
+            <a:pPr defTabSz="932472" fontAlgn="base">
+              <a:lnSpc>
+                <a:spcPct val="90000"/>
+              </a:lnSpc>
+              <a:spcBef>
+                <a:spcPct val="0"/>
+              </a:spcBef>
+              <a:spcAft>
+                <a:spcPct val="0"/>
+              </a:spcAft>
+            </a:pPr>
+            <a:r>
+              <a:rPr lang="en-US" sz="1400" dirty="0" err="1">
+                <a:solidFill>
+                  <a:schemeClr val="accent6">
+                    <a:lumMod val="10000"/>
+                  </a:schemeClr>
+                </a:solidFill>
+                <a:latin typeface="Consolas" panose="020B0609020204030204" pitchFamily="49" charset="0"/>
+                <a:ea typeface="Segoe UI" pitchFamily="34" charset="0"/>
+                <a:cs typeface="Courier New" panose="02070309020205020404" pitchFamily="49" charset="0"/>
+              </a:rPr>
+              <a:t>df.createOrReplaceTempView</a:t>
+            </a:r>
+            <a:r>
+              <a:rPr lang="en-US" sz="1400" dirty="0">
+                <a:solidFill>
+                  <a:schemeClr val="accent6">
+                    <a:lumMod val="10000"/>
+                  </a:schemeClr>
+                </a:solidFill>
+                <a:latin typeface="Consolas" panose="020B0609020204030204" pitchFamily="49" charset="0"/>
+                <a:ea typeface="Segoe UI" pitchFamily="34" charset="0"/>
+                <a:cs typeface="Courier New" panose="02070309020205020404" pitchFamily="49" charset="0"/>
+              </a:rPr>
+              <a:t>("products")</a:t>
+            </a:r>
+          </a:p>
+          <a:p>
+            <a:pPr defTabSz="932472" fontAlgn="base">
+              <a:lnSpc>
+                <a:spcPct val="90000"/>
+              </a:lnSpc>
+              <a:spcBef>
+                <a:spcPct val="0"/>
+              </a:spcBef>
+              <a:spcAft>
+                <a:spcPct val="0"/>
+              </a:spcAft>
+            </a:pPr>
+            <a:endParaRPr lang="en-US" sz="1400" dirty="0">
+              <a:solidFill>
+                <a:schemeClr val="tx1"/>
+              </a:solidFill>
+              <a:latin typeface="Consolas" panose="020B0609020204030204" pitchFamily="49" charset="0"/>
+              <a:ea typeface="Segoe UI" pitchFamily="34" charset="0"/>
+              <a:cs typeface="Courier New" panose="02070309020205020404" pitchFamily="49" charset="0"/>
+            </a:endParaRPr>
+          </a:p>
+          <a:p>
+            <a:pPr defTabSz="932472" fontAlgn="base">
+              <a:lnSpc>
+                <a:spcPct val="90000"/>
+              </a:lnSpc>
+              <a:spcBef>
+                <a:spcPct val="0"/>
+              </a:spcBef>
+              <a:spcAft>
+                <a:spcPct val="0"/>
+              </a:spcAft>
+            </a:pPr>
+            <a:r>
+              <a:rPr lang="en-US" sz="1400" dirty="0">
+                <a:solidFill>
+                  <a:srgbClr val="008000"/>
+                </a:solidFill>
+                <a:latin typeface="Consolas" panose="020B0609020204030204" pitchFamily="49" charset="0"/>
+                <a:ea typeface="Segoe UI" pitchFamily="34" charset="0"/>
+                <a:cs typeface="Courier New" panose="02070309020205020404" pitchFamily="49" charset="0"/>
+              </a:rPr>
+              <a:t># Use </a:t>
+            </a:r>
+            <a:r>
+              <a:rPr lang="en-US" sz="1400" dirty="0" err="1">
+                <a:solidFill>
+                  <a:srgbClr val="008000"/>
+                </a:solidFill>
+                <a:latin typeface="Consolas" panose="020B0609020204030204" pitchFamily="49" charset="0"/>
+                <a:ea typeface="Segoe UI" pitchFamily="34" charset="0"/>
+                <a:cs typeface="Courier New" panose="02070309020205020404" pitchFamily="49" charset="0"/>
+              </a:rPr>
+              <a:t>spark.sql</a:t>
+            </a:r>
+            <a:r>
+              <a:rPr lang="en-US" sz="1400" dirty="0">
+                <a:solidFill>
+                  <a:srgbClr val="008000"/>
+                </a:solidFill>
+                <a:latin typeface="Consolas" panose="020B0609020204030204" pitchFamily="49" charset="0"/>
+                <a:ea typeface="Segoe UI" pitchFamily="34" charset="0"/>
+                <a:cs typeface="Courier New" panose="02070309020205020404" pitchFamily="49" charset="0"/>
+              </a:rPr>
+              <a:t> method for inline SQL queries that return a </a:t>
+            </a:r>
+            <a:r>
+              <a:rPr lang="en-US" sz="1400" dirty="0" err="1">
+                <a:solidFill>
+                  <a:srgbClr val="008000"/>
+                </a:solidFill>
+                <a:latin typeface="Consolas" panose="020B0609020204030204" pitchFamily="49" charset="0"/>
+                <a:ea typeface="Segoe UI" pitchFamily="34" charset="0"/>
+                <a:cs typeface="Courier New" panose="02070309020205020404" pitchFamily="49" charset="0"/>
+              </a:rPr>
+              <a:t>dataframe</a:t>
+            </a:r>
+            <a:endParaRPr lang="en-US" sz="1400" dirty="0">
+              <a:solidFill>
+                <a:srgbClr val="008000"/>
+              </a:solidFill>
+              <a:latin typeface="Consolas" panose="020B0609020204030204" pitchFamily="49" charset="0"/>
+              <a:ea typeface="Segoe UI" pitchFamily="34" charset="0"/>
+              <a:cs typeface="Courier New" panose="02070309020205020404" pitchFamily="49" charset="0"/>
+            </a:endParaRPr>
+          </a:p>
+          <a:p>
+            <a:pPr defTabSz="932472" fontAlgn="base">
+              <a:lnSpc>
+                <a:spcPct val="90000"/>
+              </a:lnSpc>
+              <a:spcBef>
+                <a:spcPct val="0"/>
+              </a:spcBef>
+              <a:spcAft>
+                <a:spcPct val="0"/>
+              </a:spcAft>
+            </a:pPr>
+            <a:r>
+              <a:rPr lang="en-US" sz="1400" dirty="0" err="1">
+                <a:solidFill>
+                  <a:schemeClr val="accent6">
+                    <a:lumMod val="10000"/>
+                  </a:schemeClr>
+                </a:solidFill>
+                <a:latin typeface="Consolas" panose="020B0609020204030204" pitchFamily="49" charset="0"/>
+                <a:ea typeface="Segoe UI" pitchFamily="34" charset="0"/>
+                <a:cs typeface="Courier New" panose="02070309020205020404" pitchFamily="49" charset="0"/>
+              </a:rPr>
+              <a:t>bikes_df</a:t>
+            </a:r>
+            <a:r>
+              <a:rPr lang="en-US" sz="1400" dirty="0">
+                <a:solidFill>
+                  <a:schemeClr val="accent6">
+                    <a:lumMod val="10000"/>
+                  </a:schemeClr>
+                </a:solidFill>
+                <a:latin typeface="Consolas" panose="020B0609020204030204" pitchFamily="49" charset="0"/>
+                <a:ea typeface="Segoe UI" pitchFamily="34" charset="0"/>
+                <a:cs typeface="Courier New" panose="02070309020205020404" pitchFamily="49" charset="0"/>
+              </a:rPr>
+              <a:t> = </a:t>
+            </a:r>
+            <a:r>
+              <a:rPr lang="en-US" sz="1400" dirty="0" err="1">
+                <a:solidFill>
+                  <a:schemeClr val="accent6">
+                    <a:lumMod val="10000"/>
+                  </a:schemeClr>
+                </a:solidFill>
+                <a:latin typeface="Consolas" panose="020B0609020204030204" pitchFamily="49" charset="0"/>
+                <a:ea typeface="Segoe UI" pitchFamily="34" charset="0"/>
+                <a:cs typeface="Courier New" panose="02070309020205020404" pitchFamily="49" charset="0"/>
+              </a:rPr>
+              <a:t>spark.sql</a:t>
+            </a:r>
+            <a:r>
+              <a:rPr lang="en-US" sz="1400" dirty="0">
+                <a:solidFill>
+                  <a:schemeClr val="accent6">
+                    <a:lumMod val="10000"/>
+                  </a:schemeClr>
+                </a:solidFill>
+                <a:latin typeface="Consolas" panose="020B0609020204030204" pitchFamily="49" charset="0"/>
+                <a:ea typeface="Segoe UI" pitchFamily="34" charset="0"/>
+                <a:cs typeface="Courier New" panose="02070309020205020404" pitchFamily="49" charset="0"/>
+              </a:rPr>
+              <a:t>("SELECT </a:t>
+            </a:r>
+            <a:r>
+              <a:rPr lang="en-US" sz="1400" dirty="0" err="1">
+                <a:solidFill>
+                  <a:schemeClr val="accent6">
+                    <a:lumMod val="10000"/>
+                  </a:schemeClr>
+                </a:solidFill>
+                <a:latin typeface="Consolas" panose="020B0609020204030204" pitchFamily="49" charset="0"/>
+                <a:ea typeface="Segoe UI" pitchFamily="34" charset="0"/>
+                <a:cs typeface="Courier New" panose="02070309020205020404" pitchFamily="49" charset="0"/>
+              </a:rPr>
+              <a:t>ProductID</a:t>
+            </a:r>
+            <a:r>
+              <a:rPr lang="en-US" sz="1400" dirty="0">
+                <a:solidFill>
+                  <a:schemeClr val="accent6">
+                    <a:lumMod val="10000"/>
+                  </a:schemeClr>
+                </a:solidFill>
+                <a:latin typeface="Consolas" panose="020B0609020204030204" pitchFamily="49" charset="0"/>
+                <a:ea typeface="Segoe UI" pitchFamily="34" charset="0"/>
+                <a:cs typeface="Courier New" panose="02070309020205020404" pitchFamily="49" charset="0"/>
+              </a:rPr>
+              <a:t>, ProductName, </a:t>
+            </a:r>
+            <a:r>
+              <a:rPr lang="en-US" sz="1400" dirty="0" err="1">
+                <a:solidFill>
+                  <a:schemeClr val="accent6">
+                    <a:lumMod val="10000"/>
+                  </a:schemeClr>
+                </a:solidFill>
+                <a:latin typeface="Consolas" panose="020B0609020204030204" pitchFamily="49" charset="0"/>
+                <a:ea typeface="Segoe UI" pitchFamily="34" charset="0"/>
+                <a:cs typeface="Courier New" panose="02070309020205020404" pitchFamily="49" charset="0"/>
+              </a:rPr>
+              <a:t>ListPrice</a:t>
+            </a:r>
+            <a:r>
+              <a:rPr lang="en-US" sz="1400" dirty="0">
+                <a:solidFill>
+                  <a:schemeClr val="accent6">
+                    <a:lumMod val="10000"/>
+                  </a:schemeClr>
+                </a:solidFill>
+                <a:latin typeface="Consolas" panose="020B0609020204030204" pitchFamily="49" charset="0"/>
+                <a:ea typeface="Segoe UI" pitchFamily="34" charset="0"/>
+                <a:cs typeface="Courier New" panose="02070309020205020404" pitchFamily="49" charset="0"/>
+              </a:rPr>
+              <a:t> \</a:t>
+            </a:r>
+          </a:p>
+          <a:p>
+            <a:pPr defTabSz="932472" fontAlgn="base">
+              <a:lnSpc>
+                <a:spcPct val="90000"/>
+              </a:lnSpc>
+              <a:spcBef>
+                <a:spcPct val="0"/>
+              </a:spcBef>
+              <a:spcAft>
+                <a:spcPct val="0"/>
+              </a:spcAft>
+            </a:pPr>
+            <a:r>
+              <a:rPr lang="en-US" sz="1400" dirty="0">
+                <a:solidFill>
+                  <a:schemeClr val="accent6">
+                    <a:lumMod val="10000"/>
+                  </a:schemeClr>
+                </a:solidFill>
+                <a:latin typeface="Consolas" panose="020B0609020204030204" pitchFamily="49" charset="0"/>
+                <a:ea typeface="Segoe UI" pitchFamily="34" charset="0"/>
+                <a:cs typeface="Courier New" panose="02070309020205020404" pitchFamily="49" charset="0"/>
+              </a:rPr>
+              <a:t>                      FROM products \</a:t>
+            </a:r>
+          </a:p>
+          <a:p>
+            <a:pPr defTabSz="932472" fontAlgn="base">
+              <a:lnSpc>
+                <a:spcPct val="90000"/>
+              </a:lnSpc>
+              <a:spcBef>
+                <a:spcPct val="0"/>
+              </a:spcBef>
+              <a:spcAft>
+                <a:spcPct val="0"/>
+              </a:spcAft>
+            </a:pPr>
+            <a:r>
+              <a:rPr lang="en-US" sz="1400" dirty="0">
+                <a:solidFill>
+                  <a:schemeClr val="accent6">
+                    <a:lumMod val="10000"/>
+                  </a:schemeClr>
+                </a:solidFill>
+                <a:latin typeface="Consolas" panose="020B0609020204030204" pitchFamily="49" charset="0"/>
+                <a:ea typeface="Segoe UI" pitchFamily="34" charset="0"/>
+                <a:cs typeface="Courier New" panose="02070309020205020404" pitchFamily="49" charset="0"/>
+              </a:rPr>
+              <a:t>                      WHERE Category IN ('Mountain Bikes', 'Road Bikes')")</a:t>
+            </a:r>
+          </a:p>
+          <a:p>
+            <a:pPr defTabSz="932472" fontAlgn="base">
+              <a:lnSpc>
+                <a:spcPct val="90000"/>
+              </a:lnSpc>
+              <a:spcBef>
+                <a:spcPct val="0"/>
+              </a:spcBef>
+              <a:spcAft>
+                <a:spcPct val="0"/>
+              </a:spcAft>
+            </a:pPr>
+            <a:r>
+              <a:rPr lang="en-US" sz="1400" dirty="0">
+                <a:solidFill>
+                  <a:schemeClr val="accent6">
+                    <a:lumMod val="10000"/>
+                  </a:schemeClr>
+                </a:solidFill>
+                <a:latin typeface="Consolas" panose="020B0609020204030204" pitchFamily="49" charset="0"/>
+                <a:ea typeface="Segoe UI" pitchFamily="34" charset="0"/>
+                <a:cs typeface="Courier New" panose="02070309020205020404" pitchFamily="49" charset="0"/>
+              </a:rPr>
+              <a:t>display(</a:t>
+            </a:r>
+            <a:r>
+              <a:rPr lang="en-US" sz="1400" dirty="0" err="1">
+                <a:solidFill>
+                  <a:schemeClr val="accent6">
+                    <a:lumMod val="10000"/>
+                  </a:schemeClr>
+                </a:solidFill>
+                <a:latin typeface="Consolas" panose="020B0609020204030204" pitchFamily="49" charset="0"/>
+                <a:ea typeface="Segoe UI" pitchFamily="34" charset="0"/>
+                <a:cs typeface="Courier New" panose="02070309020205020404" pitchFamily="49" charset="0"/>
+              </a:rPr>
+              <a:t>bikes_df</a:t>
+            </a:r>
+            <a:r>
+              <a:rPr lang="en-US" sz="1400" dirty="0">
+                <a:solidFill>
+                  <a:schemeClr val="accent6">
+                    <a:lumMod val="10000"/>
+                  </a:schemeClr>
+                </a:solidFill>
+                <a:latin typeface="Consolas" panose="020B0609020204030204" pitchFamily="49" charset="0"/>
+                <a:ea typeface="Segoe UI" pitchFamily="34" charset="0"/>
+                <a:cs typeface="Courier New" panose="02070309020205020404" pitchFamily="49" charset="0"/>
+              </a:rPr>
+              <a:t>)</a:t>
+            </a:r>
+          </a:p>
+        </p:txBody>
+      </p:sp>
+      <p:sp>
+        <p:nvSpPr>
+          <p:cNvPr id="7" name="Rectangle 6">
+            <a:extLst>
+              <a:ext uri="{FF2B5EF4-FFF2-40B4-BE49-F238E27FC236}">
+                <a16:creationId xmlns:a16="http://schemas.microsoft.com/office/drawing/2014/main" id="{8CFBB96A-2F5F-50A8-DB18-A1FAC855B189}"/>
+              </a:ext>
+            </a:extLst>
+          </p:cNvPr>
+          <p:cNvSpPr/>
+          <p:nvPr/>
+        </p:nvSpPr>
+        <p:spPr bwMode="auto">
+          <a:xfrm>
+            <a:off x="579438" y="3987464"/>
+            <a:ext cx="11020425" cy="1707407"/>
+          </a:xfrm>
+          <a:prstGeom prst="rect">
+            <a:avLst/>
+          </a:prstGeom>
+          <a:noFill/>
+          <a:ln w="19050">
+            <a:solidFill>
+              <a:schemeClr val="accent4"/>
+            </a:solidFill>
+            <a:headEnd type="none" w="med" len="med"/>
+            <a:tailEnd type="none" w="med" len="med"/>
+          </a:ln>
+          <a:effectLst/>
+        </p:spPr>
+        <p:style>
+          <a:lnRef idx="1">
+            <a:schemeClr val="accent2"/>
+          </a:lnRef>
+          <a:fillRef idx="3">
+            <a:schemeClr val="accent2"/>
+          </a:fillRef>
+          <a:effectRef idx="2">
+            <a:schemeClr val="accent2"/>
+          </a:effectRef>
+          <a:fontRef idx="minor">
+            <a:schemeClr val="lt1"/>
+          </a:fontRef>
+        </p:style>
+        <p:txBody>
+          <a:bodyPr rot="0" spcFirstLastPara="0" vertOverflow="overflow" horzOverflow="overflow" vert="horz" wrap="square" lIns="182880" tIns="146304" rIns="182880" bIns="146304" numCol="1" spcCol="0" rtlCol="0" fromWordArt="0" anchor="t" anchorCtr="0" forceAA="0" compatLnSpc="1">
+            <a:prstTxWarp prst="textNoShape">
+              <a:avLst/>
+            </a:prstTxWarp>
+            <a:noAutofit/>
+          </a:bodyPr>
+          <a:lstStyle/>
+          <a:p>
+            <a:pPr defTabSz="932472" fontAlgn="base">
+              <a:lnSpc>
+                <a:spcPct val="90000"/>
+              </a:lnSpc>
+              <a:spcBef>
+                <a:spcPct val="0"/>
+              </a:spcBef>
+              <a:spcAft>
+                <a:spcPct val="0"/>
+              </a:spcAft>
+            </a:pPr>
+            <a:r>
+              <a:rPr lang="en-US" sz="1400" dirty="0">
+                <a:solidFill>
+                  <a:schemeClr val="accent6">
+                    <a:lumMod val="10000"/>
+                  </a:schemeClr>
+                </a:solidFill>
+                <a:latin typeface="Consolas" panose="020B0609020204030204" pitchFamily="49" charset="0"/>
+                <a:ea typeface="Segoe UI" pitchFamily="34" charset="0"/>
+                <a:cs typeface="Courier New" panose="02070309020205020404" pitchFamily="49" charset="0"/>
+              </a:rPr>
+              <a:t>%</a:t>
+            </a:r>
+            <a:r>
+              <a:rPr lang="en-US" sz="1400" dirty="0" err="1">
+                <a:solidFill>
+                  <a:schemeClr val="accent6">
+                    <a:lumMod val="10000"/>
+                  </a:schemeClr>
+                </a:solidFill>
+                <a:latin typeface="Consolas" panose="020B0609020204030204" pitchFamily="49" charset="0"/>
+                <a:ea typeface="Segoe UI" pitchFamily="34" charset="0"/>
+                <a:cs typeface="Courier New" panose="02070309020205020404" pitchFamily="49" charset="0"/>
+              </a:rPr>
+              <a:t>sql</a:t>
+            </a:r>
+            <a:endParaRPr lang="en-US" sz="1400" dirty="0">
+              <a:solidFill>
+                <a:schemeClr val="accent6">
+                  <a:lumMod val="10000"/>
+                </a:schemeClr>
+              </a:solidFill>
+              <a:latin typeface="Consolas" panose="020B0609020204030204" pitchFamily="49" charset="0"/>
+              <a:ea typeface="Segoe UI" pitchFamily="34" charset="0"/>
+              <a:cs typeface="Courier New" panose="02070309020205020404" pitchFamily="49" charset="0"/>
+            </a:endParaRPr>
+          </a:p>
+          <a:p>
+            <a:pPr defTabSz="932472" fontAlgn="base">
+              <a:lnSpc>
+                <a:spcPct val="90000"/>
+              </a:lnSpc>
+              <a:spcBef>
+                <a:spcPct val="0"/>
+              </a:spcBef>
+              <a:spcAft>
+                <a:spcPct val="0"/>
+              </a:spcAft>
+            </a:pPr>
+            <a:endParaRPr lang="en-US" sz="1400" dirty="0">
+              <a:solidFill>
+                <a:srgbClr val="008000"/>
+              </a:solidFill>
+              <a:latin typeface="Consolas" panose="020B0609020204030204" pitchFamily="49" charset="0"/>
+              <a:ea typeface="Segoe UI" pitchFamily="34" charset="0"/>
+              <a:cs typeface="Courier New" panose="02070309020205020404" pitchFamily="49" charset="0"/>
+            </a:endParaRPr>
+          </a:p>
+          <a:p>
+            <a:pPr defTabSz="932472" fontAlgn="base">
+              <a:lnSpc>
+                <a:spcPct val="90000"/>
+              </a:lnSpc>
+              <a:spcBef>
+                <a:spcPct val="0"/>
+              </a:spcBef>
+              <a:spcAft>
+                <a:spcPct val="0"/>
+              </a:spcAft>
+            </a:pPr>
+            <a:r>
+              <a:rPr lang="en-US" sz="1400" dirty="0">
+                <a:solidFill>
+                  <a:srgbClr val="008000"/>
+                </a:solidFill>
+                <a:latin typeface="Consolas" panose="020B0609020204030204" pitchFamily="49" charset="0"/>
+                <a:ea typeface="Segoe UI" pitchFamily="34" charset="0"/>
+                <a:cs typeface="Courier New" panose="02070309020205020404" pitchFamily="49" charset="0"/>
+              </a:rPr>
+              <a:t>-- Use SQL to query tables in the </a:t>
+            </a:r>
+            <a:r>
+              <a:rPr lang="en-US" sz="1400" dirty="0" err="1">
+                <a:solidFill>
+                  <a:srgbClr val="008000"/>
+                </a:solidFill>
+                <a:latin typeface="Consolas" panose="020B0609020204030204" pitchFamily="49" charset="0"/>
+                <a:ea typeface="Segoe UI" pitchFamily="34" charset="0"/>
+                <a:cs typeface="Courier New" panose="02070309020205020404" pitchFamily="49" charset="0"/>
+              </a:rPr>
+              <a:t>metastore</a:t>
+            </a:r>
+            <a:endParaRPr lang="en-US" sz="1400" dirty="0">
+              <a:solidFill>
+                <a:srgbClr val="008000"/>
+              </a:solidFill>
+              <a:latin typeface="Consolas" panose="020B0609020204030204" pitchFamily="49" charset="0"/>
+              <a:ea typeface="Segoe UI" pitchFamily="34" charset="0"/>
+              <a:cs typeface="Courier New" panose="02070309020205020404" pitchFamily="49" charset="0"/>
+            </a:endParaRPr>
+          </a:p>
+          <a:p>
+            <a:pPr defTabSz="932472" fontAlgn="base">
+              <a:lnSpc>
+                <a:spcPct val="90000"/>
+              </a:lnSpc>
+              <a:spcBef>
+                <a:spcPct val="0"/>
+              </a:spcBef>
+              <a:spcAft>
+                <a:spcPct val="0"/>
+              </a:spcAft>
+            </a:pPr>
+            <a:r>
+              <a:rPr lang="en-US" sz="1400" dirty="0">
+                <a:solidFill>
+                  <a:schemeClr val="accent6">
+                    <a:lumMod val="10000"/>
+                  </a:schemeClr>
+                </a:solidFill>
+                <a:latin typeface="Consolas" panose="020B0609020204030204" pitchFamily="49" charset="0"/>
+                <a:ea typeface="Segoe UI" pitchFamily="34" charset="0"/>
+                <a:cs typeface="Courier New" panose="02070309020205020404" pitchFamily="49" charset="0"/>
+              </a:rPr>
+              <a:t>SELECT Category, COUNT(</a:t>
+            </a:r>
+            <a:r>
+              <a:rPr lang="en-US" sz="1400" dirty="0" err="1">
+                <a:solidFill>
+                  <a:schemeClr val="accent6">
+                    <a:lumMod val="10000"/>
+                  </a:schemeClr>
+                </a:solidFill>
+                <a:latin typeface="Consolas" panose="020B0609020204030204" pitchFamily="49" charset="0"/>
+                <a:ea typeface="Segoe UI" pitchFamily="34" charset="0"/>
+                <a:cs typeface="Courier New" panose="02070309020205020404" pitchFamily="49" charset="0"/>
+              </a:rPr>
+              <a:t>ProductID</a:t>
+            </a:r>
+            <a:r>
+              <a:rPr lang="en-US" sz="1400" dirty="0">
+                <a:solidFill>
+                  <a:schemeClr val="accent6">
+                    <a:lumMod val="10000"/>
+                  </a:schemeClr>
+                </a:solidFill>
+                <a:latin typeface="Consolas" panose="020B0609020204030204" pitchFamily="49" charset="0"/>
+                <a:ea typeface="Segoe UI" pitchFamily="34" charset="0"/>
+                <a:cs typeface="Courier New" panose="02070309020205020404" pitchFamily="49" charset="0"/>
+              </a:rPr>
+              <a:t>) AS </a:t>
+            </a:r>
+            <a:r>
+              <a:rPr lang="en-US" sz="1400" dirty="0" err="1">
+                <a:solidFill>
+                  <a:schemeClr val="accent6">
+                    <a:lumMod val="10000"/>
+                  </a:schemeClr>
+                </a:solidFill>
+                <a:latin typeface="Consolas" panose="020B0609020204030204" pitchFamily="49" charset="0"/>
+                <a:ea typeface="Segoe UI" pitchFamily="34" charset="0"/>
+                <a:cs typeface="Courier New" panose="02070309020205020404" pitchFamily="49" charset="0"/>
+              </a:rPr>
+              <a:t>ProductCount</a:t>
+            </a:r>
+            <a:endParaRPr lang="en-US" sz="1400" dirty="0">
+              <a:solidFill>
+                <a:schemeClr val="accent6">
+                  <a:lumMod val="10000"/>
+                </a:schemeClr>
+              </a:solidFill>
+              <a:latin typeface="Consolas" panose="020B0609020204030204" pitchFamily="49" charset="0"/>
+              <a:ea typeface="Segoe UI" pitchFamily="34" charset="0"/>
+              <a:cs typeface="Courier New" panose="02070309020205020404" pitchFamily="49" charset="0"/>
+            </a:endParaRPr>
+          </a:p>
+          <a:p>
+            <a:pPr defTabSz="932472" fontAlgn="base">
+              <a:lnSpc>
+                <a:spcPct val="90000"/>
+              </a:lnSpc>
+              <a:spcBef>
+                <a:spcPct val="0"/>
+              </a:spcBef>
+              <a:spcAft>
+                <a:spcPct val="0"/>
+              </a:spcAft>
+            </a:pPr>
+            <a:r>
+              <a:rPr lang="en-US" sz="1400" dirty="0">
+                <a:solidFill>
+                  <a:schemeClr val="accent6">
+                    <a:lumMod val="10000"/>
+                  </a:schemeClr>
+                </a:solidFill>
+                <a:latin typeface="Consolas" panose="020B0609020204030204" pitchFamily="49" charset="0"/>
+                <a:ea typeface="Segoe UI" pitchFamily="34" charset="0"/>
+                <a:cs typeface="Courier New" panose="02070309020205020404" pitchFamily="49" charset="0"/>
+              </a:rPr>
+              <a:t>FROM products</a:t>
+            </a:r>
+          </a:p>
+          <a:p>
+            <a:pPr defTabSz="932472" fontAlgn="base">
+              <a:lnSpc>
+                <a:spcPct val="90000"/>
+              </a:lnSpc>
+              <a:spcBef>
+                <a:spcPct val="0"/>
+              </a:spcBef>
+              <a:spcAft>
+                <a:spcPct val="0"/>
+              </a:spcAft>
+            </a:pPr>
+            <a:r>
+              <a:rPr lang="en-US" sz="1400" dirty="0">
+                <a:solidFill>
+                  <a:schemeClr val="accent6">
+                    <a:lumMod val="10000"/>
+                  </a:schemeClr>
+                </a:solidFill>
+                <a:latin typeface="Consolas" panose="020B0609020204030204" pitchFamily="49" charset="0"/>
+                <a:ea typeface="Segoe UI" pitchFamily="34" charset="0"/>
+                <a:cs typeface="Courier New" panose="02070309020205020404" pitchFamily="49" charset="0"/>
+              </a:rPr>
+              <a:t>GROUP BY Category</a:t>
+            </a:r>
+          </a:p>
+          <a:p>
+            <a:pPr defTabSz="932472" fontAlgn="base">
+              <a:lnSpc>
+                <a:spcPct val="90000"/>
+              </a:lnSpc>
+              <a:spcBef>
+                <a:spcPct val="0"/>
+              </a:spcBef>
+              <a:spcAft>
+                <a:spcPct val="0"/>
+              </a:spcAft>
+            </a:pPr>
+            <a:r>
+              <a:rPr lang="en-US" sz="1400" dirty="0">
+                <a:solidFill>
+                  <a:schemeClr val="accent6">
+                    <a:lumMod val="10000"/>
+                  </a:schemeClr>
+                </a:solidFill>
+                <a:latin typeface="Consolas" panose="020B0609020204030204" pitchFamily="49" charset="0"/>
+                <a:ea typeface="Segoe UI" pitchFamily="34" charset="0"/>
+                <a:cs typeface="Courier New" panose="02070309020205020404" pitchFamily="49" charset="0"/>
+              </a:rPr>
+              <a:t>ORDER BY Category</a:t>
+            </a:r>
+          </a:p>
+        </p:txBody>
+      </p:sp>
+    </p:spTree>
+    <p:extLst>
+      <p:ext uri="{BB962C8B-B14F-4D97-AF65-F5344CB8AC3E}">
+        <p14:creationId xmlns:p14="http://schemas.microsoft.com/office/powerpoint/2010/main" val="4291781643"/>
+      </p:ext>
+    </p:extLst>
+  </p:cSld>
+  <p:clrMapOvr>
+    <a:masterClrMapping/>
+  </p:clrMapOvr>
+  <p:transition>
+    <p:fade/>
+  </p:transition>
+</p:sld>
+</file>
+
+<file path=ppt/slides/slide18.xml><?xml version="1.0" encoding="utf-8"?>
+<p:sld xmlns:a="http://schemas.openxmlformats.org/drawingml/2006/main" xmlns:r="http://schemas.openxmlformats.org/officeDocument/2006/relationships" xmlns:p="http://schemas.openxmlformats.org/presentationml/2006/main">
+  <p:cSld>
+    <p:spTree>
+      <p:nvGrpSpPr>
+        <p:cNvPr id="1" name=""/>
+        <p:cNvGrpSpPr/>
+        <p:nvPr/>
+      </p:nvGrpSpPr>
+      <p:grpSpPr>
+        <a:xfrm>
+          <a:off x="0" y="0"/>
+          <a:ext cx="0" cy="0"/>
+          <a:chOff x="0" y="0"/>
+          <a:chExt cx="0" cy="0"/>
+        </a:xfrm>
+      </p:grpSpPr>
+      <p:sp>
+        <p:nvSpPr>
           <p:cNvPr id="6" name="Text Placeholder 5">
             <a:extLst>
               <a:ext uri="{FF2B5EF4-FFF2-40B4-BE49-F238E27FC236}">
@@ -24260,7 +28713,7 @@
 </p:sld>
 </file>
 
-<file path=ppt/slides/slide17.xml><?xml version="1.0" encoding="utf-8"?>
+<file path=ppt/slides/slide19.xml><?xml version="1.0" encoding="utf-8"?>
 <p:sld xmlns:a="http://schemas.openxmlformats.org/drawingml/2006/main" xmlns:r="http://schemas.openxmlformats.org/officeDocument/2006/relationships" xmlns:p="http://schemas.openxmlformats.org/presentationml/2006/main">
   <p:cSld>
     <p:spTree>
@@ -24457,7 +28910,7 @@
                 <a:tabLst/>
                 <a:defRPr/>
               </a:pPr>
-              <a:t>17</a:t>
+              <a:t>19</a:t>
             </a:fld>
             <a:endParaRPr kumimoji="0" lang="en-US" sz="900" b="1" i="0" u="none" strike="noStrike" kern="1200" cap="none" spc="0" normalizeH="0" baseline="0" noProof="0" dirty="0">
               <a:ln>
@@ -24839,112 +29292,6 @@
 </p:sld>
 </file>
 
-<file path=ppt/slides/slide18.xml><?xml version="1.0" encoding="utf-8"?>
-<p:sld xmlns:a="http://schemas.openxmlformats.org/drawingml/2006/main" xmlns:r="http://schemas.openxmlformats.org/officeDocument/2006/relationships" xmlns:p="http://schemas.openxmlformats.org/presentationml/2006/main">
-  <p:cSld>
-    <p:spTree>
-      <p:nvGrpSpPr>
-        <p:cNvPr id="1" name=""/>
-        <p:cNvGrpSpPr/>
-        <p:nvPr/>
-      </p:nvGrpSpPr>
-      <p:grpSpPr>
-        <a:xfrm>
-          <a:off x="0" y="0"/>
-          <a:ext cx="0" cy="0"/>
-          <a:chOff x="0" y="0"/>
-          <a:chExt cx="0" cy="0"/>
-        </a:xfrm>
-      </p:grpSpPr>
-      <p:sp>
-        <p:nvSpPr>
-          <p:cNvPr id="2" name="Title 1">
-            <a:extLst>
-              <a:ext uri="{FF2B5EF4-FFF2-40B4-BE49-F238E27FC236}">
-                <a16:creationId xmlns:a16="http://schemas.microsoft.com/office/drawing/2014/main" id="{21A99087-F939-4EAF-AD38-211701C7799F}"/>
-              </a:ext>
-            </a:extLst>
-          </p:cNvPr>
-          <p:cNvSpPr>
-            <a:spLocks noGrp="1"/>
-          </p:cNvSpPr>
-          <p:nvPr>
-            <p:ph type="ctrTitle"/>
-          </p:nvPr>
-        </p:nvSpPr>
-        <p:spPr>
-          <a:xfrm>
-            <a:off x="1387813" y="3415452"/>
-            <a:ext cx="9144000" cy="1096613"/>
-          </a:xfrm>
-        </p:spPr>
-        <p:txBody>
-          <a:bodyPr>
-            <a:normAutofit/>
-          </a:bodyPr>
-          <a:lstStyle/>
-          <a:p>
-            <a:r>
-              <a:rPr lang="en-US" dirty="0"/>
-              <a:t>LAB 24: </a:t>
-            </a:r>
-            <a:r>
-              <a:rPr lang="en-US"/>
-              <a:t>Use Spark in Azure </a:t>
-            </a:r>
-            <a:r>
-              <a:rPr lang="en-US" dirty="0"/>
-              <a:t>Databricks</a:t>
-            </a:r>
-          </a:p>
-        </p:txBody>
-      </p:sp>
-      <p:sp>
-        <p:nvSpPr>
-          <p:cNvPr id="3" name="Subtitle 2">
-            <a:extLst>
-              <a:ext uri="{FF2B5EF4-FFF2-40B4-BE49-F238E27FC236}">
-                <a16:creationId xmlns:a16="http://schemas.microsoft.com/office/drawing/2014/main" id="{78BC2C14-5B54-4319-BA1D-46B0C6B5B674}"/>
-              </a:ext>
-            </a:extLst>
-          </p:cNvPr>
-          <p:cNvSpPr>
-            <a:spLocks noGrp="1"/>
-          </p:cNvSpPr>
-          <p:nvPr>
-            <p:ph type="subTitle" idx="1"/>
-          </p:nvPr>
-        </p:nvSpPr>
-        <p:spPr>
-          <a:xfrm>
-            <a:off x="1387813" y="4843830"/>
-            <a:ext cx="9144000" cy="531554"/>
-          </a:xfrm>
-        </p:spPr>
-        <p:txBody>
-          <a:bodyPr/>
-          <a:lstStyle/>
-          <a:p>
-            <a:r>
-              <a:rPr lang="en-US" dirty="0"/>
-              <a:t>60 minutes</a:t>
-            </a:r>
-          </a:p>
-        </p:txBody>
-      </p:sp>
-    </p:spTree>
-    <p:extLst>
-      <p:ext uri="{BB962C8B-B14F-4D97-AF65-F5344CB8AC3E}">
-        <p14:creationId xmlns:p14="http://schemas.microsoft.com/office/powerpoint/2010/main" val="86463890"/>
-      </p:ext>
-    </p:extLst>
-  </p:cSld>
-  <p:clrMapOvr>
-    <a:masterClrMapping/>
-  </p:clrMapOvr>
-</p:sld>
-</file>
-
 <file path=ppt/slides/slide2.xml><?xml version="1.0" encoding="utf-8"?>
 <p:sld xmlns:a="http://schemas.openxmlformats.org/drawingml/2006/main" xmlns:r="http://schemas.openxmlformats.org/officeDocument/2006/relationships" xmlns:p="http://schemas.openxmlformats.org/presentationml/2006/main">
   <p:cSld>
@@ -25098,6 +29445,2310 @@
     <p:extLst>
       <p:ext uri="{BB962C8B-B14F-4D97-AF65-F5344CB8AC3E}">
         <p14:creationId xmlns:p14="http://schemas.microsoft.com/office/powerpoint/2010/main" val="2612443108"/>
+      </p:ext>
+    </p:extLst>
+  </p:cSld>
+  <p:clrMapOvr>
+    <a:masterClrMapping/>
+  </p:clrMapOvr>
+</p:sld>
+</file>
+
+<file path=ppt/slides/slide20.xml><?xml version="1.0" encoding="utf-8"?>
+<p:sld xmlns:a="http://schemas.openxmlformats.org/drawingml/2006/main" xmlns:r="http://schemas.openxmlformats.org/officeDocument/2006/relationships" xmlns:p="http://schemas.openxmlformats.org/presentationml/2006/main">
+  <p:cSld>
+    <p:spTree>
+      <p:nvGrpSpPr>
+        <p:cNvPr id="1" name=""/>
+        <p:cNvGrpSpPr/>
+        <p:nvPr/>
+      </p:nvGrpSpPr>
+      <p:grpSpPr>
+        <a:xfrm>
+          <a:off x="0" y="0"/>
+          <a:ext cx="0" cy="0"/>
+          <a:chOff x="0" y="0"/>
+          <a:chExt cx="0" cy="0"/>
+        </a:xfrm>
+      </p:grpSpPr>
+      <p:sp>
+        <p:nvSpPr>
+          <p:cNvPr id="2" name="Title 1">
+            <a:extLst>
+              <a:ext uri="{FF2B5EF4-FFF2-40B4-BE49-F238E27FC236}">
+                <a16:creationId xmlns:a16="http://schemas.microsoft.com/office/drawing/2014/main" id="{56FE439C-A1FA-5CE0-C41C-97A60E5EE185}"/>
+              </a:ext>
+            </a:extLst>
+          </p:cNvPr>
+          <p:cNvSpPr>
+            <a:spLocks noGrp="1"/>
+          </p:cNvSpPr>
+          <p:nvPr>
+            <p:ph type="title"/>
+          </p:nvPr>
+        </p:nvSpPr>
+        <p:spPr/>
+        <p:txBody>
+          <a:bodyPr/>
+          <a:lstStyle/>
+          <a:p>
+            <a:r>
+              <a:rPr lang="en-US" dirty="0"/>
+              <a:t>Modify and save </a:t>
+            </a:r>
+            <a:r>
+              <a:rPr lang="en-US" dirty="0" err="1"/>
+              <a:t>dataframes</a:t>
+            </a:r>
+            <a:endParaRPr lang="en-US" dirty="0"/>
+          </a:p>
+        </p:txBody>
+      </p:sp>
+      <p:sp>
+        <p:nvSpPr>
+          <p:cNvPr id="13" name="Text Placeholder 12">
+            <a:extLst>
+              <a:ext uri="{FF2B5EF4-FFF2-40B4-BE49-F238E27FC236}">
+                <a16:creationId xmlns:a16="http://schemas.microsoft.com/office/drawing/2014/main" id="{8C5CEF62-5D4F-2CBB-CD8A-5331F3467446}"/>
+              </a:ext>
+            </a:extLst>
+          </p:cNvPr>
+          <p:cNvSpPr>
+            <a:spLocks noGrp="1"/>
+          </p:cNvSpPr>
+          <p:nvPr>
+            <p:ph type="body" sz="quarter" idx="15"/>
+          </p:nvPr>
+        </p:nvSpPr>
+        <p:spPr>
+          <a:xfrm>
+            <a:off x="588262" y="1570101"/>
+            <a:ext cx="4417411" cy="3980577"/>
+          </a:xfrm>
+        </p:spPr>
+        <p:txBody>
+          <a:bodyPr/>
+          <a:lstStyle/>
+          <a:p>
+            <a:pPr marL="261938" lvl="1" indent="-261938">
+              <a:spcBef>
+                <a:spcPts val="1200"/>
+              </a:spcBef>
+              <a:buFont typeface="Arial" panose="020B0604020202020204" pitchFamily="34" charset="0"/>
+              <a:buChar char="•"/>
+            </a:pPr>
+            <a:r>
+              <a:rPr lang="en-US" sz="2200" dirty="0">
+                <a:latin typeface="+mj-lt"/>
+                <a:cs typeface="Segoe UI" panose="020B0502040204020203" pitchFamily="34" charset="0"/>
+              </a:rPr>
+              <a:t>Load source file into a </a:t>
+            </a:r>
+            <a:r>
+              <a:rPr lang="en-US" sz="2200" dirty="0" err="1">
+                <a:latin typeface="+mj-lt"/>
+                <a:cs typeface="Segoe UI" panose="020B0502040204020203" pitchFamily="34" charset="0"/>
+              </a:rPr>
+              <a:t>dataframe</a:t>
+            </a:r>
+            <a:endParaRPr lang="en-US" sz="2200" dirty="0">
+              <a:latin typeface="+mj-lt"/>
+              <a:cs typeface="Segoe UI" panose="020B0502040204020203" pitchFamily="34" charset="0"/>
+            </a:endParaRPr>
+          </a:p>
+          <a:p>
+            <a:pPr marL="261938" lvl="1" indent="-261938">
+              <a:spcBef>
+                <a:spcPts val="1200"/>
+              </a:spcBef>
+              <a:buFont typeface="Arial" panose="020B0604020202020204" pitchFamily="34" charset="0"/>
+              <a:buChar char="•"/>
+            </a:pPr>
+            <a:r>
+              <a:rPr lang="en-US" sz="2200" dirty="0">
+                <a:latin typeface="+mj-lt"/>
+                <a:cs typeface="Segoe UI" panose="020B0502040204020203" pitchFamily="34" charset="0"/>
+              </a:rPr>
+              <a:t>Use </a:t>
+            </a:r>
+            <a:r>
+              <a:rPr lang="en-US" sz="2200" dirty="0" err="1">
+                <a:latin typeface="+mj-lt"/>
+                <a:cs typeface="Segoe UI" panose="020B0502040204020203" pitchFamily="34" charset="0"/>
+              </a:rPr>
+              <a:t>dataframe</a:t>
+            </a:r>
+            <a:r>
+              <a:rPr lang="en-US" sz="2200" dirty="0">
+                <a:latin typeface="+mj-lt"/>
+                <a:cs typeface="Segoe UI" panose="020B0502040204020203" pitchFamily="34" charset="0"/>
+              </a:rPr>
+              <a:t> methods and functions to transform the data:</a:t>
+            </a:r>
+          </a:p>
+          <a:p>
+            <a:pPr marL="623888" lvl="1" indent="-246063" defTabSz="914367">
+              <a:spcBef>
+                <a:spcPts val="400"/>
+              </a:spcBef>
+              <a:buFont typeface="Segoe UI" panose="020B0502040204020203" pitchFamily="34" charset="0"/>
+              <a:buChar char="–"/>
+              <a:tabLst>
+                <a:tab pos="508000" algn="l"/>
+              </a:tabLst>
+            </a:pPr>
+            <a:r>
+              <a:rPr lang="en-US" sz="1800" dirty="0">
+                <a:gradFill>
+                  <a:gsLst>
+                    <a:gs pos="2917">
+                      <a:schemeClr val="tx1"/>
+                    </a:gs>
+                    <a:gs pos="30000">
+                      <a:schemeClr val="tx1"/>
+                    </a:gs>
+                  </a:gsLst>
+                  <a:lin ang="5400000" scaled="0"/>
+                </a:gradFill>
+              </a:rPr>
+              <a:t>Filter rows</a:t>
+            </a:r>
+          </a:p>
+          <a:p>
+            <a:pPr marL="623888" lvl="1" indent="-246063" defTabSz="914367">
+              <a:spcBef>
+                <a:spcPts val="400"/>
+              </a:spcBef>
+              <a:buFont typeface="Segoe UI" panose="020B0502040204020203" pitchFamily="34" charset="0"/>
+              <a:buChar char="–"/>
+              <a:tabLst>
+                <a:tab pos="508000" algn="l"/>
+              </a:tabLst>
+            </a:pPr>
+            <a:r>
+              <a:rPr lang="en-US" sz="1800" dirty="0">
+                <a:gradFill>
+                  <a:gsLst>
+                    <a:gs pos="2917">
+                      <a:schemeClr val="tx1"/>
+                    </a:gs>
+                    <a:gs pos="30000">
+                      <a:schemeClr val="tx1"/>
+                    </a:gs>
+                  </a:gsLst>
+                  <a:lin ang="5400000" scaled="0"/>
+                </a:gradFill>
+              </a:rPr>
+              <a:t>Modify column values</a:t>
+            </a:r>
+          </a:p>
+          <a:p>
+            <a:pPr marL="623888" lvl="1" indent="-246063" defTabSz="914367">
+              <a:spcBef>
+                <a:spcPts val="400"/>
+              </a:spcBef>
+              <a:buFont typeface="Segoe UI" panose="020B0502040204020203" pitchFamily="34" charset="0"/>
+              <a:buChar char="–"/>
+              <a:tabLst>
+                <a:tab pos="508000" algn="l"/>
+              </a:tabLst>
+            </a:pPr>
+            <a:r>
+              <a:rPr lang="en-US" sz="1800" dirty="0">
+                <a:gradFill>
+                  <a:gsLst>
+                    <a:gs pos="2917">
+                      <a:schemeClr val="tx1"/>
+                    </a:gs>
+                    <a:gs pos="30000">
+                      <a:schemeClr val="tx1"/>
+                    </a:gs>
+                  </a:gsLst>
+                  <a:lin ang="5400000" scaled="0"/>
+                </a:gradFill>
+              </a:rPr>
+              <a:t>Derive new columns</a:t>
+            </a:r>
+          </a:p>
+          <a:p>
+            <a:pPr marL="623888" lvl="1" indent="-246063" defTabSz="914367">
+              <a:spcBef>
+                <a:spcPts val="400"/>
+              </a:spcBef>
+              <a:buFont typeface="Segoe UI" panose="020B0502040204020203" pitchFamily="34" charset="0"/>
+              <a:buChar char="–"/>
+              <a:tabLst>
+                <a:tab pos="508000" algn="l"/>
+              </a:tabLst>
+            </a:pPr>
+            <a:r>
+              <a:rPr lang="en-US" sz="1800" dirty="0">
+                <a:gradFill>
+                  <a:gsLst>
+                    <a:gs pos="2917">
+                      <a:schemeClr val="tx1"/>
+                    </a:gs>
+                    <a:gs pos="30000">
+                      <a:schemeClr val="tx1"/>
+                    </a:gs>
+                  </a:gsLst>
+                  <a:lin ang="5400000" scaled="0"/>
+                </a:gradFill>
+              </a:rPr>
+              <a:t>Drop columns</a:t>
+            </a:r>
+          </a:p>
+          <a:p>
+            <a:pPr marL="261938" lvl="1" indent="-261938">
+              <a:spcBef>
+                <a:spcPts val="1200"/>
+              </a:spcBef>
+              <a:buFont typeface="Arial" panose="020B0604020202020204" pitchFamily="34" charset="0"/>
+              <a:buChar char="•"/>
+            </a:pPr>
+            <a:r>
+              <a:rPr lang="en-US" sz="2200" dirty="0">
+                <a:latin typeface="+mj-lt"/>
+                <a:cs typeface="Segoe UI" panose="020B0502040204020203" pitchFamily="34" charset="0"/>
+              </a:rPr>
+              <a:t>Write the modified data</a:t>
+            </a:r>
+          </a:p>
+          <a:p>
+            <a:pPr marL="623888" lvl="1" indent="-246063" defTabSz="914367">
+              <a:spcBef>
+                <a:spcPts val="400"/>
+              </a:spcBef>
+              <a:buFont typeface="Segoe UI" panose="020B0502040204020203" pitchFamily="34" charset="0"/>
+              <a:buChar char="–"/>
+              <a:tabLst>
+                <a:tab pos="508000" algn="l"/>
+              </a:tabLst>
+            </a:pPr>
+            <a:r>
+              <a:rPr lang="en-US" sz="1800" dirty="0">
+                <a:gradFill>
+                  <a:gsLst>
+                    <a:gs pos="2917">
+                      <a:schemeClr val="tx1"/>
+                    </a:gs>
+                    <a:gs pos="30000">
+                      <a:schemeClr val="tx1"/>
+                    </a:gs>
+                  </a:gsLst>
+                  <a:lin ang="5400000" scaled="0"/>
+                </a:gradFill>
+              </a:rPr>
+              <a:t>Specify required file format</a:t>
+            </a:r>
+          </a:p>
+        </p:txBody>
+      </p:sp>
+      <p:sp>
+        <p:nvSpPr>
+          <p:cNvPr id="10" name="Text Placeholder 9">
+            <a:extLst>
+              <a:ext uri="{FF2B5EF4-FFF2-40B4-BE49-F238E27FC236}">
+                <a16:creationId xmlns:a16="http://schemas.microsoft.com/office/drawing/2014/main" id="{FC18AF53-9D5D-4891-D053-ACCF21457493}"/>
+              </a:ext>
+            </a:extLst>
+          </p:cNvPr>
+          <p:cNvSpPr>
+            <a:spLocks noGrp="1"/>
+          </p:cNvSpPr>
+          <p:nvPr>
+            <p:ph type="body" sz="quarter" idx="11"/>
+          </p:nvPr>
+        </p:nvSpPr>
+        <p:spPr>
+          <a:xfrm>
+            <a:off x="5800725" y="582613"/>
+            <a:ext cx="5799138" cy="3176254"/>
+          </a:xfrm>
+          <a:ln w="19050">
+            <a:solidFill>
+              <a:schemeClr val="accent4"/>
+            </a:solidFill>
+          </a:ln>
+        </p:spPr>
+        <p:txBody>
+          <a:bodyPr lIns="182880" tIns="146304" rIns="182880" bIns="146304"/>
+          <a:lstStyle/>
+          <a:p>
+            <a:pPr defTabSz="932472" fontAlgn="base">
+              <a:lnSpc>
+                <a:spcPct val="90000"/>
+              </a:lnSpc>
+              <a:spcBef>
+                <a:spcPct val="0"/>
+              </a:spcBef>
+              <a:spcAft>
+                <a:spcPct val="0"/>
+              </a:spcAft>
+            </a:pPr>
+            <a:r>
+              <a:rPr lang="en-US" sz="1600" dirty="0">
+                <a:solidFill>
+                  <a:schemeClr val="tx1"/>
+                </a:solidFill>
+                <a:cs typeface="Courier New" panose="02070309020205020404" pitchFamily="49" charset="0"/>
+              </a:rPr>
+              <a:t>from </a:t>
+            </a:r>
+            <a:r>
+              <a:rPr lang="en-US" sz="1600" dirty="0" err="1">
+                <a:solidFill>
+                  <a:schemeClr val="tx1"/>
+                </a:solidFill>
+                <a:cs typeface="Courier New" panose="02070309020205020404" pitchFamily="49" charset="0"/>
+              </a:rPr>
+              <a:t>pyspark.sql.functions</a:t>
+            </a:r>
+            <a:r>
+              <a:rPr lang="en-US" sz="1600" dirty="0">
+                <a:solidFill>
+                  <a:schemeClr val="tx1"/>
+                </a:solidFill>
+                <a:cs typeface="Courier New" panose="02070309020205020404" pitchFamily="49" charset="0"/>
+              </a:rPr>
+              <a:t> import year, col</a:t>
+            </a:r>
+          </a:p>
+          <a:p>
+            <a:pPr defTabSz="932472" fontAlgn="base">
+              <a:lnSpc>
+                <a:spcPct val="90000"/>
+              </a:lnSpc>
+              <a:spcBef>
+                <a:spcPct val="0"/>
+              </a:spcBef>
+              <a:spcAft>
+                <a:spcPct val="0"/>
+              </a:spcAft>
+            </a:pPr>
+            <a:endParaRPr lang="en-US" sz="1600" dirty="0">
+              <a:solidFill>
+                <a:schemeClr val="tx1"/>
+              </a:solidFill>
+              <a:ea typeface="Segoe UI" pitchFamily="34" charset="0"/>
+              <a:cs typeface="Courier New" panose="02070309020205020404" pitchFamily="49" charset="0"/>
+            </a:endParaRPr>
+          </a:p>
+          <a:p>
+            <a:pPr defTabSz="932472" fontAlgn="base">
+              <a:lnSpc>
+                <a:spcPct val="90000"/>
+              </a:lnSpc>
+              <a:spcBef>
+                <a:spcPct val="0"/>
+              </a:spcBef>
+              <a:spcAft>
+                <a:spcPct val="0"/>
+              </a:spcAft>
+            </a:pPr>
+            <a:r>
+              <a:rPr lang="en-US" sz="1600" dirty="0">
+                <a:solidFill>
+                  <a:srgbClr val="008000"/>
+                </a:solidFill>
+                <a:ea typeface="Segoe UI" pitchFamily="34" charset="0"/>
+                <a:cs typeface="Courier New" panose="02070309020205020404" pitchFamily="49" charset="0"/>
+              </a:rPr>
+              <a:t># Load data</a:t>
+            </a:r>
+          </a:p>
+          <a:p>
+            <a:pPr defTabSz="932472" fontAlgn="base">
+              <a:lnSpc>
+                <a:spcPct val="90000"/>
+              </a:lnSpc>
+              <a:spcBef>
+                <a:spcPct val="0"/>
+              </a:spcBef>
+              <a:spcAft>
+                <a:spcPct val="0"/>
+              </a:spcAft>
+            </a:pPr>
+            <a:r>
+              <a:rPr lang="en-US" sz="1600" dirty="0" err="1">
+                <a:solidFill>
+                  <a:schemeClr val="tx1"/>
+                </a:solidFill>
+                <a:ea typeface="Segoe UI" pitchFamily="34" charset="0"/>
+                <a:cs typeface="Courier New" panose="02070309020205020404" pitchFamily="49" charset="0"/>
+              </a:rPr>
+              <a:t>df</a:t>
+            </a:r>
+            <a:r>
+              <a:rPr lang="en-US" sz="1600" dirty="0">
+                <a:solidFill>
+                  <a:schemeClr val="tx1"/>
+                </a:solidFill>
+                <a:ea typeface="Segoe UI" pitchFamily="34" charset="0"/>
+                <a:cs typeface="Courier New" panose="02070309020205020404" pitchFamily="49" charset="0"/>
+              </a:rPr>
+              <a:t> = </a:t>
+            </a:r>
+            <a:r>
+              <a:rPr lang="en-US" sz="1600" dirty="0" err="1">
+                <a:solidFill>
+                  <a:schemeClr val="tx1"/>
+                </a:solidFill>
+                <a:ea typeface="Segoe UI" pitchFamily="34" charset="0"/>
+                <a:cs typeface="Courier New" panose="02070309020205020404" pitchFamily="49" charset="0"/>
+              </a:rPr>
+              <a:t>spark.read.load</a:t>
+            </a:r>
+            <a:r>
+              <a:rPr lang="en-US" sz="1600" dirty="0">
+                <a:solidFill>
+                  <a:schemeClr val="tx1"/>
+                </a:solidFill>
+                <a:ea typeface="Segoe UI" pitchFamily="34" charset="0"/>
+                <a:cs typeface="Courier New" panose="02070309020205020404" pitchFamily="49" charset="0"/>
+              </a:rPr>
+              <a:t>("/data/orders.csv",</a:t>
+            </a:r>
+          </a:p>
+          <a:p>
+            <a:pPr defTabSz="932472" fontAlgn="base">
+              <a:lnSpc>
+                <a:spcPct val="90000"/>
+              </a:lnSpc>
+              <a:spcBef>
+                <a:spcPct val="0"/>
+              </a:spcBef>
+              <a:spcAft>
+                <a:spcPct val="0"/>
+              </a:spcAft>
+            </a:pPr>
+            <a:r>
+              <a:rPr lang="en-US" sz="1600" dirty="0">
+                <a:solidFill>
+                  <a:schemeClr val="tx1"/>
+                </a:solidFill>
+                <a:ea typeface="Segoe UI" pitchFamily="34" charset="0"/>
+                <a:cs typeface="Courier New" panose="02070309020205020404" pitchFamily="49" charset="0"/>
+              </a:rPr>
+              <a:t>                     format="csv", header=True)</a:t>
+            </a:r>
+          </a:p>
+          <a:p>
+            <a:pPr defTabSz="932472" fontAlgn="base">
+              <a:lnSpc>
+                <a:spcPct val="90000"/>
+              </a:lnSpc>
+              <a:spcBef>
+                <a:spcPct val="0"/>
+              </a:spcBef>
+              <a:spcAft>
+                <a:spcPct val="0"/>
+              </a:spcAft>
+            </a:pPr>
+            <a:endParaRPr lang="en-US" sz="1600" dirty="0">
+              <a:solidFill>
+                <a:schemeClr val="tx1"/>
+              </a:solidFill>
+              <a:ea typeface="Segoe UI" pitchFamily="34" charset="0"/>
+              <a:cs typeface="Courier New" panose="02070309020205020404" pitchFamily="49" charset="0"/>
+            </a:endParaRPr>
+          </a:p>
+          <a:p>
+            <a:pPr defTabSz="932472" fontAlgn="base">
+              <a:lnSpc>
+                <a:spcPct val="90000"/>
+              </a:lnSpc>
+              <a:spcBef>
+                <a:spcPct val="0"/>
+              </a:spcBef>
+              <a:spcAft>
+                <a:spcPct val="0"/>
+              </a:spcAft>
+            </a:pPr>
+            <a:r>
+              <a:rPr lang="en-US" sz="1600" dirty="0">
+                <a:solidFill>
+                  <a:srgbClr val="008000"/>
+                </a:solidFill>
+                <a:ea typeface="Segoe UI" pitchFamily="34" charset="0"/>
+                <a:cs typeface="Courier New" panose="02070309020205020404" pitchFamily="49" charset="0"/>
+              </a:rPr>
+              <a:t># Add Year column, derived from </a:t>
+            </a:r>
+            <a:r>
+              <a:rPr lang="en-US" sz="1600" dirty="0" err="1">
+                <a:solidFill>
+                  <a:srgbClr val="008000"/>
+                </a:solidFill>
+                <a:ea typeface="Segoe UI" pitchFamily="34" charset="0"/>
+                <a:cs typeface="Courier New" panose="02070309020205020404" pitchFamily="49" charset="0"/>
+              </a:rPr>
+              <a:t>OrderDate</a:t>
+            </a:r>
+            <a:endParaRPr lang="en-US" sz="1600" dirty="0">
+              <a:solidFill>
+                <a:srgbClr val="008000"/>
+              </a:solidFill>
+              <a:ea typeface="Segoe UI" pitchFamily="34" charset="0"/>
+              <a:cs typeface="Courier New" panose="02070309020205020404" pitchFamily="49" charset="0"/>
+            </a:endParaRPr>
+          </a:p>
+          <a:p>
+            <a:pPr defTabSz="932472" fontAlgn="base">
+              <a:lnSpc>
+                <a:spcPct val="90000"/>
+              </a:lnSpc>
+              <a:spcBef>
+                <a:spcPct val="0"/>
+              </a:spcBef>
+              <a:spcAft>
+                <a:spcPct val="0"/>
+              </a:spcAft>
+            </a:pPr>
+            <a:r>
+              <a:rPr lang="en-US" sz="1600" dirty="0" err="1">
+                <a:solidFill>
+                  <a:schemeClr val="tx1"/>
+                </a:solidFill>
+                <a:cs typeface="Courier New" panose="02070309020205020404" pitchFamily="49" charset="0"/>
+              </a:rPr>
+              <a:t>df</a:t>
+            </a:r>
+            <a:r>
+              <a:rPr lang="en-US" sz="1600" dirty="0">
+                <a:solidFill>
+                  <a:schemeClr val="tx1"/>
+                </a:solidFill>
+                <a:cs typeface="Courier New" panose="02070309020205020404" pitchFamily="49" charset="0"/>
+              </a:rPr>
+              <a:t> = </a:t>
+            </a:r>
+            <a:r>
+              <a:rPr lang="en-US" sz="1600" dirty="0" err="1">
+                <a:solidFill>
+                  <a:schemeClr val="tx1"/>
+                </a:solidFill>
+                <a:cs typeface="Courier New" panose="02070309020205020404" pitchFamily="49" charset="0"/>
+              </a:rPr>
+              <a:t>df.withColumn</a:t>
+            </a:r>
+            <a:r>
+              <a:rPr lang="en-US" sz="1600" dirty="0">
+                <a:solidFill>
+                  <a:schemeClr val="tx1"/>
+                </a:solidFill>
+                <a:cs typeface="Courier New" panose="02070309020205020404" pitchFamily="49" charset="0"/>
+              </a:rPr>
+              <a:t>("Year", year(col("</a:t>
+            </a:r>
+            <a:r>
+              <a:rPr lang="en-US" sz="1600" dirty="0" err="1">
+                <a:solidFill>
+                  <a:schemeClr val="tx1"/>
+                </a:solidFill>
+                <a:cs typeface="Courier New" panose="02070309020205020404" pitchFamily="49" charset="0"/>
+              </a:rPr>
+              <a:t>OrderDate</a:t>
+            </a:r>
+            <a:r>
+              <a:rPr lang="en-US" sz="1600" dirty="0">
+                <a:solidFill>
+                  <a:schemeClr val="tx1"/>
+                </a:solidFill>
+                <a:cs typeface="Courier New" panose="02070309020205020404" pitchFamily="49" charset="0"/>
+              </a:rPr>
+              <a:t>")))</a:t>
+            </a:r>
+          </a:p>
+          <a:p>
+            <a:pPr defTabSz="932472" fontAlgn="base">
+              <a:lnSpc>
+                <a:spcPct val="90000"/>
+              </a:lnSpc>
+              <a:spcBef>
+                <a:spcPct val="0"/>
+              </a:spcBef>
+              <a:spcAft>
+                <a:spcPct val="0"/>
+              </a:spcAft>
+            </a:pPr>
+            <a:endParaRPr lang="en-US" sz="1600" dirty="0">
+              <a:solidFill>
+                <a:schemeClr val="tx1"/>
+              </a:solidFill>
+              <a:cs typeface="Courier New" panose="02070309020205020404" pitchFamily="49" charset="0"/>
+            </a:endParaRPr>
+          </a:p>
+          <a:p>
+            <a:pPr defTabSz="932472" fontAlgn="base">
+              <a:lnSpc>
+                <a:spcPct val="90000"/>
+              </a:lnSpc>
+              <a:spcBef>
+                <a:spcPct val="0"/>
+              </a:spcBef>
+              <a:spcAft>
+                <a:spcPct val="0"/>
+              </a:spcAft>
+            </a:pPr>
+            <a:r>
+              <a:rPr lang="en-US" sz="1600" dirty="0">
+                <a:solidFill>
+                  <a:srgbClr val="008000"/>
+                </a:solidFill>
+                <a:ea typeface="Segoe UI" pitchFamily="34" charset="0"/>
+                <a:cs typeface="Courier New" panose="02070309020205020404" pitchFamily="49" charset="0"/>
+              </a:rPr>
+              <a:t># Save transformed data</a:t>
+            </a:r>
+            <a:endParaRPr lang="en-US" sz="1600" dirty="0">
+              <a:solidFill>
+                <a:srgbClr val="008000"/>
+              </a:solidFill>
+              <a:cs typeface="Courier New" panose="02070309020205020404" pitchFamily="49" charset="0"/>
+            </a:endParaRPr>
+          </a:p>
+          <a:p>
+            <a:pPr defTabSz="932472" fontAlgn="base">
+              <a:lnSpc>
+                <a:spcPct val="90000"/>
+              </a:lnSpc>
+              <a:spcBef>
+                <a:spcPct val="0"/>
+              </a:spcBef>
+              <a:spcAft>
+                <a:spcPct val="0"/>
+              </a:spcAft>
+            </a:pPr>
+            <a:r>
+              <a:rPr lang="en-US" sz="1600" dirty="0" err="1">
+                <a:solidFill>
+                  <a:schemeClr val="tx1"/>
+                </a:solidFill>
+                <a:cs typeface="Courier New" panose="02070309020205020404" pitchFamily="49" charset="0"/>
+              </a:rPr>
+              <a:t>df.write.mode</a:t>
+            </a:r>
+            <a:r>
+              <a:rPr lang="en-US" sz="1600" dirty="0">
+                <a:solidFill>
+                  <a:schemeClr val="tx1"/>
+                </a:solidFill>
+                <a:cs typeface="Courier New" panose="02070309020205020404" pitchFamily="49" charset="0"/>
+              </a:rPr>
+              <a:t>("overwrite").parquet("/data/</a:t>
+            </a:r>
+            <a:r>
+              <a:rPr lang="en-US" sz="1600" dirty="0" err="1">
+                <a:solidFill>
+                  <a:schemeClr val="tx1"/>
+                </a:solidFill>
+                <a:cs typeface="Courier New" panose="02070309020205020404" pitchFamily="49" charset="0"/>
+              </a:rPr>
+              <a:t>orders.parquet</a:t>
+            </a:r>
+            <a:r>
+              <a:rPr lang="en-US" sz="1600" dirty="0">
+                <a:solidFill>
+                  <a:schemeClr val="tx1"/>
+                </a:solidFill>
+                <a:cs typeface="Courier New" panose="02070309020205020404" pitchFamily="49" charset="0"/>
+              </a:rPr>
+              <a:t>")</a:t>
+            </a:r>
+          </a:p>
+        </p:txBody>
+      </p:sp>
+    </p:spTree>
+    <p:extLst>
+      <p:ext uri="{BB962C8B-B14F-4D97-AF65-F5344CB8AC3E}">
+        <p14:creationId xmlns:p14="http://schemas.microsoft.com/office/powerpoint/2010/main" val="2269908640"/>
+      </p:ext>
+    </p:extLst>
+  </p:cSld>
+  <p:clrMapOvr>
+    <a:masterClrMapping/>
+  </p:clrMapOvr>
+  <p:transition>
+    <p:fade/>
+  </p:transition>
+</p:sld>
+</file>
+
+<file path=ppt/slides/slide21.xml><?xml version="1.0" encoding="utf-8"?>
+<p:sld xmlns:a="http://schemas.openxmlformats.org/drawingml/2006/main" xmlns:r="http://schemas.openxmlformats.org/officeDocument/2006/relationships" xmlns:p="http://schemas.openxmlformats.org/presentationml/2006/main">
+  <p:cSld>
+    <p:spTree>
+      <p:nvGrpSpPr>
+        <p:cNvPr id="1" name=""/>
+        <p:cNvGrpSpPr/>
+        <p:nvPr/>
+      </p:nvGrpSpPr>
+      <p:grpSpPr>
+        <a:xfrm>
+          <a:off x="0" y="0"/>
+          <a:ext cx="0" cy="0"/>
+          <a:chOff x="0" y="0"/>
+          <a:chExt cx="0" cy="0"/>
+        </a:xfrm>
+      </p:grpSpPr>
+      <p:sp>
+        <p:nvSpPr>
+          <p:cNvPr id="2" name="Title 1">
+            <a:extLst>
+              <a:ext uri="{FF2B5EF4-FFF2-40B4-BE49-F238E27FC236}">
+                <a16:creationId xmlns:a16="http://schemas.microsoft.com/office/drawing/2014/main" id="{56FE439C-A1FA-5CE0-C41C-97A60E5EE185}"/>
+              </a:ext>
+            </a:extLst>
+          </p:cNvPr>
+          <p:cNvSpPr>
+            <a:spLocks noGrp="1"/>
+          </p:cNvSpPr>
+          <p:nvPr>
+            <p:ph type="title"/>
+          </p:nvPr>
+        </p:nvSpPr>
+        <p:spPr>
+          <a:xfrm>
+            <a:off x="588262" y="585216"/>
+            <a:ext cx="4042761" cy="369332"/>
+          </a:xfrm>
+        </p:spPr>
+        <p:txBody>
+          <a:bodyPr>
+            <a:normAutofit fontScale="90000"/>
+          </a:bodyPr>
+          <a:lstStyle/>
+          <a:p>
+            <a:r>
+              <a:rPr lang="en-US" dirty="0"/>
+              <a:t>Partition data files</a:t>
+            </a:r>
+          </a:p>
+        </p:txBody>
+      </p:sp>
+      <p:sp>
+        <p:nvSpPr>
+          <p:cNvPr id="23" name="Text Placeholder 22">
+            <a:extLst>
+              <a:ext uri="{FF2B5EF4-FFF2-40B4-BE49-F238E27FC236}">
+                <a16:creationId xmlns:a16="http://schemas.microsoft.com/office/drawing/2014/main" id="{9A45F0AE-71C9-1CBC-926D-009F40DCAE39}"/>
+              </a:ext>
+            </a:extLst>
+          </p:cNvPr>
+          <p:cNvSpPr>
+            <a:spLocks noGrp="1"/>
+          </p:cNvSpPr>
+          <p:nvPr>
+            <p:ph type="body" sz="quarter" idx="15"/>
+          </p:nvPr>
+        </p:nvSpPr>
+        <p:spPr>
+          <a:xfrm>
+            <a:off x="586389" y="1708455"/>
+            <a:ext cx="4042761" cy="1261884"/>
+          </a:xfrm>
+        </p:spPr>
+        <p:txBody>
+          <a:bodyPr/>
+          <a:lstStyle/>
+          <a:p>
+            <a:pPr marL="228600" lvl="1" indent="-228600">
+              <a:spcBef>
+                <a:spcPts val="1200"/>
+              </a:spcBef>
+              <a:buFont typeface="Arial" panose="020B0604020202020204" pitchFamily="34" charset="0"/>
+              <a:buChar char="•"/>
+            </a:pPr>
+            <a:r>
+              <a:rPr lang="en-US" sz="1800" dirty="0">
+                <a:cs typeface="Segoe UI" panose="020B0502040204020203" pitchFamily="34" charset="0"/>
+              </a:rPr>
+              <a:t>Partition data by one or more columns</a:t>
+            </a:r>
+          </a:p>
+          <a:p>
+            <a:pPr marL="228600" lvl="1" indent="-228600">
+              <a:spcBef>
+                <a:spcPts val="1200"/>
+              </a:spcBef>
+              <a:buFont typeface="Arial" panose="020B0604020202020204" pitchFamily="34" charset="0"/>
+              <a:buChar char="•"/>
+            </a:pPr>
+            <a:r>
+              <a:rPr lang="en-US" sz="1800" dirty="0">
+                <a:cs typeface="Segoe UI" panose="020B0502040204020203" pitchFamily="34" charset="0"/>
+              </a:rPr>
+              <a:t>Distributes data to improve performance and scalability</a:t>
+            </a:r>
+          </a:p>
+        </p:txBody>
+      </p:sp>
+      <p:sp>
+        <p:nvSpPr>
+          <p:cNvPr id="22" name="Text Placeholder 21">
+            <a:extLst>
+              <a:ext uri="{FF2B5EF4-FFF2-40B4-BE49-F238E27FC236}">
+                <a16:creationId xmlns:a16="http://schemas.microsoft.com/office/drawing/2014/main" id="{B173C38D-BAFB-35F2-F65D-6042A1EF0D77}"/>
+              </a:ext>
+            </a:extLst>
+          </p:cNvPr>
+          <p:cNvSpPr>
+            <a:spLocks noGrp="1"/>
+          </p:cNvSpPr>
+          <p:nvPr>
+            <p:ph type="body" sz="quarter" idx="11"/>
+          </p:nvPr>
+        </p:nvSpPr>
+        <p:spPr>
+          <a:xfrm>
+            <a:off x="5800725" y="582613"/>
+            <a:ext cx="5799138" cy="726353"/>
+          </a:xfrm>
+          <a:ln w="19050">
+            <a:solidFill>
+              <a:schemeClr val="accent4"/>
+            </a:solidFill>
+          </a:ln>
+        </p:spPr>
+        <p:txBody>
+          <a:bodyPr lIns="182880" tIns="146304" rIns="182880" bIns="146304">
+            <a:normAutofit fontScale="92500" lnSpcReduction="10000"/>
+          </a:bodyPr>
+          <a:lstStyle/>
+          <a:p>
+            <a:r>
+              <a:rPr lang="en-US" sz="1400" dirty="0" err="1">
+                <a:solidFill>
+                  <a:schemeClr val="tx1"/>
+                </a:solidFill>
+                <a:cs typeface="Courier New" panose="02070309020205020404" pitchFamily="49" charset="0"/>
+              </a:rPr>
+              <a:t>df.write.partitionBy</a:t>
+            </a:r>
+            <a:r>
+              <a:rPr lang="en-US" sz="1400" dirty="0">
+                <a:solidFill>
+                  <a:schemeClr val="tx1"/>
+                </a:solidFill>
+                <a:cs typeface="Courier New" panose="02070309020205020404" pitchFamily="49" charset="0"/>
+              </a:rPr>
+              <a:t>("Year").mode("overwrite").parquet("/data")</a:t>
+            </a:r>
+          </a:p>
+        </p:txBody>
+      </p:sp>
+      <p:grpSp>
+        <p:nvGrpSpPr>
+          <p:cNvPr id="18" name="Group 17" descr="Graphic of a Folder titled Data with subfolders titles Year=2020 and Year=2021">
+            <a:extLst>
+              <a:ext uri="{FF2B5EF4-FFF2-40B4-BE49-F238E27FC236}">
+                <a16:creationId xmlns:a16="http://schemas.microsoft.com/office/drawing/2014/main" id="{8E2548C9-433C-B96C-A4AB-63F99DAD453D}"/>
+              </a:ext>
+            </a:extLst>
+          </p:cNvPr>
+          <p:cNvGrpSpPr/>
+          <p:nvPr/>
+        </p:nvGrpSpPr>
+        <p:grpSpPr>
+          <a:xfrm>
+            <a:off x="7378980" y="1235142"/>
+            <a:ext cx="2642628" cy="3511234"/>
+            <a:chOff x="4481210" y="3059925"/>
+            <a:chExt cx="1884011" cy="2503268"/>
+          </a:xfrm>
+        </p:grpSpPr>
+        <p:cxnSp>
+          <p:nvCxnSpPr>
+            <p:cNvPr id="19" name="Straight Connector 18">
+              <a:extLst>
+                <a:ext uri="{FF2B5EF4-FFF2-40B4-BE49-F238E27FC236}">
+                  <a16:creationId xmlns:a16="http://schemas.microsoft.com/office/drawing/2014/main" id="{5215C799-A352-6A72-C1E7-744265C0F4D5}"/>
+                </a:ext>
+              </a:extLst>
+            </p:cNvPr>
+            <p:cNvCxnSpPr>
+              <a:stCxn id="5" idx="2"/>
+              <a:endCxn id="13" idx="1"/>
+            </p:cNvCxnSpPr>
+            <p:nvPr/>
+          </p:nvCxnSpPr>
+          <p:spPr>
+            <a:xfrm rot="16200000" flipH="1">
+              <a:off x="4994678" y="4020195"/>
+              <a:ext cx="278081" cy="322523"/>
+            </a:xfrm>
+            <a:prstGeom prst="bentConnector2">
+              <a:avLst/>
+            </a:prstGeom>
+            <a:ln w="38100">
+              <a:solidFill>
+                <a:schemeClr val="tx1"/>
+              </a:solidFill>
+              <a:headEnd type="none"/>
+              <a:tailEnd type="none"/>
+            </a:ln>
+          </p:spPr>
+          <p:style>
+            <a:lnRef idx="1">
+              <a:schemeClr val="accent1"/>
+            </a:lnRef>
+            <a:fillRef idx="0">
+              <a:schemeClr val="accent1"/>
+            </a:fillRef>
+            <a:effectRef idx="0">
+              <a:schemeClr val="accent1"/>
+            </a:effectRef>
+            <a:fontRef idx="minor">
+              <a:schemeClr val="tx1"/>
+            </a:fontRef>
+          </p:style>
+        </p:cxnSp>
+        <p:pic>
+          <p:nvPicPr>
+            <p:cNvPr id="17" name="Graphic 16" descr="Paper with solid fill">
+              <a:extLst>
+                <a:ext uri="{FF2B5EF4-FFF2-40B4-BE49-F238E27FC236}">
+                  <a16:creationId xmlns:a16="http://schemas.microsoft.com/office/drawing/2014/main" id="{E722B387-FA06-02D5-0D30-E5500BF9DE84}"/>
+                </a:ext>
+              </a:extLst>
+            </p:cNvPr>
+            <p:cNvPicPr>
+              <a:picLocks noChangeAspect="1"/>
+            </p:cNvPicPr>
+            <p:nvPr/>
+          </p:nvPicPr>
+          <p:blipFill>
+            <a:blip r:embed="rId3">
+              <a:extLst>
+                <a:ext uri="{96DAC541-7B7A-43D3-8B79-37D633B846F1}">
+                  <asvg:svgBlip xmlns:asvg="http://schemas.microsoft.com/office/drawing/2016/SVG/main" r:embed="rId4"/>
+                </a:ext>
+              </a:extLst>
+            </a:blip>
+            <a:stretch>
+              <a:fillRect/>
+            </a:stretch>
+          </p:blipFill>
+          <p:spPr>
+            <a:xfrm>
+              <a:off x="5633159" y="4569066"/>
+              <a:ext cx="601428" cy="601428"/>
+            </a:xfrm>
+            <a:prstGeom prst="rect">
+              <a:avLst/>
+            </a:prstGeom>
+          </p:spPr>
+        </p:pic>
+        <p:pic>
+          <p:nvPicPr>
+            <p:cNvPr id="8" name="Graphic 7" descr="Paper with solid fill">
+              <a:extLst>
+                <a:ext uri="{FF2B5EF4-FFF2-40B4-BE49-F238E27FC236}">
+                  <a16:creationId xmlns:a16="http://schemas.microsoft.com/office/drawing/2014/main" id="{364E0BC8-39A4-C6C4-9522-7B6F0EC0FD5B}"/>
+                </a:ext>
+              </a:extLst>
+            </p:cNvPr>
+            <p:cNvPicPr>
+              <a:picLocks noChangeAspect="1"/>
+            </p:cNvPicPr>
+            <p:nvPr/>
+          </p:nvPicPr>
+          <p:blipFill>
+            <a:blip r:embed="rId3">
+              <a:extLst>
+                <a:ext uri="{96DAC541-7B7A-43D3-8B79-37D633B846F1}">
+                  <asvg:svgBlip xmlns:asvg="http://schemas.microsoft.com/office/drawing/2016/SVG/main" r:embed="rId4"/>
+                </a:ext>
+              </a:extLst>
+            </a:blip>
+            <a:stretch>
+              <a:fillRect/>
+            </a:stretch>
+          </p:blipFill>
+          <p:spPr>
+            <a:xfrm>
+              <a:off x="5584520" y="3741703"/>
+              <a:ext cx="601428" cy="601428"/>
+            </a:xfrm>
+            <a:prstGeom prst="rect">
+              <a:avLst/>
+            </a:prstGeom>
+          </p:spPr>
+        </p:pic>
+        <p:grpSp>
+          <p:nvGrpSpPr>
+            <p:cNvPr id="10" name="Group 9">
+              <a:extLst>
+                <a:ext uri="{FF2B5EF4-FFF2-40B4-BE49-F238E27FC236}">
+                  <a16:creationId xmlns:a16="http://schemas.microsoft.com/office/drawing/2014/main" id="{35A82C61-D64E-B169-F5EE-B048C0F4D404}"/>
+                </a:ext>
+              </a:extLst>
+            </p:cNvPr>
+            <p:cNvGrpSpPr/>
+            <p:nvPr/>
+          </p:nvGrpSpPr>
+          <p:grpSpPr>
+            <a:xfrm>
+              <a:off x="4481210" y="3059925"/>
+              <a:ext cx="982493" cy="982492"/>
+              <a:chOff x="3213371" y="3033862"/>
+              <a:chExt cx="1159788" cy="1159788"/>
+            </a:xfrm>
+          </p:grpSpPr>
+          <p:pic>
+            <p:nvPicPr>
+              <p:cNvPr id="5" name="Graphic 4" descr="Folder with solid fill">
+                <a:extLst>
+                  <a:ext uri="{FF2B5EF4-FFF2-40B4-BE49-F238E27FC236}">
+                    <a16:creationId xmlns:a16="http://schemas.microsoft.com/office/drawing/2014/main" id="{D03ABD07-92BF-3060-65C3-CF5F754DA292}"/>
+                  </a:ext>
+                </a:extLst>
+              </p:cNvPr>
+              <p:cNvPicPr>
+                <a:picLocks noChangeAspect="1"/>
+              </p:cNvPicPr>
+              <p:nvPr/>
+            </p:nvPicPr>
+            <p:blipFill>
+              <a:blip r:embed="rId5">
+                <a:extLst>
+                  <a:ext uri="{96DAC541-7B7A-43D3-8B79-37D633B846F1}">
+                    <asvg:svgBlip xmlns:asvg="http://schemas.microsoft.com/office/drawing/2016/SVG/main" r:embed="rId6"/>
+                  </a:ext>
+                </a:extLst>
+              </a:blip>
+              <a:stretch>
+                <a:fillRect/>
+              </a:stretch>
+            </p:blipFill>
+            <p:spPr>
+              <a:xfrm>
+                <a:off x="3213371" y="3033862"/>
+                <a:ext cx="1159788" cy="1159788"/>
+              </a:xfrm>
+              <a:prstGeom prst="rect">
+                <a:avLst/>
+              </a:prstGeom>
+            </p:spPr>
+          </p:pic>
+          <p:sp>
+            <p:nvSpPr>
+              <p:cNvPr id="9" name="TextBox 8">
+                <a:extLst>
+                  <a:ext uri="{FF2B5EF4-FFF2-40B4-BE49-F238E27FC236}">
+                    <a16:creationId xmlns:a16="http://schemas.microsoft.com/office/drawing/2014/main" id="{BE2ECDAE-3229-3EB2-E0C3-0CEF45F78928}"/>
+                  </a:ext>
+                </a:extLst>
+              </p:cNvPr>
+              <p:cNvSpPr txBox="1"/>
+              <p:nvPr/>
+            </p:nvSpPr>
+            <p:spPr>
+              <a:xfrm>
+                <a:off x="3412540" y="3378723"/>
+                <a:ext cx="761450" cy="528624"/>
+              </a:xfrm>
+              <a:prstGeom prst="rect">
+                <a:avLst/>
+              </a:prstGeom>
+              <a:noFill/>
+            </p:spPr>
+            <p:txBody>
+              <a:bodyPr wrap="none" lIns="182880" tIns="146304" rIns="182880" bIns="146304" rtlCol="0">
+                <a:spAutoFit/>
+              </a:bodyPr>
+              <a:lstStyle/>
+              <a:p>
+                <a:pPr>
+                  <a:lnSpc>
+                    <a:spcPct val="90000"/>
+                  </a:lnSpc>
+                  <a:spcAft>
+                    <a:spcPts val="600"/>
+                  </a:spcAft>
+                </a:pPr>
+                <a:r>
+                  <a:rPr lang="en-US" sz="1100" dirty="0">
+                    <a:solidFill>
+                      <a:schemeClr val="bg1"/>
+                    </a:solidFill>
+                  </a:rPr>
+                  <a:t>data</a:t>
+                </a:r>
+              </a:p>
+            </p:txBody>
+          </p:sp>
+        </p:grpSp>
+        <p:grpSp>
+          <p:nvGrpSpPr>
+            <p:cNvPr id="11" name="Group 10">
+              <a:extLst>
+                <a:ext uri="{FF2B5EF4-FFF2-40B4-BE49-F238E27FC236}">
+                  <a16:creationId xmlns:a16="http://schemas.microsoft.com/office/drawing/2014/main" id="{BB80155C-F784-1316-99B8-B009057A04B8}"/>
+                </a:ext>
+              </a:extLst>
+            </p:cNvPr>
+            <p:cNvGrpSpPr/>
+            <p:nvPr/>
+          </p:nvGrpSpPr>
+          <p:grpSpPr>
+            <a:xfrm>
+              <a:off x="5294980" y="3771215"/>
+              <a:ext cx="1040991" cy="982492"/>
+              <a:chOff x="3178842" y="3217030"/>
+              <a:chExt cx="1228842" cy="1159788"/>
+            </a:xfrm>
+          </p:grpSpPr>
+          <p:pic>
+            <p:nvPicPr>
+              <p:cNvPr id="12" name="Graphic 11" descr="Folder with solid fill">
+                <a:extLst>
+                  <a:ext uri="{FF2B5EF4-FFF2-40B4-BE49-F238E27FC236}">
+                    <a16:creationId xmlns:a16="http://schemas.microsoft.com/office/drawing/2014/main" id="{5379A921-80C7-B2BC-84F4-B7B447258998}"/>
+                  </a:ext>
+                </a:extLst>
+              </p:cNvPr>
+              <p:cNvPicPr>
+                <a:picLocks noChangeAspect="1"/>
+              </p:cNvPicPr>
+              <p:nvPr/>
+            </p:nvPicPr>
+            <p:blipFill>
+              <a:blip r:embed="rId5">
+                <a:extLst>
+                  <a:ext uri="{96DAC541-7B7A-43D3-8B79-37D633B846F1}">
+                    <asvg:svgBlip xmlns:asvg="http://schemas.microsoft.com/office/drawing/2016/SVG/main" r:embed="rId6"/>
+                  </a:ext>
+                </a:extLst>
+              </a:blip>
+              <a:stretch>
+                <a:fillRect/>
+              </a:stretch>
+            </p:blipFill>
+            <p:spPr>
+              <a:xfrm>
+                <a:off x="3213370" y="3217030"/>
+                <a:ext cx="1159788" cy="1159788"/>
+              </a:xfrm>
+              <a:prstGeom prst="rect">
+                <a:avLst/>
+              </a:prstGeom>
+            </p:spPr>
+          </p:pic>
+          <p:sp>
+            <p:nvSpPr>
+              <p:cNvPr id="13" name="TextBox 12">
+                <a:extLst>
+                  <a:ext uri="{FF2B5EF4-FFF2-40B4-BE49-F238E27FC236}">
+                    <a16:creationId xmlns:a16="http://schemas.microsoft.com/office/drawing/2014/main" id="{3E0DE526-A2DD-D31D-B97D-85010B1A4F2E}"/>
+                  </a:ext>
+                </a:extLst>
+              </p:cNvPr>
+              <p:cNvSpPr txBox="1"/>
+              <p:nvPr/>
+            </p:nvSpPr>
+            <p:spPr>
+              <a:xfrm>
+                <a:off x="3178842" y="3601121"/>
+                <a:ext cx="1228842" cy="528626"/>
+              </a:xfrm>
+              <a:prstGeom prst="rect">
+                <a:avLst/>
+              </a:prstGeom>
+              <a:noFill/>
+            </p:spPr>
+            <p:txBody>
+              <a:bodyPr wrap="none" lIns="182880" tIns="146304" rIns="182880" bIns="146304" rtlCol="0">
+                <a:spAutoFit/>
+              </a:bodyPr>
+              <a:lstStyle/>
+              <a:p>
+                <a:pPr>
+                  <a:lnSpc>
+                    <a:spcPct val="90000"/>
+                  </a:lnSpc>
+                  <a:spcAft>
+                    <a:spcPts val="600"/>
+                  </a:spcAft>
+                </a:pPr>
+                <a:r>
+                  <a:rPr lang="en-US" sz="1100" dirty="0">
+                    <a:solidFill>
+                      <a:schemeClr val="bg1"/>
+                    </a:solidFill>
+                  </a:rPr>
+                  <a:t>Year=2020</a:t>
+                </a:r>
+              </a:p>
+            </p:txBody>
+          </p:sp>
+        </p:grpSp>
+        <p:grpSp>
+          <p:nvGrpSpPr>
+            <p:cNvPr id="14" name="Group 13">
+              <a:extLst>
+                <a:ext uri="{FF2B5EF4-FFF2-40B4-BE49-F238E27FC236}">
+                  <a16:creationId xmlns:a16="http://schemas.microsoft.com/office/drawing/2014/main" id="{0B262F1A-8AE1-6F4E-02C4-D45F01955821}"/>
+                </a:ext>
+              </a:extLst>
+            </p:cNvPr>
+            <p:cNvGrpSpPr/>
+            <p:nvPr/>
+          </p:nvGrpSpPr>
+          <p:grpSpPr>
+            <a:xfrm>
+              <a:off x="5324230" y="4580701"/>
+              <a:ext cx="1040991" cy="982492"/>
+              <a:chOff x="3178842" y="3301235"/>
+              <a:chExt cx="1228842" cy="1159788"/>
+            </a:xfrm>
+          </p:grpSpPr>
+          <p:pic>
+            <p:nvPicPr>
+              <p:cNvPr id="15" name="Graphic 14" descr="Folder with solid fill">
+                <a:extLst>
+                  <a:ext uri="{FF2B5EF4-FFF2-40B4-BE49-F238E27FC236}">
+                    <a16:creationId xmlns:a16="http://schemas.microsoft.com/office/drawing/2014/main" id="{836B16C9-E014-165C-1D71-A03A96C09271}"/>
+                  </a:ext>
+                </a:extLst>
+              </p:cNvPr>
+              <p:cNvPicPr>
+                <a:picLocks noChangeAspect="1"/>
+              </p:cNvPicPr>
+              <p:nvPr/>
+            </p:nvPicPr>
+            <p:blipFill>
+              <a:blip r:embed="rId5">
+                <a:extLst>
+                  <a:ext uri="{96DAC541-7B7A-43D3-8B79-37D633B846F1}">
+                    <asvg:svgBlip xmlns:asvg="http://schemas.microsoft.com/office/drawing/2016/SVG/main" r:embed="rId6"/>
+                  </a:ext>
+                </a:extLst>
+              </a:blip>
+              <a:stretch>
+                <a:fillRect/>
+              </a:stretch>
+            </p:blipFill>
+            <p:spPr>
+              <a:xfrm>
+                <a:off x="3213370" y="3301235"/>
+                <a:ext cx="1159788" cy="1159788"/>
+              </a:xfrm>
+              <a:prstGeom prst="rect">
+                <a:avLst/>
+              </a:prstGeom>
+            </p:spPr>
+          </p:pic>
+          <p:sp>
+            <p:nvSpPr>
+              <p:cNvPr id="16" name="TextBox 15">
+                <a:extLst>
+                  <a:ext uri="{FF2B5EF4-FFF2-40B4-BE49-F238E27FC236}">
+                    <a16:creationId xmlns:a16="http://schemas.microsoft.com/office/drawing/2014/main" id="{9BD1BB2E-1D4D-F443-265F-4E58186FC78F}"/>
+                  </a:ext>
+                </a:extLst>
+              </p:cNvPr>
+              <p:cNvSpPr txBox="1"/>
+              <p:nvPr/>
+            </p:nvSpPr>
+            <p:spPr>
+              <a:xfrm>
+                <a:off x="3178842" y="3654708"/>
+                <a:ext cx="1228842" cy="528626"/>
+              </a:xfrm>
+              <a:prstGeom prst="rect">
+                <a:avLst/>
+              </a:prstGeom>
+              <a:noFill/>
+            </p:spPr>
+            <p:txBody>
+              <a:bodyPr wrap="none" lIns="182880" tIns="146304" rIns="182880" bIns="146304" rtlCol="0">
+                <a:spAutoFit/>
+              </a:bodyPr>
+              <a:lstStyle/>
+              <a:p>
+                <a:pPr>
+                  <a:lnSpc>
+                    <a:spcPct val="90000"/>
+                  </a:lnSpc>
+                  <a:spcAft>
+                    <a:spcPts val="600"/>
+                  </a:spcAft>
+                </a:pPr>
+                <a:r>
+                  <a:rPr lang="en-US" sz="1100" dirty="0">
+                    <a:solidFill>
+                      <a:schemeClr val="bg1"/>
+                    </a:solidFill>
+                  </a:rPr>
+                  <a:t>Year=2021</a:t>
+                </a:r>
+              </a:p>
+            </p:txBody>
+          </p:sp>
+        </p:grpSp>
+        <p:cxnSp>
+          <p:nvCxnSpPr>
+            <p:cNvPr id="20" name="Straight Connector 18">
+              <a:extLst>
+                <a:ext uri="{FF2B5EF4-FFF2-40B4-BE49-F238E27FC236}">
+                  <a16:creationId xmlns:a16="http://schemas.microsoft.com/office/drawing/2014/main" id="{A6752E52-FA22-9AB0-B241-6C89D893D20E}"/>
+                </a:ext>
+              </a:extLst>
+            </p:cNvPr>
+            <p:cNvCxnSpPr>
+              <a:cxnSpLocks/>
+              <a:stCxn id="5" idx="2"/>
+              <a:endCxn id="16" idx="1"/>
+            </p:cNvCxnSpPr>
+            <p:nvPr/>
+          </p:nvCxnSpPr>
+          <p:spPr>
+            <a:xfrm rot="16200000" flipH="1">
+              <a:off x="4617528" y="4397345"/>
+              <a:ext cx="1061630" cy="351773"/>
+            </a:xfrm>
+            <a:prstGeom prst="bentConnector2">
+              <a:avLst/>
+            </a:prstGeom>
+            <a:ln w="38100">
+              <a:solidFill>
+                <a:schemeClr val="tx1"/>
+              </a:solidFill>
+              <a:headEnd type="none"/>
+              <a:tailEnd type="none"/>
+            </a:ln>
+          </p:spPr>
+          <p:style>
+            <a:lnRef idx="1">
+              <a:schemeClr val="accent1"/>
+            </a:lnRef>
+            <a:fillRef idx="0">
+              <a:schemeClr val="accent1"/>
+            </a:fillRef>
+            <a:effectRef idx="0">
+              <a:schemeClr val="accent1"/>
+            </a:effectRef>
+            <a:fontRef idx="minor">
+              <a:schemeClr val="tx1"/>
+            </a:fontRef>
+          </p:style>
+        </p:cxnSp>
+      </p:grpSp>
+    </p:spTree>
+    <p:extLst>
+      <p:ext uri="{BB962C8B-B14F-4D97-AF65-F5344CB8AC3E}">
+        <p14:creationId xmlns:p14="http://schemas.microsoft.com/office/powerpoint/2010/main" val="846591196"/>
+      </p:ext>
+    </p:extLst>
+  </p:cSld>
+  <p:clrMapOvr>
+    <a:masterClrMapping/>
+  </p:clrMapOvr>
+  <p:transition>
+    <p:fade/>
+  </p:transition>
+</p:sld>
+</file>
+
+<file path=ppt/slides/slide22.xml><?xml version="1.0" encoding="utf-8"?>
+<p:sld xmlns:a="http://schemas.openxmlformats.org/drawingml/2006/main" xmlns:r="http://schemas.openxmlformats.org/officeDocument/2006/relationships" xmlns:p="http://schemas.openxmlformats.org/presentationml/2006/main">
+  <p:cSld>
+    <p:spTree>
+      <p:nvGrpSpPr>
+        <p:cNvPr id="1" name=""/>
+        <p:cNvGrpSpPr/>
+        <p:nvPr/>
+      </p:nvGrpSpPr>
+      <p:grpSpPr>
+        <a:xfrm>
+          <a:off x="0" y="0"/>
+          <a:ext cx="0" cy="0"/>
+          <a:chOff x="0" y="0"/>
+          <a:chExt cx="0" cy="0"/>
+        </a:xfrm>
+      </p:grpSpPr>
+      <p:sp>
+        <p:nvSpPr>
+          <p:cNvPr id="2" name="Title 1">
+            <a:extLst>
+              <a:ext uri="{FF2B5EF4-FFF2-40B4-BE49-F238E27FC236}">
+                <a16:creationId xmlns:a16="http://schemas.microsoft.com/office/drawing/2014/main" id="{56FE439C-A1FA-5CE0-C41C-97A60E5EE185}"/>
+              </a:ext>
+            </a:extLst>
+          </p:cNvPr>
+          <p:cNvSpPr>
+            <a:spLocks noGrp="1"/>
+          </p:cNvSpPr>
+          <p:nvPr>
+            <p:ph type="title"/>
+          </p:nvPr>
+        </p:nvSpPr>
+        <p:spPr/>
+        <p:txBody>
+          <a:bodyPr/>
+          <a:lstStyle/>
+          <a:p>
+            <a:r>
+              <a:rPr lang="en-US" dirty="0"/>
+              <a:t>Transform data with SQL</a:t>
+            </a:r>
+          </a:p>
+        </p:txBody>
+      </p:sp>
+      <p:sp>
+        <p:nvSpPr>
+          <p:cNvPr id="5" name="Text Placeholder 4">
+            <a:extLst>
+              <a:ext uri="{FF2B5EF4-FFF2-40B4-BE49-F238E27FC236}">
+                <a16:creationId xmlns:a16="http://schemas.microsoft.com/office/drawing/2014/main" id="{6CCC8208-A139-EAE5-6F83-E358AEA1856E}"/>
+              </a:ext>
+            </a:extLst>
+          </p:cNvPr>
+          <p:cNvSpPr>
+            <a:spLocks noGrp="1"/>
+          </p:cNvSpPr>
+          <p:nvPr>
+            <p:ph type="body" sz="quarter" idx="15"/>
+          </p:nvPr>
+        </p:nvSpPr>
+        <p:spPr>
+          <a:xfrm>
+            <a:off x="586389" y="1708455"/>
+            <a:ext cx="4042761" cy="2513509"/>
+          </a:xfrm>
+        </p:spPr>
+        <p:txBody>
+          <a:bodyPr/>
+          <a:lstStyle/>
+          <a:p>
+            <a:pPr marL="228600" lvl="1" indent="-228600">
+              <a:spcBef>
+                <a:spcPts val="1200"/>
+              </a:spcBef>
+              <a:buFont typeface="Arial" panose="020B0604020202020204" pitchFamily="34" charset="0"/>
+              <a:buChar char="•"/>
+            </a:pPr>
+            <a:r>
+              <a:rPr lang="en-US" sz="1800" dirty="0">
+                <a:cs typeface="Segoe UI" panose="020B0502040204020203" pitchFamily="34" charset="0"/>
+              </a:rPr>
+              <a:t>Use the </a:t>
+            </a:r>
+            <a:r>
+              <a:rPr lang="en-US" sz="1800" dirty="0" err="1">
+                <a:cs typeface="Segoe UI" panose="020B0502040204020203" pitchFamily="34" charset="0"/>
+              </a:rPr>
+              <a:t>metastore</a:t>
+            </a:r>
+            <a:r>
+              <a:rPr lang="en-US" sz="1800" dirty="0">
+                <a:cs typeface="Segoe UI" panose="020B0502040204020203" pitchFamily="34" charset="0"/>
+              </a:rPr>
+              <a:t> to define tables and views</a:t>
+            </a:r>
+          </a:p>
+          <a:p>
+            <a:pPr marL="228600" lvl="1" indent="-228600">
+              <a:spcBef>
+                <a:spcPts val="1200"/>
+              </a:spcBef>
+              <a:buFont typeface="Arial" panose="020B0604020202020204" pitchFamily="34" charset="0"/>
+              <a:buChar char="•"/>
+            </a:pPr>
+            <a:r>
+              <a:rPr lang="en-US" sz="1800" dirty="0">
+                <a:cs typeface="Segoe UI" panose="020B0502040204020203" pitchFamily="34" charset="0"/>
+              </a:rPr>
+              <a:t>Use SQL to query and transform</a:t>
+            </a:r>
+            <a:br>
+              <a:rPr lang="en-US" sz="1800" dirty="0">
+                <a:cs typeface="Segoe UI" panose="020B0502040204020203" pitchFamily="34" charset="0"/>
+              </a:rPr>
+            </a:br>
+            <a:r>
+              <a:rPr lang="en-US" sz="1800" dirty="0">
+                <a:cs typeface="Segoe UI" panose="020B0502040204020203" pitchFamily="34" charset="0"/>
+              </a:rPr>
+              <a:t>the data</a:t>
+            </a:r>
+          </a:p>
+          <a:p>
+            <a:pPr marL="228600" lvl="1" indent="-228600">
+              <a:spcBef>
+                <a:spcPts val="1200"/>
+              </a:spcBef>
+              <a:buFont typeface="Arial" panose="020B0604020202020204" pitchFamily="34" charset="0"/>
+              <a:buChar char="•"/>
+            </a:pPr>
+            <a:r>
+              <a:rPr lang="en-US" sz="1800" dirty="0">
+                <a:cs typeface="Segoe UI" panose="020B0502040204020203" pitchFamily="34" charset="0"/>
+              </a:rPr>
+              <a:t>Save transformed data as an</a:t>
+            </a:r>
+            <a:br>
+              <a:rPr lang="en-US" sz="1800" dirty="0">
+                <a:cs typeface="Segoe UI" panose="020B0502040204020203" pitchFamily="34" charset="0"/>
+              </a:rPr>
+            </a:br>
+            <a:r>
+              <a:rPr lang="en-US" sz="1800" dirty="0">
+                <a:cs typeface="Segoe UI" panose="020B0502040204020203" pitchFamily="34" charset="0"/>
+              </a:rPr>
+              <a:t>external table</a:t>
+            </a:r>
+          </a:p>
+          <a:p>
+            <a:pPr marL="566738" lvl="1" indent="-219075" defTabSz="914367">
+              <a:spcBef>
+                <a:spcPts val="400"/>
+              </a:spcBef>
+              <a:buFont typeface="Segoe UI" panose="020B0502040204020203" pitchFamily="34" charset="0"/>
+              <a:buChar char="–"/>
+              <a:tabLst>
+                <a:tab pos="508000" algn="l"/>
+              </a:tabLst>
+            </a:pPr>
+            <a:r>
+              <a:rPr lang="en-US" sz="1600" dirty="0">
+                <a:gradFill>
+                  <a:gsLst>
+                    <a:gs pos="2917">
+                      <a:schemeClr val="tx1"/>
+                    </a:gs>
+                    <a:gs pos="30000">
+                      <a:schemeClr val="tx1"/>
+                    </a:gs>
+                  </a:gsLst>
+                  <a:lin ang="5400000" scaled="0"/>
+                </a:gradFill>
+              </a:rPr>
+              <a:t>Dropping an external table does not delete the data files</a:t>
+            </a:r>
+          </a:p>
+        </p:txBody>
+      </p:sp>
+      <p:sp>
+        <p:nvSpPr>
+          <p:cNvPr id="3" name="Text Placeholder 2">
+            <a:extLst>
+              <a:ext uri="{FF2B5EF4-FFF2-40B4-BE49-F238E27FC236}">
+                <a16:creationId xmlns:a16="http://schemas.microsoft.com/office/drawing/2014/main" id="{81509567-F053-34B7-12F9-D8AC584EB113}"/>
+              </a:ext>
+            </a:extLst>
+          </p:cNvPr>
+          <p:cNvSpPr>
+            <a:spLocks noGrp="1"/>
+          </p:cNvSpPr>
+          <p:nvPr>
+            <p:ph type="body" sz="quarter" idx="11"/>
+          </p:nvPr>
+        </p:nvSpPr>
+        <p:spPr>
+          <a:xfrm>
+            <a:off x="5800725" y="582613"/>
+            <a:ext cx="5799138" cy="2622256"/>
+          </a:xfrm>
+          <a:ln w="19050">
+            <a:solidFill>
+              <a:schemeClr val="accent4"/>
+            </a:solidFill>
+          </a:ln>
+        </p:spPr>
+        <p:txBody>
+          <a:bodyPr lIns="182880" tIns="146304" rIns="182880" bIns="146304"/>
+          <a:lstStyle/>
+          <a:p>
+            <a:pPr marL="0" marR="0" lvl="0" indent="0" algn="l" defTabSz="932472" rtl="0" eaLnBrk="1" fontAlgn="base" latinLnBrk="0" hangingPunct="1">
+              <a:lnSpc>
+                <a:spcPct val="90000"/>
+              </a:lnSpc>
+              <a:spcBef>
+                <a:spcPct val="0"/>
+              </a:spcBef>
+              <a:spcAft>
+                <a:spcPct val="0"/>
+              </a:spcAft>
+              <a:buClrTx/>
+              <a:buSzTx/>
+              <a:buFontTx/>
+              <a:buNone/>
+              <a:tabLst/>
+              <a:defRPr/>
+            </a:pPr>
+            <a:r>
+              <a:rPr kumimoji="0" lang="en-US" sz="1400" b="0" i="0" u="none" strike="noStrike" kern="1200" cap="none" spc="0" normalizeH="0" baseline="0" noProof="0" dirty="0">
+                <a:ln>
+                  <a:noFill/>
+                </a:ln>
+                <a:solidFill>
+                  <a:srgbClr val="008000"/>
+                </a:solidFill>
+                <a:effectLst/>
+                <a:uLnTx/>
+                <a:uFillTx/>
+                <a:ea typeface="Segoe UI" pitchFamily="34" charset="0"/>
+                <a:cs typeface="Courier New" panose="02070309020205020404" pitchFamily="49" charset="0"/>
+              </a:rPr>
+              <a:t># Create a view in the </a:t>
+            </a:r>
+            <a:r>
+              <a:rPr kumimoji="0" lang="en-US" sz="1400" b="0" i="0" u="none" strike="noStrike" kern="1200" cap="none" spc="0" normalizeH="0" baseline="0" noProof="0" dirty="0" err="1">
+                <a:ln>
+                  <a:noFill/>
+                </a:ln>
+                <a:solidFill>
+                  <a:srgbClr val="008000"/>
+                </a:solidFill>
+                <a:effectLst/>
+                <a:uLnTx/>
+                <a:uFillTx/>
+                <a:ea typeface="Segoe UI" pitchFamily="34" charset="0"/>
+                <a:cs typeface="Courier New" panose="02070309020205020404" pitchFamily="49" charset="0"/>
+              </a:rPr>
+              <a:t>metastore</a:t>
+            </a:r>
+            <a:endParaRPr kumimoji="0" lang="en-US" sz="1400" b="0" i="0" u="none" strike="noStrike" kern="1200" cap="none" spc="0" normalizeH="0" baseline="0" noProof="0" dirty="0">
+              <a:ln>
+                <a:noFill/>
+              </a:ln>
+              <a:solidFill>
+                <a:srgbClr val="008000"/>
+              </a:solidFill>
+              <a:effectLst/>
+              <a:uLnTx/>
+              <a:uFillTx/>
+              <a:ea typeface="Segoe UI" pitchFamily="34" charset="0"/>
+              <a:cs typeface="Courier New" panose="02070309020205020404" pitchFamily="49" charset="0"/>
+            </a:endParaRPr>
+          </a:p>
+          <a:p>
+            <a:pPr marL="0" marR="0" lvl="0" indent="0" algn="l" defTabSz="932472" rtl="0" eaLnBrk="1" fontAlgn="base" latinLnBrk="0" hangingPunct="1">
+              <a:lnSpc>
+                <a:spcPct val="90000"/>
+              </a:lnSpc>
+              <a:spcBef>
+                <a:spcPct val="0"/>
+              </a:spcBef>
+              <a:spcAft>
+                <a:spcPct val="0"/>
+              </a:spcAft>
+              <a:buClrTx/>
+              <a:buSzTx/>
+              <a:buFontTx/>
+              <a:buNone/>
+              <a:tabLst/>
+              <a:defRPr/>
+            </a:pPr>
+            <a:r>
+              <a:rPr kumimoji="0" lang="en-US" sz="1400" b="0" i="0" u="none" strike="noStrike" kern="1200" cap="none" spc="0" normalizeH="0" baseline="0" noProof="0" dirty="0" err="1">
+                <a:ln>
+                  <a:noFill/>
+                </a:ln>
+                <a:solidFill>
+                  <a:srgbClr val="000000"/>
+                </a:solidFill>
+                <a:effectLst/>
+                <a:uLnTx/>
+                <a:uFillTx/>
+                <a:ea typeface="Segoe UI" pitchFamily="34" charset="0"/>
+                <a:cs typeface="Courier New" panose="02070309020205020404" pitchFamily="49" charset="0"/>
+              </a:rPr>
+              <a:t>df.createOrReplaceTempView</a:t>
+            </a:r>
+            <a:r>
+              <a:rPr kumimoji="0" lang="en-US" sz="1400" b="0" i="0" u="none" strike="noStrike" kern="1200" cap="none" spc="0" normalizeH="0" baseline="0" noProof="0" dirty="0">
+                <a:ln>
+                  <a:noFill/>
+                </a:ln>
+                <a:solidFill>
+                  <a:srgbClr val="000000"/>
+                </a:solidFill>
+                <a:effectLst/>
+                <a:uLnTx/>
+                <a:uFillTx/>
+                <a:ea typeface="Segoe UI" pitchFamily="34" charset="0"/>
+                <a:cs typeface="Courier New" panose="02070309020205020404" pitchFamily="49" charset="0"/>
+              </a:rPr>
+              <a:t>("</a:t>
+            </a:r>
+            <a:r>
+              <a:rPr kumimoji="0" lang="en-US" sz="1400" b="0" i="0" u="none" strike="noStrike" kern="1200" cap="none" spc="0" normalizeH="0" baseline="0" noProof="0" dirty="0" err="1">
+                <a:ln>
+                  <a:noFill/>
+                </a:ln>
+                <a:solidFill>
+                  <a:srgbClr val="000000"/>
+                </a:solidFill>
+                <a:effectLst/>
+                <a:uLnTx/>
+                <a:uFillTx/>
+                <a:ea typeface="Segoe UI" pitchFamily="34" charset="0"/>
+                <a:cs typeface="Courier New" panose="02070309020205020404" pitchFamily="49" charset="0"/>
+              </a:rPr>
+              <a:t>sales_orders</a:t>
+            </a:r>
+            <a:r>
+              <a:rPr kumimoji="0" lang="en-US" sz="1400" b="0" i="0" u="none" strike="noStrike" kern="1200" cap="none" spc="0" normalizeH="0" baseline="0" noProof="0" dirty="0">
+                <a:ln>
+                  <a:noFill/>
+                </a:ln>
+                <a:solidFill>
+                  <a:srgbClr val="000000"/>
+                </a:solidFill>
+                <a:effectLst/>
+                <a:uLnTx/>
+                <a:uFillTx/>
+                <a:ea typeface="Segoe UI" pitchFamily="34" charset="0"/>
+                <a:cs typeface="Courier New" panose="02070309020205020404" pitchFamily="49" charset="0"/>
+              </a:rPr>
+              <a:t>")</a:t>
+            </a:r>
+          </a:p>
+          <a:p>
+            <a:pPr marL="0" marR="0" lvl="0" indent="0" algn="l" defTabSz="932472" rtl="0" eaLnBrk="1" fontAlgn="base" latinLnBrk="0" hangingPunct="1">
+              <a:lnSpc>
+                <a:spcPct val="90000"/>
+              </a:lnSpc>
+              <a:spcBef>
+                <a:spcPct val="0"/>
+              </a:spcBef>
+              <a:spcAft>
+                <a:spcPct val="0"/>
+              </a:spcAft>
+              <a:buClrTx/>
+              <a:buSzTx/>
+              <a:buFontTx/>
+              <a:buNone/>
+              <a:tabLst/>
+              <a:defRPr/>
+            </a:pPr>
+            <a:endParaRPr lang="en-US" sz="1400" dirty="0">
+              <a:solidFill>
+                <a:srgbClr val="000000"/>
+              </a:solidFill>
+              <a:cs typeface="Courier New" panose="02070309020205020404" pitchFamily="49" charset="0"/>
+            </a:endParaRPr>
+          </a:p>
+          <a:p>
+            <a:pPr marL="0" marR="0" lvl="0" indent="0" algn="l" defTabSz="932472" rtl="0" eaLnBrk="1" fontAlgn="base" latinLnBrk="0" hangingPunct="1">
+              <a:lnSpc>
+                <a:spcPct val="90000"/>
+              </a:lnSpc>
+              <a:spcBef>
+                <a:spcPct val="0"/>
+              </a:spcBef>
+              <a:spcAft>
+                <a:spcPct val="0"/>
+              </a:spcAft>
+              <a:buClrTx/>
+              <a:buSzTx/>
+              <a:buFontTx/>
+              <a:buNone/>
+              <a:tabLst/>
+              <a:defRPr/>
+            </a:pPr>
+            <a:r>
+              <a:rPr kumimoji="0" lang="en-US" sz="1400" b="0" i="0" u="none" strike="noStrike" kern="1200" cap="none" spc="0" normalizeH="0" baseline="0" noProof="0" dirty="0">
+                <a:ln>
+                  <a:noFill/>
+                </a:ln>
+                <a:solidFill>
+                  <a:srgbClr val="008000"/>
+                </a:solidFill>
+                <a:effectLst/>
+                <a:uLnTx/>
+                <a:uFillTx/>
+                <a:ea typeface="Segoe UI" pitchFamily="34" charset="0"/>
+                <a:cs typeface="Courier New" panose="02070309020205020404" pitchFamily="49" charset="0"/>
+              </a:rPr>
+              <a:t># Use SQL to transform data and return a </a:t>
+            </a:r>
+            <a:r>
+              <a:rPr kumimoji="0" lang="en-US" sz="1400" b="0" i="0" u="none" strike="noStrike" kern="1200" cap="none" spc="0" normalizeH="0" baseline="0" noProof="0" dirty="0" err="1">
+                <a:ln>
+                  <a:noFill/>
+                </a:ln>
+                <a:solidFill>
+                  <a:srgbClr val="008000"/>
+                </a:solidFill>
+                <a:effectLst/>
+                <a:uLnTx/>
+                <a:uFillTx/>
+                <a:ea typeface="Segoe UI" pitchFamily="34" charset="0"/>
+                <a:cs typeface="Courier New" panose="02070309020205020404" pitchFamily="49" charset="0"/>
+              </a:rPr>
+              <a:t>dataframe</a:t>
+            </a:r>
+            <a:endParaRPr lang="en-US" sz="1400" dirty="0">
+              <a:solidFill>
+                <a:srgbClr val="008000"/>
+              </a:solidFill>
+              <a:cs typeface="Courier New" panose="02070309020205020404" pitchFamily="49" charset="0"/>
+            </a:endParaRPr>
+          </a:p>
+          <a:p>
+            <a:pPr defTabSz="932472" fontAlgn="base">
+              <a:lnSpc>
+                <a:spcPct val="90000"/>
+              </a:lnSpc>
+              <a:spcBef>
+                <a:spcPct val="0"/>
+              </a:spcBef>
+              <a:spcAft>
+                <a:spcPct val="0"/>
+              </a:spcAft>
+            </a:pPr>
+            <a:r>
+              <a:rPr lang="en-US" sz="1400" dirty="0" err="1">
+                <a:solidFill>
+                  <a:schemeClr val="tx1"/>
+                </a:solidFill>
+                <a:cs typeface="Courier New" panose="02070309020205020404" pitchFamily="49" charset="0"/>
+              </a:rPr>
+              <a:t>new_df</a:t>
+            </a:r>
+            <a:r>
+              <a:rPr lang="en-US" sz="1400" dirty="0">
+                <a:solidFill>
+                  <a:schemeClr val="tx1"/>
+                </a:solidFill>
+                <a:cs typeface="Courier New" panose="02070309020205020404" pitchFamily="49" charset="0"/>
+              </a:rPr>
+              <a:t> = </a:t>
+            </a:r>
+            <a:r>
+              <a:rPr lang="en-US" sz="1400" dirty="0" err="1">
+                <a:solidFill>
+                  <a:schemeClr val="tx1"/>
+                </a:solidFill>
+                <a:ea typeface="Segoe UI" pitchFamily="34" charset="0"/>
+                <a:cs typeface="Courier New" panose="02070309020205020404" pitchFamily="49" charset="0"/>
+              </a:rPr>
+              <a:t>spark.sql</a:t>
+            </a:r>
+            <a:r>
+              <a:rPr lang="en-US" sz="1400" dirty="0">
+                <a:solidFill>
+                  <a:schemeClr val="tx1"/>
+                </a:solidFill>
+                <a:ea typeface="Segoe UI" pitchFamily="34" charset="0"/>
+                <a:cs typeface="Courier New" panose="02070309020205020404" pitchFamily="49" charset="0"/>
+              </a:rPr>
+              <a:t>("SELECT </a:t>
+            </a:r>
+            <a:r>
+              <a:rPr lang="en-US" sz="1400" dirty="0" err="1">
+                <a:solidFill>
+                  <a:schemeClr val="tx1"/>
+                </a:solidFill>
+                <a:ea typeface="Segoe UI" pitchFamily="34" charset="0"/>
+                <a:cs typeface="Courier New" panose="02070309020205020404" pitchFamily="49" charset="0"/>
+              </a:rPr>
+              <a:t>OrderNo</a:t>
+            </a:r>
+            <a:r>
+              <a:rPr lang="en-US" sz="1400" dirty="0">
+                <a:solidFill>
+                  <a:schemeClr val="tx1"/>
+                </a:solidFill>
+                <a:ea typeface="Segoe UI" pitchFamily="34" charset="0"/>
+                <a:cs typeface="Courier New" panose="02070309020205020404" pitchFamily="49" charset="0"/>
+              </a:rPr>
+              <a:t>, </a:t>
+            </a:r>
+            <a:r>
+              <a:rPr lang="en-US" sz="1400" dirty="0" err="1">
+                <a:solidFill>
+                  <a:schemeClr val="tx1"/>
+                </a:solidFill>
+                <a:ea typeface="Segoe UI" pitchFamily="34" charset="0"/>
+                <a:cs typeface="Courier New" panose="02070309020205020404" pitchFamily="49" charset="0"/>
+              </a:rPr>
+              <a:t>OrderDate</a:t>
+            </a:r>
+            <a:r>
+              <a:rPr lang="en-US" sz="1400" dirty="0">
+                <a:solidFill>
+                  <a:schemeClr val="tx1"/>
+                </a:solidFill>
+                <a:ea typeface="Segoe UI" pitchFamily="34" charset="0"/>
+                <a:cs typeface="Courier New" panose="02070309020205020404" pitchFamily="49" charset="0"/>
+              </a:rPr>
+              <a:t>, Year(</a:t>
+            </a:r>
+            <a:r>
+              <a:rPr lang="en-US" sz="1400" dirty="0" err="1">
+                <a:solidFill>
+                  <a:schemeClr val="tx1"/>
+                </a:solidFill>
+                <a:ea typeface="Segoe UI" pitchFamily="34" charset="0"/>
+                <a:cs typeface="Courier New" panose="02070309020205020404" pitchFamily="49" charset="0"/>
+              </a:rPr>
+              <a:t>OrderDate</a:t>
+            </a:r>
+            <a:r>
+              <a:rPr lang="en-US" sz="1400" dirty="0">
+                <a:solidFill>
+                  <a:schemeClr val="tx1"/>
+                </a:solidFill>
+                <a:ea typeface="Segoe UI" pitchFamily="34" charset="0"/>
+                <a:cs typeface="Courier New" panose="02070309020205020404" pitchFamily="49" charset="0"/>
+              </a:rPr>
+              <a:t>) As Year FROM </a:t>
+            </a:r>
+            <a:r>
+              <a:rPr lang="en-US" sz="1400" dirty="0" err="1">
+                <a:solidFill>
+                  <a:schemeClr val="tx1"/>
+                </a:solidFill>
+                <a:ea typeface="Segoe UI" pitchFamily="34" charset="0"/>
+                <a:cs typeface="Courier New" panose="02070309020205020404" pitchFamily="49" charset="0"/>
+              </a:rPr>
+              <a:t>sales_orders</a:t>
+            </a:r>
+            <a:r>
+              <a:rPr lang="en-US" sz="1400" dirty="0">
+                <a:solidFill>
+                  <a:schemeClr val="tx1"/>
+                </a:solidFill>
+                <a:ea typeface="Segoe UI" pitchFamily="34" charset="0"/>
+                <a:cs typeface="Courier New" panose="02070309020205020404" pitchFamily="49" charset="0"/>
+              </a:rPr>
+              <a:t>")</a:t>
+            </a:r>
+          </a:p>
+          <a:p>
+            <a:pPr defTabSz="932472" fontAlgn="base">
+              <a:lnSpc>
+                <a:spcPct val="90000"/>
+              </a:lnSpc>
+              <a:spcBef>
+                <a:spcPct val="0"/>
+              </a:spcBef>
+              <a:spcAft>
+                <a:spcPct val="0"/>
+              </a:spcAft>
+            </a:pPr>
+            <a:endParaRPr lang="en-US" sz="1400" dirty="0">
+              <a:solidFill>
+                <a:schemeClr val="tx1"/>
+              </a:solidFill>
+              <a:ea typeface="Segoe UI" pitchFamily="34" charset="0"/>
+              <a:cs typeface="Courier New" panose="02070309020205020404" pitchFamily="49" charset="0"/>
+            </a:endParaRPr>
+          </a:p>
+          <a:p>
+            <a:pPr defTabSz="932472" fontAlgn="base">
+              <a:lnSpc>
+                <a:spcPct val="90000"/>
+              </a:lnSpc>
+              <a:spcBef>
+                <a:spcPct val="0"/>
+              </a:spcBef>
+              <a:spcAft>
+                <a:spcPct val="0"/>
+              </a:spcAft>
+            </a:pPr>
+            <a:r>
+              <a:rPr kumimoji="0" lang="en-US" sz="1400" b="0" i="0" u="none" strike="noStrike" kern="1200" cap="none" spc="0" normalizeH="0" baseline="0" noProof="0" dirty="0">
+                <a:ln>
+                  <a:noFill/>
+                </a:ln>
+                <a:solidFill>
+                  <a:srgbClr val="008000"/>
+                </a:solidFill>
+                <a:effectLst/>
+                <a:uLnTx/>
+                <a:uFillTx/>
+                <a:ea typeface="Segoe UI" pitchFamily="34" charset="0"/>
+                <a:cs typeface="Courier New" panose="02070309020205020404" pitchFamily="49" charset="0"/>
+              </a:rPr>
+              <a:t># Save the </a:t>
+            </a:r>
+            <a:r>
+              <a:rPr kumimoji="0" lang="en-US" sz="1400" b="0" i="0" u="none" strike="noStrike" kern="1200" cap="none" spc="0" normalizeH="0" baseline="0" noProof="0" dirty="0" err="1">
+                <a:ln>
+                  <a:noFill/>
+                </a:ln>
+                <a:solidFill>
+                  <a:srgbClr val="008000"/>
+                </a:solidFill>
+                <a:effectLst/>
+                <a:uLnTx/>
+                <a:uFillTx/>
+                <a:ea typeface="Segoe UI" pitchFamily="34" charset="0"/>
+                <a:cs typeface="Courier New" panose="02070309020205020404" pitchFamily="49" charset="0"/>
+              </a:rPr>
+              <a:t>dataframe</a:t>
+            </a:r>
+            <a:r>
+              <a:rPr kumimoji="0" lang="en-US" sz="1400" b="0" i="0" u="none" strike="noStrike" kern="1200" cap="none" spc="0" normalizeH="0" baseline="0" noProof="0" dirty="0">
+                <a:ln>
+                  <a:noFill/>
+                </a:ln>
+                <a:solidFill>
+                  <a:srgbClr val="008000"/>
+                </a:solidFill>
+                <a:effectLst/>
+                <a:uLnTx/>
+                <a:uFillTx/>
+                <a:ea typeface="Segoe UI" pitchFamily="34" charset="0"/>
+                <a:cs typeface="Courier New" panose="02070309020205020404" pitchFamily="49" charset="0"/>
+              </a:rPr>
+              <a:t> as an external table</a:t>
+            </a:r>
+            <a:endParaRPr lang="en-US" sz="1400" dirty="0">
+              <a:solidFill>
+                <a:srgbClr val="008000"/>
+              </a:solidFill>
+              <a:ea typeface="Segoe UI" pitchFamily="34" charset="0"/>
+              <a:cs typeface="Courier New" panose="02070309020205020404" pitchFamily="49" charset="0"/>
+            </a:endParaRPr>
+          </a:p>
+          <a:p>
+            <a:pPr defTabSz="932472" fontAlgn="base">
+              <a:lnSpc>
+                <a:spcPct val="90000"/>
+              </a:lnSpc>
+              <a:spcBef>
+                <a:spcPct val="0"/>
+              </a:spcBef>
+              <a:spcAft>
+                <a:spcPct val="0"/>
+              </a:spcAft>
+            </a:pPr>
+            <a:r>
+              <a:rPr lang="en-US" sz="1400" dirty="0" err="1">
+                <a:solidFill>
+                  <a:schemeClr val="tx1"/>
+                </a:solidFill>
+                <a:cs typeface="Courier New" panose="02070309020205020404" pitchFamily="49" charset="0"/>
+              </a:rPr>
+              <a:t>new_df</a:t>
+            </a:r>
+            <a:r>
+              <a:rPr lang="en-US" sz="1400" dirty="0" err="1">
+                <a:solidFill>
+                  <a:schemeClr val="tx1"/>
+                </a:solidFill>
+                <a:ea typeface="Segoe UI" pitchFamily="34" charset="0"/>
+                <a:cs typeface="Courier New" panose="02070309020205020404" pitchFamily="49" charset="0"/>
+              </a:rPr>
+              <a:t>.write.partitionBy</a:t>
+            </a:r>
+            <a:r>
+              <a:rPr lang="en-US" sz="1400" dirty="0">
+                <a:solidFill>
+                  <a:schemeClr val="tx1"/>
+                </a:solidFill>
+                <a:ea typeface="Segoe UI" pitchFamily="34" charset="0"/>
+                <a:cs typeface="Courier New" panose="02070309020205020404" pitchFamily="49" charset="0"/>
+              </a:rPr>
+              <a:t>("Year").</a:t>
+            </a:r>
+            <a:r>
+              <a:rPr lang="en-US" sz="1400" dirty="0" err="1">
+                <a:solidFill>
+                  <a:schemeClr val="tx1"/>
+                </a:solidFill>
+                <a:ea typeface="Segoe UI" pitchFamily="34" charset="0"/>
+                <a:cs typeface="Courier New" panose="02070309020205020404" pitchFamily="49" charset="0"/>
+              </a:rPr>
+              <a:t>saveAsTable</a:t>
+            </a:r>
+            <a:r>
+              <a:rPr lang="en-US" sz="1400" dirty="0">
+                <a:solidFill>
+                  <a:schemeClr val="tx1"/>
+                </a:solidFill>
+                <a:ea typeface="Segoe UI" pitchFamily="34" charset="0"/>
+                <a:cs typeface="Courier New" panose="02070309020205020404" pitchFamily="49" charset="0"/>
+              </a:rPr>
+              <a:t>("</a:t>
+            </a:r>
+            <a:r>
+              <a:rPr lang="en-US" sz="1400" dirty="0" err="1">
+                <a:solidFill>
+                  <a:schemeClr val="tx1"/>
+                </a:solidFill>
+                <a:ea typeface="Segoe UI" pitchFamily="34" charset="0"/>
+                <a:cs typeface="Courier New" panose="02070309020205020404" pitchFamily="49" charset="0"/>
+              </a:rPr>
+              <a:t>transformed_orders</a:t>
+            </a:r>
+            <a:r>
+              <a:rPr lang="en-US" sz="1400" dirty="0">
+                <a:solidFill>
+                  <a:schemeClr val="tx1"/>
+                </a:solidFill>
+                <a:ea typeface="Segoe UI" pitchFamily="34" charset="0"/>
+                <a:cs typeface="Courier New" panose="02070309020205020404" pitchFamily="49" charset="0"/>
+              </a:rPr>
+              <a:t>", format="parquet",</a:t>
+            </a:r>
+          </a:p>
+          <a:p>
+            <a:pPr defTabSz="932472" fontAlgn="base">
+              <a:lnSpc>
+                <a:spcPct val="90000"/>
+              </a:lnSpc>
+              <a:spcBef>
+                <a:spcPct val="0"/>
+              </a:spcBef>
+              <a:spcAft>
+                <a:spcPct val="0"/>
+              </a:spcAft>
+            </a:pPr>
+            <a:r>
+              <a:rPr lang="en-US" sz="1400" dirty="0">
+                <a:solidFill>
+                  <a:schemeClr val="tx1"/>
+                </a:solidFill>
+                <a:ea typeface="Segoe UI" pitchFamily="34" charset="0"/>
+                <a:cs typeface="Courier New" panose="02070309020205020404" pitchFamily="49" charset="0"/>
+              </a:rPr>
+              <a:t>                                             mode="overwrite", path="/</a:t>
+            </a:r>
+            <a:r>
+              <a:rPr lang="en-US" sz="1400" dirty="0" err="1">
+                <a:solidFill>
+                  <a:schemeClr val="tx1"/>
+                </a:solidFill>
+                <a:ea typeface="Segoe UI" pitchFamily="34" charset="0"/>
+                <a:cs typeface="Courier New" panose="02070309020205020404" pitchFamily="49" charset="0"/>
+              </a:rPr>
+              <a:t>transformed_orders</a:t>
+            </a:r>
+            <a:r>
+              <a:rPr lang="en-US" sz="1400" dirty="0">
+                <a:solidFill>
+                  <a:schemeClr val="tx1"/>
+                </a:solidFill>
+                <a:ea typeface="Segoe UI" pitchFamily="34" charset="0"/>
+                <a:cs typeface="Courier New" panose="02070309020205020404" pitchFamily="49" charset="0"/>
+              </a:rPr>
+              <a:t>")</a:t>
+            </a:r>
+          </a:p>
+        </p:txBody>
+      </p:sp>
+    </p:spTree>
+    <p:extLst>
+      <p:ext uri="{BB962C8B-B14F-4D97-AF65-F5344CB8AC3E}">
+        <p14:creationId xmlns:p14="http://schemas.microsoft.com/office/powerpoint/2010/main" val="2430172290"/>
+      </p:ext>
+    </p:extLst>
+  </p:cSld>
+  <p:clrMapOvr>
+    <a:masterClrMapping/>
+  </p:clrMapOvr>
+  <p:transition>
+    <p:fade/>
+  </p:transition>
+</p:sld>
+</file>
+
+<file path=ppt/slides/slide23.xml><?xml version="1.0" encoding="utf-8"?>
+<p:sld xmlns:a="http://schemas.openxmlformats.org/drawingml/2006/main" xmlns:r="http://schemas.openxmlformats.org/officeDocument/2006/relationships" xmlns:p="http://schemas.openxmlformats.org/presentationml/2006/main">
+  <p:cSld>
+    <p:spTree>
+      <p:nvGrpSpPr>
+        <p:cNvPr id="1" name=""/>
+        <p:cNvGrpSpPr/>
+        <p:nvPr/>
+      </p:nvGrpSpPr>
+      <p:grpSpPr>
+        <a:xfrm>
+          <a:off x="0" y="0"/>
+          <a:ext cx="0" cy="0"/>
+          <a:chOff x="0" y="0"/>
+          <a:chExt cx="0" cy="0"/>
+        </a:xfrm>
+      </p:grpSpPr>
+      <p:sp>
+        <p:nvSpPr>
+          <p:cNvPr id="2" name="Title 1">
+            <a:extLst>
+              <a:ext uri="{FF2B5EF4-FFF2-40B4-BE49-F238E27FC236}">
+                <a16:creationId xmlns:a16="http://schemas.microsoft.com/office/drawing/2014/main" id="{21A99087-F939-4EAF-AD38-211701C7799F}"/>
+              </a:ext>
+            </a:extLst>
+          </p:cNvPr>
+          <p:cNvSpPr>
+            <a:spLocks noGrp="1"/>
+          </p:cNvSpPr>
+          <p:nvPr>
+            <p:ph type="ctrTitle"/>
+          </p:nvPr>
+        </p:nvSpPr>
+        <p:spPr>
+          <a:xfrm>
+            <a:off x="1387813" y="3415452"/>
+            <a:ext cx="9144000" cy="1096613"/>
+          </a:xfrm>
+        </p:spPr>
+        <p:txBody>
+          <a:bodyPr>
+            <a:normAutofit/>
+          </a:bodyPr>
+          <a:lstStyle/>
+          <a:p>
+            <a:r>
+              <a:rPr lang="en-US" dirty="0"/>
+              <a:t>LAB 24: </a:t>
+            </a:r>
+            <a:r>
+              <a:rPr lang="en-US"/>
+              <a:t>Use Spark in Azure </a:t>
+            </a:r>
+            <a:r>
+              <a:rPr lang="en-US" dirty="0"/>
+              <a:t>Databricks</a:t>
+            </a:r>
+          </a:p>
+        </p:txBody>
+      </p:sp>
+      <p:sp>
+        <p:nvSpPr>
+          <p:cNvPr id="3" name="Subtitle 2">
+            <a:extLst>
+              <a:ext uri="{FF2B5EF4-FFF2-40B4-BE49-F238E27FC236}">
+                <a16:creationId xmlns:a16="http://schemas.microsoft.com/office/drawing/2014/main" id="{78BC2C14-5B54-4319-BA1D-46B0C6B5B674}"/>
+              </a:ext>
+            </a:extLst>
+          </p:cNvPr>
+          <p:cNvSpPr>
+            <a:spLocks noGrp="1"/>
+          </p:cNvSpPr>
+          <p:nvPr>
+            <p:ph type="subTitle" idx="1"/>
+          </p:nvPr>
+        </p:nvSpPr>
+        <p:spPr>
+          <a:xfrm>
+            <a:off x="1387813" y="4843830"/>
+            <a:ext cx="9144000" cy="531554"/>
+          </a:xfrm>
+        </p:spPr>
+        <p:txBody>
+          <a:bodyPr/>
+          <a:lstStyle/>
+          <a:p>
+            <a:r>
+              <a:rPr lang="en-US" dirty="0"/>
+              <a:t>60 minutes</a:t>
+            </a:r>
+          </a:p>
+        </p:txBody>
+      </p:sp>
+    </p:spTree>
+    <p:extLst>
+      <p:ext uri="{BB962C8B-B14F-4D97-AF65-F5344CB8AC3E}">
+        <p14:creationId xmlns:p14="http://schemas.microsoft.com/office/powerpoint/2010/main" val="86463890"/>
       </p:ext>
     </p:extLst>
   </p:cSld>

--- a/04-Data exploration and transformation in Azure Databricks.pptx
+++ b/04-Data exploration and transformation in Azure Databricks.pptx
@@ -816,7 +816,7 @@
           <a:p>
             <a:fld id="{2B56BDA5-FBCC-43E1-957B-02AF36889AD5}" type="datetimeFigureOut">
               <a:rPr lang="en-US" smtClean="0"/>
-              <a:t>9/7/2024</a:t>
+              <a:t>9/8/2024</a:t>
             </a:fld>
             <a:endParaRPr lang="en-US" dirty="0"/>
           </a:p>
@@ -993,7 +993,7 @@
           <a:p>
             <a:fld id="{8F44CDF0-0D54-4AFE-B409-D6358A9BB9A1}" type="datetimeFigureOut">
               <a:rPr lang="en-US" smtClean="0"/>
-              <a:t>9/7/2024</a:t>
+              <a:t>9/8/2024</a:t>
             </a:fld>
             <a:endParaRPr lang="en-US" dirty="0"/>
           </a:p>
@@ -1445,6 +1445,103 @@
           <a:bodyPr/>
           <a:lstStyle/>
           <a:p>
+            <a:r>
+              <a:rPr lang="en-IE" b="1" dirty="0"/>
+              <a:t>Talking Points:</a:t>
+            </a:r>
+          </a:p>
+          <a:p>
+            <a:endParaRPr lang="en-IE" dirty="0"/>
+          </a:p>
+          <a:p>
+            <a:r>
+              <a:rPr lang="en-IE" dirty="0"/>
+              <a:t>Let’s look at how you can query data using DataFrames in Azure Databricks</a:t>
+            </a:r>
+            <a:endParaRPr lang="en-GB" dirty="0"/>
+          </a:p>
+        </p:txBody>
+      </p:sp>
+      <p:sp>
+        <p:nvSpPr>
+          <p:cNvPr id="4" name="Slide Number Placeholder 3"/>
+          <p:cNvSpPr>
+            <a:spLocks noGrp="1"/>
+          </p:cNvSpPr>
+          <p:nvPr>
+            <p:ph type="sldNum" sz="quarter" idx="5"/>
+          </p:nvPr>
+        </p:nvSpPr>
+        <p:spPr/>
+        <p:txBody>
+          <a:bodyPr/>
+          <a:lstStyle/>
+          <a:p>
+            <a:fld id="{37E24C93-78CA-4AF0-9E77-825D60ABA46D}" type="slidenum">
+              <a:rPr lang="en-US" smtClean="0"/>
+              <a:t>13</a:t>
+            </a:fld>
+            <a:endParaRPr lang="en-US" dirty="0"/>
+          </a:p>
+        </p:txBody>
+      </p:sp>
+    </p:spTree>
+    <p:extLst>
+      <p:ext uri="{BB962C8B-B14F-4D97-AF65-F5344CB8AC3E}">
+        <p14:creationId xmlns:p14="http://schemas.microsoft.com/office/powerpoint/2010/main" val="2053942289"/>
+      </p:ext>
+    </p:extLst>
+  </p:cSld>
+  <p:clrMapOvr>
+    <a:masterClrMapping/>
+  </p:clrMapOvr>
+</p:notes>
+</file>
+
+<file path=ppt/notesSlides/notesSlide11.xml><?xml version="1.0" encoding="utf-8"?>
+<p:notes xmlns:a="http://schemas.openxmlformats.org/drawingml/2006/main" xmlns:r="http://schemas.openxmlformats.org/officeDocument/2006/relationships" xmlns:p="http://schemas.openxmlformats.org/presentationml/2006/main">
+  <p:cSld>
+    <p:spTree>
+      <p:nvGrpSpPr>
+        <p:cNvPr id="1" name=""/>
+        <p:cNvGrpSpPr/>
+        <p:nvPr/>
+      </p:nvGrpSpPr>
+      <p:grpSpPr>
+        <a:xfrm>
+          <a:off x="0" y="0"/>
+          <a:ext cx="0" cy="0"/>
+          <a:chOff x="0" y="0"/>
+          <a:chExt cx="0" cy="0"/>
+        </a:xfrm>
+      </p:grpSpPr>
+      <p:sp>
+        <p:nvSpPr>
+          <p:cNvPr id="2" name="Slide Image Placeholder 1"/>
+          <p:cNvSpPr>
+            <a:spLocks noGrp="1" noRot="1" noChangeAspect="1"/>
+          </p:cNvSpPr>
+          <p:nvPr>
+            <p:ph type="sldImg"/>
+          </p:nvPr>
+        </p:nvSpPr>
+        <p:spPr/>
+      </p:sp>
+      <p:sp>
+        <p:nvSpPr>
+          <p:cNvPr id="3" name="Notes Placeholder 2"/>
+          <p:cNvSpPr>
+            <a:spLocks noGrp="1"/>
+          </p:cNvSpPr>
+          <p:nvPr>
+            <p:ph type="body" idx="1"/>
+          </p:nvPr>
+        </p:nvSpPr>
+        <p:spPr/>
+        <p:txBody>
+          <a:bodyPr/>
+          <a:lstStyle/>
+          <a:p>
             <a:endParaRPr lang="en-US"/>
           </a:p>
         </p:txBody>
@@ -1545,408 +1642,6 @@
 </p:notes>
 </file>
 
-<file path=ppt/notesSlides/notesSlide11.xml><?xml version="1.0" encoding="utf-8"?>
-<p:notes xmlns:a="http://schemas.openxmlformats.org/drawingml/2006/main" xmlns:r="http://schemas.openxmlformats.org/officeDocument/2006/relationships" xmlns:p="http://schemas.openxmlformats.org/presentationml/2006/main">
-  <p:cSld>
-    <p:spTree>
-      <p:nvGrpSpPr>
-        <p:cNvPr id="1" name=""/>
-        <p:cNvGrpSpPr/>
-        <p:nvPr/>
-      </p:nvGrpSpPr>
-      <p:grpSpPr>
-        <a:xfrm>
-          <a:off x="0" y="0"/>
-          <a:ext cx="0" cy="0"/>
-          <a:chOff x="0" y="0"/>
-          <a:chExt cx="0" cy="0"/>
-        </a:xfrm>
-      </p:grpSpPr>
-      <p:sp>
-        <p:nvSpPr>
-          <p:cNvPr id="2" name="Slide Image Placeholder 1"/>
-          <p:cNvSpPr>
-            <a:spLocks noGrp="1" noRot="1" noChangeAspect="1"/>
-          </p:cNvSpPr>
-          <p:nvPr>
-            <p:ph type="sldImg"/>
-          </p:nvPr>
-        </p:nvSpPr>
-        <p:spPr/>
-      </p:sp>
-      <p:sp>
-        <p:nvSpPr>
-          <p:cNvPr id="3" name="Notes Placeholder 2"/>
-          <p:cNvSpPr>
-            <a:spLocks noGrp="1"/>
-          </p:cNvSpPr>
-          <p:nvPr>
-            <p:ph type="body" idx="1"/>
-          </p:nvPr>
-        </p:nvSpPr>
-        <p:spPr/>
-        <p:txBody>
-          <a:bodyPr/>
-          <a:lstStyle/>
-          <a:p>
-            <a:pPr marL="0" marR="0" lvl="0" indent="0" defTabSz="228554" eaLnBrk="1" fontAlgn="auto" latinLnBrk="0" hangingPunct="1">
-              <a:lnSpc>
-                <a:spcPct val="117999"/>
-              </a:lnSpc>
-              <a:spcBef>
-                <a:spcPts val="0"/>
-              </a:spcBef>
-              <a:spcAft>
-                <a:spcPts val="0"/>
-              </a:spcAft>
-              <a:buClrTx/>
-              <a:buSzTx/>
-              <a:buFontTx/>
-              <a:buNone/>
-              <a:tabLst/>
-              <a:defRPr/>
-            </a:pPr>
-            <a:r>
-              <a:rPr lang="en-US" sz="800" b="1" dirty="0"/>
-              <a:t>Talking points</a:t>
-            </a:r>
-          </a:p>
-          <a:p>
-            <a:pPr marL="0" marR="0" lvl="0" indent="0" defTabSz="228554" eaLnBrk="1" fontAlgn="auto" latinLnBrk="0" hangingPunct="1">
-              <a:lnSpc>
-                <a:spcPct val="117999"/>
-              </a:lnSpc>
-              <a:spcBef>
-                <a:spcPts val="0"/>
-              </a:spcBef>
-              <a:spcAft>
-                <a:spcPts val="0"/>
-              </a:spcAft>
-              <a:buClrTx/>
-              <a:buSzTx/>
-              <a:buFontTx/>
-              <a:buNone/>
-              <a:tabLst/>
-              <a:defRPr/>
-            </a:pPr>
-            <a:endParaRPr lang="en-US" sz="800" b="1" dirty="0"/>
-          </a:p>
-          <a:p>
-            <a:pPr>
-              <a:lnSpc>
-                <a:spcPct val="117999"/>
-              </a:lnSpc>
-            </a:pPr>
-            <a:r>
-              <a:rPr lang="en-US" sz="900" b="1" i="1" dirty="0">
-                <a:solidFill>
-                  <a:srgbClr val="171717"/>
-                </a:solidFill>
-                <a:latin typeface="Segoe UI"/>
-                <a:cs typeface="Segoe UI"/>
-              </a:rPr>
-              <a:t>General info:</a:t>
-            </a:r>
-          </a:p>
-          <a:p>
-            <a:pPr>
-              <a:lnSpc>
-                <a:spcPct val="117999"/>
-              </a:lnSpc>
-            </a:pPr>
-            <a:endParaRPr lang="en-US" sz="900" b="1" i="1" dirty="0">
-              <a:solidFill>
-                <a:srgbClr val="171717"/>
-              </a:solidFill>
-              <a:latin typeface="Segoe UI"/>
-              <a:cs typeface="Segoe UI"/>
-            </a:endParaRPr>
-          </a:p>
-          <a:p>
-            <a:r>
-              <a:rPr lang="en-GB" sz="800" b="0" i="0" dirty="0">
-                <a:solidFill>
-                  <a:srgbClr val="171717"/>
-                </a:solidFill>
-                <a:effectLst/>
-                <a:latin typeface="Segoe UI" panose="020B0502040204020203" pitchFamily="34" charset="0"/>
-              </a:rPr>
-              <a:t>The Apache Spark </a:t>
-            </a:r>
-            <a:r>
-              <a:rPr lang="en-GB" sz="800" b="0" i="0" u="none" strike="noStrike" dirty="0">
-                <a:effectLst/>
-                <a:latin typeface="Segoe UI" panose="020B0502040204020203" pitchFamily="34" charset="0"/>
-                <a:hlinkClick r:id="rId3"/>
-              </a:rPr>
-              <a:t>DataFrame API</a:t>
-            </a:r>
-            <a:r>
-              <a:rPr lang="en-GB" sz="800" b="0" i="0" dirty="0">
-                <a:solidFill>
-                  <a:srgbClr val="171717"/>
-                </a:solidFill>
-                <a:effectLst/>
-                <a:latin typeface="Segoe UI" panose="020B0502040204020203" pitchFamily="34" charset="0"/>
-              </a:rPr>
-              <a:t> provides a rich set of functions (select columns, filter, join, aggregate, and so on) that allow you to solve common data analysis problems efficiently. DataFrames also allow you to mix operations seamlessly with custom Python, SQL, R, and Scala code. Within the notebook experience in Azure Databricks, files can be read in a single command. </a:t>
-            </a:r>
-          </a:p>
-          <a:p>
-            <a:endParaRPr lang="en-GB" sz="800" b="1" i="1" dirty="0">
-              <a:solidFill>
-                <a:srgbClr val="171717"/>
-              </a:solidFill>
-              <a:effectLst/>
-              <a:latin typeface="Segoe UI" panose="020B0502040204020203" pitchFamily="34" charset="0"/>
-              <a:cs typeface="Segoe UI"/>
-            </a:endParaRPr>
-          </a:p>
-          <a:p>
-            <a:pPr algn="l"/>
-            <a:r>
-              <a:rPr lang="en-GB" sz="900" b="1" i="1" dirty="0">
-                <a:solidFill>
-                  <a:srgbClr val="171717"/>
-                </a:solidFill>
-                <a:effectLst/>
-                <a:latin typeface="Segoe UI"/>
-                <a:cs typeface="Segoe UI"/>
-              </a:rPr>
-              <a:t>What are DataFrames?</a:t>
-            </a:r>
-          </a:p>
-          <a:p>
-            <a:pPr algn="l"/>
-            <a:endParaRPr lang="en-GB" sz="900" b="1" i="1" dirty="0">
-              <a:solidFill>
-                <a:srgbClr val="171717"/>
-              </a:solidFill>
-              <a:effectLst/>
-              <a:latin typeface="Segoe UI"/>
-              <a:cs typeface="Segoe UI"/>
-            </a:endParaRPr>
-          </a:p>
-          <a:p>
-            <a:pPr algn="l"/>
-            <a:r>
-              <a:rPr lang="en-GB" sz="900" b="0" i="0" dirty="0">
-                <a:solidFill>
-                  <a:srgbClr val="171717"/>
-                </a:solidFill>
-                <a:effectLst/>
-                <a:latin typeface="Segoe UI" panose="020B0502040204020203" pitchFamily="34" charset="0"/>
-              </a:rPr>
-              <a:t>You could view DataFrames as you might see data in Microsoft Excel. It's like a box with squares in it, that organizes data, which we could also refer to as a table of data. It is a single set of two-dimensional data that can have multiple rows and columns in the data. Each row, is a sample of data. Each column is a variable or parameter that describes the data.</a:t>
-            </a:r>
-          </a:p>
-          <a:p>
-            <a:pPr algn="l"/>
-            <a:endParaRPr lang="en-GB" sz="900" b="0" i="0" dirty="0">
-              <a:solidFill>
-                <a:srgbClr val="171717"/>
-              </a:solidFill>
-              <a:effectLst/>
-              <a:latin typeface="Segoe UI" panose="020B0502040204020203" pitchFamily="34" charset="0"/>
-            </a:endParaRPr>
-          </a:p>
-          <a:p>
-            <a:pPr algn="l"/>
-            <a:r>
-              <a:rPr lang="en-GB" sz="900" b="0" i="0" dirty="0">
-                <a:solidFill>
-                  <a:srgbClr val="171717"/>
-                </a:solidFill>
-                <a:effectLst/>
-                <a:latin typeface="Segoe UI" panose="020B0502040204020203" pitchFamily="34" charset="0"/>
-              </a:rPr>
-              <a:t>What would happen though, if you have thousands and thousands boxes?</a:t>
-            </a:r>
-          </a:p>
-          <a:p>
-            <a:pPr algn="l"/>
-            <a:endParaRPr lang="en-GB" sz="900" b="0" i="0" dirty="0">
-              <a:solidFill>
-                <a:srgbClr val="171717"/>
-              </a:solidFill>
-              <a:effectLst/>
-              <a:latin typeface="Segoe UI" panose="020B0502040204020203" pitchFamily="34" charset="0"/>
-            </a:endParaRPr>
-          </a:p>
-          <a:p>
-            <a:pPr algn="l"/>
-            <a:r>
-              <a:rPr lang="en-GB" sz="900" b="0" i="0" dirty="0">
-                <a:solidFill>
-                  <a:srgbClr val="171717"/>
-                </a:solidFill>
-                <a:effectLst/>
-                <a:latin typeface="Segoe UI" panose="020B0502040204020203" pitchFamily="34" charset="0"/>
-              </a:rPr>
-              <a:t>A DataFrame creates a data structure and it's one of the core data structures in Spark. In Spark, a DataFrame is seen as a distributed collection of data that is organized into columns that have names.</a:t>
-            </a:r>
-          </a:p>
-          <a:p>
-            <a:pPr algn="l"/>
-            <a:r>
-              <a:rPr lang="en-GB" sz="900" b="0" i="0" dirty="0">
-                <a:solidFill>
-                  <a:srgbClr val="171717"/>
-                </a:solidFill>
-                <a:effectLst/>
-                <a:latin typeface="Segoe UI" panose="020B0502040204020203" pitchFamily="34" charset="0"/>
-              </a:rPr>
-              <a:t>As you start reading or loading data that is unstructured, semi-structured, or structured. A DataFrame can start transforming that data in order to gain insights. You can use different languages that have different functionalities, like using Spark SQL, PySpark, and others to read and manipulate the data as you require.</a:t>
-            </a:r>
-          </a:p>
-          <a:p>
-            <a:pPr algn="l"/>
-            <a:endParaRPr lang="en-GB" sz="900" b="0" i="0" dirty="0">
-              <a:solidFill>
-                <a:srgbClr val="171717"/>
-              </a:solidFill>
-              <a:effectLst/>
-              <a:latin typeface="Segoe UI" panose="020B0502040204020203" pitchFamily="34" charset="0"/>
-            </a:endParaRPr>
-          </a:p>
-          <a:p>
-            <a:pPr marL="0" marR="0" lvl="0" indent="0" algn="l" defTabSz="932742" rtl="0" eaLnBrk="1" fontAlgn="auto" latinLnBrk="0" hangingPunct="1">
-              <a:lnSpc>
-                <a:spcPct val="90000"/>
-              </a:lnSpc>
-              <a:spcBef>
-                <a:spcPts val="0"/>
-              </a:spcBef>
-              <a:spcAft>
-                <a:spcPts val="340"/>
-              </a:spcAft>
-              <a:buClrTx/>
-              <a:buSzTx/>
-              <a:buFontTx/>
-              <a:buNone/>
-              <a:tabLst/>
-              <a:defRPr/>
-            </a:pPr>
-            <a:r>
-              <a:rPr lang="en-US" sz="800" b="1" dirty="0"/>
-              <a:t>Instructor notes and guidance</a:t>
-            </a:r>
-          </a:p>
-          <a:p>
-            <a:pPr marL="0" marR="0" lvl="0" indent="0" algn="l" defTabSz="932742" rtl="0" eaLnBrk="1" fontAlgn="auto" latinLnBrk="0" hangingPunct="1">
-              <a:lnSpc>
-                <a:spcPct val="90000"/>
-              </a:lnSpc>
-              <a:spcBef>
-                <a:spcPts val="0"/>
-              </a:spcBef>
-              <a:spcAft>
-                <a:spcPts val="340"/>
-              </a:spcAft>
-              <a:buClrTx/>
-              <a:buSzTx/>
-              <a:buFontTx/>
-              <a:buNone/>
-              <a:tabLst/>
-              <a:defRPr/>
-            </a:pPr>
-            <a:endParaRPr lang="en-US" sz="800" kern="1200" dirty="0">
-              <a:solidFill>
-                <a:schemeClr val="tx1"/>
-              </a:solidFill>
-              <a:effectLst/>
-              <a:latin typeface="Segoe UI Light" pitchFamily="34" charset="0"/>
-              <a:ea typeface="+mn-ea"/>
-              <a:cs typeface="+mn-cs"/>
-            </a:endParaRPr>
-          </a:p>
-          <a:p>
-            <a:pPr defTabSz="932742">
-              <a:lnSpc>
-                <a:spcPct val="90000"/>
-              </a:lnSpc>
-              <a:spcAft>
-                <a:spcPts val="340"/>
-              </a:spcAft>
-              <a:defRPr/>
-            </a:pPr>
-            <a:r>
-              <a:rPr lang="en-GB" sz="1100" dirty="0">
-                <a:solidFill>
-                  <a:srgbClr val="000000"/>
-                </a:solidFill>
-                <a:latin typeface="Calibri"/>
-                <a:cs typeface="Calibri"/>
-              </a:rPr>
-              <a:t>This slide depicts code that uses the DataFrame API in Apache Spark. Above you find an example of a DataFrame called </a:t>
-            </a:r>
-            <a:r>
-              <a:rPr lang="en-GB" sz="1100" dirty="0" err="1">
-                <a:solidFill>
-                  <a:srgbClr val="000000"/>
-                </a:solidFill>
-                <a:latin typeface="Calibri"/>
-                <a:cs typeface="Calibri"/>
-              </a:rPr>
-              <a:t>pagecountsEnAllDF</a:t>
-            </a:r>
-            <a:r>
-              <a:rPr lang="en-GB" sz="1100" dirty="0">
-                <a:solidFill>
-                  <a:srgbClr val="000000"/>
-                </a:solidFill>
-                <a:latin typeface="Calibri"/>
-                <a:cs typeface="Calibri"/>
-              </a:rPr>
-              <a:t> (that is highlighted in the graphic) in the code being created, followed by a mix of DataFrame functions in the same statement. In this example, the results are being cached and has a count being performed. Students will work with DataFrames in the lab themselves, and explore what DataFrames look like, how to create one, and how to work with transformations.  </a:t>
-            </a:r>
-            <a:endParaRPr lang="en-GB" sz="1100" b="0" i="0" u="none" strike="noStrike" dirty="0">
-              <a:solidFill>
-                <a:srgbClr val="000000"/>
-              </a:solidFill>
-              <a:effectLst/>
-              <a:latin typeface="Calibri" panose="020F0502020204030204" pitchFamily="34" charset="0"/>
-              <a:cs typeface="Calibri"/>
-            </a:endParaRPr>
-          </a:p>
-        </p:txBody>
-      </p:sp>
-      <p:sp>
-        <p:nvSpPr>
-          <p:cNvPr id="4" name="Slide Number Placeholder 3"/>
-          <p:cNvSpPr>
-            <a:spLocks noGrp="1"/>
-          </p:cNvSpPr>
-          <p:nvPr>
-            <p:ph type="sldNum" sz="quarter" idx="5"/>
-          </p:nvPr>
-        </p:nvSpPr>
-        <p:spPr/>
-        <p:txBody>
-          <a:bodyPr/>
-          <a:lstStyle/>
-          <a:p>
-            <a:fld id="{37E24C93-78CA-4AF0-9E77-825D60ABA46D}" type="slidenum">
-              <a:rPr lang="en-US" smtClean="0"/>
-              <a:t>15</a:t>
-            </a:fld>
-            <a:endParaRPr lang="en-US" dirty="0"/>
-          </a:p>
-        </p:txBody>
-      </p:sp>
-    </p:spTree>
-    <p:extLst>
-      <p:ext uri="{BB962C8B-B14F-4D97-AF65-F5344CB8AC3E}">
-        <p14:creationId xmlns:p14="http://schemas.microsoft.com/office/powerpoint/2010/main" val="3265638940"/>
-      </p:ext>
-    </p:extLst>
-  </p:cSld>
-  <p:clrMapOvr>
-    <a:masterClrMapping/>
-  </p:clrMapOvr>
-</p:notes>
-</file>
-
 <file path=ppt/notesSlides/notesSlide12.xml><?xml version="1.0" encoding="utf-8"?>
 <p:notes xmlns:a="http://schemas.openxmlformats.org/drawingml/2006/main" xmlns:r="http://schemas.openxmlformats.org/officeDocument/2006/relationships" xmlns:p="http://schemas.openxmlformats.org/presentationml/2006/main">
   <p:cSld>
@@ -1991,170 +1686,331 @@
           <a:bodyPr/>
           <a:lstStyle/>
           <a:p>
-            <a:r>
-              <a:rPr lang="en-US" i="1" dirty="0"/>
-              <a:t>The %</a:t>
-            </a:r>
-            <a:r>
-              <a:rPr lang="en-US" i="1" dirty="0" err="1"/>
-              <a:t>pyspark</a:t>
-            </a:r>
-            <a:r>
-              <a:rPr lang="en-US" i="1" dirty="0"/>
-              <a:t> “magic” at the beginning of the code instructs Spark to treat the following code as Python. You could also use %spark to indicate that the code cell contains Scala code.</a:t>
-            </a:r>
-          </a:p>
-          <a:p>
-            <a:endParaRPr lang="en-US" i="1" dirty="0"/>
-          </a:p>
-          <a:p>
-            <a:r>
-              <a:rPr lang="en-US" i="1" dirty="0" err="1"/>
-              <a:t>Dataframes</a:t>
-            </a:r>
-            <a:r>
-              <a:rPr lang="en-US" i="1" dirty="0"/>
-              <a:t> are not the only way to work with data in Spark, but they’re the most common. Other data object types include resilient distributed dataset (RDD), which are the core native building block for data structures in Spark, and Datasets, which are essentially strongly-typed </a:t>
-            </a:r>
-            <a:r>
-              <a:rPr lang="en-US" i="1" dirty="0" err="1"/>
-              <a:t>dataframes</a:t>
-            </a:r>
-            <a:r>
-              <a:rPr lang="en-US" i="1" dirty="0"/>
-              <a:t>. </a:t>
-            </a:r>
-            <a:r>
-              <a:rPr lang="en-US" i="1" dirty="0" err="1"/>
-              <a:t>Dataframes</a:t>
-            </a:r>
-            <a:r>
-              <a:rPr lang="en-US" i="1" dirty="0"/>
-              <a:t> are provided on Spark via the </a:t>
-            </a:r>
-            <a:r>
-              <a:rPr lang="en-US" i="1" dirty="0" err="1"/>
-              <a:t>SparkSQL</a:t>
-            </a:r>
-            <a:r>
-              <a:rPr lang="en-US" i="1" dirty="0"/>
-              <a:t> library and are functionally very similar to Pandas </a:t>
-            </a:r>
-            <a:r>
-              <a:rPr lang="en-US" i="1" dirty="0" err="1"/>
-              <a:t>dataframes</a:t>
-            </a:r>
-            <a:r>
-              <a:rPr lang="en-US" i="1" dirty="0"/>
-              <a:t> that are commonly used in Python (with which some students may be familiar).</a:t>
-            </a:r>
-          </a:p>
-          <a:p>
-            <a:endParaRPr lang="en-US" i="1" dirty="0"/>
-          </a:p>
-          <a:p>
-            <a:r>
-              <a:rPr lang="en-US" i="1" dirty="0"/>
-              <a:t>The code sample on the slide shows how to load a </a:t>
-            </a:r>
-            <a:r>
-              <a:rPr lang="en-US" i="1" dirty="0" err="1"/>
-              <a:t>dataframe</a:t>
-            </a:r>
-            <a:r>
-              <a:rPr lang="en-US" i="1" dirty="0"/>
-              <a:t> with data from a CSV file (you can also load data from other formats, including Parquet) and how to use some of its built-in methods (specifically select and </a:t>
-            </a:r>
-            <a:r>
-              <a:rPr lang="en-US" i="1" dirty="0" err="1"/>
-              <a:t>groupBy</a:t>
-            </a:r>
-            <a:r>
-              <a:rPr lang="en-US" i="1" dirty="0"/>
-              <a:t>) and functions (count) to manipulate data. For details about these and other </a:t>
-            </a:r>
-            <a:r>
-              <a:rPr lang="en-US" i="1" dirty="0" err="1"/>
-              <a:t>dataframe</a:t>
-            </a:r>
-            <a:r>
-              <a:rPr lang="en-US" i="1" dirty="0"/>
-              <a:t> methods and functions, see the Spark </a:t>
-            </a:r>
-            <a:r>
-              <a:rPr lang="en-US" i="1" dirty="0" err="1"/>
-              <a:t>Dataframe</a:t>
-            </a:r>
-            <a:r>
-              <a:rPr lang="en-US" i="1" dirty="0"/>
-              <a:t> API documentation at https://spark.apache.org/docs/latest/api/python/reference/pyspark.sql/dataframe.html.</a:t>
-            </a:r>
-          </a:p>
-          <a:p>
-            <a:endParaRPr lang="en-US" i="1" dirty="0"/>
+            <a:pPr marL="0" marR="0" lvl="0" indent="0" defTabSz="228554" eaLnBrk="1" fontAlgn="auto" latinLnBrk="0" hangingPunct="1">
+              <a:lnSpc>
+                <a:spcPct val="117999"/>
+              </a:lnSpc>
+              <a:spcBef>
+                <a:spcPts val="0"/>
+              </a:spcBef>
+              <a:spcAft>
+                <a:spcPts val="0"/>
+              </a:spcAft>
+              <a:buClrTx/>
+              <a:buSzTx/>
+              <a:buFontTx/>
+              <a:buNone/>
+              <a:tabLst/>
+              <a:defRPr/>
+            </a:pPr>
+            <a:r>
+              <a:rPr lang="en-US" sz="800" b="1" dirty="0"/>
+              <a:t>Talking points</a:t>
+            </a:r>
+          </a:p>
+          <a:p>
+            <a:pPr marL="0" marR="0" lvl="0" indent="0" defTabSz="228554" eaLnBrk="1" fontAlgn="auto" latinLnBrk="0" hangingPunct="1">
+              <a:lnSpc>
+                <a:spcPct val="117999"/>
+              </a:lnSpc>
+              <a:spcBef>
+                <a:spcPts val="0"/>
+              </a:spcBef>
+              <a:spcAft>
+                <a:spcPts val="0"/>
+              </a:spcAft>
+              <a:buClrTx/>
+              <a:buSzTx/>
+              <a:buFontTx/>
+              <a:buNone/>
+              <a:tabLst/>
+              <a:defRPr/>
+            </a:pPr>
+            <a:endParaRPr lang="en-US" sz="800" b="1" dirty="0"/>
+          </a:p>
+          <a:p>
+            <a:pPr>
+              <a:lnSpc>
+                <a:spcPct val="117999"/>
+              </a:lnSpc>
+            </a:pPr>
+            <a:r>
+              <a:rPr lang="en-US" sz="900" b="1" i="1" dirty="0">
+                <a:solidFill>
+                  <a:srgbClr val="171717"/>
+                </a:solidFill>
+                <a:latin typeface="Segoe UI"/>
+                <a:cs typeface="Segoe UI"/>
+              </a:rPr>
+              <a:t>General info:</a:t>
+            </a:r>
+          </a:p>
+          <a:p>
+            <a:pPr>
+              <a:lnSpc>
+                <a:spcPct val="117999"/>
+              </a:lnSpc>
+            </a:pPr>
+            <a:endParaRPr lang="en-US" sz="900" b="1" i="1" dirty="0">
+              <a:solidFill>
+                <a:srgbClr val="171717"/>
+              </a:solidFill>
+              <a:latin typeface="Segoe UI"/>
+              <a:cs typeface="Segoe UI"/>
+            </a:endParaRPr>
+          </a:p>
+          <a:p>
+            <a:r>
+              <a:rPr lang="en-GB" sz="800" b="0" i="0" dirty="0">
+                <a:solidFill>
+                  <a:srgbClr val="171717"/>
+                </a:solidFill>
+                <a:effectLst/>
+                <a:latin typeface="Segoe UI" panose="020B0502040204020203" pitchFamily="34" charset="0"/>
+              </a:rPr>
+              <a:t>The Apache Spark </a:t>
+            </a:r>
+            <a:r>
+              <a:rPr lang="en-GB" sz="800" b="0" i="0" u="none" strike="noStrike" dirty="0">
+                <a:effectLst/>
+                <a:latin typeface="Segoe UI" panose="020B0502040204020203" pitchFamily="34" charset="0"/>
+                <a:hlinkClick r:id="rId3"/>
+              </a:rPr>
+              <a:t>DataFrame API</a:t>
+            </a:r>
+            <a:r>
+              <a:rPr lang="en-GB" sz="800" b="0" i="0" dirty="0">
+                <a:solidFill>
+                  <a:srgbClr val="171717"/>
+                </a:solidFill>
+                <a:effectLst/>
+                <a:latin typeface="Segoe UI" panose="020B0502040204020203" pitchFamily="34" charset="0"/>
+              </a:rPr>
+              <a:t> provides a rich set of functions (select columns, filter, join, aggregate, and so on) that allow you to solve common data analysis problems efficiently. DataFrames also allow you to mix operations seamlessly with custom Python, SQL, R, and Scala code. Within the notebook experience in Azure Databricks, files can be read in a single command. </a:t>
+            </a:r>
+          </a:p>
+          <a:p>
+            <a:endParaRPr lang="en-GB" sz="800" b="1" i="1" dirty="0">
+              <a:solidFill>
+                <a:srgbClr val="171717"/>
+              </a:solidFill>
+              <a:effectLst/>
+              <a:latin typeface="Segoe UI" panose="020B0502040204020203" pitchFamily="34" charset="0"/>
+              <a:cs typeface="Segoe UI"/>
+            </a:endParaRPr>
+          </a:p>
+          <a:p>
+            <a:pPr algn="l"/>
+            <a:r>
+              <a:rPr lang="en-GB" sz="900" b="1" i="1" dirty="0">
+                <a:solidFill>
+                  <a:srgbClr val="171717"/>
+                </a:solidFill>
+                <a:effectLst/>
+                <a:latin typeface="Segoe UI"/>
+                <a:cs typeface="Segoe UI"/>
+              </a:rPr>
+              <a:t>What are DataFrames?</a:t>
+            </a:r>
+          </a:p>
+          <a:p>
+            <a:pPr algn="l"/>
+            <a:endParaRPr lang="en-GB" sz="900" b="1" i="1" dirty="0">
+              <a:solidFill>
+                <a:srgbClr val="171717"/>
+              </a:solidFill>
+              <a:effectLst/>
+              <a:latin typeface="Segoe UI"/>
+              <a:cs typeface="Segoe UI"/>
+            </a:endParaRPr>
+          </a:p>
+          <a:p>
+            <a:pPr algn="l"/>
+            <a:r>
+              <a:rPr lang="en-GB" sz="900" b="0" i="0" dirty="0">
+                <a:solidFill>
+                  <a:srgbClr val="171717"/>
+                </a:solidFill>
+                <a:effectLst/>
+                <a:latin typeface="Segoe UI" panose="020B0502040204020203" pitchFamily="34" charset="0"/>
+              </a:rPr>
+              <a:t>You could view DataFrames as you might see data in Microsoft Excel. It's like a box with squares in it, that organizes data, which we could also refer to as a table of data. It is a single set of two-dimensional data that can have multiple rows and columns in the data. Each row, is a sample of data. Each column is a variable or parameter that describes the data.</a:t>
+            </a:r>
+          </a:p>
+          <a:p>
+            <a:pPr algn="l"/>
+            <a:endParaRPr lang="en-GB" sz="900" b="0" i="0" dirty="0">
+              <a:solidFill>
+                <a:srgbClr val="171717"/>
+              </a:solidFill>
+              <a:effectLst/>
+              <a:latin typeface="Segoe UI" panose="020B0502040204020203" pitchFamily="34" charset="0"/>
+            </a:endParaRPr>
+          </a:p>
+          <a:p>
+            <a:pPr algn="l"/>
+            <a:r>
+              <a:rPr lang="en-GB" sz="900" b="0" i="0" dirty="0">
+                <a:solidFill>
+                  <a:srgbClr val="171717"/>
+                </a:solidFill>
+                <a:effectLst/>
+                <a:latin typeface="Segoe UI" panose="020B0502040204020203" pitchFamily="34" charset="0"/>
+              </a:rPr>
+              <a:t>What would happen though, if you have thousands and thousands boxes?</a:t>
+            </a:r>
+          </a:p>
+          <a:p>
+            <a:pPr algn="l"/>
+            <a:endParaRPr lang="en-GB" sz="900" b="0" i="0" dirty="0">
+              <a:solidFill>
+                <a:srgbClr val="171717"/>
+              </a:solidFill>
+              <a:effectLst/>
+              <a:latin typeface="Segoe UI" panose="020B0502040204020203" pitchFamily="34" charset="0"/>
+            </a:endParaRPr>
+          </a:p>
+          <a:p>
+            <a:pPr algn="l"/>
+            <a:r>
+              <a:rPr lang="en-GB" sz="900" b="0" i="0" dirty="0">
+                <a:solidFill>
+                  <a:srgbClr val="171717"/>
+                </a:solidFill>
+                <a:effectLst/>
+                <a:latin typeface="Segoe UI" panose="020B0502040204020203" pitchFamily="34" charset="0"/>
+              </a:rPr>
+              <a:t>A DataFrame creates a data structure and it's one of the core data structures in Spark. In Spark, a DataFrame is seen as a distributed collection of data that is organized into columns that have names.</a:t>
+            </a:r>
+          </a:p>
+          <a:p>
+            <a:pPr algn="l"/>
+            <a:r>
+              <a:rPr lang="en-GB" sz="900" b="0" i="0" dirty="0">
+                <a:solidFill>
+                  <a:srgbClr val="171717"/>
+                </a:solidFill>
+                <a:effectLst/>
+                <a:latin typeface="Segoe UI" panose="020B0502040204020203" pitchFamily="34" charset="0"/>
+              </a:rPr>
+              <a:t>As you start reading or loading data that is unstructured, semi-structured, or structured. A DataFrame can start transforming that data in order to gain insights. You can use different languages that have different functionalities, like using Spark SQL, PySpark, and others to read and manipulate the data as you require.</a:t>
+            </a:r>
+          </a:p>
+          <a:p>
+            <a:pPr algn="l"/>
+            <a:endParaRPr lang="en-GB" sz="900" b="0" i="0" dirty="0">
+              <a:solidFill>
+                <a:srgbClr val="171717"/>
+              </a:solidFill>
+              <a:effectLst/>
+              <a:latin typeface="Segoe UI" panose="020B0502040204020203" pitchFamily="34" charset="0"/>
+            </a:endParaRPr>
+          </a:p>
+          <a:p>
+            <a:pPr marL="0" marR="0" lvl="0" indent="0" algn="l" defTabSz="932742" rtl="0" eaLnBrk="1" fontAlgn="auto" latinLnBrk="0" hangingPunct="1">
+              <a:lnSpc>
+                <a:spcPct val="90000"/>
+              </a:lnSpc>
+              <a:spcBef>
+                <a:spcPts val="0"/>
+              </a:spcBef>
+              <a:spcAft>
+                <a:spcPts val="340"/>
+              </a:spcAft>
+              <a:buClrTx/>
+              <a:buSzTx/>
+              <a:buFontTx/>
+              <a:buNone/>
+              <a:tabLst/>
+              <a:defRPr/>
+            </a:pPr>
+            <a:r>
+              <a:rPr lang="en-US" sz="800" b="1" dirty="0"/>
+              <a:t>Instructor notes and guidance</a:t>
+            </a:r>
+          </a:p>
+          <a:p>
+            <a:pPr marL="0" marR="0" lvl="0" indent="0" algn="l" defTabSz="932742" rtl="0" eaLnBrk="1" fontAlgn="auto" latinLnBrk="0" hangingPunct="1">
+              <a:lnSpc>
+                <a:spcPct val="90000"/>
+              </a:lnSpc>
+              <a:spcBef>
+                <a:spcPts val="0"/>
+              </a:spcBef>
+              <a:spcAft>
+                <a:spcPts val="340"/>
+              </a:spcAft>
+              <a:buClrTx/>
+              <a:buSzTx/>
+              <a:buFontTx/>
+              <a:buNone/>
+              <a:tabLst/>
+              <a:defRPr/>
+            </a:pPr>
+            <a:endParaRPr lang="en-US" sz="800" kern="1200" dirty="0">
+              <a:solidFill>
+                <a:schemeClr val="tx1"/>
+              </a:solidFill>
+              <a:effectLst/>
+              <a:latin typeface="Segoe UI Light" pitchFamily="34" charset="0"/>
+              <a:ea typeface="+mn-ea"/>
+              <a:cs typeface="+mn-cs"/>
+            </a:endParaRPr>
+          </a:p>
+          <a:p>
+            <a:pPr defTabSz="932742">
+              <a:lnSpc>
+                <a:spcPct val="90000"/>
+              </a:lnSpc>
+              <a:spcAft>
+                <a:spcPts val="340"/>
+              </a:spcAft>
+              <a:defRPr/>
+            </a:pPr>
+            <a:r>
+              <a:rPr lang="en-GB" sz="1100" dirty="0">
+                <a:solidFill>
+                  <a:srgbClr val="000000"/>
+                </a:solidFill>
+                <a:latin typeface="Calibri"/>
+                <a:cs typeface="Calibri"/>
+              </a:rPr>
+              <a:t>This slide depicts code that uses the DataFrame API in Apache Spark. Above you find an example of a DataFrame called </a:t>
+            </a:r>
+            <a:r>
+              <a:rPr lang="en-GB" sz="1100" dirty="0" err="1">
+                <a:solidFill>
+                  <a:srgbClr val="000000"/>
+                </a:solidFill>
+                <a:latin typeface="Calibri"/>
+                <a:cs typeface="Calibri"/>
+              </a:rPr>
+              <a:t>pagecountsEnAllDF</a:t>
+            </a:r>
+            <a:r>
+              <a:rPr lang="en-GB" sz="1100" dirty="0">
+                <a:solidFill>
+                  <a:srgbClr val="000000"/>
+                </a:solidFill>
+                <a:latin typeface="Calibri"/>
+                <a:cs typeface="Calibri"/>
+              </a:rPr>
+              <a:t> (that is highlighted in the graphic) in the code being created, followed by a mix of DataFrame functions in the same statement. In this example, the results are being cached and has a count being performed. Students will work with DataFrames in the lab themselves, and explore what DataFrames look like, how to create one, and how to work with transformations.  </a:t>
+            </a:r>
+            <a:endParaRPr lang="en-GB" sz="1100" b="0" i="0" u="none" strike="noStrike" dirty="0">
+              <a:solidFill>
+                <a:srgbClr val="000000"/>
+              </a:solidFill>
+              <a:effectLst/>
+              <a:latin typeface="Calibri" panose="020F0502020204030204" pitchFamily="34" charset="0"/>
+              <a:cs typeface="Calibri"/>
+            </a:endParaRPr>
           </a:p>
         </p:txBody>
       </p:sp>
       <p:sp>
         <p:nvSpPr>
-          <p:cNvPr id="4" name="Header Placeholder 3"/>
-          <p:cNvSpPr>
-            <a:spLocks noGrp="1"/>
-          </p:cNvSpPr>
-          <p:nvPr>
-            <p:ph type="hdr" sz="quarter"/>
-          </p:nvPr>
-        </p:nvSpPr>
-        <p:spPr/>
-        <p:txBody>
-          <a:bodyPr/>
-          <a:lstStyle/>
-          <a:p>
-            <a:endParaRPr lang="en-US"/>
-          </a:p>
-        </p:txBody>
-      </p:sp>
-      <p:sp>
-        <p:nvSpPr>
-          <p:cNvPr id="5" name="Footer Placeholder 4"/>
-          <p:cNvSpPr>
-            <a:spLocks noGrp="1"/>
-          </p:cNvSpPr>
-          <p:nvPr>
-            <p:ph type="ftr" sz="quarter" idx="4"/>
-          </p:nvPr>
-        </p:nvSpPr>
-        <p:spPr/>
-        <p:txBody>
-          <a:bodyPr/>
-          <a:lstStyle/>
-          <a:p>
-            <a:pPr defTabSz="914099" eaLnBrk="0" hangingPunct="0"/>
-            <a:r>
-              <a:rPr lang="en-US" sz="400">
-                <a:gradFill>
-                  <a:gsLst>
-                    <a:gs pos="0">
-                      <a:prstClr val="black"/>
-                    </a:gs>
-                    <a:gs pos="100000">
-                      <a:prstClr val="black"/>
-                    </a:gs>
-                  </a:gsLst>
-                  <a:lin ang="5400000" scaled="0"/>
-                </a:gradFill>
-                <a:latin typeface="Segoe UI" pitchFamily="34" charset="0"/>
-                <a:ea typeface="Segoe UI" pitchFamily="34" charset="0"/>
-                <a:cs typeface="Segoe UI" pitchFamily="34" charset="0"/>
-              </a:rPr>
-              <a:t>© Microsoft Corporation</a:t>
-            </a:r>
-          </a:p>
-        </p:txBody>
-      </p:sp>
-      <p:sp>
-        <p:nvSpPr>
-          <p:cNvPr id="6" name="Slide Number Placeholder 5"/>
+          <p:cNvPr id="4" name="Slide Number Placeholder 3"/>
           <p:cNvSpPr>
             <a:spLocks noGrp="1"/>
           </p:cNvSpPr>
@@ -2167,19 +2023,18 @@
           <a:bodyPr/>
           <a:lstStyle/>
           <a:p>
-            <a:fld id="{B4008EB6-D09E-4580-8CD6-DDB14511944F}" type="slidenum">
+            <a:fld id="{37E24C93-78CA-4AF0-9E77-825D60ABA46D}" type="slidenum">
               <a:rPr lang="en-US" smtClean="0"/>
-              <a:pPr/>
-              <a:t>16</a:t>
+              <a:t>15</a:t>
             </a:fld>
-            <a:endParaRPr lang="en-US"/>
+            <a:endParaRPr lang="en-US" dirty="0"/>
           </a:p>
         </p:txBody>
       </p:sp>
     </p:spTree>
     <p:extLst>
       <p:ext uri="{BB962C8B-B14F-4D97-AF65-F5344CB8AC3E}">
-        <p14:creationId xmlns:p14="http://schemas.microsoft.com/office/powerpoint/2010/main" val="609860776"/>
+        <p14:creationId xmlns:p14="http://schemas.microsoft.com/office/powerpoint/2010/main" val="3265638940"/>
       </p:ext>
     </p:extLst>
   </p:cSld>
@@ -2235,7 +2090,69 @@
           <a:p>
             <a:r>
               <a:rPr lang="en-US" i="1" dirty="0"/>
-              <a:t>In addition to providing the </a:t>
+              <a:t>The %</a:t>
+            </a:r>
+            <a:r>
+              <a:rPr lang="en-US" i="1" dirty="0" err="1"/>
+              <a:t>pyspark</a:t>
+            </a:r>
+            <a:r>
+              <a:rPr lang="en-US" i="1" dirty="0"/>
+              <a:t> “magic” at the beginning of the code instructs Spark to treat the following code as Python. You could also use %spark to indicate that the code cell contains Scala code.</a:t>
+            </a:r>
+          </a:p>
+          <a:p>
+            <a:endParaRPr lang="en-US" i="1" dirty="0"/>
+          </a:p>
+          <a:p>
+            <a:r>
+              <a:rPr lang="en-US" i="1" dirty="0" err="1"/>
+              <a:t>Dataframes</a:t>
+            </a:r>
+            <a:r>
+              <a:rPr lang="en-US" i="1" dirty="0"/>
+              <a:t> are not the only way to work with data in Spark, but they’re the most common. Other data object types include resilient distributed dataset (RDD), which are the core native building block for data structures in Spark, and Datasets, which are essentially strongly-typed </a:t>
+            </a:r>
+            <a:r>
+              <a:rPr lang="en-US" i="1" dirty="0" err="1"/>
+              <a:t>dataframes</a:t>
+            </a:r>
+            <a:r>
+              <a:rPr lang="en-US" i="1" dirty="0"/>
+              <a:t>. </a:t>
+            </a:r>
+            <a:r>
+              <a:rPr lang="en-US" i="1" dirty="0" err="1"/>
+              <a:t>Dataframes</a:t>
+            </a:r>
+            <a:r>
+              <a:rPr lang="en-US" i="1" dirty="0"/>
+              <a:t> are provided on Spark via the </a:t>
+            </a:r>
+            <a:r>
+              <a:rPr lang="en-US" i="1" dirty="0" err="1"/>
+              <a:t>SparkSQL</a:t>
+            </a:r>
+            <a:r>
+              <a:rPr lang="en-US" i="1" dirty="0"/>
+              <a:t> library and are functionally very similar to Pandas </a:t>
+            </a:r>
+            <a:r>
+              <a:rPr lang="en-US" i="1" dirty="0" err="1"/>
+              <a:t>dataframes</a:t>
+            </a:r>
+            <a:r>
+              <a:rPr lang="en-US" i="1" dirty="0"/>
+              <a:t> that are commonly used in Python (with which some students may be familiar).</a:t>
+            </a:r>
+          </a:p>
+          <a:p>
+            <a:endParaRPr lang="en-US" i="1" dirty="0"/>
+          </a:p>
+          <a:p>
+            <a:r>
+              <a:rPr lang="en-US" i="1" dirty="0"/>
+              <a:t>The code sample on the slide shows how to load a </a:t>
             </a:r>
             <a:r>
               <a:rPr lang="en-US" i="1" dirty="0" err="1"/>
@@ -2243,23 +2160,15 @@
             </a:r>
             <a:r>
               <a:rPr lang="en-US" i="1" dirty="0"/>
-              <a:t> object, the </a:t>
+              <a:t> with data from a CSV file (you can also load data from other formats, including Parquet) and how to use some of its built-in methods (specifically select and </a:t>
             </a:r>
             <a:r>
               <a:rPr lang="en-US" i="1" dirty="0" err="1"/>
-              <a:t>SparkSQl</a:t>
+              <a:t>groupBy</a:t>
             </a:r>
             <a:r>
               <a:rPr lang="en-US" i="1" dirty="0"/>
-              <a:t> library provides support for SQL syntax, either via the </a:t>
-            </a:r>
-            <a:r>
-              <a:rPr lang="en-US" i="1" dirty="0" err="1"/>
-              <a:t>spark.sql</a:t>
-            </a:r>
-            <a:r>
-              <a:rPr lang="en-US" i="1" dirty="0"/>
-              <a:t> method to return a </a:t>
+              <a:t>) and functions (count) to manipulate data. For details about these and other </a:t>
             </a:r>
             <a:r>
               <a:rPr lang="en-US" i="1" dirty="0" err="1"/>
@@ -2267,49 +2176,19 @@
             </a:r>
             <a:r>
               <a:rPr lang="en-US" i="1" dirty="0"/>
-              <a:t> or in standalone SQL code.</a:t>
+              <a:t> methods and functions, see the Spark </a:t>
+            </a:r>
+            <a:r>
+              <a:rPr lang="en-US" i="1" dirty="0" err="1"/>
+              <a:t>Dataframe</a:t>
+            </a:r>
+            <a:r>
+              <a:rPr lang="en-US" i="1" dirty="0"/>
+              <a:t> API documentation at https://spark.apache.org/docs/latest/api/python/reference/pyspark.sql/dataframe.html.</a:t>
             </a:r>
           </a:p>
           <a:p>
             <a:endParaRPr lang="en-US" i="1" dirty="0"/>
-          </a:p>
-          <a:p>
-            <a:r>
-              <a:rPr lang="en-US" i="1" dirty="0"/>
-              <a:t>To understand what’s going on in the code examples, students need to be aware of the existence of the Spark “</a:t>
-            </a:r>
-            <a:r>
-              <a:rPr lang="en-US" i="1" dirty="0" err="1"/>
-              <a:t>metastore</a:t>
-            </a:r>
-            <a:r>
-              <a:rPr lang="en-US" i="1" dirty="0"/>
-              <a:t>”, which you can think of as being a relational database layer in which tables and views are defined. The data itself is stored in files, which the tables “overlay”. Spark </a:t>
-            </a:r>
-            <a:r>
-              <a:rPr lang="en-US" i="1" dirty="0" err="1"/>
-              <a:t>metastores</a:t>
-            </a:r>
-            <a:r>
-              <a:rPr lang="en-US" i="1" dirty="0"/>
-              <a:t> are based on a technology called </a:t>
-            </a:r>
-            <a:r>
-              <a:rPr lang="en-US" b="1" i="1" dirty="0"/>
-              <a:t>Hive</a:t>
-            </a:r>
-            <a:r>
-              <a:rPr lang="en-US" i="1" dirty="0"/>
-              <a:t>, which provides relational data services to open source systems such as Hadoop and Spark. We’ll explore tables in the </a:t>
-            </a:r>
-            <a:r>
-              <a:rPr lang="en-US" i="1" dirty="0" err="1"/>
-              <a:t>metastore</a:t>
-            </a:r>
-            <a:r>
-              <a:rPr lang="en-US" i="1" dirty="0"/>
-              <a:t> later in this module when we discuss Delta Lake.</a:t>
-            </a:r>
           </a:p>
         </p:txBody>
       </p:sp>
@@ -2388,7 +2267,7 @@
             <a:fld id="{B4008EB6-D09E-4580-8CD6-DDB14511944F}" type="slidenum">
               <a:rPr lang="en-US" smtClean="0"/>
               <a:pPr/>
-              <a:t>17</a:t>
+              <a:t>16</a:t>
             </a:fld>
             <a:endParaRPr lang="en-US"/>
           </a:p>
@@ -2397,7 +2276,7 @@
     </p:spTree>
     <p:extLst>
       <p:ext uri="{BB962C8B-B14F-4D97-AF65-F5344CB8AC3E}">
-        <p14:creationId xmlns:p14="http://schemas.microsoft.com/office/powerpoint/2010/main" val="4131556773"/>
+        <p14:creationId xmlns:p14="http://schemas.microsoft.com/office/powerpoint/2010/main" val="609860776"/>
       </p:ext>
     </p:extLst>
   </p:cSld>
@@ -2451,43 +2330,146 @@
           <a:bodyPr/>
           <a:lstStyle/>
           <a:p>
-            <a:pPr marL="0" marR="0" lvl="0" indent="0" algn="l" defTabSz="914400" rtl="0" eaLnBrk="1" fontAlgn="auto" latinLnBrk="0" hangingPunct="1">
-              <a:lnSpc>
-                <a:spcPct val="100000"/>
-              </a:lnSpc>
-              <a:spcBef>
-                <a:spcPts val="0"/>
-              </a:spcBef>
-              <a:spcAft>
-                <a:spcPts val="0"/>
-              </a:spcAft>
-              <a:buClrTx/>
-              <a:buSzTx/>
-              <a:buFontTx/>
-              <a:buNone/>
-              <a:tabLst/>
-              <a:defRPr/>
-            </a:pPr>
-            <a:r>
-              <a:rPr lang="en-IE" b="1" dirty="0"/>
-              <a:t>Talking Points:</a:t>
-            </a:r>
-            <a:endParaRPr lang="en-IE" dirty="0"/>
-          </a:p>
-          <a:p>
-            <a:endParaRPr lang="en-GB" dirty="0"/>
-          </a:p>
-          <a:p>
-            <a:r>
-              <a:rPr lang="en-GB" dirty="0"/>
-              <a:t>Let’s look at some common manipulation and transformation capabilities with Azure Databricks</a:t>
+            <a:r>
+              <a:rPr lang="en-US" i="1" dirty="0"/>
+              <a:t>In addition to providing the </a:t>
+            </a:r>
+            <a:r>
+              <a:rPr lang="en-US" i="1" dirty="0" err="1"/>
+              <a:t>dataframe</a:t>
+            </a:r>
+            <a:r>
+              <a:rPr lang="en-US" i="1" dirty="0"/>
+              <a:t> object, the </a:t>
+            </a:r>
+            <a:r>
+              <a:rPr lang="en-US" i="1" dirty="0" err="1"/>
+              <a:t>SparkSQL</a:t>
+            </a:r>
+            <a:r>
+              <a:rPr lang="en-US" i="1" dirty="0"/>
+              <a:t> library provides support for SQL syntax, either via the </a:t>
+            </a:r>
+            <a:r>
+              <a:rPr lang="en-US" i="1" dirty="0" err="1"/>
+              <a:t>spark.sql</a:t>
+            </a:r>
+            <a:r>
+              <a:rPr lang="en-US" i="1" dirty="0"/>
+              <a:t> method to return a </a:t>
+            </a:r>
+            <a:r>
+              <a:rPr lang="en-US" i="1" dirty="0" err="1"/>
+              <a:t>dataframe</a:t>
+            </a:r>
+            <a:r>
+              <a:rPr lang="en-US" i="1" dirty="0"/>
+              <a:t> or in standalone SQL code.</a:t>
+            </a:r>
+          </a:p>
+          <a:p>
+            <a:endParaRPr lang="en-US" i="1" dirty="0"/>
+          </a:p>
+          <a:p>
+            <a:r>
+              <a:rPr lang="en-US" i="1" dirty="0"/>
+              <a:t>To understand what’s going on in the code examples, students need to be aware of the existence of the Spark “</a:t>
+            </a:r>
+            <a:r>
+              <a:rPr lang="en-US" i="1" dirty="0" err="1"/>
+              <a:t>metastore</a:t>
+            </a:r>
+            <a:r>
+              <a:rPr lang="en-US" i="1" dirty="0"/>
+              <a:t>”, which you can think of as being a relational database layer in which tables and views are defined. The data itself is stored in files, which the tables “overlay”. Spark </a:t>
+            </a:r>
+            <a:r>
+              <a:rPr lang="en-US" i="1" dirty="0" err="1"/>
+              <a:t>metastores</a:t>
+            </a:r>
+            <a:r>
+              <a:rPr lang="en-US" i="1" dirty="0"/>
+              <a:t> are based on a technology called </a:t>
+            </a:r>
+            <a:r>
+              <a:rPr lang="en-US" b="1" i="1" dirty="0"/>
+              <a:t>Hive</a:t>
+            </a:r>
+            <a:r>
+              <a:rPr lang="en-US" i="1" dirty="0"/>
+              <a:t>, which provides relational data services to open source systems such as Hadoop and Spark. We’ll explore tables in the </a:t>
+            </a:r>
+            <a:r>
+              <a:rPr lang="en-US" i="1" dirty="0" err="1"/>
+              <a:t>metastore</a:t>
+            </a:r>
+            <a:r>
+              <a:rPr lang="en-US" i="1" dirty="0"/>
+              <a:t> later in this module when we discuss Delta Lake.</a:t>
             </a:r>
           </a:p>
         </p:txBody>
       </p:sp>
       <p:sp>
         <p:nvSpPr>
-          <p:cNvPr id="4" name="Slide Number Placeholder 3"/>
+          <p:cNvPr id="4" name="Header Placeholder 3"/>
+          <p:cNvSpPr>
+            <a:spLocks noGrp="1"/>
+          </p:cNvSpPr>
+          <p:nvPr>
+            <p:ph type="hdr" sz="quarter"/>
+          </p:nvPr>
+        </p:nvSpPr>
+        <p:spPr/>
+        <p:txBody>
+          <a:bodyPr/>
+          <a:lstStyle/>
+          <a:p>
+            <a:endParaRPr lang="en-US"/>
+          </a:p>
+        </p:txBody>
+      </p:sp>
+      <p:sp>
+        <p:nvSpPr>
+          <p:cNvPr id="5" name="Footer Placeholder 4"/>
+          <p:cNvSpPr>
+            <a:spLocks noGrp="1"/>
+          </p:cNvSpPr>
+          <p:nvPr>
+            <p:ph type="ftr" sz="quarter" idx="4"/>
+          </p:nvPr>
+        </p:nvSpPr>
+        <p:spPr/>
+        <p:txBody>
+          <a:bodyPr/>
+          <a:lstStyle/>
+          <a:p>
+            <a:pPr defTabSz="914099" eaLnBrk="0" hangingPunct="0"/>
+            <a:r>
+              <a:rPr lang="en-US" sz="400">
+                <a:gradFill>
+                  <a:gsLst>
+                    <a:gs pos="0">
+                      <a:prstClr val="black"/>
+                    </a:gs>
+                    <a:gs pos="100000">
+                      <a:prstClr val="black"/>
+                    </a:gs>
+                  </a:gsLst>
+                  <a:lin ang="5400000" scaled="0"/>
+                </a:gradFill>
+                <a:latin typeface="Segoe UI" pitchFamily="34" charset="0"/>
+                <a:ea typeface="Segoe UI" pitchFamily="34" charset="0"/>
+                <a:cs typeface="Segoe UI" pitchFamily="34" charset="0"/>
+              </a:rPr>
+              <a:t>© Microsoft Corporation</a:t>
+            </a:r>
+          </a:p>
+        </p:txBody>
+      </p:sp>
+      <p:sp>
+        <p:nvSpPr>
+          <p:cNvPr id="6" name="Slide Number Placeholder 5"/>
           <p:cNvSpPr>
             <a:spLocks noGrp="1"/>
           </p:cNvSpPr>
@@ -2500,18 +2482,19 @@
           <a:bodyPr/>
           <a:lstStyle/>
           <a:p>
-            <a:fld id="{37E24C93-78CA-4AF0-9E77-825D60ABA46D}" type="slidenum">
+            <a:fld id="{B4008EB6-D09E-4580-8CD6-DDB14511944F}" type="slidenum">
               <a:rPr lang="en-US" smtClean="0"/>
-              <a:t>18</a:t>
+              <a:pPr/>
+              <a:t>17</a:t>
             </a:fld>
-            <a:endParaRPr lang="en-US" dirty="0"/>
+            <a:endParaRPr lang="en-US"/>
           </a:p>
         </p:txBody>
       </p:sp>
     </p:spTree>
     <p:extLst>
       <p:ext uri="{BB962C8B-B14F-4D97-AF65-F5344CB8AC3E}">
-        <p14:creationId xmlns:p14="http://schemas.microsoft.com/office/powerpoint/2010/main" val="420517814"/>
+        <p14:creationId xmlns:p14="http://schemas.microsoft.com/office/powerpoint/2010/main" val="4131556773"/>
       </p:ext>
     </p:extLst>
   </p:cSld>
@@ -2565,9 +2548,9 @@
           <a:bodyPr/>
           <a:lstStyle/>
           <a:p>
-            <a:pPr marL="0" marR="0" lvl="0" indent="0" defTabSz="228554" eaLnBrk="1" fontAlgn="auto" latinLnBrk="0" hangingPunct="1">
+            <a:pPr marL="0" marR="0" lvl="0" indent="0" algn="l" defTabSz="914400" rtl="0" eaLnBrk="1" fontAlgn="auto" latinLnBrk="0" hangingPunct="1">
               <a:lnSpc>
-                <a:spcPct val="117999"/>
+                <a:spcPct val="100000"/>
               </a:lnSpc>
               <a:spcBef>
                 <a:spcPts val="0"/>
@@ -2583,439 +2566,18 @@
               <a:defRPr/>
             </a:pPr>
             <a:r>
-              <a:rPr lang="en-US" sz="1000" b="1" dirty="0"/>
-              <a:t>Talking points</a:t>
-            </a:r>
-          </a:p>
-          <a:p>
-            <a:pPr algn="l">
-              <a:buFont typeface="Arial" panose="020B0604020202020204" pitchFamily="34" charset="0"/>
-              <a:buNone/>
-            </a:pPr>
-            <a:endParaRPr lang="en-GB" sz="1200" b="0" i="0" dirty="0">
-              <a:solidFill>
-                <a:srgbClr val="171717"/>
-              </a:solidFill>
-              <a:effectLst/>
-              <a:latin typeface="Segoe UI" panose="020B0502040204020203" pitchFamily="34" charset="0"/>
-              <a:sym typeface="Helvetica Neue"/>
-            </a:endParaRPr>
-          </a:p>
-          <a:p>
-            <a:pPr algn="l">
-              <a:buFont typeface="Arial" panose="020B0604020202020204" pitchFamily="34" charset="0"/>
-              <a:buNone/>
-            </a:pPr>
-            <a:r>
-              <a:rPr lang="en-GB" sz="1200" b="0" i="0" u="none" dirty="0">
-                <a:solidFill>
-                  <a:srgbClr val="171717"/>
-                </a:solidFill>
-                <a:effectLst/>
-                <a:latin typeface="Segoe UI"/>
-                <a:cs typeface="Segoe UI"/>
-                <a:sym typeface="Helvetica Neue"/>
-              </a:rPr>
-              <a:t>There are a number of advanced transformation that can be performed in Azure Databricks, here are some common transformations used:</a:t>
-            </a:r>
-          </a:p>
-          <a:p>
-            <a:pPr algn="l">
-              <a:buFont typeface="Arial" panose="020B0604020202020204" pitchFamily="34" charset="0"/>
-              <a:buNone/>
-            </a:pPr>
-            <a:endParaRPr lang="en-GB" sz="1200" b="1" i="1" dirty="0">
-              <a:solidFill>
-                <a:srgbClr val="171717"/>
-              </a:solidFill>
-              <a:effectLst/>
-              <a:latin typeface="Segoe UI"/>
-              <a:cs typeface="Segoe UI"/>
-              <a:sym typeface="Helvetica Neue"/>
-            </a:endParaRPr>
-          </a:p>
-          <a:p>
-            <a:pPr algn="l">
-              <a:buFont typeface="Arial" panose="020B0604020202020204" pitchFamily="34" charset="0"/>
-              <a:buNone/>
-            </a:pPr>
-            <a:r>
-              <a:rPr lang="en-GB" sz="1200" b="1" i="1" dirty="0" err="1">
-                <a:solidFill>
-                  <a:srgbClr val="171717"/>
-                </a:solidFill>
-                <a:effectLst/>
-                <a:latin typeface="Segoe UI"/>
-                <a:cs typeface="Segoe UI"/>
-                <a:sym typeface="Helvetica Neue"/>
-              </a:rPr>
-              <a:t>DateTime</a:t>
-            </a:r>
-            <a:r>
-              <a:rPr lang="en-GB" sz="1200" b="1" i="1" dirty="0">
-                <a:solidFill>
-                  <a:srgbClr val="171717"/>
-                </a:solidFill>
-                <a:effectLst/>
-                <a:latin typeface="Segoe UI"/>
-                <a:cs typeface="Segoe UI"/>
-                <a:sym typeface="Helvetica Neue"/>
-              </a:rPr>
-              <a:t> manipulation:</a:t>
-            </a:r>
-          </a:p>
-          <a:p>
-            <a:pPr algn="l">
-              <a:buFont typeface="Arial" panose="020B0604020202020204" pitchFamily="34" charset="0"/>
-              <a:buNone/>
-            </a:pPr>
-            <a:endParaRPr lang="en-GB" sz="1200" b="1" i="1" dirty="0">
-              <a:solidFill>
-                <a:srgbClr val="171717"/>
-              </a:solidFill>
-              <a:effectLst/>
-              <a:latin typeface="Segoe UI"/>
-              <a:cs typeface="Segoe UI"/>
-            </a:endParaRPr>
-          </a:p>
-          <a:p>
-            <a:pPr algn="l">
-              <a:buFont typeface="Arial" panose="020B0604020202020204" pitchFamily="34" charset="0"/>
-              <a:buNone/>
-            </a:pPr>
-            <a:r>
-              <a:rPr lang="en-GB" sz="1200" b="0" i="0" dirty="0">
-                <a:solidFill>
-                  <a:srgbClr val="171717"/>
-                </a:solidFill>
-                <a:effectLst/>
-                <a:latin typeface="Segoe UI" panose="020B0502040204020203" pitchFamily="34" charset="0"/>
-                <a:sym typeface="Helvetica Neue"/>
-              </a:rPr>
-              <a:t>Sometimes you need to normalize data where different </a:t>
-            </a:r>
-            <a:r>
-              <a:rPr lang="en-GB" sz="1200" b="0" i="0" dirty="0" err="1">
-                <a:solidFill>
-                  <a:srgbClr val="171717"/>
-                </a:solidFill>
-                <a:effectLst/>
-                <a:latin typeface="Segoe UI" panose="020B0502040204020203" pitchFamily="34" charset="0"/>
-                <a:sym typeface="Helvetica Neue"/>
-              </a:rPr>
-              <a:t>DateTime</a:t>
-            </a:r>
-            <a:r>
-              <a:rPr lang="en-GB" sz="1200" b="0" i="0" dirty="0">
-                <a:solidFill>
-                  <a:srgbClr val="171717"/>
-                </a:solidFill>
-                <a:effectLst/>
-                <a:latin typeface="Segoe UI" panose="020B0502040204020203" pitchFamily="34" charset="0"/>
-                <a:sym typeface="Helvetica Neue"/>
-              </a:rPr>
-              <a:t> formats have been used. Within Azure Databricks, you can use different functions to manipulate </a:t>
-            </a:r>
-            <a:r>
-              <a:rPr lang="en-GB" sz="1200" b="0" i="0" dirty="0" err="1">
-                <a:solidFill>
-                  <a:srgbClr val="171717"/>
-                </a:solidFill>
-                <a:effectLst/>
-                <a:latin typeface="Segoe UI" panose="020B0502040204020203" pitchFamily="34" charset="0"/>
-                <a:sym typeface="Helvetica Neue"/>
-              </a:rPr>
-              <a:t>DateTime</a:t>
-            </a:r>
-            <a:r>
-              <a:rPr lang="en-GB" sz="1200" b="0" i="0" dirty="0">
-                <a:solidFill>
-                  <a:srgbClr val="171717"/>
-                </a:solidFill>
-                <a:effectLst/>
-                <a:latin typeface="Segoe UI" panose="020B0502040204020203" pitchFamily="34" charset="0"/>
-                <a:sym typeface="Helvetica Neue"/>
-              </a:rPr>
-              <a:t> and use it across DataFrames. </a:t>
-            </a:r>
-          </a:p>
-          <a:p>
-            <a:pPr algn="l">
-              <a:buFont typeface="Arial" panose="020B0604020202020204" pitchFamily="34" charset="0"/>
-              <a:buNone/>
-            </a:pPr>
-            <a:endParaRPr lang="en-GB" sz="1200" b="0" i="0" dirty="0">
-              <a:solidFill>
-                <a:srgbClr val="171717"/>
-              </a:solidFill>
-              <a:effectLst/>
-              <a:latin typeface="Segoe UI" panose="020B0502040204020203" pitchFamily="34" charset="0"/>
-              <a:sym typeface="Helvetica Neue"/>
-            </a:endParaRPr>
-          </a:p>
-          <a:p>
-            <a:pPr algn="l">
-              <a:buFont typeface="Arial" panose="020B0604020202020204" pitchFamily="34" charset="0"/>
-              <a:buNone/>
-            </a:pPr>
-            <a:r>
-              <a:rPr lang="en-GB" sz="1200" b="1" i="1" dirty="0">
-                <a:solidFill>
-                  <a:srgbClr val="171717"/>
-                </a:solidFill>
-                <a:effectLst/>
-                <a:latin typeface="Segoe UI"/>
-                <a:cs typeface="Segoe UI"/>
-                <a:sym typeface="Helvetica Neue"/>
-              </a:rPr>
-              <a:t>Aggregate functions:</a:t>
-            </a:r>
-          </a:p>
-          <a:p>
-            <a:pPr algn="l">
-              <a:buFont typeface="Arial" panose="020B0604020202020204" pitchFamily="34" charset="0"/>
-              <a:buNone/>
-            </a:pPr>
-            <a:endParaRPr lang="en-GB" sz="1200" b="1" i="1" dirty="0">
-              <a:solidFill>
-                <a:srgbClr val="171717"/>
-              </a:solidFill>
-              <a:effectLst/>
-              <a:latin typeface="Segoe UI"/>
-              <a:cs typeface="Segoe UI"/>
-            </a:endParaRPr>
-          </a:p>
-          <a:p>
-            <a:pPr algn="l"/>
-            <a:r>
-              <a:rPr lang="en-GB" sz="1800" b="0" i="0" dirty="0">
-                <a:effectLst/>
-                <a:latin typeface="Helvetica Neue"/>
-              </a:rPr>
-              <a:t>Aggregating data is one of the more common tasks when working with big data. When there is a question such as what are the total sales, you might think off using an aggregate function. A common used function is the </a:t>
-            </a:r>
-            <a:r>
-              <a:rPr lang="en-GB" sz="1800" b="0" i="0" dirty="0" err="1">
-                <a:effectLst/>
-                <a:latin typeface="Helvetica Neue"/>
-              </a:rPr>
-              <a:t>groupBy</a:t>
-            </a:r>
-            <a:r>
-              <a:rPr lang="en-GB" sz="1800" b="0" i="0" dirty="0">
-                <a:effectLst/>
-                <a:latin typeface="Helvetica Neue"/>
-              </a:rPr>
-              <a:t>() function, which g</a:t>
-            </a:r>
-            <a:r>
-              <a:rPr lang="en-GB" sz="1800" b="0" dirty="0">
-                <a:effectLst/>
-                <a:latin typeface="Helvetica Neue"/>
-              </a:rPr>
-              <a:t>roups the Dataset using the specified columns, so that we can run aggregation on them, we can see the aggregation per grouping. </a:t>
-            </a:r>
-            <a:r>
-              <a:rPr lang="en-GB" sz="1800" b="0" i="0" dirty="0">
-                <a:effectLst/>
-                <a:latin typeface="Helvetica Neue"/>
-              </a:rPr>
-              <a:t>Unlike some other transformations, this transformation does not return a DataFrame. In Scala it returns a </a:t>
-            </a:r>
-            <a:r>
-              <a:rPr lang="en-GB" sz="1800" b="0" i="0" dirty="0" err="1">
-                <a:effectLst/>
-                <a:latin typeface="Helvetica Neue"/>
-              </a:rPr>
-              <a:t>RelationalGroupedDataset</a:t>
-            </a:r>
-            <a:r>
-              <a:rPr lang="en-GB" sz="1800" b="0" i="0" dirty="0">
-                <a:effectLst/>
-                <a:latin typeface="Helvetica Neue"/>
-              </a:rPr>
-              <a:t> object and in Python it returns a </a:t>
-            </a:r>
-            <a:r>
-              <a:rPr lang="en-GB" sz="1800" b="0" i="0" dirty="0" err="1">
-                <a:effectLst/>
-                <a:latin typeface="Helvetica Neue"/>
-              </a:rPr>
-              <a:t>GroupedData</a:t>
-            </a:r>
-            <a:r>
-              <a:rPr lang="en-GB" sz="1800" b="0" i="0" dirty="0">
-                <a:effectLst/>
-                <a:latin typeface="Helvetica Neue"/>
-              </a:rPr>
-              <a:t> objects. So be mindful these will not be persisted until you store the results in a DataFrame.</a:t>
-            </a:r>
-          </a:p>
-          <a:p>
-            <a:pPr algn="l">
-              <a:buFont typeface="Arial" panose="020B0604020202020204" pitchFamily="34" charset="0"/>
-              <a:buNone/>
-            </a:pPr>
-            <a:endParaRPr lang="en-GB" sz="1200" b="0" i="0" dirty="0">
-              <a:solidFill>
-                <a:srgbClr val="171717"/>
-              </a:solidFill>
-              <a:effectLst/>
-              <a:latin typeface="Segoe UI" panose="020B0502040204020203" pitchFamily="34" charset="0"/>
-              <a:sym typeface="Helvetica Neue"/>
-            </a:endParaRPr>
-          </a:p>
-          <a:p>
-            <a:pPr algn="l">
-              <a:buFont typeface="Arial" panose="020B0604020202020204" pitchFamily="34" charset="0"/>
-              <a:buNone/>
-            </a:pPr>
-            <a:r>
-              <a:rPr lang="en-GB" sz="1200" b="1" i="1" dirty="0">
-                <a:solidFill>
-                  <a:srgbClr val="171717"/>
-                </a:solidFill>
-                <a:effectLst/>
-                <a:latin typeface="Segoe UI"/>
-                <a:cs typeface="Segoe UI"/>
-                <a:sym typeface="Helvetica Neue"/>
-              </a:rPr>
-              <a:t>Deduplication of Data:</a:t>
-            </a:r>
-            <a:endParaRPr lang="en-GB" sz="1200" b="1" i="1" dirty="0">
-              <a:solidFill>
-                <a:srgbClr val="171717"/>
-              </a:solidFill>
-              <a:effectLst/>
-              <a:latin typeface="Segoe UI"/>
-              <a:cs typeface="Segoe UI"/>
-            </a:endParaRPr>
-          </a:p>
-          <a:p>
-            <a:pPr algn="l"/>
-            <a:endParaRPr lang="en-GB" sz="1200" b="0" i="0" dirty="0">
-              <a:solidFill>
-                <a:srgbClr val="000000"/>
-              </a:solidFill>
-              <a:effectLst/>
-              <a:latin typeface="Helvetica Neue"/>
-            </a:endParaRPr>
-          </a:p>
-          <a:p>
-            <a:pPr algn="l"/>
-            <a:r>
-              <a:rPr lang="en-GB" sz="1200" b="0" i="0" dirty="0">
-                <a:solidFill>
-                  <a:srgbClr val="000000"/>
-                </a:solidFill>
-                <a:effectLst/>
-                <a:latin typeface="Helvetica Neue"/>
-              </a:rPr>
-              <a:t>In many scenarios, you will likely get data where there are duplicate records. In some of the records, the names could be mixed case, while in others, they are uppercase, which results in a deduplication of records. </a:t>
-            </a:r>
-            <a:endParaRPr lang="en-IE" sz="1000" dirty="0">
-              <a:latin typeface="Helvetica Neue"/>
-              <a:sym typeface="Helvetica Neue"/>
-            </a:endParaRPr>
-          </a:p>
-          <a:p>
-            <a:pPr marL="0" indent="0">
-              <a:buNone/>
-            </a:pPr>
-            <a:endParaRPr lang="en-US" sz="1000" b="1" dirty="0"/>
-          </a:p>
-          <a:p>
-            <a:pPr marL="0" marR="0" lvl="0" indent="0" algn="l" defTabSz="932742" rtl="0" eaLnBrk="1" fontAlgn="auto" latinLnBrk="0" hangingPunct="1">
-              <a:lnSpc>
-                <a:spcPct val="90000"/>
-              </a:lnSpc>
-              <a:spcBef>
-                <a:spcPts val="0"/>
-              </a:spcBef>
-              <a:spcAft>
-                <a:spcPts val="340"/>
-              </a:spcAft>
-              <a:buClrTx/>
-              <a:buSzTx/>
-              <a:buFontTx/>
-              <a:buNone/>
-              <a:tabLst/>
-              <a:defRPr/>
-            </a:pPr>
-            <a:r>
-              <a:rPr lang="en-US" sz="1000" b="1" dirty="0"/>
-              <a:t>Instructor notes and guidance</a:t>
-            </a:r>
-          </a:p>
-          <a:p>
-            <a:pPr marR="0" lvl="0" indent="0" fontAlgn="auto">
-              <a:lnSpc>
-                <a:spcPct val="90000"/>
-              </a:lnSpc>
-              <a:spcBef>
-                <a:spcPts val="0"/>
-              </a:spcBef>
-              <a:spcAft>
-                <a:spcPts val="340"/>
-              </a:spcAft>
-              <a:buClrTx/>
-              <a:buSzTx/>
-              <a:buFontTx/>
-              <a:buNone/>
-              <a:tabLst/>
-              <a:defRPr/>
-            </a:pPr>
-            <a:endParaRPr lang="en-US" sz="1200" dirty="0">
-              <a:solidFill>
-                <a:srgbClr val="000000"/>
-              </a:solidFill>
-              <a:latin typeface="Helvetica Neue"/>
-            </a:endParaRPr>
-          </a:p>
-          <a:p>
-            <a:pPr marR="0" lvl="0" indent="0" fontAlgn="auto">
-              <a:lnSpc>
-                <a:spcPct val="90000"/>
-              </a:lnSpc>
-              <a:spcBef>
-                <a:spcPts val="0"/>
-              </a:spcBef>
-              <a:spcAft>
-                <a:spcPts val="340"/>
-              </a:spcAft>
-              <a:buClrTx/>
-              <a:buSzTx/>
-              <a:buFontTx/>
-              <a:buNone/>
-              <a:tabLst/>
-              <a:defRPr/>
-            </a:pPr>
-            <a:r>
-              <a:rPr lang="en-US" sz="1200" dirty="0">
-                <a:solidFill>
-                  <a:srgbClr val="000000"/>
-                </a:solidFill>
-                <a:latin typeface="Helvetica Neue"/>
-              </a:rPr>
-              <a:t>This slide showcases some example of advanced transformation methods that are commonly seen among customers.  In the lab, students will deep-dive into notebook examples of each of the advanced methods mentioned. The students will use the functions to play with </a:t>
-            </a:r>
-            <a:r>
-              <a:rPr lang="en-US" sz="1200" dirty="0" err="1">
-                <a:solidFill>
-                  <a:srgbClr val="000000"/>
-                </a:solidFill>
-                <a:latin typeface="Helvetica Neue"/>
-              </a:rPr>
-              <a:t>DataTime</a:t>
-            </a:r>
-            <a:r>
-              <a:rPr lang="en-US" sz="1200" dirty="0">
-                <a:solidFill>
-                  <a:srgbClr val="000000"/>
-                </a:solidFill>
-                <a:latin typeface="Helvetica Neue"/>
-              </a:rPr>
-              <a:t> manipulation, aggregate functions and deduplication functions of data. </a:t>
+              <a:rPr lang="en-IE" b="1" dirty="0"/>
+              <a:t>Talking Points:</a:t>
+            </a:r>
+            <a:endParaRPr lang="en-IE" dirty="0"/>
+          </a:p>
+          <a:p>
+            <a:endParaRPr lang="en-GB" dirty="0"/>
+          </a:p>
+          <a:p>
+            <a:r>
+              <a:rPr lang="en-GB" dirty="0"/>
+              <a:t>Let’s look at some common manipulation and transformation capabilities with Azure Databricks</a:t>
             </a:r>
           </a:p>
         </p:txBody>
@@ -3037,7 +2599,7 @@
           <a:p>
             <a:fld id="{37E24C93-78CA-4AF0-9E77-825D60ABA46D}" type="slidenum">
               <a:rPr lang="en-US" smtClean="0"/>
-              <a:t>19</a:t>
+              <a:t>18</a:t>
             </a:fld>
             <a:endParaRPr lang="en-US" dirty="0"/>
           </a:p>
@@ -3046,7 +2608,7 @@
     </p:spTree>
     <p:extLst>
       <p:ext uri="{BB962C8B-B14F-4D97-AF65-F5344CB8AC3E}">
-        <p14:creationId xmlns:p14="http://schemas.microsoft.com/office/powerpoint/2010/main" val="1281536820"/>
+        <p14:creationId xmlns:p14="http://schemas.microsoft.com/office/powerpoint/2010/main" val="420517814"/>
       </p:ext>
     </p:extLst>
   </p:cSld>
@@ -3100,120 +2662,464 @@
           <a:bodyPr/>
           <a:lstStyle/>
           <a:p>
-            <a:r>
-              <a:rPr lang="en-US" i="1" dirty="0"/>
-              <a:t>Point out that the code loads data in CSV format and saves the transformed results in Parquet format – sometimes that’s the only transformation required! In this case, the data is modified by adding a new column named “Year” that is derived from the </a:t>
-            </a:r>
-            <a:r>
-              <a:rPr lang="en-US" i="1" dirty="0" err="1"/>
-              <a:t>OrderDate</a:t>
-            </a:r>
-            <a:r>
-              <a:rPr lang="en-US" i="1" dirty="0"/>
-              <a:t> column by using the </a:t>
-            </a:r>
-            <a:r>
-              <a:rPr lang="en-US" b="1" i="1" dirty="0"/>
-              <a:t>year</a:t>
-            </a:r>
-            <a:r>
-              <a:rPr lang="en-US" b="0" i="1" dirty="0"/>
-              <a:t> function.</a:t>
-            </a:r>
-            <a:endParaRPr lang="en-US" i="1" dirty="0"/>
-          </a:p>
-          <a:p>
-            <a:r>
-              <a:rPr lang="en-US" i="1" dirty="0"/>
-              <a:t>See the </a:t>
-            </a:r>
-            <a:r>
-              <a:rPr lang="en-US" i="1" dirty="0" err="1"/>
-              <a:t>PySpark</a:t>
-            </a:r>
-            <a:r>
-              <a:rPr lang="en-US" i="1" dirty="0"/>
-              <a:t> </a:t>
-            </a:r>
-            <a:r>
-              <a:rPr lang="en-US" i="1" dirty="0" err="1"/>
-              <a:t>Dataframe</a:t>
-            </a:r>
-            <a:r>
-              <a:rPr lang="en-US" i="1" dirty="0"/>
-              <a:t> API reference at https://spark.apache.org/docs/latest/api/python/reference/pyspark.sql/dataframe.html for more details of transformations you can apply to </a:t>
-            </a:r>
-            <a:r>
-              <a:rPr lang="en-US" i="1" dirty="0" err="1"/>
-              <a:t>dataframes</a:t>
-            </a:r>
-            <a:r>
-              <a:rPr lang="en-US" i="1" dirty="0"/>
-              <a:t>.</a:t>
+            <a:pPr marL="0" marR="0" lvl="0" indent="0" defTabSz="228554" eaLnBrk="1" fontAlgn="auto" latinLnBrk="0" hangingPunct="1">
+              <a:lnSpc>
+                <a:spcPct val="117999"/>
+              </a:lnSpc>
+              <a:spcBef>
+                <a:spcPts val="0"/>
+              </a:spcBef>
+              <a:spcAft>
+                <a:spcPts val="0"/>
+              </a:spcAft>
+              <a:buClrTx/>
+              <a:buSzTx/>
+              <a:buFontTx/>
+              <a:buNone/>
+              <a:tabLst/>
+              <a:defRPr/>
+            </a:pPr>
+            <a:r>
+              <a:rPr lang="en-US" sz="1000" b="1" dirty="0"/>
+              <a:t>Talking points</a:t>
+            </a:r>
+          </a:p>
+          <a:p>
+            <a:pPr algn="l">
+              <a:buFont typeface="Arial" panose="020B0604020202020204" pitchFamily="34" charset="0"/>
+              <a:buNone/>
+            </a:pPr>
+            <a:endParaRPr lang="en-GB" sz="1200" b="0" i="0" dirty="0">
+              <a:solidFill>
+                <a:srgbClr val="171717"/>
+              </a:solidFill>
+              <a:effectLst/>
+              <a:latin typeface="Segoe UI" panose="020B0502040204020203" pitchFamily="34" charset="0"/>
+              <a:sym typeface="Helvetica Neue"/>
+            </a:endParaRPr>
+          </a:p>
+          <a:p>
+            <a:pPr algn="l">
+              <a:buFont typeface="Arial" panose="020B0604020202020204" pitchFamily="34" charset="0"/>
+              <a:buNone/>
+            </a:pPr>
+            <a:r>
+              <a:rPr lang="en-GB" sz="1200" b="0" i="0" u="none" dirty="0">
+                <a:solidFill>
+                  <a:srgbClr val="171717"/>
+                </a:solidFill>
+                <a:effectLst/>
+                <a:latin typeface="Segoe UI"/>
+                <a:cs typeface="Segoe UI"/>
+                <a:sym typeface="Helvetica Neue"/>
+              </a:rPr>
+              <a:t>There are a number of advanced transformation that can be performed in Azure Databricks, here are some common transformations used:</a:t>
+            </a:r>
+          </a:p>
+          <a:p>
+            <a:pPr algn="l">
+              <a:buFont typeface="Arial" panose="020B0604020202020204" pitchFamily="34" charset="0"/>
+              <a:buNone/>
+            </a:pPr>
+            <a:endParaRPr lang="en-GB" sz="1200" b="1" i="1" dirty="0">
+              <a:solidFill>
+                <a:srgbClr val="171717"/>
+              </a:solidFill>
+              <a:effectLst/>
+              <a:latin typeface="Segoe UI"/>
+              <a:cs typeface="Segoe UI"/>
+              <a:sym typeface="Helvetica Neue"/>
+            </a:endParaRPr>
+          </a:p>
+          <a:p>
+            <a:pPr algn="l">
+              <a:buFont typeface="Arial" panose="020B0604020202020204" pitchFamily="34" charset="0"/>
+              <a:buNone/>
+            </a:pPr>
+            <a:r>
+              <a:rPr lang="en-GB" sz="1200" b="1" i="1" dirty="0" err="1">
+                <a:solidFill>
+                  <a:srgbClr val="171717"/>
+                </a:solidFill>
+                <a:effectLst/>
+                <a:latin typeface="Segoe UI"/>
+                <a:cs typeface="Segoe UI"/>
+                <a:sym typeface="Helvetica Neue"/>
+              </a:rPr>
+              <a:t>DateTime</a:t>
+            </a:r>
+            <a:r>
+              <a:rPr lang="en-GB" sz="1200" b="1" i="1" dirty="0">
+                <a:solidFill>
+                  <a:srgbClr val="171717"/>
+                </a:solidFill>
+                <a:effectLst/>
+                <a:latin typeface="Segoe UI"/>
+                <a:cs typeface="Segoe UI"/>
+                <a:sym typeface="Helvetica Neue"/>
+              </a:rPr>
+              <a:t> manipulation:</a:t>
+            </a:r>
+          </a:p>
+          <a:p>
+            <a:pPr algn="l">
+              <a:buFont typeface="Arial" panose="020B0604020202020204" pitchFamily="34" charset="0"/>
+              <a:buNone/>
+            </a:pPr>
+            <a:endParaRPr lang="en-GB" sz="1200" b="1" i="1" dirty="0">
+              <a:solidFill>
+                <a:srgbClr val="171717"/>
+              </a:solidFill>
+              <a:effectLst/>
+              <a:latin typeface="Segoe UI"/>
+              <a:cs typeface="Segoe UI"/>
+            </a:endParaRPr>
+          </a:p>
+          <a:p>
+            <a:pPr algn="l">
+              <a:buFont typeface="Arial" panose="020B0604020202020204" pitchFamily="34" charset="0"/>
+              <a:buNone/>
+            </a:pPr>
+            <a:r>
+              <a:rPr lang="en-GB" sz="1200" b="0" i="0" dirty="0">
+                <a:solidFill>
+                  <a:srgbClr val="171717"/>
+                </a:solidFill>
+                <a:effectLst/>
+                <a:latin typeface="Segoe UI" panose="020B0502040204020203" pitchFamily="34" charset="0"/>
+                <a:sym typeface="Helvetica Neue"/>
+              </a:rPr>
+              <a:t>Sometimes you need to normalize data where different </a:t>
+            </a:r>
+            <a:r>
+              <a:rPr lang="en-GB" sz="1200" b="0" i="0" dirty="0" err="1">
+                <a:solidFill>
+                  <a:srgbClr val="171717"/>
+                </a:solidFill>
+                <a:effectLst/>
+                <a:latin typeface="Segoe UI" panose="020B0502040204020203" pitchFamily="34" charset="0"/>
+                <a:sym typeface="Helvetica Neue"/>
+              </a:rPr>
+              <a:t>DateTime</a:t>
+            </a:r>
+            <a:r>
+              <a:rPr lang="en-GB" sz="1200" b="0" i="0" dirty="0">
+                <a:solidFill>
+                  <a:srgbClr val="171717"/>
+                </a:solidFill>
+                <a:effectLst/>
+                <a:latin typeface="Segoe UI" panose="020B0502040204020203" pitchFamily="34" charset="0"/>
+                <a:sym typeface="Helvetica Neue"/>
+              </a:rPr>
+              <a:t> formats have been used. Within Azure Databricks, you can use different functions to manipulate </a:t>
+            </a:r>
+            <a:r>
+              <a:rPr lang="en-GB" sz="1200" b="0" i="0" dirty="0" err="1">
+                <a:solidFill>
+                  <a:srgbClr val="171717"/>
+                </a:solidFill>
+                <a:effectLst/>
+                <a:latin typeface="Segoe UI" panose="020B0502040204020203" pitchFamily="34" charset="0"/>
+                <a:sym typeface="Helvetica Neue"/>
+              </a:rPr>
+              <a:t>DateTime</a:t>
+            </a:r>
+            <a:r>
+              <a:rPr lang="en-GB" sz="1200" b="0" i="0" dirty="0">
+                <a:solidFill>
+                  <a:srgbClr val="171717"/>
+                </a:solidFill>
+                <a:effectLst/>
+                <a:latin typeface="Segoe UI" panose="020B0502040204020203" pitchFamily="34" charset="0"/>
+                <a:sym typeface="Helvetica Neue"/>
+              </a:rPr>
+              <a:t> and use it across DataFrames. </a:t>
+            </a:r>
+          </a:p>
+          <a:p>
+            <a:pPr algn="l">
+              <a:buFont typeface="Arial" panose="020B0604020202020204" pitchFamily="34" charset="0"/>
+              <a:buNone/>
+            </a:pPr>
+            <a:endParaRPr lang="en-GB" sz="1200" b="0" i="0" dirty="0">
+              <a:solidFill>
+                <a:srgbClr val="171717"/>
+              </a:solidFill>
+              <a:effectLst/>
+              <a:latin typeface="Segoe UI" panose="020B0502040204020203" pitchFamily="34" charset="0"/>
+              <a:sym typeface="Helvetica Neue"/>
+            </a:endParaRPr>
+          </a:p>
+          <a:p>
+            <a:pPr algn="l">
+              <a:buFont typeface="Arial" panose="020B0604020202020204" pitchFamily="34" charset="0"/>
+              <a:buNone/>
+            </a:pPr>
+            <a:r>
+              <a:rPr lang="en-GB" sz="1200" b="1" i="1" dirty="0">
+                <a:solidFill>
+                  <a:srgbClr val="171717"/>
+                </a:solidFill>
+                <a:effectLst/>
+                <a:latin typeface="Segoe UI"/>
+                <a:cs typeface="Segoe UI"/>
+                <a:sym typeface="Helvetica Neue"/>
+              </a:rPr>
+              <a:t>Aggregate functions:</a:t>
+            </a:r>
+          </a:p>
+          <a:p>
+            <a:pPr algn="l">
+              <a:buFont typeface="Arial" panose="020B0604020202020204" pitchFamily="34" charset="0"/>
+              <a:buNone/>
+            </a:pPr>
+            <a:endParaRPr lang="en-GB" sz="1200" b="1" i="1" dirty="0">
+              <a:solidFill>
+                <a:srgbClr val="171717"/>
+              </a:solidFill>
+              <a:effectLst/>
+              <a:latin typeface="Segoe UI"/>
+              <a:cs typeface="Segoe UI"/>
+            </a:endParaRPr>
+          </a:p>
+          <a:p>
+            <a:pPr algn="l"/>
+            <a:r>
+              <a:rPr lang="en-GB" sz="1800" b="0" i="0" dirty="0">
+                <a:effectLst/>
+                <a:latin typeface="Helvetica Neue"/>
+              </a:rPr>
+              <a:t>Aggregating data is one of the more common tasks when working with big data. When there is a question such as what are the total sales, you might think off using an aggregate function. A common used function is the </a:t>
+            </a:r>
+            <a:r>
+              <a:rPr lang="en-GB" sz="1800" b="0" i="0" dirty="0" err="1">
+                <a:effectLst/>
+                <a:latin typeface="Helvetica Neue"/>
+              </a:rPr>
+              <a:t>groupBy</a:t>
+            </a:r>
+            <a:r>
+              <a:rPr lang="en-GB" sz="1800" b="0" i="0" dirty="0">
+                <a:effectLst/>
+                <a:latin typeface="Helvetica Neue"/>
+              </a:rPr>
+              <a:t>() function, which g</a:t>
+            </a:r>
+            <a:r>
+              <a:rPr lang="en-GB" sz="1800" b="0" dirty="0">
+                <a:effectLst/>
+                <a:latin typeface="Helvetica Neue"/>
+              </a:rPr>
+              <a:t>roups the Dataset using the specified columns, so that we can run aggregation on them, we can see the aggregation per grouping. </a:t>
+            </a:r>
+            <a:r>
+              <a:rPr lang="en-GB" sz="1800" b="0" i="0" dirty="0">
+                <a:effectLst/>
+                <a:latin typeface="Helvetica Neue"/>
+              </a:rPr>
+              <a:t>Unlike some other transformations, this transformation does not return a DataFrame. In Scala it returns a </a:t>
+            </a:r>
+            <a:r>
+              <a:rPr lang="en-GB" sz="1800" b="0" i="0" dirty="0" err="1">
+                <a:effectLst/>
+                <a:latin typeface="Helvetica Neue"/>
+              </a:rPr>
+              <a:t>RelationalGroupedDataset</a:t>
+            </a:r>
+            <a:r>
+              <a:rPr lang="en-GB" sz="1800" b="0" i="0" dirty="0">
+                <a:effectLst/>
+                <a:latin typeface="Helvetica Neue"/>
+              </a:rPr>
+              <a:t> object and in Python it returns a </a:t>
+            </a:r>
+            <a:r>
+              <a:rPr lang="en-GB" sz="1800" b="0" i="0" dirty="0" err="1">
+                <a:effectLst/>
+                <a:latin typeface="Helvetica Neue"/>
+              </a:rPr>
+              <a:t>GroupedData</a:t>
+            </a:r>
+            <a:r>
+              <a:rPr lang="en-GB" sz="1800" b="0" i="0" dirty="0">
+                <a:effectLst/>
+                <a:latin typeface="Helvetica Neue"/>
+              </a:rPr>
+              <a:t> objects. So be mindful these will not be persisted until you store the results in a DataFrame.</a:t>
+            </a:r>
+          </a:p>
+          <a:p>
+            <a:pPr algn="l">
+              <a:buFont typeface="Arial" panose="020B0604020202020204" pitchFamily="34" charset="0"/>
+              <a:buNone/>
+            </a:pPr>
+            <a:endParaRPr lang="en-GB" sz="1200" b="0" i="0" dirty="0">
+              <a:solidFill>
+                <a:srgbClr val="171717"/>
+              </a:solidFill>
+              <a:effectLst/>
+              <a:latin typeface="Segoe UI" panose="020B0502040204020203" pitchFamily="34" charset="0"/>
+              <a:sym typeface="Helvetica Neue"/>
+            </a:endParaRPr>
+          </a:p>
+          <a:p>
+            <a:pPr algn="l">
+              <a:buFont typeface="Arial" panose="020B0604020202020204" pitchFamily="34" charset="0"/>
+              <a:buNone/>
+            </a:pPr>
+            <a:r>
+              <a:rPr lang="en-GB" sz="1200" b="1" i="1" dirty="0">
+                <a:solidFill>
+                  <a:srgbClr val="171717"/>
+                </a:solidFill>
+                <a:effectLst/>
+                <a:latin typeface="Segoe UI"/>
+                <a:cs typeface="Segoe UI"/>
+                <a:sym typeface="Helvetica Neue"/>
+              </a:rPr>
+              <a:t>Deduplication of Data:</a:t>
+            </a:r>
+            <a:endParaRPr lang="en-GB" sz="1200" b="1" i="1" dirty="0">
+              <a:solidFill>
+                <a:srgbClr val="171717"/>
+              </a:solidFill>
+              <a:effectLst/>
+              <a:latin typeface="Segoe UI"/>
+              <a:cs typeface="Segoe UI"/>
+            </a:endParaRPr>
+          </a:p>
+          <a:p>
+            <a:pPr algn="l"/>
+            <a:endParaRPr lang="en-GB" sz="1200" b="0" i="0" dirty="0">
+              <a:solidFill>
+                <a:srgbClr val="000000"/>
+              </a:solidFill>
+              <a:effectLst/>
+              <a:latin typeface="Helvetica Neue"/>
+            </a:endParaRPr>
+          </a:p>
+          <a:p>
+            <a:pPr algn="l"/>
+            <a:r>
+              <a:rPr lang="en-GB" sz="1200" b="0" i="0" dirty="0">
+                <a:solidFill>
+                  <a:srgbClr val="000000"/>
+                </a:solidFill>
+                <a:effectLst/>
+                <a:latin typeface="Helvetica Neue"/>
+              </a:rPr>
+              <a:t>In many scenarios, you will likely get data where there are duplicate records. In some of the records, the names could be mixed case, while in others, they are uppercase, which results in a deduplication of records. </a:t>
+            </a:r>
+            <a:endParaRPr lang="en-IE" sz="1000" dirty="0">
+              <a:latin typeface="Helvetica Neue"/>
+              <a:sym typeface="Helvetica Neue"/>
+            </a:endParaRPr>
+          </a:p>
+          <a:p>
+            <a:pPr marL="0" indent="0">
+              <a:buNone/>
+            </a:pPr>
+            <a:endParaRPr lang="en-US" sz="1000" b="1" dirty="0"/>
+          </a:p>
+          <a:p>
+            <a:pPr marL="0" marR="0" lvl="0" indent="0" algn="l" defTabSz="932742" rtl="0" eaLnBrk="1" fontAlgn="auto" latinLnBrk="0" hangingPunct="1">
+              <a:lnSpc>
+                <a:spcPct val="90000"/>
+              </a:lnSpc>
+              <a:spcBef>
+                <a:spcPts val="0"/>
+              </a:spcBef>
+              <a:spcAft>
+                <a:spcPts val="340"/>
+              </a:spcAft>
+              <a:buClrTx/>
+              <a:buSzTx/>
+              <a:buFontTx/>
+              <a:buNone/>
+              <a:tabLst/>
+              <a:defRPr/>
+            </a:pPr>
+            <a:r>
+              <a:rPr lang="en-US" sz="1000" b="1" dirty="0"/>
+              <a:t>Instructor notes and guidance</a:t>
+            </a:r>
+          </a:p>
+          <a:p>
+            <a:pPr marR="0" lvl="0" indent="0" fontAlgn="auto">
+              <a:lnSpc>
+                <a:spcPct val="90000"/>
+              </a:lnSpc>
+              <a:spcBef>
+                <a:spcPts val="0"/>
+              </a:spcBef>
+              <a:spcAft>
+                <a:spcPts val="340"/>
+              </a:spcAft>
+              <a:buClrTx/>
+              <a:buSzTx/>
+              <a:buFontTx/>
+              <a:buNone/>
+              <a:tabLst/>
+              <a:defRPr/>
+            </a:pPr>
+            <a:endParaRPr lang="en-US" sz="1200" dirty="0">
+              <a:solidFill>
+                <a:srgbClr val="000000"/>
+              </a:solidFill>
+              <a:latin typeface="Helvetica Neue"/>
+            </a:endParaRPr>
+          </a:p>
+          <a:p>
+            <a:pPr marR="0" lvl="0" indent="0" fontAlgn="auto">
+              <a:lnSpc>
+                <a:spcPct val="90000"/>
+              </a:lnSpc>
+              <a:spcBef>
+                <a:spcPts val="0"/>
+              </a:spcBef>
+              <a:spcAft>
+                <a:spcPts val="340"/>
+              </a:spcAft>
+              <a:buClrTx/>
+              <a:buSzTx/>
+              <a:buFontTx/>
+              <a:buNone/>
+              <a:tabLst/>
+              <a:defRPr/>
+            </a:pPr>
+            <a:r>
+              <a:rPr lang="en-US" sz="1200" dirty="0">
+                <a:solidFill>
+                  <a:srgbClr val="000000"/>
+                </a:solidFill>
+                <a:latin typeface="Helvetica Neue"/>
+              </a:rPr>
+              <a:t>This slide showcases some example of advanced transformation methods that are commonly seen among customers.  In the lab, students will deep-dive into notebook examples of each of the advanced methods mentioned. The students will use the functions to play with </a:t>
+            </a:r>
+            <a:r>
+              <a:rPr lang="en-US" sz="1200" dirty="0" err="1">
+                <a:solidFill>
+                  <a:srgbClr val="000000"/>
+                </a:solidFill>
+                <a:latin typeface="Helvetica Neue"/>
+              </a:rPr>
+              <a:t>DataTime</a:t>
+            </a:r>
+            <a:r>
+              <a:rPr lang="en-US" sz="1200" dirty="0">
+                <a:solidFill>
+                  <a:srgbClr val="000000"/>
+                </a:solidFill>
+                <a:latin typeface="Helvetica Neue"/>
+              </a:rPr>
+              <a:t> manipulation, aggregate functions and deduplication functions of data. </a:t>
             </a:r>
           </a:p>
         </p:txBody>
       </p:sp>
       <p:sp>
         <p:nvSpPr>
-          <p:cNvPr id="4" name="Header Placeholder 3"/>
-          <p:cNvSpPr>
-            <a:spLocks noGrp="1"/>
-          </p:cNvSpPr>
-          <p:nvPr>
-            <p:ph type="hdr" sz="quarter"/>
-          </p:nvPr>
-        </p:nvSpPr>
-        <p:spPr/>
-        <p:txBody>
-          <a:bodyPr/>
-          <a:lstStyle/>
-          <a:p>
-            <a:endParaRPr lang="en-US"/>
-          </a:p>
-        </p:txBody>
-      </p:sp>
-      <p:sp>
-        <p:nvSpPr>
-          <p:cNvPr id="5" name="Footer Placeholder 4"/>
-          <p:cNvSpPr>
-            <a:spLocks noGrp="1"/>
-          </p:cNvSpPr>
-          <p:nvPr>
-            <p:ph type="ftr" sz="quarter" idx="4"/>
-          </p:nvPr>
-        </p:nvSpPr>
-        <p:spPr/>
-        <p:txBody>
-          <a:bodyPr/>
-          <a:lstStyle/>
-          <a:p>
-            <a:pPr defTabSz="914099" eaLnBrk="0" hangingPunct="0"/>
-            <a:r>
-              <a:rPr lang="en-US" sz="400">
-                <a:gradFill>
-                  <a:gsLst>
-                    <a:gs pos="0">
-                      <a:prstClr val="black"/>
-                    </a:gs>
-                    <a:gs pos="100000">
-                      <a:prstClr val="black"/>
-                    </a:gs>
-                  </a:gsLst>
-                  <a:lin ang="5400000" scaled="0"/>
-                </a:gradFill>
-                <a:latin typeface="Segoe UI" pitchFamily="34" charset="0"/>
-                <a:ea typeface="Segoe UI" pitchFamily="34" charset="0"/>
-                <a:cs typeface="Segoe UI" pitchFamily="34" charset="0"/>
-              </a:rPr>
-              <a:t>© Microsoft Corporation</a:t>
-            </a:r>
-          </a:p>
-        </p:txBody>
-      </p:sp>
-      <p:sp>
-        <p:nvSpPr>
-          <p:cNvPr id="6" name="Slide Number Placeholder 5"/>
+          <p:cNvPr id="4" name="Slide Number Placeholder 3"/>
           <p:cNvSpPr>
             <a:spLocks noGrp="1"/>
           </p:cNvSpPr>
@@ -3226,19 +3132,18 @@
           <a:bodyPr/>
           <a:lstStyle/>
           <a:p>
-            <a:fld id="{B4008EB6-D09E-4580-8CD6-DDB14511944F}" type="slidenum">
+            <a:fld id="{37E24C93-78CA-4AF0-9E77-825D60ABA46D}" type="slidenum">
               <a:rPr lang="en-US" smtClean="0"/>
-              <a:pPr/>
-              <a:t>20</a:t>
+              <a:t>19</a:t>
             </a:fld>
-            <a:endParaRPr lang="en-US"/>
+            <a:endParaRPr lang="en-US" dirty="0"/>
           </a:p>
         </p:txBody>
       </p:sp>
     </p:spTree>
     <p:extLst>
       <p:ext uri="{BB962C8B-B14F-4D97-AF65-F5344CB8AC3E}">
-        <p14:creationId xmlns:p14="http://schemas.microsoft.com/office/powerpoint/2010/main" val="4186549347"/>
+        <p14:creationId xmlns:p14="http://schemas.microsoft.com/office/powerpoint/2010/main" val="1281536820"/>
       </p:ext>
     </p:extLst>
   </p:cSld>
@@ -3294,21 +3199,54 @@
           <a:p>
             <a:r>
               <a:rPr lang="en-US" i="1" dirty="0"/>
-              <a:t>Partitioning data enables Spark to optimize query performance by distributing processing for each partition across worker nodes. Additionally, queries that filter based on partitioning columns improve performance by eliminating unnecessary disk IO.</a:t>
-            </a:r>
-          </a:p>
-          <a:p>
+              <a:t>Point out that the code loads data in CSV format and saves the transformed results in Parquet format – sometimes that’s the only transformation required! In this case, the data is modified by adding a new column named “Year” that is derived from the </a:t>
+            </a:r>
+            <a:r>
+              <a:rPr lang="en-US" i="1" dirty="0" err="1"/>
+              <a:t>OrderDate</a:t>
+            </a:r>
             <a:r>
               <a:rPr lang="en-US" i="1" dirty="0"/>
-              <a:t>Note that the folder names generated when partitioning a </a:t>
+              <a:t> column by using the </a:t>
+            </a:r>
+            <a:r>
+              <a:rPr lang="en-US" b="1" i="1" dirty="0"/>
+              <a:t>year</a:t>
+            </a:r>
+            <a:r>
+              <a:rPr lang="en-US" b="0" i="1" dirty="0"/>
+              <a:t> function.</a:t>
+            </a:r>
+            <a:endParaRPr lang="en-US" i="1" dirty="0"/>
+          </a:p>
+          <a:p>
+            <a:r>
+              <a:rPr lang="en-US" i="1" dirty="0"/>
+              <a:t>See the </a:t>
             </a:r>
             <a:r>
               <a:rPr lang="en-US" i="1" dirty="0" err="1"/>
-              <a:t>dataframe</a:t>
+              <a:t>PySpark</a:t>
             </a:r>
             <a:r>
               <a:rPr lang="en-US" i="1" dirty="0"/>
-              <a:t> include the partitioning column name and value in a “column=value” format.</a:t>
+              <a:t> </a:t>
+            </a:r>
+            <a:r>
+              <a:rPr lang="en-US" i="1" dirty="0" err="1"/>
+              <a:t>Dataframe</a:t>
+            </a:r>
+            <a:r>
+              <a:rPr lang="en-US" i="1" dirty="0"/>
+              <a:t> API reference at https://spark.apache.org/docs/latest/api/python/reference/pyspark.sql/dataframe.html for more details of transformations you can apply to </a:t>
+            </a:r>
+            <a:r>
+              <a:rPr lang="en-US" i="1" dirty="0" err="1"/>
+              <a:t>dataframes</a:t>
+            </a:r>
+            <a:r>
+              <a:rPr lang="en-US" i="1" dirty="0"/>
+              <a:t>.</a:t>
             </a:r>
           </a:p>
         </p:txBody>
@@ -3388,7 +3326,7 @@
             <a:fld id="{B4008EB6-D09E-4580-8CD6-DDB14511944F}" type="slidenum">
               <a:rPr lang="en-US" smtClean="0"/>
               <a:pPr/>
-              <a:t>21</a:t>
+              <a:t>20</a:t>
             </a:fld>
             <a:endParaRPr lang="en-US"/>
           </a:p>
@@ -3397,7 +3335,7 @@
     </p:spTree>
     <p:extLst>
       <p:ext uri="{BB962C8B-B14F-4D97-AF65-F5344CB8AC3E}">
-        <p14:creationId xmlns:p14="http://schemas.microsoft.com/office/powerpoint/2010/main" val="1394205423"/>
+        <p14:creationId xmlns:p14="http://schemas.microsoft.com/office/powerpoint/2010/main" val="4186549347"/>
       </p:ext>
     </p:extLst>
   </p:cSld>
@@ -3453,15 +3391,13 @@
           <a:p>
             <a:r>
               <a:rPr lang="en-US" i="1" dirty="0"/>
-              <a:t>Many data engineers are familiar with SQL syntax and will find it easier to use when manipulating relational data structures. Creating a view in the </a:t>
-            </a:r>
-            <a:r>
-              <a:rPr lang="en-US" i="1" dirty="0" err="1"/>
-              <a:t>metastore</a:t>
-            </a:r>
+              <a:t>Partitioning data enables Spark to optimize query performance by distributing processing for each partition across worker nodes. Additionally, queries that filter based on partitioning columns improve performance by eliminating unnecessary disk IO.</a:t>
+            </a:r>
+          </a:p>
+          <a:p>
             <a:r>
               <a:rPr lang="en-US" i="1" dirty="0"/>
-              <a:t> enables you to write SQL queries that return a transformed </a:t>
+              <a:t>Note that the folder names generated when partitioning a </a:t>
             </a:r>
             <a:r>
               <a:rPr lang="en-US" i="1" dirty="0" err="1"/>
@@ -3469,25 +3405,8 @@
             </a:r>
             <a:r>
               <a:rPr lang="en-US" i="1" dirty="0"/>
-              <a:t>, which you can then write as an external table. External tables are relational tables in the </a:t>
-            </a:r>
-            <a:r>
-              <a:rPr lang="en-US" i="1" dirty="0" err="1"/>
-              <a:t>metastore</a:t>
-            </a:r>
-            <a:r>
-              <a:rPr lang="en-US" i="1" dirty="0"/>
-              <a:t> that reference files in a data lake location that you specify, so you can access the data by querying the table or by reading the files directly from the data lake. Additionally, external tables are “loosely bound” to the underlying data files – dropping the table does </a:t>
-            </a:r>
-            <a:r>
-              <a:rPr lang="en-US" i="1" u="sng" dirty="0"/>
-              <a:t>not</a:t>
-            </a:r>
-            <a:r>
-              <a:rPr lang="en-US" i="1" u="none" dirty="0"/>
-              <a:t> delete the files, so you can use this technique to transform the data and persist it in files, drop the table, and still use the transformed data files in downstream processes.</a:t>
-            </a:r>
-            <a:endParaRPr lang="en-US" i="1" dirty="0"/>
+              <a:t> include the partitioning column name and value in a “column=value” format.</a:t>
+            </a:r>
           </a:p>
         </p:txBody>
       </p:sp>
@@ -3566,7 +3485,7 @@
             <a:fld id="{B4008EB6-D09E-4580-8CD6-DDB14511944F}" type="slidenum">
               <a:rPr lang="en-US" smtClean="0"/>
               <a:pPr/>
-              <a:t>22</a:t>
+              <a:t>21</a:t>
             </a:fld>
             <a:endParaRPr lang="en-US"/>
           </a:p>
@@ -3575,7 +3494,7 @@
     </p:spTree>
     <p:extLst>
       <p:ext uri="{BB962C8B-B14F-4D97-AF65-F5344CB8AC3E}">
-        <p14:creationId xmlns:p14="http://schemas.microsoft.com/office/powerpoint/2010/main" val="1887702454"/>
+        <p14:creationId xmlns:p14="http://schemas.microsoft.com/office/powerpoint/2010/main" val="1394205423"/>
       </p:ext>
     </p:extLst>
   </p:cSld>
@@ -3629,108 +3548,106 @@
           <a:bodyPr/>
           <a:lstStyle/>
           <a:p>
-            <a:pPr algn="l" rtl="0" fontAlgn="base"/>
-            <a:r>
-              <a:rPr lang="en-US" sz="1200" b="1" i="0" u="none" strike="noStrike" dirty="0">
-                <a:solidFill>
-                  <a:srgbClr val="000000"/>
-                </a:solidFill>
-                <a:effectLst/>
-                <a:latin typeface="Helvetica Neue"/>
-              </a:rPr>
-              <a:t>TALKING POINTS</a:t>
-            </a:r>
-            <a:r>
-              <a:rPr lang="en-US" sz="1200" b="0" i="0" dirty="0">
-                <a:effectLst/>
-                <a:latin typeface="Helvetica Neue"/>
-              </a:rPr>
-              <a:t>​</a:t>
-            </a:r>
-            <a:endParaRPr lang="en-US" b="0" i="0" dirty="0">
-              <a:effectLst/>
-            </a:endParaRPr>
-          </a:p>
-          <a:p>
-            <a:pPr algn="l" rtl="0" fontAlgn="base"/>
-            <a:r>
-              <a:rPr lang="en-US" sz="1200" b="0" i="0" dirty="0">
-                <a:effectLst/>
-                <a:latin typeface="Helvetica Neue"/>
-              </a:rPr>
-              <a:t>​</a:t>
-            </a:r>
-            <a:endParaRPr lang="en-US" b="0" i="0" dirty="0">
-              <a:effectLst/>
-            </a:endParaRPr>
-          </a:p>
-          <a:p>
-            <a:pPr algn="l" rtl="0" fontAlgn="base"/>
-            <a:r>
-              <a:rPr lang="en-US" sz="1200" b="0" i="0" u="none" strike="noStrike" dirty="0">
-                <a:solidFill>
-                  <a:srgbClr val="000000"/>
-                </a:solidFill>
-                <a:effectLst/>
-                <a:latin typeface="Helvetica Neue"/>
-              </a:rPr>
-              <a:t>Let’s put this into reality and show you how it works.</a:t>
-            </a:r>
-            <a:r>
-              <a:rPr lang="en-US" sz="1200" b="0" i="0" dirty="0">
-                <a:effectLst/>
-                <a:latin typeface="Helvetica Neue"/>
-              </a:rPr>
-              <a:t>​</a:t>
-            </a:r>
-            <a:endParaRPr lang="en-US" b="0" i="0" dirty="0">
-              <a:effectLst/>
-            </a:endParaRPr>
-          </a:p>
-          <a:p>
-            <a:pPr algn="l" rtl="0" fontAlgn="base"/>
-            <a:r>
-              <a:rPr lang="en-US" sz="1200" b="0" i="0" dirty="0">
-                <a:effectLst/>
-                <a:latin typeface="Helvetica Neue"/>
-              </a:rPr>
-              <a:t>​</a:t>
-            </a:r>
-            <a:endParaRPr lang="en-US" b="0" i="0" dirty="0">
-              <a:effectLst/>
-            </a:endParaRPr>
-          </a:p>
-          <a:p>
-            <a:pPr algn="l" rtl="0" fontAlgn="base"/>
-            <a:r>
-              <a:rPr lang="en-US" sz="1200" b="0" i="0" u="none" strike="noStrike" dirty="0">
-                <a:solidFill>
-                  <a:srgbClr val="000000"/>
-                </a:solidFill>
-                <a:effectLst/>
-                <a:latin typeface="Helvetica Neue"/>
-              </a:rPr>
-              <a:t>All instructions and context are found in this repository</a:t>
-            </a:r>
-            <a:r>
-              <a:rPr lang="en-US" sz="1200" b="0" i="0" dirty="0">
-                <a:effectLst/>
-                <a:latin typeface="Helvetica Neue"/>
-              </a:rPr>
-              <a:t>​</a:t>
-            </a:r>
-            <a:endParaRPr lang="en-US" b="0" i="0" dirty="0">
-              <a:effectLst/>
-            </a:endParaRPr>
-          </a:p>
-          <a:p>
-            <a:endParaRPr lang="en-GB" dirty="0"/>
+            <a:r>
+              <a:rPr lang="en-US" i="1" dirty="0"/>
+              <a:t>Many data engineers are familiar with SQL syntax and will find it easier to use when manipulating relational data structures. Creating a view in the </a:t>
+            </a:r>
+            <a:r>
+              <a:rPr lang="en-US" i="1" dirty="0" err="1"/>
+              <a:t>metastore</a:t>
+            </a:r>
+            <a:r>
+              <a:rPr lang="en-US" i="1" dirty="0"/>
+              <a:t> enables you to write SQL queries that return a transformed </a:t>
+            </a:r>
+            <a:r>
+              <a:rPr lang="en-US" i="1" dirty="0" err="1"/>
+              <a:t>dataframe</a:t>
+            </a:r>
+            <a:r>
+              <a:rPr lang="en-US" i="1" dirty="0"/>
+              <a:t>, which you can then write as an external table. External tables are relational tables in the </a:t>
+            </a:r>
+            <a:r>
+              <a:rPr lang="en-US" i="1" dirty="0" err="1"/>
+              <a:t>metastore</a:t>
+            </a:r>
+            <a:r>
+              <a:rPr lang="en-US" i="1" dirty="0"/>
+              <a:t> that reference files in a data lake location that you specify, so you can access the data by querying the table or by reading the files directly from the data lake. Additionally, external tables are “loosely bound” to the underlying data files – dropping the table does </a:t>
+            </a:r>
+            <a:r>
+              <a:rPr lang="en-US" i="1" u="sng" dirty="0"/>
+              <a:t>not</a:t>
+            </a:r>
+            <a:r>
+              <a:rPr lang="en-US" i="1" u="none" dirty="0"/>
+              <a:t> delete the files, so you can use this technique to transform the data and persist it in files, drop the table, and still use the transformed data files in downstream processes.</a:t>
+            </a:r>
+            <a:endParaRPr lang="en-US" i="1" dirty="0"/>
           </a:p>
         </p:txBody>
       </p:sp>
       <p:sp>
         <p:nvSpPr>
-          <p:cNvPr id="4" name="Slide Number Placeholder 3"/>
+          <p:cNvPr id="4" name="Header Placeholder 3"/>
+          <p:cNvSpPr>
+            <a:spLocks noGrp="1"/>
+          </p:cNvSpPr>
+          <p:nvPr>
+            <p:ph type="hdr" sz="quarter"/>
+          </p:nvPr>
+        </p:nvSpPr>
+        <p:spPr/>
+        <p:txBody>
+          <a:bodyPr/>
+          <a:lstStyle/>
+          <a:p>
+            <a:endParaRPr lang="en-US"/>
+          </a:p>
+        </p:txBody>
+      </p:sp>
+      <p:sp>
+        <p:nvSpPr>
+          <p:cNvPr id="5" name="Footer Placeholder 4"/>
+          <p:cNvSpPr>
+            <a:spLocks noGrp="1"/>
+          </p:cNvSpPr>
+          <p:nvPr>
+            <p:ph type="ftr" sz="quarter" idx="4"/>
+          </p:nvPr>
+        </p:nvSpPr>
+        <p:spPr/>
+        <p:txBody>
+          <a:bodyPr/>
+          <a:lstStyle/>
+          <a:p>
+            <a:pPr defTabSz="914099" eaLnBrk="0" hangingPunct="0"/>
+            <a:r>
+              <a:rPr lang="en-US" sz="400">
+                <a:gradFill>
+                  <a:gsLst>
+                    <a:gs pos="0">
+                      <a:prstClr val="black"/>
+                    </a:gs>
+                    <a:gs pos="100000">
+                      <a:prstClr val="black"/>
+                    </a:gs>
+                  </a:gsLst>
+                  <a:lin ang="5400000" scaled="0"/>
+                </a:gradFill>
+                <a:latin typeface="Segoe UI" pitchFamily="34" charset="0"/>
+                <a:ea typeface="Segoe UI" pitchFamily="34" charset="0"/>
+                <a:cs typeface="Segoe UI" pitchFamily="34" charset="0"/>
+              </a:rPr>
+              <a:t>© Microsoft Corporation</a:t>
+            </a:r>
+          </a:p>
+        </p:txBody>
+      </p:sp>
+      <p:sp>
+        <p:nvSpPr>
+          <p:cNvPr id="6" name="Slide Number Placeholder 5"/>
           <p:cNvSpPr>
             <a:spLocks noGrp="1"/>
           </p:cNvSpPr>
@@ -3743,18 +3660,19 @@
           <a:bodyPr/>
           <a:lstStyle/>
           <a:p>
-            <a:fld id="{37E24C93-78CA-4AF0-9E77-825D60ABA46D}" type="slidenum">
+            <a:fld id="{B4008EB6-D09E-4580-8CD6-DDB14511944F}" type="slidenum">
               <a:rPr lang="en-US" smtClean="0"/>
-              <a:t>23</a:t>
+              <a:pPr/>
+              <a:t>22</a:t>
             </a:fld>
-            <a:endParaRPr lang="en-US" dirty="0"/>
+            <a:endParaRPr lang="en-US"/>
           </a:p>
         </p:txBody>
       </p:sp>
     </p:spTree>
     <p:extLst>
       <p:ext uri="{BB962C8B-B14F-4D97-AF65-F5344CB8AC3E}">
-        <p14:creationId xmlns:p14="http://schemas.microsoft.com/office/powerpoint/2010/main" val="1674645597"/>
+        <p14:creationId xmlns:p14="http://schemas.microsoft.com/office/powerpoint/2010/main" val="1887702454"/>
       </p:ext>
     </p:extLst>
   </p:cSld>
@@ -3842,6 +3760,185 @@
     <p:extLst>
       <p:ext uri="{BB962C8B-B14F-4D97-AF65-F5344CB8AC3E}">
         <p14:creationId xmlns:p14="http://schemas.microsoft.com/office/powerpoint/2010/main" val="1008444059"/>
+      </p:ext>
+    </p:extLst>
+  </p:cSld>
+  <p:clrMapOvr>
+    <a:masterClrMapping/>
+  </p:clrMapOvr>
+</p:notes>
+</file>
+
+<file path=ppt/notesSlides/notesSlide20.xml><?xml version="1.0" encoding="utf-8"?>
+<p:notes xmlns:a="http://schemas.openxmlformats.org/drawingml/2006/main" xmlns:r="http://schemas.openxmlformats.org/officeDocument/2006/relationships" xmlns:p="http://schemas.openxmlformats.org/presentationml/2006/main">
+  <p:cSld>
+    <p:spTree>
+      <p:nvGrpSpPr>
+        <p:cNvPr id="1" name=""/>
+        <p:cNvGrpSpPr/>
+        <p:nvPr/>
+      </p:nvGrpSpPr>
+      <p:grpSpPr>
+        <a:xfrm>
+          <a:off x="0" y="0"/>
+          <a:ext cx="0" cy="0"/>
+          <a:chOff x="0" y="0"/>
+          <a:chExt cx="0" cy="0"/>
+        </a:xfrm>
+      </p:grpSpPr>
+      <p:sp>
+        <p:nvSpPr>
+          <p:cNvPr id="2" name="Slide Image Placeholder 1"/>
+          <p:cNvSpPr>
+            <a:spLocks noGrp="1" noRot="1" noChangeAspect="1"/>
+          </p:cNvSpPr>
+          <p:nvPr>
+            <p:ph type="sldImg"/>
+          </p:nvPr>
+        </p:nvSpPr>
+        <p:spPr/>
+      </p:sp>
+      <p:sp>
+        <p:nvSpPr>
+          <p:cNvPr id="3" name="Notes Placeholder 2"/>
+          <p:cNvSpPr>
+            <a:spLocks noGrp="1"/>
+          </p:cNvSpPr>
+          <p:nvPr>
+            <p:ph type="body" idx="1"/>
+          </p:nvPr>
+        </p:nvSpPr>
+        <p:spPr/>
+        <p:txBody>
+          <a:bodyPr/>
+          <a:lstStyle/>
+          <a:p>
+            <a:pPr algn="l" rtl="0" fontAlgn="base"/>
+            <a:r>
+              <a:rPr lang="en-US" sz="1200" b="1" i="0" u="none" strike="noStrike" dirty="0">
+                <a:solidFill>
+                  <a:srgbClr val="000000"/>
+                </a:solidFill>
+                <a:effectLst/>
+                <a:latin typeface="Helvetica Neue"/>
+              </a:rPr>
+              <a:t>TALKING POINTS</a:t>
+            </a:r>
+            <a:r>
+              <a:rPr lang="en-US" sz="1200" b="0" i="0" dirty="0">
+                <a:effectLst/>
+                <a:latin typeface="Helvetica Neue"/>
+              </a:rPr>
+              <a:t>​</a:t>
+            </a:r>
+            <a:endParaRPr lang="en-US" b="0" i="0" dirty="0">
+              <a:effectLst/>
+            </a:endParaRPr>
+          </a:p>
+          <a:p>
+            <a:pPr algn="l" rtl="0" fontAlgn="base"/>
+            <a:r>
+              <a:rPr lang="en-US" sz="1200" b="0" i="0" dirty="0">
+                <a:effectLst/>
+                <a:latin typeface="Helvetica Neue"/>
+              </a:rPr>
+              <a:t>​</a:t>
+            </a:r>
+            <a:endParaRPr lang="en-US" b="0" i="0" dirty="0">
+              <a:effectLst/>
+            </a:endParaRPr>
+          </a:p>
+          <a:p>
+            <a:pPr algn="l" rtl="0" fontAlgn="base"/>
+            <a:r>
+              <a:rPr lang="en-US" sz="1200" b="0" i="0" u="none" strike="noStrike" dirty="0">
+                <a:solidFill>
+                  <a:srgbClr val="000000"/>
+                </a:solidFill>
+                <a:effectLst/>
+                <a:latin typeface="Helvetica Neue"/>
+              </a:rPr>
+              <a:t>Let’s put this into reality and show you how it works.</a:t>
+            </a:r>
+            <a:r>
+              <a:rPr lang="en-US" sz="1200" b="0" i="0" dirty="0">
+                <a:effectLst/>
+                <a:latin typeface="Helvetica Neue"/>
+              </a:rPr>
+              <a:t>​</a:t>
+            </a:r>
+            <a:endParaRPr lang="en-US" b="0" i="0" dirty="0">
+              <a:effectLst/>
+            </a:endParaRPr>
+          </a:p>
+          <a:p>
+            <a:pPr algn="l" rtl="0" fontAlgn="base"/>
+            <a:r>
+              <a:rPr lang="en-US" sz="1200" b="0" i="0" dirty="0">
+                <a:effectLst/>
+                <a:latin typeface="Helvetica Neue"/>
+              </a:rPr>
+              <a:t>​</a:t>
+            </a:r>
+            <a:endParaRPr lang="en-US" b="0" i="0" dirty="0">
+              <a:effectLst/>
+            </a:endParaRPr>
+          </a:p>
+          <a:p>
+            <a:pPr algn="l" rtl="0" fontAlgn="base"/>
+            <a:r>
+              <a:rPr lang="en-US" sz="1200" b="0" i="0" u="none" strike="noStrike" dirty="0">
+                <a:solidFill>
+                  <a:srgbClr val="000000"/>
+                </a:solidFill>
+                <a:effectLst/>
+                <a:latin typeface="Helvetica Neue"/>
+              </a:rPr>
+              <a:t>All instructions and context are found in this repository</a:t>
+            </a:r>
+            <a:r>
+              <a:rPr lang="en-US" sz="1200" b="0" i="0" dirty="0">
+                <a:effectLst/>
+                <a:latin typeface="Helvetica Neue"/>
+              </a:rPr>
+              <a:t>​</a:t>
+            </a:r>
+            <a:endParaRPr lang="en-US" b="0" i="0" dirty="0">
+              <a:effectLst/>
+            </a:endParaRPr>
+          </a:p>
+          <a:p>
+            <a:endParaRPr lang="en-GB" dirty="0"/>
+          </a:p>
+        </p:txBody>
+      </p:sp>
+      <p:sp>
+        <p:nvSpPr>
+          <p:cNvPr id="4" name="Slide Number Placeholder 3"/>
+          <p:cNvSpPr>
+            <a:spLocks noGrp="1"/>
+          </p:cNvSpPr>
+          <p:nvPr>
+            <p:ph type="sldNum" sz="quarter" idx="5"/>
+          </p:nvPr>
+        </p:nvSpPr>
+        <p:spPr/>
+        <p:txBody>
+          <a:bodyPr/>
+          <a:lstStyle/>
+          <a:p>
+            <a:fld id="{37E24C93-78CA-4AF0-9E77-825D60ABA46D}" type="slidenum">
+              <a:rPr lang="en-US" smtClean="0"/>
+              <a:t>23</a:t>
+            </a:fld>
+            <a:endParaRPr lang="en-US" dirty="0"/>
+          </a:p>
+        </p:txBody>
+      </p:sp>
+    </p:spTree>
+    <p:extLst>
+      <p:ext uri="{BB962C8B-B14F-4D97-AF65-F5344CB8AC3E}">
+        <p14:creationId xmlns:p14="http://schemas.microsoft.com/office/powerpoint/2010/main" val="1674645597"/>
       </p:ext>
     </p:extLst>
   </p:cSld>
@@ -4920,74 +5017,7 @@
           <a:bodyPr/>
           <a:lstStyle/>
           <a:p>
-            <a:r>
-              <a:rPr lang="en-US" sz="1200" b="1" dirty="0"/>
-              <a:t>TALKING POINTS</a:t>
-            </a:r>
-          </a:p>
-          <a:p>
-            <a:endParaRPr lang="en-US" sz="1200" dirty="0"/>
-          </a:p>
-          <a:p>
-            <a:r>
-              <a:rPr lang="en-US" sz="1200" dirty="0"/>
-              <a:t>Let’s go over what Azure Databricks</a:t>
-            </a:r>
-          </a:p>
-          <a:p>
-            <a:endParaRPr lang="en-GB" sz="1200" dirty="0"/>
-          </a:p>
-          <a:p>
-            <a:pPr marL="0" marR="0" lvl="0" indent="0" algn="l" defTabSz="914367" rtl="0" eaLnBrk="1" fontAlgn="auto" latinLnBrk="0" hangingPunct="1">
-              <a:lnSpc>
-                <a:spcPct val="90000"/>
-              </a:lnSpc>
-              <a:spcBef>
-                <a:spcPts val="0"/>
-              </a:spcBef>
-              <a:spcAft>
-                <a:spcPts val="333"/>
-              </a:spcAft>
-              <a:buClrTx/>
-              <a:buSzTx/>
-              <a:buFontTx/>
-              <a:buNone/>
-              <a:tabLst/>
-              <a:defRPr/>
-            </a:pPr>
-            <a:r>
-              <a:rPr lang="en-US" sz="1200" b="1" dirty="0"/>
-              <a:t>PRESENTER NOTES AND GUIDANCE</a:t>
-            </a:r>
-          </a:p>
-          <a:p>
-            <a:endParaRPr lang="en-US" sz="1200" dirty="0"/>
-          </a:p>
-          <a:p>
-            <a:pPr marL="0" marR="0" lvl="0" indent="0" algn="l" defTabSz="914367" rtl="0" eaLnBrk="1" fontAlgn="auto" latinLnBrk="0" hangingPunct="1">
-              <a:lnSpc>
-                <a:spcPct val="90000"/>
-              </a:lnSpc>
-              <a:spcBef>
-                <a:spcPts val="0"/>
-              </a:spcBef>
-              <a:spcAft>
-                <a:spcPts val="333"/>
-              </a:spcAft>
-              <a:buClrTx/>
-              <a:buSzTx/>
-              <a:buFontTx/>
-              <a:buNone/>
-              <a:tabLst/>
-              <a:defRPr/>
-            </a:pPr>
-            <a:r>
-              <a:rPr lang="en-US" sz="1200" dirty="0"/>
-              <a:t>Poll your audience.</a:t>
-            </a:r>
-          </a:p>
-          <a:p>
-            <a:endParaRPr lang="en-GB" dirty="0"/>
+            <a:endParaRPr lang="en-US" dirty="0"/>
           </a:p>
         </p:txBody>
       </p:sp>
@@ -5008,7 +5038,7 @@
           <a:p>
             <a:fld id="{37E24C93-78CA-4AF0-9E77-825D60ABA46D}" type="slidenum">
               <a:rPr lang="en-US" smtClean="0"/>
-              <a:t>9</a:t>
+              <a:t>8</a:t>
             </a:fld>
             <a:endParaRPr lang="en-US" dirty="0"/>
           </a:p>
@@ -5017,7 +5047,7 @@
     </p:spTree>
     <p:extLst>
       <p:ext uri="{BB962C8B-B14F-4D97-AF65-F5344CB8AC3E}">
-        <p14:creationId xmlns:p14="http://schemas.microsoft.com/office/powerpoint/2010/main" val="1850920789"/>
+        <p14:creationId xmlns:p14="http://schemas.microsoft.com/office/powerpoint/2010/main" val="1405399381"/>
       </p:ext>
     </p:extLst>
   </p:cSld>
@@ -5072,45 +5102,69 @@
           <a:lstStyle/>
           <a:p>
             <a:r>
-              <a:rPr lang="en-US" sz="1400" b="1" dirty="0"/>
+              <a:rPr lang="en-US" sz="1200" b="1" dirty="0"/>
               <a:t>TALKING POINTS</a:t>
             </a:r>
           </a:p>
           <a:p>
-            <a:pPr marL="171450" indent="-171450">
-              <a:buFont typeface="Arial" panose="020B0604020202020204" pitchFamily="34" charset="0"/>
-              <a:buChar char="•"/>
+            <a:endParaRPr lang="en-US" sz="1200" dirty="0"/>
+          </a:p>
+          <a:p>
+            <a:r>
+              <a:rPr lang="en-US" sz="1200" dirty="0"/>
+              <a:t>Let’s go over what Azure Databricks</a:t>
+            </a:r>
+          </a:p>
+          <a:p>
+            <a:endParaRPr lang="en-GB" sz="1200" dirty="0"/>
+          </a:p>
+          <a:p>
+            <a:pPr marL="0" marR="0" lvl="0" indent="0" algn="l" defTabSz="914367" rtl="0" eaLnBrk="1" fontAlgn="auto" latinLnBrk="0" hangingPunct="1">
+              <a:lnSpc>
+                <a:spcPct val="90000"/>
+              </a:lnSpc>
+              <a:spcBef>
+                <a:spcPts val="0"/>
+              </a:spcBef>
+              <a:spcAft>
+                <a:spcPts val="333"/>
+              </a:spcAft>
+              <a:buClrTx/>
+              <a:buSzTx/>
+              <a:buFontTx/>
+              <a:buNone/>
+              <a:tabLst/>
+              <a:defRPr/>
             </a:pPr>
-            <a:endParaRPr lang="en-US" sz="1200" b="1" dirty="0"/>
-          </a:p>
-          <a:p>
-            <a:pPr marL="171450" indent="-171450">
-              <a:buFont typeface="Arial" panose="020B0604020202020204" pitchFamily="34" charset="0"/>
-              <a:buChar char="•"/>
+            <a:r>
+              <a:rPr lang="en-US" sz="1200" b="1" dirty="0"/>
+              <a:t>PRESENTER NOTES AND GUIDANCE</a:t>
+            </a:r>
+          </a:p>
+          <a:p>
+            <a:endParaRPr lang="en-US" sz="1200" dirty="0"/>
+          </a:p>
+          <a:p>
+            <a:pPr marL="0" marR="0" lvl="0" indent="0" algn="l" defTabSz="914367" rtl="0" eaLnBrk="1" fontAlgn="auto" latinLnBrk="0" hangingPunct="1">
+              <a:lnSpc>
+                <a:spcPct val="90000"/>
+              </a:lnSpc>
+              <a:spcBef>
+                <a:spcPts val="0"/>
+              </a:spcBef>
+              <a:spcAft>
+                <a:spcPts val="333"/>
+              </a:spcAft>
+              <a:buClrTx/>
+              <a:buSzTx/>
+              <a:buFontTx/>
+              <a:buNone/>
+              <a:tabLst/>
+              <a:defRPr/>
             </a:pPr>
             <a:r>
-              <a:rPr lang="en-GB" sz="1200" dirty="0"/>
-              <a:t>Fully-managed, cloud-based Spark platform for Big Data and Machine Learning workloads.</a:t>
-            </a:r>
-          </a:p>
-          <a:p>
-            <a:pPr marL="171450" indent="-171450">
-              <a:buFont typeface="Arial" panose="020B0604020202020204" pitchFamily="34" charset="0"/>
-              <a:buChar char="•"/>
-            </a:pPr>
-            <a:r>
-              <a:rPr lang="en-GB" sz="1200" dirty="0"/>
-              <a:t>Empowers developers to accelerate AI and innovation by simplifying the process of building enterprise-grade production data applications</a:t>
-            </a:r>
-          </a:p>
-          <a:p>
-            <a:pPr marL="171450" indent="-171450">
-              <a:buFont typeface="Arial" panose="020B0604020202020204" pitchFamily="34" charset="0"/>
-              <a:buChar char="•"/>
-            </a:pPr>
-            <a:r>
-              <a:rPr lang="en-GB" sz="1200" dirty="0"/>
-              <a:t>Integrates with Azure Data services commonly used by Data Engineers, including Azure Data Factory, Azure Synapse Analytics, Power BI and Azure Data Lake Storage</a:t>
+              <a:rPr lang="en-US" sz="1200" dirty="0"/>
+              <a:t>Poll your audience.</a:t>
             </a:r>
           </a:p>
           <a:p>
@@ -5135,7 +5189,7 @@
           <a:p>
             <a:fld id="{37E24C93-78CA-4AF0-9E77-825D60ABA46D}" type="slidenum">
               <a:rPr lang="en-US" smtClean="0"/>
-              <a:t>10</a:t>
+              <a:t>9</a:t>
             </a:fld>
             <a:endParaRPr lang="en-US" dirty="0"/>
           </a:p>
@@ -5144,7 +5198,7 @@
     </p:spTree>
     <p:extLst>
       <p:ext uri="{BB962C8B-B14F-4D97-AF65-F5344CB8AC3E}">
-        <p14:creationId xmlns:p14="http://schemas.microsoft.com/office/powerpoint/2010/main" val="1604342835"/>
+        <p14:creationId xmlns:p14="http://schemas.microsoft.com/office/powerpoint/2010/main" val="1850920789"/>
       </p:ext>
     </p:extLst>
   </p:cSld>
@@ -5204,118 +5258,40 @@
             </a:r>
           </a:p>
           <a:p>
+            <a:pPr marL="171450" indent="-171450">
+              <a:buFont typeface="Arial" panose="020B0604020202020204" pitchFamily="34" charset="0"/>
+              <a:buChar char="•"/>
+            </a:pPr>
             <a:endParaRPr lang="en-US" sz="1200" b="1" dirty="0"/>
           </a:p>
           <a:p>
-            <a:pPr algn="l"/>
-            <a:r>
-              <a:rPr lang="en-US" b="0" i="0" dirty="0">
-                <a:solidFill>
-                  <a:srgbClr val="171717"/>
-                </a:solidFill>
-                <a:effectLst/>
-                <a:latin typeface="Segoe UI" panose="020B0502040204020203" pitchFamily="34" charset="0"/>
-              </a:rPr>
-              <a:t>Azure Databricks is a full-managed data analytics platform optimized for Microsoft Azure. Azure Databricks offers three environments for developing data intensive applications: Databricks SQL, Databricks Data Science &amp; Engineering, and Databricks Machine Learning.</a:t>
-            </a:r>
-          </a:p>
-          <a:p>
-            <a:pPr algn="l"/>
-            <a:endParaRPr lang="en-US" b="0" i="0" dirty="0">
-              <a:solidFill>
-                <a:srgbClr val="171717"/>
-              </a:solidFill>
-              <a:effectLst/>
-              <a:latin typeface="Segoe UI" panose="020B0502040204020203" pitchFamily="34" charset="0"/>
-            </a:endParaRPr>
-          </a:p>
-          <a:p>
-            <a:pPr algn="l"/>
-            <a:r>
-              <a:rPr lang="en-US" b="1" i="0" dirty="0">
-                <a:solidFill>
-                  <a:srgbClr val="171717"/>
-                </a:solidFill>
-                <a:effectLst/>
-                <a:latin typeface="Segoe UI" panose="020B0502040204020203" pitchFamily="34" charset="0"/>
-              </a:rPr>
-              <a:t>Databricks SQL</a:t>
-            </a:r>
-            <a:r>
-              <a:rPr lang="en-US" b="0" i="0" dirty="0">
-                <a:solidFill>
-                  <a:srgbClr val="171717"/>
-                </a:solidFill>
-                <a:effectLst/>
-                <a:latin typeface="Segoe UI" panose="020B0502040204020203" pitchFamily="34" charset="0"/>
-              </a:rPr>
-              <a:t> provides an easy-to-use platform for analysts who want to run SQL queries on their data lake, create multiple visualization types to explore query results from different perspectives, and build and share dashboards.</a:t>
-            </a:r>
-          </a:p>
-          <a:p>
-            <a:pPr algn="l"/>
-            <a:endParaRPr lang="en-US" b="0" i="0" dirty="0">
-              <a:solidFill>
-                <a:srgbClr val="171717"/>
-              </a:solidFill>
-              <a:effectLst/>
-              <a:latin typeface="Segoe UI" panose="020B0502040204020203" pitchFamily="34" charset="0"/>
-            </a:endParaRPr>
-          </a:p>
-          <a:p>
-            <a:pPr algn="l"/>
-            <a:r>
-              <a:rPr lang="en-US" b="1" i="0" dirty="0">
-                <a:solidFill>
-                  <a:srgbClr val="171717"/>
-                </a:solidFill>
-                <a:effectLst/>
-                <a:latin typeface="Segoe UI" panose="020B0502040204020203" pitchFamily="34" charset="0"/>
-              </a:rPr>
-              <a:t>Databricks Data Science &amp; Engineering</a:t>
-            </a:r>
-            <a:r>
-              <a:rPr lang="en-US" b="0" i="0" dirty="0">
-                <a:solidFill>
-                  <a:srgbClr val="171717"/>
-                </a:solidFill>
-                <a:effectLst/>
-                <a:latin typeface="Segoe UI" panose="020B0502040204020203" pitchFamily="34" charset="0"/>
-              </a:rPr>
-              <a:t> (commonly referred to simply as “Workspace”) provides an interactive workspace that enables collaboration between data engineers, data scientists, and machine learning engineers. For a big data pipeline, the data (raw or structured) is ingested into Azure through Azure Data Factory in batches, or streamed near real-time using Apache Kafka, Event Hub, or IoT Hub. This data lands in a data lake for long term persisted storage, in Azure Blob Storage or Azure Data Lake Storage. As part of your analytics workflow, use Azure Databricks to read data from multiple data sources and turn it into breakthrough insights using Spark.</a:t>
-            </a:r>
-          </a:p>
-          <a:p>
-            <a:pPr algn="l"/>
-            <a:endParaRPr lang="en-US" b="0" i="0" dirty="0">
-              <a:solidFill>
-                <a:srgbClr val="171717"/>
-              </a:solidFill>
-              <a:effectLst/>
-              <a:latin typeface="Segoe UI" panose="020B0502040204020203" pitchFamily="34" charset="0"/>
-            </a:endParaRPr>
-          </a:p>
-          <a:p>
-            <a:pPr algn="l"/>
-            <a:r>
-              <a:rPr lang="en-US" b="1" i="0" dirty="0">
-                <a:solidFill>
-                  <a:srgbClr val="171717"/>
-                </a:solidFill>
-                <a:effectLst/>
-                <a:latin typeface="Segoe UI" panose="020B0502040204020203" pitchFamily="34" charset="0"/>
-              </a:rPr>
-              <a:t>Databricks Machine Learning</a:t>
-            </a:r>
-            <a:r>
-              <a:rPr lang="en-US" b="0" i="0" dirty="0">
-                <a:solidFill>
-                  <a:srgbClr val="171717"/>
-                </a:solidFill>
-                <a:effectLst/>
-                <a:latin typeface="Segoe UI" panose="020B0502040204020203" pitchFamily="34" charset="0"/>
-              </a:rPr>
-              <a:t> is an integrated end-to-end machine learning environment incorporating managed services for experiment tracking, model training, feature development and management, and feature and model serving.</a:t>
+            <a:pPr marL="171450" indent="-171450">
+              <a:buFont typeface="Arial" panose="020B0604020202020204" pitchFamily="34" charset="0"/>
+              <a:buChar char="•"/>
+            </a:pPr>
+            <a:r>
+              <a:rPr lang="en-GB" sz="1200" dirty="0"/>
+              <a:t>Fully-managed, cloud-based Spark platform for Big Data and Machine Learning workloads.</a:t>
+            </a:r>
+          </a:p>
+          <a:p>
+            <a:pPr marL="171450" indent="-171450">
+              <a:buFont typeface="Arial" panose="020B0604020202020204" pitchFamily="34" charset="0"/>
+              <a:buChar char="•"/>
+            </a:pPr>
+            <a:r>
+              <a:rPr lang="en-GB" sz="1200" dirty="0"/>
+              <a:t>Empowers developers to accelerate AI and innovation by simplifying the process of building enterprise-grade production data applications</a:t>
+            </a:r>
+          </a:p>
+          <a:p>
+            <a:pPr marL="171450" indent="-171450">
+              <a:buFont typeface="Arial" panose="020B0604020202020204" pitchFamily="34" charset="0"/>
+              <a:buChar char="•"/>
+            </a:pPr>
+            <a:r>
+              <a:rPr lang="en-GB" sz="1200" dirty="0"/>
+              <a:t>Integrates with Azure Data services commonly used by Data Engineers, including Azure Data Factory, Azure Synapse Analytics, Power BI and Azure Data Lake Storage</a:t>
             </a:r>
           </a:p>
           <a:p>
@@ -5340,7 +5316,7 @@
           <a:p>
             <a:fld id="{37E24C93-78CA-4AF0-9E77-825D60ABA46D}" type="slidenum">
               <a:rPr lang="en-US" smtClean="0"/>
-              <a:t>11</a:t>
+              <a:t>10</a:t>
             </a:fld>
             <a:endParaRPr lang="en-US" dirty="0"/>
           </a:p>
@@ -5349,7 +5325,7 @@
     </p:spTree>
     <p:extLst>
       <p:ext uri="{BB962C8B-B14F-4D97-AF65-F5344CB8AC3E}">
-        <p14:creationId xmlns:p14="http://schemas.microsoft.com/office/powerpoint/2010/main" val="2465716462"/>
+        <p14:creationId xmlns:p14="http://schemas.microsoft.com/office/powerpoint/2010/main" val="1604342835"/>
       </p:ext>
     </p:extLst>
   </p:cSld>
@@ -5403,189 +5379,128 @@
           <a:bodyPr/>
           <a:lstStyle/>
           <a:p>
-            <a:pPr marL="0" marR="0" lvl="0" indent="0" defTabSz="228554" eaLnBrk="1" fontAlgn="auto" latinLnBrk="0" hangingPunct="1">
-              <a:lnSpc>
-                <a:spcPct val="117999"/>
-              </a:lnSpc>
-              <a:spcBef>
-                <a:spcPts val="0"/>
-              </a:spcBef>
-              <a:spcAft>
-                <a:spcPts val="0"/>
-              </a:spcAft>
-              <a:buClrTx/>
-              <a:buSzTx/>
-              <a:buFontTx/>
-              <a:buNone/>
-              <a:tabLst/>
-              <a:defRPr/>
-            </a:pPr>
-            <a:r>
-              <a:rPr lang="en-US" sz="1000" b="1" dirty="0"/>
-              <a:t>Talking points</a:t>
-            </a:r>
-          </a:p>
-          <a:p>
-            <a:pPr marL="0" marR="0" lvl="0" indent="0" defTabSz="228554" eaLnBrk="1" fontAlgn="auto" latinLnBrk="0" hangingPunct="1">
-              <a:lnSpc>
-                <a:spcPct val="117999"/>
-              </a:lnSpc>
-              <a:spcBef>
-                <a:spcPts val="0"/>
-              </a:spcBef>
-              <a:spcAft>
-                <a:spcPts val="0"/>
-              </a:spcAft>
-              <a:buClrTx/>
-              <a:buSzTx/>
-              <a:buFontTx/>
-              <a:buNone/>
-              <a:tabLst/>
-              <a:defRPr/>
-            </a:pPr>
-            <a:endParaRPr lang="en-US" sz="1000" b="1" dirty="0"/>
-          </a:p>
-          <a:p>
-            <a:pPr marL="171450" indent="-171450" algn="l">
-              <a:buFont typeface="Arial" panose="020B0604020202020204" pitchFamily="34" charset="0"/>
-              <a:buChar char="•"/>
-            </a:pPr>
-            <a:r>
-              <a:rPr lang="en-GB" sz="1200" b="0" i="0" dirty="0">
+            <a:r>
+              <a:rPr lang="en-US" sz="1400" b="1" dirty="0"/>
+              <a:t>TALKING POINTS</a:t>
+            </a:r>
+          </a:p>
+          <a:p>
+            <a:endParaRPr lang="en-US" sz="1200" b="1" dirty="0"/>
+          </a:p>
+          <a:p>
+            <a:pPr algn="l"/>
+            <a:r>
+              <a:rPr lang="en-US" b="0" i="0" dirty="0">
                 <a:solidFill>
                   <a:srgbClr val="171717"/>
                 </a:solidFill>
                 <a:effectLst/>
                 <a:latin typeface="Segoe UI" panose="020B0502040204020203" pitchFamily="34" charset="0"/>
               </a:rPr>
-              <a:t>You can use Azure Databricks in order to read multiple file types, both with and without a Schema. You can read and write from various formats such as CSV, Parquet, and JSON. </a:t>
-            </a:r>
-          </a:p>
-          <a:p>
-            <a:pPr marL="171450" indent="-171450" algn="l">
-              <a:buFont typeface="Arial" panose="020B0604020202020204" pitchFamily="34" charset="0"/>
-              <a:buChar char="•"/>
-            </a:pPr>
-            <a:r>
-              <a:rPr lang="en-GB" sz="1200" b="0" i="0" dirty="0">
+              <a:t>Azure Databricks is a full-managed data analytics platform optimized for Microsoft Azure. Azure Databricks offers three environments for developing data intensive applications: Databricks SQL, Databricks Data Science &amp; Engineering, and Databricks Machine Learning.</a:t>
+            </a:r>
+          </a:p>
+          <a:p>
+            <a:pPr algn="l"/>
+            <a:endParaRPr lang="en-US" b="0" i="0" dirty="0">
+              <a:solidFill>
+                <a:srgbClr val="171717"/>
+              </a:solidFill>
+              <a:effectLst/>
+              <a:latin typeface="Segoe UI" panose="020B0502040204020203" pitchFamily="34" charset="0"/>
+            </a:endParaRPr>
+          </a:p>
+          <a:p>
+            <a:pPr algn="l"/>
+            <a:r>
+              <a:rPr lang="en-US" b="1" i="0" dirty="0">
                 <a:solidFill>
                   <a:srgbClr val="171717"/>
                 </a:solidFill>
                 <a:effectLst/>
                 <a:latin typeface="Segoe UI" panose="020B0502040204020203" pitchFamily="34" charset="0"/>
               </a:rPr>
-              <a:t>In addition to that, Azure Databricks can combine inputs from files and data stores, such as Azure SQL Database, Azure Data Lake storage, and Azure Synapse Analytics. </a:t>
-            </a:r>
-          </a:p>
-          <a:p>
-            <a:pPr marL="171450" indent="-171450" algn="l">
-              <a:buFont typeface="Arial" panose="020B0604020202020204" pitchFamily="34" charset="0"/>
-              <a:buChar char="•"/>
-            </a:pPr>
-            <a:r>
-              <a:rPr lang="en-GB" sz="1200" b="0" i="0" dirty="0">
+              <a:t>Databricks SQL</a:t>
+            </a:r>
+            <a:r>
+              <a:rPr lang="en-US" b="0" i="0" dirty="0">
                 <a:solidFill>
                   <a:srgbClr val="171717"/>
                 </a:solidFill>
                 <a:effectLst/>
                 <a:latin typeface="Segoe UI" panose="020B0502040204020203" pitchFamily="34" charset="0"/>
               </a:rPr>
-              <a:t>Within the notebook experience of Azure Databricks, you have multiple language support in order to read and write data by using code you prefer.  In addition, you can perform several transformation techniques and store that data for advanced analytics, while working together on the same notebook or workspace. </a:t>
-            </a:r>
-          </a:p>
-          <a:p>
-            <a:endParaRPr lang="en-US" dirty="0"/>
-          </a:p>
-          <a:p>
-            <a:pPr marL="0" marR="0" lvl="0" indent="0" algn="l" defTabSz="932742" rtl="0" eaLnBrk="1" fontAlgn="auto" latinLnBrk="0" hangingPunct="1">
-              <a:lnSpc>
-                <a:spcPct val="90000"/>
-              </a:lnSpc>
-              <a:spcBef>
-                <a:spcPts val="0"/>
-              </a:spcBef>
-              <a:spcAft>
-                <a:spcPts val="340"/>
-              </a:spcAft>
-              <a:buClrTx/>
-              <a:buSzTx/>
-              <a:buFontTx/>
-              <a:buNone/>
-              <a:tabLst/>
-              <a:defRPr/>
-            </a:pPr>
-            <a:r>
-              <a:rPr lang="en-US" sz="1000" b="1" dirty="0"/>
-              <a:t>Instructor notes and guidance</a:t>
-            </a:r>
-          </a:p>
-          <a:p>
-            <a:pPr marR="0" lvl="0" indent="0" fontAlgn="auto">
-              <a:lnSpc>
-                <a:spcPct val="90000"/>
-              </a:lnSpc>
-              <a:spcBef>
-                <a:spcPts val="0"/>
-              </a:spcBef>
-              <a:spcAft>
-                <a:spcPts val="340"/>
-              </a:spcAft>
-              <a:buClrTx/>
-              <a:buSzTx/>
-              <a:tabLst/>
-              <a:defRPr/>
-            </a:pPr>
-            <a:endParaRPr lang="en-US" sz="1200" dirty="0">
+              <a:t> provides an easy-to-use platform for analysts who want to run SQL queries on their data lake, create multiple visualization types to explore query results from different perspectives, and build and share dashboards.</a:t>
+            </a:r>
+          </a:p>
+          <a:p>
+            <a:pPr algn="l"/>
+            <a:endParaRPr lang="en-US" b="0" i="0" dirty="0">
               <a:solidFill>
                 <a:srgbClr val="171717"/>
               </a:solidFill>
+              <a:effectLst/>
               <a:latin typeface="Segoe UI" panose="020B0502040204020203" pitchFamily="34" charset="0"/>
             </a:endParaRPr>
           </a:p>
           <a:p>
-            <a:pPr marL="0" marR="0" lvl="0" indent="0" algn="l" defTabSz="914400" rtl="0" eaLnBrk="1" fontAlgn="auto" latinLnBrk="0" hangingPunct="1">
-              <a:lnSpc>
-                <a:spcPct val="90000"/>
-              </a:lnSpc>
-              <a:spcBef>
-                <a:spcPts val="0"/>
-              </a:spcBef>
-              <a:spcAft>
-                <a:spcPts val="340"/>
-              </a:spcAft>
-              <a:buClrTx/>
-              <a:buSzTx/>
-              <a:buFontTx/>
-              <a:buNone/>
-              <a:tabLst/>
-              <a:defRPr/>
-            </a:pPr>
-            <a:r>
-              <a:rPr lang="en-US" sz="1200" dirty="0">
+            <a:pPr algn="l"/>
+            <a:r>
+              <a:rPr lang="en-US" b="1" i="0" dirty="0">
                 <a:solidFill>
                   <a:srgbClr val="171717"/>
                 </a:solidFill>
+                <a:effectLst/>
                 <a:latin typeface="Segoe UI" panose="020B0502040204020203" pitchFamily="34" charset="0"/>
               </a:rPr>
-              <a:t>This slide focuses on reading and writing data and the ease to do so in Azure Databricks, as some customers already use Azure Databricks. </a:t>
-            </a:r>
-            <a:r>
-              <a:rPr lang="en-GB" sz="1200" dirty="0">
+              <a:t>Databricks Data Science &amp; Engineering</a:t>
+            </a:r>
+            <a:r>
+              <a:rPr lang="en-US" b="0" i="0" dirty="0">
                 <a:solidFill>
                   <a:srgbClr val="171717"/>
                 </a:solidFill>
-                <a:latin typeface="Segoe UI"/>
-                <a:cs typeface="Segoe UI"/>
+                <a:effectLst/>
+                <a:latin typeface="Segoe UI" panose="020B0502040204020203" pitchFamily="34" charset="0"/>
               </a:rPr>
-              <a:t>Call out to the students, that in the lab for this module, they will experience working with Azure Databricks and how reading and writing data with the use of DataFrames works within Azure Databricks. </a:t>
-            </a:r>
-            <a:endParaRPr lang="en-GB" sz="1200" dirty="0">
+              <a:t> (commonly referred to simply as “Workspace”) provides an interactive workspace that enables collaboration between data engineers, data scientists, and machine learning engineers. For a big data pipeline, the data (raw or structured) is ingested into Azure through Azure Data Factory in batches, or streamed near real-time using Apache Kafka, Event Hub, or IoT Hub. This data lands in a data lake for long term persisted storage, in Azure Blob Storage or Azure Data Lake Storage. As part of your analytics workflow, use Azure Databricks to read data from multiple data sources and turn it into breakthrough insights using Spark.</a:t>
+            </a:r>
+          </a:p>
+          <a:p>
+            <a:pPr algn="l"/>
+            <a:endParaRPr lang="en-US" b="0" i="0" dirty="0">
               <a:solidFill>
                 <a:srgbClr val="171717"/>
               </a:solidFill>
+              <a:effectLst/>
               <a:latin typeface="Segoe UI" panose="020B0502040204020203" pitchFamily="34" charset="0"/>
-              <a:cs typeface="Segoe UI"/>
             </a:endParaRPr>
+          </a:p>
+          <a:p>
+            <a:pPr algn="l"/>
+            <a:r>
+              <a:rPr lang="en-US" b="1" i="0" dirty="0">
+                <a:solidFill>
+                  <a:srgbClr val="171717"/>
+                </a:solidFill>
+                <a:effectLst/>
+                <a:latin typeface="Segoe UI" panose="020B0502040204020203" pitchFamily="34" charset="0"/>
+              </a:rPr>
+              <a:t>Databricks Machine Learning</a:t>
+            </a:r>
+            <a:r>
+              <a:rPr lang="en-US" b="0" i="0" dirty="0">
+                <a:solidFill>
+                  <a:srgbClr val="171717"/>
+                </a:solidFill>
+                <a:effectLst/>
+                <a:latin typeface="Segoe UI" panose="020B0502040204020203" pitchFamily="34" charset="0"/>
+              </a:rPr>
+              <a:t> is an integrated end-to-end machine learning environment incorporating managed services for experiment tracking, model training, feature development and management, and feature and model serving.</a:t>
+            </a:r>
+          </a:p>
+          <a:p>
+            <a:endParaRPr lang="en-GB" dirty="0"/>
           </a:p>
         </p:txBody>
       </p:sp>
@@ -5606,7 +5521,7 @@
           <a:p>
             <a:fld id="{37E24C93-78CA-4AF0-9E77-825D60ABA46D}" type="slidenum">
               <a:rPr lang="en-US" smtClean="0"/>
-              <a:t>12</a:t>
+              <a:t>11</a:t>
             </a:fld>
             <a:endParaRPr lang="en-US" dirty="0"/>
           </a:p>
@@ -5615,7 +5530,7 @@
     </p:spTree>
     <p:extLst>
       <p:ext uri="{BB962C8B-B14F-4D97-AF65-F5344CB8AC3E}">
-        <p14:creationId xmlns:p14="http://schemas.microsoft.com/office/powerpoint/2010/main" val="3912559225"/>
+        <p14:creationId xmlns:p14="http://schemas.microsoft.com/office/powerpoint/2010/main" val="2465716462"/>
       </p:ext>
     </p:extLst>
   </p:cSld>
@@ -5669,20 +5584,189 @@
           <a:bodyPr/>
           <a:lstStyle/>
           <a:p>
-            <a:r>
-              <a:rPr lang="en-IE" b="1" dirty="0"/>
-              <a:t>Talking Points:</a:t>
-            </a:r>
-          </a:p>
-          <a:p>
-            <a:endParaRPr lang="en-IE" dirty="0"/>
-          </a:p>
-          <a:p>
-            <a:r>
-              <a:rPr lang="en-IE" dirty="0"/>
-              <a:t>Let’s look at how you can query data using DataFrames in Azure Databricks</a:t>
-            </a:r>
-            <a:endParaRPr lang="en-GB" dirty="0"/>
+            <a:pPr marL="0" marR="0" lvl="0" indent="0" defTabSz="228554" eaLnBrk="1" fontAlgn="auto" latinLnBrk="0" hangingPunct="1">
+              <a:lnSpc>
+                <a:spcPct val="117999"/>
+              </a:lnSpc>
+              <a:spcBef>
+                <a:spcPts val="0"/>
+              </a:spcBef>
+              <a:spcAft>
+                <a:spcPts val="0"/>
+              </a:spcAft>
+              <a:buClrTx/>
+              <a:buSzTx/>
+              <a:buFontTx/>
+              <a:buNone/>
+              <a:tabLst/>
+              <a:defRPr/>
+            </a:pPr>
+            <a:r>
+              <a:rPr lang="en-US" sz="1000" b="1" dirty="0"/>
+              <a:t>Talking points</a:t>
+            </a:r>
+          </a:p>
+          <a:p>
+            <a:pPr marL="0" marR="0" lvl="0" indent="0" defTabSz="228554" eaLnBrk="1" fontAlgn="auto" latinLnBrk="0" hangingPunct="1">
+              <a:lnSpc>
+                <a:spcPct val="117999"/>
+              </a:lnSpc>
+              <a:spcBef>
+                <a:spcPts val="0"/>
+              </a:spcBef>
+              <a:spcAft>
+                <a:spcPts val="0"/>
+              </a:spcAft>
+              <a:buClrTx/>
+              <a:buSzTx/>
+              <a:buFontTx/>
+              <a:buNone/>
+              <a:tabLst/>
+              <a:defRPr/>
+            </a:pPr>
+            <a:endParaRPr lang="en-US" sz="1000" b="1" dirty="0"/>
+          </a:p>
+          <a:p>
+            <a:pPr marL="171450" indent="-171450" algn="l">
+              <a:buFont typeface="Arial" panose="020B0604020202020204" pitchFamily="34" charset="0"/>
+              <a:buChar char="•"/>
+            </a:pPr>
+            <a:r>
+              <a:rPr lang="en-GB" sz="1200" b="0" i="0" dirty="0">
+                <a:solidFill>
+                  <a:srgbClr val="171717"/>
+                </a:solidFill>
+                <a:effectLst/>
+                <a:latin typeface="Segoe UI" panose="020B0502040204020203" pitchFamily="34" charset="0"/>
+              </a:rPr>
+              <a:t>You can use Azure Databricks in order to read multiple file types, both with and without a Schema. You can read and write from various formats such as CSV, Parquet, and JSON. </a:t>
+            </a:r>
+          </a:p>
+          <a:p>
+            <a:pPr marL="171450" indent="-171450" algn="l">
+              <a:buFont typeface="Arial" panose="020B0604020202020204" pitchFamily="34" charset="0"/>
+              <a:buChar char="•"/>
+            </a:pPr>
+            <a:r>
+              <a:rPr lang="en-GB" sz="1200" b="0" i="0" dirty="0">
+                <a:solidFill>
+                  <a:srgbClr val="171717"/>
+                </a:solidFill>
+                <a:effectLst/>
+                <a:latin typeface="Segoe UI" panose="020B0502040204020203" pitchFamily="34" charset="0"/>
+              </a:rPr>
+              <a:t>In addition to that, Azure Databricks can combine inputs from files and data stores, such as Azure SQL Database, Azure Data Lake storage, and Azure Synapse Analytics. </a:t>
+            </a:r>
+          </a:p>
+          <a:p>
+            <a:pPr marL="171450" indent="-171450" algn="l">
+              <a:buFont typeface="Arial" panose="020B0604020202020204" pitchFamily="34" charset="0"/>
+              <a:buChar char="•"/>
+            </a:pPr>
+            <a:r>
+              <a:rPr lang="en-GB" sz="1200" b="0" i="0" dirty="0">
+                <a:solidFill>
+                  <a:srgbClr val="171717"/>
+                </a:solidFill>
+                <a:effectLst/>
+                <a:latin typeface="Segoe UI" panose="020B0502040204020203" pitchFamily="34" charset="0"/>
+              </a:rPr>
+              <a:t>Within the notebook experience of Azure Databricks, you have multiple language support in order to read and write data by using code you prefer.  In addition, you can perform several transformation techniques and store that data for advanced analytics, while working together on the same notebook or workspace. </a:t>
+            </a:r>
+          </a:p>
+          <a:p>
+            <a:endParaRPr lang="en-US" dirty="0"/>
+          </a:p>
+          <a:p>
+            <a:pPr marL="0" marR="0" lvl="0" indent="0" algn="l" defTabSz="932742" rtl="0" eaLnBrk="1" fontAlgn="auto" latinLnBrk="0" hangingPunct="1">
+              <a:lnSpc>
+                <a:spcPct val="90000"/>
+              </a:lnSpc>
+              <a:spcBef>
+                <a:spcPts val="0"/>
+              </a:spcBef>
+              <a:spcAft>
+                <a:spcPts val="340"/>
+              </a:spcAft>
+              <a:buClrTx/>
+              <a:buSzTx/>
+              <a:buFontTx/>
+              <a:buNone/>
+              <a:tabLst/>
+              <a:defRPr/>
+            </a:pPr>
+            <a:r>
+              <a:rPr lang="en-US" sz="1000" b="1" dirty="0"/>
+              <a:t>Instructor notes and guidance</a:t>
+            </a:r>
+          </a:p>
+          <a:p>
+            <a:pPr marR="0" lvl="0" indent="0" fontAlgn="auto">
+              <a:lnSpc>
+                <a:spcPct val="90000"/>
+              </a:lnSpc>
+              <a:spcBef>
+                <a:spcPts val="0"/>
+              </a:spcBef>
+              <a:spcAft>
+                <a:spcPts val="340"/>
+              </a:spcAft>
+              <a:buClrTx/>
+              <a:buSzTx/>
+              <a:tabLst/>
+              <a:defRPr/>
+            </a:pPr>
+            <a:endParaRPr lang="en-US" sz="1200" dirty="0">
+              <a:solidFill>
+                <a:srgbClr val="171717"/>
+              </a:solidFill>
+              <a:latin typeface="Segoe UI" panose="020B0502040204020203" pitchFamily="34" charset="0"/>
+            </a:endParaRPr>
+          </a:p>
+          <a:p>
+            <a:pPr marL="0" marR="0" lvl="0" indent="0" algn="l" defTabSz="914400" rtl="0" eaLnBrk="1" fontAlgn="auto" latinLnBrk="0" hangingPunct="1">
+              <a:lnSpc>
+                <a:spcPct val="90000"/>
+              </a:lnSpc>
+              <a:spcBef>
+                <a:spcPts val="0"/>
+              </a:spcBef>
+              <a:spcAft>
+                <a:spcPts val="340"/>
+              </a:spcAft>
+              <a:buClrTx/>
+              <a:buSzTx/>
+              <a:buFontTx/>
+              <a:buNone/>
+              <a:tabLst/>
+              <a:defRPr/>
+            </a:pPr>
+            <a:r>
+              <a:rPr lang="en-US" sz="1200" dirty="0">
+                <a:solidFill>
+                  <a:srgbClr val="171717"/>
+                </a:solidFill>
+                <a:latin typeface="Segoe UI" panose="020B0502040204020203" pitchFamily="34" charset="0"/>
+              </a:rPr>
+              <a:t>This slide focuses on reading and writing data and the ease to do so in Azure Databricks, as some customers already use Azure Databricks. </a:t>
+            </a:r>
+            <a:r>
+              <a:rPr lang="en-GB" sz="1200" dirty="0">
+                <a:solidFill>
+                  <a:srgbClr val="171717"/>
+                </a:solidFill>
+                <a:latin typeface="Segoe UI"/>
+                <a:cs typeface="Segoe UI"/>
+              </a:rPr>
+              <a:t>Call out to the students, that in the lab for this module, they will experience working with Azure Databricks and how reading and writing data with the use of DataFrames works within Azure Databricks. </a:t>
+            </a:r>
+            <a:endParaRPr lang="en-GB" sz="1200" dirty="0">
+              <a:solidFill>
+                <a:srgbClr val="171717"/>
+              </a:solidFill>
+              <a:latin typeface="Segoe UI" panose="020B0502040204020203" pitchFamily="34" charset="0"/>
+              <a:cs typeface="Segoe UI"/>
+            </a:endParaRPr>
           </a:p>
         </p:txBody>
       </p:sp>
@@ -5703,7 +5787,7 @@
           <a:p>
             <a:fld id="{37E24C93-78CA-4AF0-9E77-825D60ABA46D}" type="slidenum">
               <a:rPr lang="en-US" smtClean="0"/>
-              <a:t>13</a:t>
+              <a:t>12</a:t>
             </a:fld>
             <a:endParaRPr lang="en-US" dirty="0"/>
           </a:p>
@@ -5712,7 +5796,7 @@
     </p:spTree>
     <p:extLst>
       <p:ext uri="{BB962C8B-B14F-4D97-AF65-F5344CB8AC3E}">
-        <p14:creationId xmlns:p14="http://schemas.microsoft.com/office/powerpoint/2010/main" val="2053942289"/>
+        <p14:creationId xmlns:p14="http://schemas.microsoft.com/office/powerpoint/2010/main" val="3912559225"/>
       </p:ext>
     </p:extLst>
   </p:cSld>
@@ -23585,7 +23669,7 @@
 </file>
 
 <file path=ppt/slides/slide10.xml><?xml version="1.0" encoding="utf-8"?>
-<p:sld xmlns:a="http://schemas.openxmlformats.org/drawingml/2006/main" xmlns:r="http://schemas.openxmlformats.org/officeDocument/2006/relationships" xmlns:p="http://schemas.openxmlformats.org/presentationml/2006/main">
+<p:sld xmlns:a="http://schemas.openxmlformats.org/drawingml/2006/main" xmlns:r="http://schemas.openxmlformats.org/officeDocument/2006/relationships" xmlns:p="http://schemas.openxmlformats.org/presentationml/2006/main" show="0">
   <p:cSld>
     <p:spTree>
       <p:nvGrpSpPr>
@@ -23876,7 +23960,7 @@
 </file>
 
 <file path=ppt/slides/slide11.xml><?xml version="1.0" encoding="utf-8"?>
-<p:sld xmlns:a="http://schemas.openxmlformats.org/drawingml/2006/main" xmlns:r="http://schemas.openxmlformats.org/officeDocument/2006/relationships" xmlns:p="http://schemas.openxmlformats.org/presentationml/2006/main">
+<p:sld xmlns:a="http://schemas.openxmlformats.org/drawingml/2006/main" xmlns:r="http://schemas.openxmlformats.org/officeDocument/2006/relationships" xmlns:p="http://schemas.openxmlformats.org/presentationml/2006/main" show="0">
   <p:cSld>
     <p:spTree>
       <p:nvGrpSpPr>
@@ -24162,7 +24246,7 @@
 </file>
 
 <file path=ppt/slides/slide12.xml><?xml version="1.0" encoding="utf-8"?>
-<p:sld xmlns:a="http://schemas.openxmlformats.org/drawingml/2006/main" xmlns:r="http://schemas.openxmlformats.org/officeDocument/2006/relationships" xmlns:p="http://schemas.openxmlformats.org/presentationml/2006/main">
+<p:sld xmlns:a="http://schemas.openxmlformats.org/drawingml/2006/main" xmlns:r="http://schemas.openxmlformats.org/officeDocument/2006/relationships" xmlns:p="http://schemas.openxmlformats.org/presentationml/2006/main" show="0">
   <p:cSld>
     <p:spTree>
       <p:nvGrpSpPr>
@@ -24802,7 +24886,7 @@
           <a:p>
             <a:r>
               <a:rPr lang="en-US" dirty="0"/>
-              <a:t>3</a:t>
+              <a:t>2</a:t>
             </a:r>
           </a:p>
         </p:txBody>
@@ -28661,7 +28745,7 @@
           <a:p>
             <a:r>
               <a:rPr lang="en-US" dirty="0"/>
-              <a:t>4</a:t>
+              <a:t>3</a:t>
             </a:r>
           </a:p>
         </p:txBody>
@@ -29293,7 +29377,7 @@
 </file>
 
 <file path=ppt/slides/slide2.xml><?xml version="1.0" encoding="utf-8"?>
-<p:sld xmlns:a="http://schemas.openxmlformats.org/drawingml/2006/main" xmlns:r="http://schemas.openxmlformats.org/officeDocument/2006/relationships" xmlns:p="http://schemas.openxmlformats.org/presentationml/2006/main">
+<p:sld xmlns:a="http://schemas.openxmlformats.org/drawingml/2006/main" xmlns:r="http://schemas.openxmlformats.org/officeDocument/2006/relationships" xmlns:p="http://schemas.openxmlformats.org/presentationml/2006/main" show="0">
   <p:cSld>
     <p:spTree>
       <p:nvGrpSpPr>
@@ -44441,7 +44525,7 @@
           <p:nvPr/>
         </p:nvPicPr>
         <p:blipFill>
-          <a:blip r:embed="rId2">
+          <a:blip r:embed="rId3">
             <a:extLst>
               <a:ext uri="{28A0092B-C50C-407E-A947-70E740481C1C}">
                 <a14:useLocalDpi xmlns:a14="http://schemas.microsoft.com/office/drawing/2010/main" val="0"/>
@@ -44476,7 +44560,7 @@
 </file>
 
 <file path=ppt/slides/slide9.xml><?xml version="1.0" encoding="utf-8"?>
-<p:sld xmlns:a="http://schemas.openxmlformats.org/drawingml/2006/main" xmlns:r="http://schemas.openxmlformats.org/officeDocument/2006/relationships" xmlns:p="http://schemas.openxmlformats.org/presentationml/2006/main">
+<p:sld xmlns:a="http://schemas.openxmlformats.org/drawingml/2006/main" xmlns:r="http://schemas.openxmlformats.org/officeDocument/2006/relationships" xmlns:p="http://schemas.openxmlformats.org/presentationml/2006/main" show="0">
   <p:cSld>
     <p:spTree>
       <p:nvGrpSpPr>
